--- a/presentaciones/medical-leadership-summit-2026/Certificados_Medical_Leadership_Summit_2026.pptx
+++ b/presentaciones/medical-leadership-summit-2026/Certificados_Medical_Leadership_Summit_2026.pptx
@@ -1551,7 +1551,7 @@
         </p:nvSpPr>
         <p:spPr>
           <a:xfrm>
-            <a:off x="5989320" y="786384"/>
+            <a:off x="5532120" y="786384"/>
             <a:ext cx="3200400" cy="274320"/>
           </a:xfrm>
           <a:prstGeom prst="rect">
@@ -1590,7 +1590,7 @@
         </p:nvSpPr>
         <p:spPr>
           <a:xfrm>
-            <a:off x="5989320" y="1024128"/>
+            <a:off x="5532120" y="1024128"/>
             <a:ext cx="3200400" cy="292608"/>
           </a:xfrm>
           <a:prstGeom prst="rect">
@@ -1629,7 +1629,7 @@
         </p:nvSpPr>
         <p:spPr>
           <a:xfrm>
-            <a:off x="5989320" y="1298448"/>
+            <a:off x="5532120" y="1298448"/>
             <a:ext cx="3200400" cy="274320"/>
           </a:xfrm>
           <a:prstGeom prst="rect">
@@ -1668,7 +1668,7 @@
         </p:nvSpPr>
         <p:spPr>
           <a:xfrm>
-            <a:off x="8686800" y="1645920"/>
+            <a:off x="8229600" y="1645920"/>
             <a:ext cx="502920" cy="45720"/>
           </a:xfrm>
           <a:prstGeom prst="rect">
@@ -2625,20 +2625,20 @@
         </p:nvSpPr>
         <p:spPr>
           <a:xfrm>
-            <a:off x="868680" y="6839712"/>
-            <a:ext cx="2377440" cy="182880"/>
-          </a:xfrm>
-          <a:prstGeom prst="rect">
-            <a:avLst/>
-          </a:prstGeom>
-          <a:noFill/>
-          <a:ln/>
-        </p:spPr>
-        <p:txBody>
-          <a:bodyPr wrap="square" lIns="0" tIns="0" rIns="0" bIns="0" rtlCol="0" anchor="ctr"/>
-          <a:lstStyle/>
-          <a:p>
-            <a:pPr algn="l" indent="0" marL="0">
+            <a:off x="3657600" y="7370064"/>
+            <a:ext cx="2743200" cy="182880"/>
+          </a:xfrm>
+          <a:prstGeom prst="rect">
+            <a:avLst/>
+          </a:prstGeom>
+          <a:noFill/>
+          <a:ln/>
+        </p:spPr>
+        <p:txBody>
+          <a:bodyPr wrap="square" lIns="0" tIns="0" rIns="0" bIns="0" rtlCol="0" anchor="ctr"/>
+          <a:lstStyle/>
+          <a:p>
+            <a:pPr algn="ctr" indent="0" marL="0">
               <a:buNone/>
             </a:pPr>
             <a:r>
@@ -3318,20 +3318,20 @@
         </p:nvSpPr>
         <p:spPr>
           <a:xfrm>
-            <a:off x="868680" y="6839712"/>
-            <a:ext cx="2377440" cy="182880"/>
-          </a:xfrm>
-          <a:prstGeom prst="rect">
-            <a:avLst/>
-          </a:prstGeom>
-          <a:noFill/>
-          <a:ln/>
-        </p:spPr>
-        <p:txBody>
-          <a:bodyPr wrap="square" lIns="0" tIns="0" rIns="0" bIns="0" rtlCol="0" anchor="ctr"/>
-          <a:lstStyle/>
-          <a:p>
-            <a:pPr algn="l" indent="0" marL="0">
+            <a:off x="3657600" y="7370064"/>
+            <a:ext cx="2743200" cy="182880"/>
+          </a:xfrm>
+          <a:prstGeom prst="rect">
+            <a:avLst/>
+          </a:prstGeom>
+          <a:noFill/>
+          <a:ln/>
+        </p:spPr>
+        <p:txBody>
+          <a:bodyPr wrap="square" lIns="0" tIns="0" rIns="0" bIns="0" rtlCol="0" anchor="ctr"/>
+          <a:lstStyle/>
+          <a:p>
+            <a:pPr algn="ctr" indent="0" marL="0">
               <a:buNone/>
             </a:pPr>
             <a:r>
@@ -4011,20 +4011,20 @@
         </p:nvSpPr>
         <p:spPr>
           <a:xfrm>
-            <a:off x="868680" y="6839712"/>
-            <a:ext cx="2377440" cy="182880"/>
-          </a:xfrm>
-          <a:prstGeom prst="rect">
-            <a:avLst/>
-          </a:prstGeom>
-          <a:noFill/>
-          <a:ln/>
-        </p:spPr>
-        <p:txBody>
-          <a:bodyPr wrap="square" lIns="0" tIns="0" rIns="0" bIns="0" rtlCol="0" anchor="ctr"/>
-          <a:lstStyle/>
-          <a:p>
-            <a:pPr algn="l" indent="0" marL="0">
+            <a:off x="3657600" y="7370064"/>
+            <a:ext cx="2743200" cy="182880"/>
+          </a:xfrm>
+          <a:prstGeom prst="rect">
+            <a:avLst/>
+          </a:prstGeom>
+          <a:noFill/>
+          <a:ln/>
+        </p:spPr>
+        <p:txBody>
+          <a:bodyPr wrap="square" lIns="0" tIns="0" rIns="0" bIns="0" rtlCol="0" anchor="ctr"/>
+          <a:lstStyle/>
+          <a:p>
+            <a:pPr algn="ctr" indent="0" marL="0">
               <a:buNone/>
             </a:pPr>
             <a:r>
@@ -4704,20 +4704,20 @@
         </p:nvSpPr>
         <p:spPr>
           <a:xfrm>
-            <a:off x="868680" y="6839712"/>
-            <a:ext cx="2377440" cy="182880"/>
-          </a:xfrm>
-          <a:prstGeom prst="rect">
-            <a:avLst/>
-          </a:prstGeom>
-          <a:noFill/>
-          <a:ln/>
-        </p:spPr>
-        <p:txBody>
-          <a:bodyPr wrap="square" lIns="0" tIns="0" rIns="0" bIns="0" rtlCol="0" anchor="ctr"/>
-          <a:lstStyle/>
-          <a:p>
-            <a:pPr algn="l" indent="0" marL="0">
+            <a:off x="3657600" y="7370064"/>
+            <a:ext cx="2743200" cy="182880"/>
+          </a:xfrm>
+          <a:prstGeom prst="rect">
+            <a:avLst/>
+          </a:prstGeom>
+          <a:noFill/>
+          <a:ln/>
+        </p:spPr>
+        <p:txBody>
+          <a:bodyPr wrap="square" lIns="0" tIns="0" rIns="0" bIns="0" rtlCol="0" anchor="ctr"/>
+          <a:lstStyle/>
+          <a:p>
+            <a:pPr algn="ctr" indent="0" marL="0">
               <a:buNone/>
             </a:pPr>
             <a:r>
@@ -5397,20 +5397,20 @@
         </p:nvSpPr>
         <p:spPr>
           <a:xfrm>
-            <a:off x="868680" y="6839712"/>
-            <a:ext cx="2377440" cy="182880"/>
-          </a:xfrm>
-          <a:prstGeom prst="rect">
-            <a:avLst/>
-          </a:prstGeom>
-          <a:noFill/>
-          <a:ln/>
-        </p:spPr>
-        <p:txBody>
-          <a:bodyPr wrap="square" lIns="0" tIns="0" rIns="0" bIns="0" rtlCol="0" anchor="ctr"/>
-          <a:lstStyle/>
-          <a:p>
-            <a:pPr algn="l" indent="0" marL="0">
+            <a:off x="3657600" y="7370064"/>
+            <a:ext cx="2743200" cy="182880"/>
+          </a:xfrm>
+          <a:prstGeom prst="rect">
+            <a:avLst/>
+          </a:prstGeom>
+          <a:noFill/>
+          <a:ln/>
+        </p:spPr>
+        <p:txBody>
+          <a:bodyPr wrap="square" lIns="0" tIns="0" rIns="0" bIns="0" rtlCol="0" anchor="ctr"/>
+          <a:lstStyle/>
+          <a:p>
+            <a:pPr algn="ctr" indent="0" marL="0">
               <a:buNone/>
             </a:pPr>
             <a:r>
@@ -6090,20 +6090,20 @@
         </p:nvSpPr>
         <p:spPr>
           <a:xfrm>
-            <a:off x="868680" y="6839712"/>
-            <a:ext cx="2377440" cy="182880"/>
-          </a:xfrm>
-          <a:prstGeom prst="rect">
-            <a:avLst/>
-          </a:prstGeom>
-          <a:noFill/>
-          <a:ln/>
-        </p:spPr>
-        <p:txBody>
-          <a:bodyPr wrap="square" lIns="0" tIns="0" rIns="0" bIns="0" rtlCol="0" anchor="ctr"/>
-          <a:lstStyle/>
-          <a:p>
-            <a:pPr algn="l" indent="0" marL="0">
+            <a:off x="3657600" y="7370064"/>
+            <a:ext cx="2743200" cy="182880"/>
+          </a:xfrm>
+          <a:prstGeom prst="rect">
+            <a:avLst/>
+          </a:prstGeom>
+          <a:noFill/>
+          <a:ln/>
+        </p:spPr>
+        <p:txBody>
+          <a:bodyPr wrap="square" lIns="0" tIns="0" rIns="0" bIns="0" rtlCol="0" anchor="ctr"/>
+          <a:lstStyle/>
+          <a:p>
+            <a:pPr algn="ctr" indent="0" marL="0">
               <a:buNone/>
             </a:pPr>
             <a:r>
@@ -6783,20 +6783,20 @@
         </p:nvSpPr>
         <p:spPr>
           <a:xfrm>
-            <a:off x="868680" y="6839712"/>
-            <a:ext cx="2377440" cy="182880"/>
-          </a:xfrm>
-          <a:prstGeom prst="rect">
-            <a:avLst/>
-          </a:prstGeom>
-          <a:noFill/>
-          <a:ln/>
-        </p:spPr>
-        <p:txBody>
-          <a:bodyPr wrap="square" lIns="0" tIns="0" rIns="0" bIns="0" rtlCol="0" anchor="ctr"/>
-          <a:lstStyle/>
-          <a:p>
-            <a:pPr algn="l" indent="0" marL="0">
+            <a:off x="3657600" y="7370064"/>
+            <a:ext cx="2743200" cy="182880"/>
+          </a:xfrm>
+          <a:prstGeom prst="rect">
+            <a:avLst/>
+          </a:prstGeom>
+          <a:noFill/>
+          <a:ln/>
+        </p:spPr>
+        <p:txBody>
+          <a:bodyPr wrap="square" lIns="0" tIns="0" rIns="0" bIns="0" rtlCol="0" anchor="ctr"/>
+          <a:lstStyle/>
+          <a:p>
+            <a:pPr algn="ctr" indent="0" marL="0">
               <a:buNone/>
             </a:pPr>
             <a:r>
@@ -7476,20 +7476,20 @@
         </p:nvSpPr>
         <p:spPr>
           <a:xfrm>
-            <a:off x="868680" y="6839712"/>
-            <a:ext cx="2377440" cy="182880"/>
-          </a:xfrm>
-          <a:prstGeom prst="rect">
-            <a:avLst/>
-          </a:prstGeom>
-          <a:noFill/>
-          <a:ln/>
-        </p:spPr>
-        <p:txBody>
-          <a:bodyPr wrap="square" lIns="0" tIns="0" rIns="0" bIns="0" rtlCol="0" anchor="ctr"/>
-          <a:lstStyle/>
-          <a:p>
-            <a:pPr algn="l" indent="0" marL="0">
+            <a:off x="3657600" y="7370064"/>
+            <a:ext cx="2743200" cy="182880"/>
+          </a:xfrm>
+          <a:prstGeom prst="rect">
+            <a:avLst/>
+          </a:prstGeom>
+          <a:noFill/>
+          <a:ln/>
+        </p:spPr>
+        <p:txBody>
+          <a:bodyPr wrap="square" lIns="0" tIns="0" rIns="0" bIns="0" rtlCol="0" anchor="ctr"/>
+          <a:lstStyle/>
+          <a:p>
+            <a:pPr algn="ctr" indent="0" marL="0">
               <a:buNone/>
             </a:pPr>
             <a:r>
@@ -8169,20 +8169,20 @@
         </p:nvSpPr>
         <p:spPr>
           <a:xfrm>
-            <a:off x="868680" y="6839712"/>
-            <a:ext cx="2377440" cy="182880"/>
-          </a:xfrm>
-          <a:prstGeom prst="rect">
-            <a:avLst/>
-          </a:prstGeom>
-          <a:noFill/>
-          <a:ln/>
-        </p:spPr>
-        <p:txBody>
-          <a:bodyPr wrap="square" lIns="0" tIns="0" rIns="0" bIns="0" rtlCol="0" anchor="ctr"/>
-          <a:lstStyle/>
-          <a:p>
-            <a:pPr algn="l" indent="0" marL="0">
+            <a:off x="3657600" y="7370064"/>
+            <a:ext cx="2743200" cy="182880"/>
+          </a:xfrm>
+          <a:prstGeom prst="rect">
+            <a:avLst/>
+          </a:prstGeom>
+          <a:noFill/>
+          <a:ln/>
+        </p:spPr>
+        <p:txBody>
+          <a:bodyPr wrap="square" lIns="0" tIns="0" rIns="0" bIns="0" rtlCol="0" anchor="ctr"/>
+          <a:lstStyle/>
+          <a:p>
+            <a:pPr algn="ctr" indent="0" marL="0">
               <a:buNone/>
             </a:pPr>
             <a:r>
@@ -8862,20 +8862,20 @@
         </p:nvSpPr>
         <p:spPr>
           <a:xfrm>
-            <a:off x="868680" y="6839712"/>
-            <a:ext cx="2377440" cy="182880"/>
-          </a:xfrm>
-          <a:prstGeom prst="rect">
-            <a:avLst/>
-          </a:prstGeom>
-          <a:noFill/>
-          <a:ln/>
-        </p:spPr>
-        <p:txBody>
-          <a:bodyPr wrap="square" lIns="0" tIns="0" rIns="0" bIns="0" rtlCol="0" anchor="ctr"/>
-          <a:lstStyle/>
-          <a:p>
-            <a:pPr algn="l" indent="0" marL="0">
+            <a:off x="3657600" y="7370064"/>
+            <a:ext cx="2743200" cy="182880"/>
+          </a:xfrm>
+          <a:prstGeom prst="rect">
+            <a:avLst/>
+          </a:prstGeom>
+          <a:noFill/>
+          <a:ln/>
+        </p:spPr>
+        <p:txBody>
+          <a:bodyPr wrap="square" lIns="0" tIns="0" rIns="0" bIns="0" rtlCol="0" anchor="ctr"/>
+          <a:lstStyle/>
+          <a:p>
+            <a:pPr algn="ctr" indent="0" marL="0">
               <a:buNone/>
             </a:pPr>
             <a:r>
@@ -9555,20 +9555,20 @@
         </p:nvSpPr>
         <p:spPr>
           <a:xfrm>
-            <a:off x="868680" y="6839712"/>
-            <a:ext cx="2377440" cy="182880"/>
-          </a:xfrm>
-          <a:prstGeom prst="rect">
-            <a:avLst/>
-          </a:prstGeom>
-          <a:noFill/>
-          <a:ln/>
-        </p:spPr>
-        <p:txBody>
-          <a:bodyPr wrap="square" lIns="0" tIns="0" rIns="0" bIns="0" rtlCol="0" anchor="ctr"/>
-          <a:lstStyle/>
-          <a:p>
-            <a:pPr algn="l" indent="0" marL="0">
+            <a:off x="3657600" y="7370064"/>
+            <a:ext cx="2743200" cy="182880"/>
+          </a:xfrm>
+          <a:prstGeom prst="rect">
+            <a:avLst/>
+          </a:prstGeom>
+          <a:noFill/>
+          <a:ln/>
+        </p:spPr>
+        <p:txBody>
+          <a:bodyPr wrap="square" lIns="0" tIns="0" rIns="0" bIns="0" rtlCol="0" anchor="ctr"/>
+          <a:lstStyle/>
+          <a:p>
+            <a:pPr algn="ctr" indent="0" marL="0">
               <a:buNone/>
             </a:pPr>
             <a:r>

--- a/presentaciones/medical-leadership-summit-2026/Certificados_Medical_Leadership_Summit_2026.pptx
+++ b/presentaciones/medical-leadership-summit-2026/Certificados_Medical_Leadership_Summit_2026.pptx
@@ -1511,8 +1511,8 @@
         </p:blipFill>
         <p:spPr>
           <a:xfrm>
-            <a:off x="420624" y="329184"/>
-            <a:ext cx="2240280" cy="903031"/>
+            <a:off x="457200" y="155448"/>
+            <a:ext cx="2011680" cy="810885"/>
           </a:xfrm>
           <a:prstGeom prst="rect">
             <a:avLst/>
@@ -1551,8 +1551,8 @@
         </p:nvSpPr>
         <p:spPr>
           <a:xfrm>
-            <a:off x="5532120" y="786384"/>
-            <a:ext cx="3200400" cy="274320"/>
+            <a:off x="6035040" y="109728"/>
+            <a:ext cx="3566160" cy="274320"/>
           </a:xfrm>
           <a:prstGeom prst="rect">
             <a:avLst/>
@@ -1568,9 +1568,9 @@
               <a:buNone/>
             </a:pPr>
             <a:r>
-              <a:rPr lang="en-US" sz="1500" spc="200" kern="0" dirty="0">
-                <a:solidFill>
-                  <a:srgbClr val="266294"/>
+              <a:rPr lang="en-US" sz="1300" spc="200" kern="0" dirty="0">
+                <a:solidFill>
+                  <a:srgbClr val="FFFFFF"/>
                 </a:solidFill>
                 <a:latin typeface="Montserrat" pitchFamily="34" charset="0"/>
                 <a:ea typeface="Montserrat" pitchFamily="34" charset="-122"/>
@@ -1578,7 +1578,7 @@
               </a:rPr>
               <a:t>WESTHILL</a:t>
             </a:r>
-            <a:endParaRPr lang="en-US" sz="1500" dirty="0"/>
+            <a:endParaRPr lang="en-US" sz="1300" dirty="0"/>
           </a:p>
         </p:txBody>
       </p:sp>
@@ -1590,8 +1590,8 @@
         </p:nvSpPr>
         <p:spPr>
           <a:xfrm>
-            <a:off x="5532120" y="1024128"/>
-            <a:ext cx="3200400" cy="292608"/>
+            <a:off x="6035040" y="347472"/>
+            <a:ext cx="3566160" cy="292608"/>
           </a:xfrm>
           <a:prstGeom prst="rect">
             <a:avLst/>
@@ -1607,9 +1607,9 @@
               <a:buNone/>
             </a:pPr>
             <a:r>
-              <a:rPr lang="en-US" sz="1700" dirty="0">
-                <a:solidFill>
-                  <a:srgbClr val="266294"/>
+              <a:rPr lang="en-US" sz="1600" dirty="0">
+                <a:solidFill>
+                  <a:srgbClr val="FFFFFF"/>
                 </a:solidFill>
                 <a:latin typeface="Montserrat ExtraBold" pitchFamily="34" charset="0"/>
                 <a:ea typeface="Montserrat ExtraBold" pitchFamily="34" charset="-122"/>
@@ -1617,7 +1617,7 @@
               </a:rPr>
               <a:t>MEDICAL LEADERSHIP</a:t>
             </a:r>
-            <a:endParaRPr lang="en-US" sz="1700" dirty="0"/>
+            <a:endParaRPr lang="en-US" sz="1600" dirty="0"/>
           </a:p>
         </p:txBody>
       </p:sp>
@@ -1629,8 +1629,8 @@
         </p:nvSpPr>
         <p:spPr>
           <a:xfrm>
-            <a:off x="5532120" y="1298448"/>
-            <a:ext cx="3200400" cy="274320"/>
+            <a:off x="6035040" y="621792"/>
+            <a:ext cx="3566160" cy="274320"/>
           </a:xfrm>
           <a:prstGeom prst="rect">
             <a:avLst/>
@@ -1646,9 +1646,9 @@
               <a:buNone/>
             </a:pPr>
             <a:r>
-              <a:rPr lang="en-US" sz="1500" dirty="0">
-                <a:solidFill>
-                  <a:srgbClr val="266294"/>
+              <a:rPr lang="en-US" sz="1300" dirty="0">
+                <a:solidFill>
+                  <a:srgbClr val="FFFFFF"/>
                 </a:solidFill>
                 <a:latin typeface="Montserrat" pitchFamily="34" charset="0"/>
                 <a:ea typeface="Montserrat" pitchFamily="34" charset="-122"/>
@@ -1656,29 +1656,48 @@
               </a:rPr>
               <a:t>SUMMIT 2026</a:t>
             </a:r>
-            <a:endParaRPr lang="en-US" sz="1500" dirty="0"/>
-          </a:p>
-        </p:txBody>
-      </p:sp>
-      <p:sp>
-        <p:nvSpPr>
-          <p:cNvPr id="7" name="Shape 3"/>
+            <a:endParaRPr lang="en-US" sz="1300" dirty="0"/>
+          </a:p>
+        </p:txBody>
+      </p:sp>
+      <p:sp>
+        <p:nvSpPr>
+          <p:cNvPr id="7" name="Text 3"/>
           <p:cNvSpPr/>
           <p:nvPr/>
         </p:nvSpPr>
         <p:spPr>
           <a:xfrm>
-            <a:off x="8229600" y="1645920"/>
-            <a:ext cx="502920" cy="45720"/>
-          </a:xfrm>
-          <a:prstGeom prst="rect">
-            <a:avLst/>
-          </a:prstGeom>
-          <a:solidFill>
-            <a:srgbClr val="2DB34A"/>
-          </a:solidFill>
-          <a:ln/>
-        </p:spPr>
+            <a:off x="2743200" y="7498080"/>
+            <a:ext cx="4572000" cy="219456"/>
+          </a:xfrm>
+          <a:prstGeom prst="rect">
+            <a:avLst/>
+          </a:prstGeom>
+          <a:noFill/>
+          <a:ln/>
+        </p:spPr>
+        <p:txBody>
+          <a:bodyPr wrap="square" lIns="0" tIns="0" rIns="0" bIns="0" rtlCol="0" anchor="ctr"/>
+          <a:lstStyle/>
+          <a:p>
+            <a:pPr algn="ctr" indent="0" marL="0">
+              <a:buNone/>
+            </a:pPr>
+            <a:r>
+              <a:rPr lang="en-US" sz="950" spc="100" kern="0" dirty="0">
+                <a:solidFill>
+                  <a:srgbClr val="FFFFFF"/>
+                </a:solidFill>
+                <a:latin typeface="Montserrat SemiBold" pitchFamily="34" charset="0"/>
+                <a:ea typeface="Montserrat SemiBold" pitchFamily="34" charset="-122"/>
+                <a:cs typeface="Montserrat SemiBold" pitchFamily="34" charset="-120"/>
+              </a:rPr>
+              <a:t>21, 22 y 23 de octubre de 2026  ·  Facultad de Medicina</a:t>
+            </a:r>
+            <a:endParaRPr lang="en-US" sz="950" dirty="0"/>
+          </a:p>
+        </p:txBody>
       </p:sp>
       <p:sp>
         <p:nvSpPr>
@@ -1688,8 +1707,8 @@
         </p:nvSpPr>
         <p:spPr>
           <a:xfrm>
-            <a:off x="7818120" y="7296912"/>
-            <a:ext cx="2011680" cy="237744"/>
+            <a:off x="7589520" y="7498080"/>
+            <a:ext cx="2011680" cy="219456"/>
           </a:xfrm>
           <a:prstGeom prst="rect">
             <a:avLst/>
@@ -1707,7 +1726,7 @@
             <a:r>
               <a:rPr lang="en-US" sz="1000" spc="150" kern="0" dirty="0">
                 <a:solidFill>
-                  <a:srgbClr val="FFFFFF"/>
+                  <a:srgbClr val="F2C94C"/>
                 </a:solidFill>
                 <a:latin typeface="Montserrat ExtraBold" pitchFamily="34" charset="0"/>
                 <a:ea typeface="Montserrat ExtraBold" pitchFamily="34" charset="-122"/>
@@ -2030,8 +2049,8 @@
         </p:nvSpPr>
         <p:spPr>
           <a:xfrm>
-            <a:off x="3200400" y="1536192"/>
-            <a:ext cx="3657600" cy="237744"/>
+            <a:off x="1188720" y="1536192"/>
+            <a:ext cx="7680960" cy="237744"/>
           </a:xfrm>
           <a:prstGeom prst="rect">
             <a:avLst/>
@@ -2069,8 +2088,8 @@
         </p:nvSpPr>
         <p:spPr>
           <a:xfrm>
-            <a:off x="1371600" y="1737360"/>
-            <a:ext cx="7315200" cy="777240"/>
+            <a:off x="1097280" y="1737360"/>
+            <a:ext cx="7863840" cy="777240"/>
           </a:xfrm>
           <a:prstGeom prst="rect">
             <a:avLst/>
@@ -2625,26 +2644,26 @@
         </p:nvSpPr>
         <p:spPr>
           <a:xfrm>
-            <a:off x="3657600" y="7370064"/>
-            <a:ext cx="2743200" cy="182880"/>
-          </a:xfrm>
-          <a:prstGeom prst="rect">
-            <a:avLst/>
-          </a:prstGeom>
-          <a:noFill/>
-          <a:ln/>
-        </p:spPr>
-        <p:txBody>
-          <a:bodyPr wrap="square" lIns="0" tIns="0" rIns="0" bIns="0" rtlCol="0" anchor="ctr"/>
-          <a:lstStyle/>
-          <a:p>
-            <a:pPr algn="ctr" indent="0" marL="0">
+            <a:off x="457200" y="7498080"/>
+            <a:ext cx="2286000" cy="219456"/>
+          </a:xfrm>
+          <a:prstGeom prst="rect">
+            <a:avLst/>
+          </a:prstGeom>
+          <a:noFill/>
+          <a:ln/>
+        </p:spPr>
+        <p:txBody>
+          <a:bodyPr wrap="square" lIns="0" tIns="0" rIns="0" bIns="0" rtlCol="0" anchor="ctr"/>
+          <a:lstStyle/>
+          <a:p>
+            <a:pPr algn="l" indent="0" marL="0">
               <a:buNone/>
             </a:pPr>
             <a:r>
               <a:rPr lang="en-US" sz="800" spc="100" kern="0" dirty="0">
                 <a:solidFill>
-                  <a:srgbClr val="8A99AB"/>
+                  <a:srgbClr val="CFE6FB"/>
                 </a:solidFill>
                 <a:latin typeface="Montserrat SemiBold" pitchFamily="34" charset="0"/>
                 <a:ea typeface="Montserrat SemiBold" pitchFamily="34" charset="-122"/>
@@ -2689,8 +2708,8 @@
         </p:nvSpPr>
         <p:spPr>
           <a:xfrm>
-            <a:off x="3200400" y="1536192"/>
-            <a:ext cx="3657600" cy="237744"/>
+            <a:off x="1188720" y="1536192"/>
+            <a:ext cx="7680960" cy="237744"/>
           </a:xfrm>
           <a:prstGeom prst="rect">
             <a:avLst/>
@@ -2728,8 +2747,8 @@
         </p:nvSpPr>
         <p:spPr>
           <a:xfrm>
-            <a:off x="1371600" y="1737360"/>
-            <a:ext cx="7315200" cy="777240"/>
+            <a:off x="1097280" y="1737360"/>
+            <a:ext cx="7863840" cy="777240"/>
           </a:xfrm>
           <a:prstGeom prst="rect">
             <a:avLst/>
@@ -3318,26 +3337,26 @@
         </p:nvSpPr>
         <p:spPr>
           <a:xfrm>
-            <a:off x="3657600" y="7370064"/>
-            <a:ext cx="2743200" cy="182880"/>
-          </a:xfrm>
-          <a:prstGeom prst="rect">
-            <a:avLst/>
-          </a:prstGeom>
-          <a:noFill/>
-          <a:ln/>
-        </p:spPr>
-        <p:txBody>
-          <a:bodyPr wrap="square" lIns="0" tIns="0" rIns="0" bIns="0" rtlCol="0" anchor="ctr"/>
-          <a:lstStyle/>
-          <a:p>
-            <a:pPr algn="ctr" indent="0" marL="0">
+            <a:off x="457200" y="7498080"/>
+            <a:ext cx="2286000" cy="219456"/>
+          </a:xfrm>
+          <a:prstGeom prst="rect">
+            <a:avLst/>
+          </a:prstGeom>
+          <a:noFill/>
+          <a:ln/>
+        </p:spPr>
+        <p:txBody>
+          <a:bodyPr wrap="square" lIns="0" tIns="0" rIns="0" bIns="0" rtlCol="0" anchor="ctr"/>
+          <a:lstStyle/>
+          <a:p>
+            <a:pPr algn="l" indent="0" marL="0">
               <a:buNone/>
             </a:pPr>
             <a:r>
               <a:rPr lang="en-US" sz="800" spc="100" kern="0" dirty="0">
                 <a:solidFill>
-                  <a:srgbClr val="8A99AB"/>
+                  <a:srgbClr val="CFE6FB"/>
                 </a:solidFill>
                 <a:latin typeface="Montserrat SemiBold" pitchFamily="34" charset="0"/>
                 <a:ea typeface="Montserrat SemiBold" pitchFamily="34" charset="-122"/>
@@ -3382,8 +3401,8 @@
         </p:nvSpPr>
         <p:spPr>
           <a:xfrm>
-            <a:off x="3200400" y="1536192"/>
-            <a:ext cx="3657600" cy="237744"/>
+            <a:off x="1188720" y="1536192"/>
+            <a:ext cx="7680960" cy="237744"/>
           </a:xfrm>
           <a:prstGeom prst="rect">
             <a:avLst/>
@@ -3421,8 +3440,8 @@
         </p:nvSpPr>
         <p:spPr>
           <a:xfrm>
-            <a:off x="1371600" y="1737360"/>
-            <a:ext cx="7315200" cy="777240"/>
+            <a:off x="1097280" y="1737360"/>
+            <a:ext cx="7863840" cy="777240"/>
           </a:xfrm>
           <a:prstGeom prst="rect">
             <a:avLst/>
@@ -4011,26 +4030,26 @@
         </p:nvSpPr>
         <p:spPr>
           <a:xfrm>
-            <a:off x="3657600" y="7370064"/>
-            <a:ext cx="2743200" cy="182880"/>
-          </a:xfrm>
-          <a:prstGeom prst="rect">
-            <a:avLst/>
-          </a:prstGeom>
-          <a:noFill/>
-          <a:ln/>
-        </p:spPr>
-        <p:txBody>
-          <a:bodyPr wrap="square" lIns="0" tIns="0" rIns="0" bIns="0" rtlCol="0" anchor="ctr"/>
-          <a:lstStyle/>
-          <a:p>
-            <a:pPr algn="ctr" indent="0" marL="0">
+            <a:off x="457200" y="7498080"/>
+            <a:ext cx="2286000" cy="219456"/>
+          </a:xfrm>
+          <a:prstGeom prst="rect">
+            <a:avLst/>
+          </a:prstGeom>
+          <a:noFill/>
+          <a:ln/>
+        </p:spPr>
+        <p:txBody>
+          <a:bodyPr wrap="square" lIns="0" tIns="0" rIns="0" bIns="0" rtlCol="0" anchor="ctr"/>
+          <a:lstStyle/>
+          <a:p>
+            <a:pPr algn="l" indent="0" marL="0">
               <a:buNone/>
             </a:pPr>
             <a:r>
               <a:rPr lang="en-US" sz="800" spc="100" kern="0" dirty="0">
                 <a:solidFill>
-                  <a:srgbClr val="8A99AB"/>
+                  <a:srgbClr val="CFE6FB"/>
                 </a:solidFill>
                 <a:latin typeface="Montserrat SemiBold" pitchFamily="34" charset="0"/>
                 <a:ea typeface="Montserrat SemiBold" pitchFamily="34" charset="-122"/>
@@ -4075,8 +4094,8 @@
         </p:nvSpPr>
         <p:spPr>
           <a:xfrm>
-            <a:off x="3200400" y="1536192"/>
-            <a:ext cx="3657600" cy="237744"/>
+            <a:off x="1188720" y="1536192"/>
+            <a:ext cx="7680960" cy="237744"/>
           </a:xfrm>
           <a:prstGeom prst="rect">
             <a:avLst/>
@@ -4114,8 +4133,8 @@
         </p:nvSpPr>
         <p:spPr>
           <a:xfrm>
-            <a:off x="1371600" y="1737360"/>
-            <a:ext cx="7315200" cy="777240"/>
+            <a:off x="1097280" y="1737360"/>
+            <a:ext cx="7863840" cy="777240"/>
           </a:xfrm>
           <a:prstGeom prst="rect">
             <a:avLst/>
@@ -4704,26 +4723,26 @@
         </p:nvSpPr>
         <p:spPr>
           <a:xfrm>
-            <a:off x="3657600" y="7370064"/>
-            <a:ext cx="2743200" cy="182880"/>
-          </a:xfrm>
-          <a:prstGeom prst="rect">
-            <a:avLst/>
-          </a:prstGeom>
-          <a:noFill/>
-          <a:ln/>
-        </p:spPr>
-        <p:txBody>
-          <a:bodyPr wrap="square" lIns="0" tIns="0" rIns="0" bIns="0" rtlCol="0" anchor="ctr"/>
-          <a:lstStyle/>
-          <a:p>
-            <a:pPr algn="ctr" indent="0" marL="0">
+            <a:off x="457200" y="7498080"/>
+            <a:ext cx="2286000" cy="219456"/>
+          </a:xfrm>
+          <a:prstGeom prst="rect">
+            <a:avLst/>
+          </a:prstGeom>
+          <a:noFill/>
+          <a:ln/>
+        </p:spPr>
+        <p:txBody>
+          <a:bodyPr wrap="square" lIns="0" tIns="0" rIns="0" bIns="0" rtlCol="0" anchor="ctr"/>
+          <a:lstStyle/>
+          <a:p>
+            <a:pPr algn="l" indent="0" marL="0">
               <a:buNone/>
             </a:pPr>
             <a:r>
               <a:rPr lang="en-US" sz="800" spc="100" kern="0" dirty="0">
                 <a:solidFill>
-                  <a:srgbClr val="8A99AB"/>
+                  <a:srgbClr val="CFE6FB"/>
                 </a:solidFill>
                 <a:latin typeface="Montserrat SemiBold" pitchFamily="34" charset="0"/>
                 <a:ea typeface="Montserrat SemiBold" pitchFamily="34" charset="-122"/>
@@ -4768,8 +4787,8 @@
         </p:nvSpPr>
         <p:spPr>
           <a:xfrm>
-            <a:off x="3200400" y="1536192"/>
-            <a:ext cx="3657600" cy="237744"/>
+            <a:off x="1188720" y="1536192"/>
+            <a:ext cx="7680960" cy="237744"/>
           </a:xfrm>
           <a:prstGeom prst="rect">
             <a:avLst/>
@@ -4807,8 +4826,8 @@
         </p:nvSpPr>
         <p:spPr>
           <a:xfrm>
-            <a:off x="1371600" y="1737360"/>
-            <a:ext cx="7315200" cy="777240"/>
+            <a:off x="1097280" y="1737360"/>
+            <a:ext cx="7863840" cy="777240"/>
           </a:xfrm>
           <a:prstGeom prst="rect">
             <a:avLst/>
@@ -5397,26 +5416,26 @@
         </p:nvSpPr>
         <p:spPr>
           <a:xfrm>
-            <a:off x="3657600" y="7370064"/>
-            <a:ext cx="2743200" cy="182880"/>
-          </a:xfrm>
-          <a:prstGeom prst="rect">
-            <a:avLst/>
-          </a:prstGeom>
-          <a:noFill/>
-          <a:ln/>
-        </p:spPr>
-        <p:txBody>
-          <a:bodyPr wrap="square" lIns="0" tIns="0" rIns="0" bIns="0" rtlCol="0" anchor="ctr"/>
-          <a:lstStyle/>
-          <a:p>
-            <a:pPr algn="ctr" indent="0" marL="0">
+            <a:off x="457200" y="7498080"/>
+            <a:ext cx="2286000" cy="219456"/>
+          </a:xfrm>
+          <a:prstGeom prst="rect">
+            <a:avLst/>
+          </a:prstGeom>
+          <a:noFill/>
+          <a:ln/>
+        </p:spPr>
+        <p:txBody>
+          <a:bodyPr wrap="square" lIns="0" tIns="0" rIns="0" bIns="0" rtlCol="0" anchor="ctr"/>
+          <a:lstStyle/>
+          <a:p>
+            <a:pPr algn="l" indent="0" marL="0">
               <a:buNone/>
             </a:pPr>
             <a:r>
               <a:rPr lang="en-US" sz="800" spc="100" kern="0" dirty="0">
                 <a:solidFill>
-                  <a:srgbClr val="8A99AB"/>
+                  <a:srgbClr val="CFE6FB"/>
                 </a:solidFill>
                 <a:latin typeface="Montserrat SemiBold" pitchFamily="34" charset="0"/>
                 <a:ea typeface="Montserrat SemiBold" pitchFamily="34" charset="-122"/>
@@ -5461,8 +5480,8 @@
         </p:nvSpPr>
         <p:spPr>
           <a:xfrm>
-            <a:off x="3200400" y="1536192"/>
-            <a:ext cx="3657600" cy="237744"/>
+            <a:off x="1188720" y="1536192"/>
+            <a:ext cx="7680960" cy="237744"/>
           </a:xfrm>
           <a:prstGeom prst="rect">
             <a:avLst/>
@@ -5500,8 +5519,8 @@
         </p:nvSpPr>
         <p:spPr>
           <a:xfrm>
-            <a:off x="1371600" y="1737360"/>
-            <a:ext cx="7315200" cy="777240"/>
+            <a:off x="1097280" y="1737360"/>
+            <a:ext cx="7863840" cy="777240"/>
           </a:xfrm>
           <a:prstGeom prst="rect">
             <a:avLst/>
@@ -6090,26 +6109,26 @@
         </p:nvSpPr>
         <p:spPr>
           <a:xfrm>
-            <a:off x="3657600" y="7370064"/>
-            <a:ext cx="2743200" cy="182880"/>
-          </a:xfrm>
-          <a:prstGeom prst="rect">
-            <a:avLst/>
-          </a:prstGeom>
-          <a:noFill/>
-          <a:ln/>
-        </p:spPr>
-        <p:txBody>
-          <a:bodyPr wrap="square" lIns="0" tIns="0" rIns="0" bIns="0" rtlCol="0" anchor="ctr"/>
-          <a:lstStyle/>
-          <a:p>
-            <a:pPr algn="ctr" indent="0" marL="0">
+            <a:off x="457200" y="7498080"/>
+            <a:ext cx="2286000" cy="219456"/>
+          </a:xfrm>
+          <a:prstGeom prst="rect">
+            <a:avLst/>
+          </a:prstGeom>
+          <a:noFill/>
+          <a:ln/>
+        </p:spPr>
+        <p:txBody>
+          <a:bodyPr wrap="square" lIns="0" tIns="0" rIns="0" bIns="0" rtlCol="0" anchor="ctr"/>
+          <a:lstStyle/>
+          <a:p>
+            <a:pPr algn="l" indent="0" marL="0">
               <a:buNone/>
             </a:pPr>
             <a:r>
               <a:rPr lang="en-US" sz="800" spc="100" kern="0" dirty="0">
                 <a:solidFill>
-                  <a:srgbClr val="8A99AB"/>
+                  <a:srgbClr val="CFE6FB"/>
                 </a:solidFill>
                 <a:latin typeface="Montserrat SemiBold" pitchFamily="34" charset="0"/>
                 <a:ea typeface="Montserrat SemiBold" pitchFamily="34" charset="-122"/>
@@ -6154,8 +6173,8 @@
         </p:nvSpPr>
         <p:spPr>
           <a:xfrm>
-            <a:off x="3200400" y="1536192"/>
-            <a:ext cx="3657600" cy="237744"/>
+            <a:off x="1188720" y="1536192"/>
+            <a:ext cx="7680960" cy="237744"/>
           </a:xfrm>
           <a:prstGeom prst="rect">
             <a:avLst/>
@@ -6193,8 +6212,8 @@
         </p:nvSpPr>
         <p:spPr>
           <a:xfrm>
-            <a:off x="1371600" y="1737360"/>
-            <a:ext cx="7315200" cy="777240"/>
+            <a:off x="1097280" y="1737360"/>
+            <a:ext cx="7863840" cy="777240"/>
           </a:xfrm>
           <a:prstGeom prst="rect">
             <a:avLst/>
@@ -6783,26 +6802,26 @@
         </p:nvSpPr>
         <p:spPr>
           <a:xfrm>
-            <a:off x="3657600" y="7370064"/>
-            <a:ext cx="2743200" cy="182880"/>
-          </a:xfrm>
-          <a:prstGeom prst="rect">
-            <a:avLst/>
-          </a:prstGeom>
-          <a:noFill/>
-          <a:ln/>
-        </p:spPr>
-        <p:txBody>
-          <a:bodyPr wrap="square" lIns="0" tIns="0" rIns="0" bIns="0" rtlCol="0" anchor="ctr"/>
-          <a:lstStyle/>
-          <a:p>
-            <a:pPr algn="ctr" indent="0" marL="0">
+            <a:off x="457200" y="7498080"/>
+            <a:ext cx="2286000" cy="219456"/>
+          </a:xfrm>
+          <a:prstGeom prst="rect">
+            <a:avLst/>
+          </a:prstGeom>
+          <a:noFill/>
+          <a:ln/>
+        </p:spPr>
+        <p:txBody>
+          <a:bodyPr wrap="square" lIns="0" tIns="0" rIns="0" bIns="0" rtlCol="0" anchor="ctr"/>
+          <a:lstStyle/>
+          <a:p>
+            <a:pPr algn="l" indent="0" marL="0">
               <a:buNone/>
             </a:pPr>
             <a:r>
               <a:rPr lang="en-US" sz="800" spc="100" kern="0" dirty="0">
                 <a:solidFill>
-                  <a:srgbClr val="8A99AB"/>
+                  <a:srgbClr val="CFE6FB"/>
                 </a:solidFill>
                 <a:latin typeface="Montserrat SemiBold" pitchFamily="34" charset="0"/>
                 <a:ea typeface="Montserrat SemiBold" pitchFamily="34" charset="-122"/>
@@ -6847,8 +6866,8 @@
         </p:nvSpPr>
         <p:spPr>
           <a:xfrm>
-            <a:off x="3200400" y="1536192"/>
-            <a:ext cx="3657600" cy="237744"/>
+            <a:off x="1188720" y="1536192"/>
+            <a:ext cx="7680960" cy="237744"/>
           </a:xfrm>
           <a:prstGeom prst="rect">
             <a:avLst/>
@@ -6886,8 +6905,8 @@
         </p:nvSpPr>
         <p:spPr>
           <a:xfrm>
-            <a:off x="1371600" y="1737360"/>
-            <a:ext cx="7315200" cy="777240"/>
+            <a:off x="1097280" y="1737360"/>
+            <a:ext cx="7863840" cy="777240"/>
           </a:xfrm>
           <a:prstGeom prst="rect">
             <a:avLst/>
@@ -7476,26 +7495,26 @@
         </p:nvSpPr>
         <p:spPr>
           <a:xfrm>
-            <a:off x="3657600" y="7370064"/>
-            <a:ext cx="2743200" cy="182880"/>
-          </a:xfrm>
-          <a:prstGeom prst="rect">
-            <a:avLst/>
-          </a:prstGeom>
-          <a:noFill/>
-          <a:ln/>
-        </p:spPr>
-        <p:txBody>
-          <a:bodyPr wrap="square" lIns="0" tIns="0" rIns="0" bIns="0" rtlCol="0" anchor="ctr"/>
-          <a:lstStyle/>
-          <a:p>
-            <a:pPr algn="ctr" indent="0" marL="0">
+            <a:off x="457200" y="7498080"/>
+            <a:ext cx="2286000" cy="219456"/>
+          </a:xfrm>
+          <a:prstGeom prst="rect">
+            <a:avLst/>
+          </a:prstGeom>
+          <a:noFill/>
+          <a:ln/>
+        </p:spPr>
+        <p:txBody>
+          <a:bodyPr wrap="square" lIns="0" tIns="0" rIns="0" bIns="0" rtlCol="0" anchor="ctr"/>
+          <a:lstStyle/>
+          <a:p>
+            <a:pPr algn="l" indent="0" marL="0">
               <a:buNone/>
             </a:pPr>
             <a:r>
               <a:rPr lang="en-US" sz="800" spc="100" kern="0" dirty="0">
                 <a:solidFill>
-                  <a:srgbClr val="8A99AB"/>
+                  <a:srgbClr val="CFE6FB"/>
                 </a:solidFill>
                 <a:latin typeface="Montserrat SemiBold" pitchFamily="34" charset="0"/>
                 <a:ea typeface="Montserrat SemiBold" pitchFamily="34" charset="-122"/>
@@ -7540,8 +7559,8 @@
         </p:nvSpPr>
         <p:spPr>
           <a:xfrm>
-            <a:off x="3200400" y="1536192"/>
-            <a:ext cx="3657600" cy="237744"/>
+            <a:off x="1188720" y="1536192"/>
+            <a:ext cx="7680960" cy="237744"/>
           </a:xfrm>
           <a:prstGeom prst="rect">
             <a:avLst/>
@@ -7579,8 +7598,8 @@
         </p:nvSpPr>
         <p:spPr>
           <a:xfrm>
-            <a:off x="1371600" y="1737360"/>
-            <a:ext cx="7315200" cy="777240"/>
+            <a:off x="1097280" y="1737360"/>
+            <a:ext cx="7863840" cy="777240"/>
           </a:xfrm>
           <a:prstGeom prst="rect">
             <a:avLst/>
@@ -8169,26 +8188,26 @@
         </p:nvSpPr>
         <p:spPr>
           <a:xfrm>
-            <a:off x="3657600" y="7370064"/>
-            <a:ext cx="2743200" cy="182880"/>
-          </a:xfrm>
-          <a:prstGeom prst="rect">
-            <a:avLst/>
-          </a:prstGeom>
-          <a:noFill/>
-          <a:ln/>
-        </p:spPr>
-        <p:txBody>
-          <a:bodyPr wrap="square" lIns="0" tIns="0" rIns="0" bIns="0" rtlCol="0" anchor="ctr"/>
-          <a:lstStyle/>
-          <a:p>
-            <a:pPr algn="ctr" indent="0" marL="0">
+            <a:off x="457200" y="7498080"/>
+            <a:ext cx="2286000" cy="219456"/>
+          </a:xfrm>
+          <a:prstGeom prst="rect">
+            <a:avLst/>
+          </a:prstGeom>
+          <a:noFill/>
+          <a:ln/>
+        </p:spPr>
+        <p:txBody>
+          <a:bodyPr wrap="square" lIns="0" tIns="0" rIns="0" bIns="0" rtlCol="0" anchor="ctr"/>
+          <a:lstStyle/>
+          <a:p>
+            <a:pPr algn="l" indent="0" marL="0">
               <a:buNone/>
             </a:pPr>
             <a:r>
               <a:rPr lang="en-US" sz="800" spc="100" kern="0" dirty="0">
                 <a:solidFill>
-                  <a:srgbClr val="8A99AB"/>
+                  <a:srgbClr val="CFE6FB"/>
                 </a:solidFill>
                 <a:latin typeface="Montserrat SemiBold" pitchFamily="34" charset="0"/>
                 <a:ea typeface="Montserrat SemiBold" pitchFamily="34" charset="-122"/>
@@ -8233,8 +8252,8 @@
         </p:nvSpPr>
         <p:spPr>
           <a:xfrm>
-            <a:off x="3200400" y="1536192"/>
-            <a:ext cx="3657600" cy="237744"/>
+            <a:off x="1188720" y="1536192"/>
+            <a:ext cx="7680960" cy="237744"/>
           </a:xfrm>
           <a:prstGeom prst="rect">
             <a:avLst/>
@@ -8272,8 +8291,8 @@
         </p:nvSpPr>
         <p:spPr>
           <a:xfrm>
-            <a:off x="1371600" y="1737360"/>
-            <a:ext cx="7315200" cy="777240"/>
+            <a:off x="1097280" y="1737360"/>
+            <a:ext cx="7863840" cy="777240"/>
           </a:xfrm>
           <a:prstGeom prst="rect">
             <a:avLst/>
@@ -8862,26 +8881,26 @@
         </p:nvSpPr>
         <p:spPr>
           <a:xfrm>
-            <a:off x="3657600" y="7370064"/>
-            <a:ext cx="2743200" cy="182880"/>
-          </a:xfrm>
-          <a:prstGeom prst="rect">
-            <a:avLst/>
-          </a:prstGeom>
-          <a:noFill/>
-          <a:ln/>
-        </p:spPr>
-        <p:txBody>
-          <a:bodyPr wrap="square" lIns="0" tIns="0" rIns="0" bIns="0" rtlCol="0" anchor="ctr"/>
-          <a:lstStyle/>
-          <a:p>
-            <a:pPr algn="ctr" indent="0" marL="0">
+            <a:off x="457200" y="7498080"/>
+            <a:ext cx="2286000" cy="219456"/>
+          </a:xfrm>
+          <a:prstGeom prst="rect">
+            <a:avLst/>
+          </a:prstGeom>
+          <a:noFill/>
+          <a:ln/>
+        </p:spPr>
+        <p:txBody>
+          <a:bodyPr wrap="square" lIns="0" tIns="0" rIns="0" bIns="0" rtlCol="0" anchor="ctr"/>
+          <a:lstStyle/>
+          <a:p>
+            <a:pPr algn="l" indent="0" marL="0">
               <a:buNone/>
             </a:pPr>
             <a:r>
               <a:rPr lang="en-US" sz="800" spc="100" kern="0" dirty="0">
                 <a:solidFill>
-                  <a:srgbClr val="8A99AB"/>
+                  <a:srgbClr val="CFE6FB"/>
                 </a:solidFill>
                 <a:latin typeface="Montserrat SemiBold" pitchFamily="34" charset="0"/>
                 <a:ea typeface="Montserrat SemiBold" pitchFamily="34" charset="-122"/>
@@ -8926,8 +8945,8 @@
         </p:nvSpPr>
         <p:spPr>
           <a:xfrm>
-            <a:off x="3200400" y="1536192"/>
-            <a:ext cx="3657600" cy="237744"/>
+            <a:off x="1188720" y="1536192"/>
+            <a:ext cx="7680960" cy="237744"/>
           </a:xfrm>
           <a:prstGeom prst="rect">
             <a:avLst/>
@@ -8965,8 +8984,8 @@
         </p:nvSpPr>
         <p:spPr>
           <a:xfrm>
-            <a:off x="1371600" y="1737360"/>
-            <a:ext cx="7315200" cy="777240"/>
+            <a:off x="1097280" y="1737360"/>
+            <a:ext cx="7863840" cy="777240"/>
           </a:xfrm>
           <a:prstGeom prst="rect">
             <a:avLst/>
@@ -9555,26 +9574,26 @@
         </p:nvSpPr>
         <p:spPr>
           <a:xfrm>
-            <a:off x="3657600" y="7370064"/>
-            <a:ext cx="2743200" cy="182880"/>
-          </a:xfrm>
-          <a:prstGeom prst="rect">
-            <a:avLst/>
-          </a:prstGeom>
-          <a:noFill/>
-          <a:ln/>
-        </p:spPr>
-        <p:txBody>
-          <a:bodyPr wrap="square" lIns="0" tIns="0" rIns="0" bIns="0" rtlCol="0" anchor="ctr"/>
-          <a:lstStyle/>
-          <a:p>
-            <a:pPr algn="ctr" indent="0" marL="0">
+            <a:off x="457200" y="7498080"/>
+            <a:ext cx="2286000" cy="219456"/>
+          </a:xfrm>
+          <a:prstGeom prst="rect">
+            <a:avLst/>
+          </a:prstGeom>
+          <a:noFill/>
+          <a:ln/>
+        </p:spPr>
+        <p:txBody>
+          <a:bodyPr wrap="square" lIns="0" tIns="0" rIns="0" bIns="0" rtlCol="0" anchor="ctr"/>
+          <a:lstStyle/>
+          <a:p>
+            <a:pPr algn="l" indent="0" marL="0">
               <a:buNone/>
             </a:pPr>
             <a:r>
               <a:rPr lang="en-US" sz="800" spc="100" kern="0" dirty="0">
                 <a:solidFill>
-                  <a:srgbClr val="8A99AB"/>
+                  <a:srgbClr val="CFE6FB"/>
                 </a:solidFill>
                 <a:latin typeface="Montserrat SemiBold" pitchFamily="34" charset="0"/>
                 <a:ea typeface="Montserrat SemiBold" pitchFamily="34" charset="-122"/>

--- a/presentaciones/medical-leadership-summit-2026/Certificados_Medical_Leadership_Summit_2026.pptx
+++ b/presentaciones/medical-leadership-summit-2026/Certificados_Medical_Leadership_Summit_2026.pptx
@@ -1511,7 +1511,7 @@
         </p:blipFill>
         <p:spPr>
           <a:xfrm>
-            <a:off x="457200" y="155448"/>
+            <a:off x="502920" y="164592"/>
             <a:ext cx="2011680" cy="810885"/>
           </a:xfrm>
           <a:prstGeom prst="rect">
@@ -1551,6 +1551,60 @@
         </p:nvSpPr>
         <p:spPr>
           <a:xfrm>
+            <a:off x="3520440" y="1033272"/>
+            <a:ext cx="3017520" cy="365760"/>
+          </a:xfrm>
+          <a:prstGeom prst="roundRect">
+            <a:avLst>
+              <a:gd name="adj" fmla="val 50000"/>
+            </a:avLst>
+          </a:prstGeom>
+          <a:solidFill>
+            <a:srgbClr val="FFFFFF"/>
+          </a:solidFill>
+          <a:ln w="22225">
+            <a:solidFill>
+              <a:srgbClr val="F2C94C"/>
+            </a:solidFill>
+          </a:ln>
+          <a:effectLst>
+            <a:outerShdw sx="100000" sy="100000" kx="0" ky="0" algn="bl" rotWithShape="0" blurRad="76200" dist="25400" dir="5400000">
+              <a:srgbClr val="0E2A47">
+                <a:alpha val="18000"/>
+              </a:srgbClr>
+            </a:outerShdw>
+          </a:effectLst>
+        </p:spPr>
+        <p:txBody>
+          <a:bodyPr wrap="square" lIns="0" tIns="0" rIns="0" bIns="0" rtlCol="0" anchor="ctr"/>
+          <a:lstStyle/>
+          <a:p>
+            <a:pPr algn="ctr" indent="0" marL="0">
+              <a:buNone/>
+            </a:pPr>
+            <a:r>
+              <a:rPr lang="en-US" sz="1050" spc="300" kern="0" dirty="0">
+                <a:solidFill>
+                  <a:srgbClr val="266294"/>
+                </a:solidFill>
+                <a:latin typeface="Montserrat ExtraBold" pitchFamily="34" charset="0"/>
+                <a:ea typeface="Montserrat ExtraBold" pitchFamily="34" charset="-122"/>
+                <a:cs typeface="Montserrat ExtraBold" pitchFamily="34" charset="-120"/>
+              </a:rPr>
+              <a:t>FACULTAD DE MEDICINA</a:t>
+            </a:r>
+            <a:endParaRPr lang="en-US" sz="1050" dirty="0"/>
+          </a:p>
+        </p:txBody>
+      </p:sp>
+      <p:sp>
+        <p:nvSpPr>
+          <p:cNvPr id="5" name="Text 1"/>
+          <p:cNvSpPr/>
+          <p:nvPr/>
+        </p:nvSpPr>
+        <p:spPr>
+          <a:xfrm>
             <a:off x="6035040" y="109728"/>
             <a:ext cx="3566160" cy="274320"/>
           </a:xfrm>
@@ -1584,7 +1638,7 @@
       </p:sp>
       <p:sp>
         <p:nvSpPr>
-          <p:cNvPr id="5" name="Text 1"/>
+          <p:cNvPr id="6" name="Text 2"/>
           <p:cNvSpPr/>
           <p:nvPr/>
         </p:nvSpPr>
@@ -1623,7 +1677,7 @@
       </p:sp>
       <p:sp>
         <p:nvSpPr>
-          <p:cNvPr id="6" name="Text 2"/>
+          <p:cNvPr id="7" name="Text 3"/>
           <p:cNvSpPr/>
           <p:nvPr/>
         </p:nvSpPr>
@@ -1662,7 +1716,7 @@
       </p:sp>
       <p:sp>
         <p:nvSpPr>
-          <p:cNvPr id="7" name="Text 3"/>
+          <p:cNvPr id="8" name="Text 4"/>
           <p:cNvSpPr/>
           <p:nvPr/>
         </p:nvSpPr>
@@ -1701,7 +1755,7 @@
       </p:sp>
       <p:sp>
         <p:nvSpPr>
-          <p:cNvPr id="8" name="Text 4"/>
+          <p:cNvPr id="9" name="Text 5"/>
           <p:cNvSpPr/>
           <p:nvPr/>
         </p:nvSpPr>
@@ -2049,32 +2103,336 @@
         </p:nvSpPr>
         <p:spPr>
           <a:xfrm>
-            <a:off x="1188720" y="1536192"/>
-            <a:ext cx="7680960" cy="237744"/>
-          </a:xfrm>
-          <a:prstGeom prst="rect">
-            <a:avLst/>
-          </a:prstGeom>
-          <a:noFill/>
-          <a:ln/>
-        </p:spPr>
-        <p:txBody>
-          <a:bodyPr wrap="square" lIns="0" tIns="0" rIns="0" bIns="0" rtlCol="0" anchor="ctr"/>
-          <a:lstStyle/>
-          <a:p>
-            <a:pPr algn="ctr" indent="0" marL="0">
-              <a:buNone/>
-            </a:pPr>
-            <a:r>
-              <a:rPr lang="en-US" sz="1050" spc="300" kern="0" dirty="0">
+            <a:off x="1097280" y="1737360"/>
+            <a:ext cx="7863840" cy="777240"/>
+          </a:xfrm>
+          <a:prstGeom prst="rect">
+            <a:avLst/>
+          </a:prstGeom>
+          <a:noFill/>
+          <a:ln/>
+        </p:spPr>
+        <p:txBody>
+          <a:bodyPr wrap="square" lIns="0" tIns="0" rIns="0" bIns="0" rtlCol="0" anchor="ctr"/>
+          <a:lstStyle/>
+          <a:p>
+            <a:pPr algn="ctr" indent="0" marL="0">
+              <a:buNone/>
+            </a:pPr>
+            <a:r>
+              <a:rPr lang="en-US" sz="5000" spc="800" kern="0" dirty="0">
+                <a:solidFill>
+                  <a:srgbClr val="266294"/>
+                </a:solidFill>
+                <a:latin typeface="Montserrat ExtraBold" pitchFamily="34" charset="0"/>
+                <a:ea typeface="Montserrat ExtraBold" pitchFamily="34" charset="-122"/>
+                <a:cs typeface="Montserrat ExtraBold" pitchFamily="34" charset="-120"/>
+              </a:rPr>
+              <a:t>CERTIFICADO</a:t>
+            </a:r>
+            <a:endParaRPr lang="en-US" sz="5000" dirty="0"/>
+          </a:p>
+        </p:txBody>
+      </p:sp>
+      <p:pic>
+        <p:nvPicPr>
+          <p:cNvPr id="3" name="Image 0" descr="preencoded.png">    </p:cNvPr>
+          <p:cNvPicPr>
+            <a:picLocks noChangeAspect="1"/>
+          </p:cNvPicPr>
+          <p:nvPr/>
+        </p:nvPicPr>
+        <p:blipFill>
+          <a:blip r:embed="rId1"/>
+          <a:stretch>
+            <a:fillRect/>
+          </a:stretch>
+        </p:blipFill>
+        <p:spPr>
+          <a:xfrm>
+            <a:off x="1874520" y="2642616"/>
+            <a:ext cx="1371600" cy="182880"/>
+          </a:xfrm>
+          <a:prstGeom prst="rect">
+            <a:avLst/>
+          </a:prstGeom>
+        </p:spPr>
+      </p:pic>
+      <p:pic>
+        <p:nvPicPr>
+          <p:cNvPr id="4" name="Image 1" descr="preencoded.png">    </p:cNvPr>
+          <p:cNvPicPr>
+            <a:picLocks noChangeAspect="1"/>
+          </p:cNvPicPr>
+          <p:nvPr/>
+        </p:nvPicPr>
+        <p:blipFill>
+          <a:blip r:embed="rId2"/>
+          <a:stretch>
+            <a:fillRect/>
+          </a:stretch>
+        </p:blipFill>
+        <p:spPr>
+          <a:xfrm>
+            <a:off x="6812280" y="2642616"/>
+            <a:ext cx="1371600" cy="182880"/>
+          </a:xfrm>
+          <a:prstGeom prst="rect">
+            <a:avLst/>
+          </a:prstGeom>
+        </p:spPr>
+      </p:pic>
+      <p:sp>
+        <p:nvSpPr>
+          <p:cNvPr id="5" name="Text 1"/>
+          <p:cNvSpPr txBox="1"/>
+          <p:nvPr/>
+        </p:nvSpPr>
+        <p:spPr>
+          <a:xfrm>
+            <a:off x="3291840" y="2560320"/>
+            <a:ext cx="3474720" cy="329184"/>
+          </a:xfrm>
+          <a:prstGeom prst="rect">
+            <a:avLst/>
+          </a:prstGeom>
+          <a:noFill/>
+          <a:ln/>
+        </p:spPr>
+        <p:txBody>
+          <a:bodyPr wrap="square" lIns="0" tIns="0" rIns="0" bIns="0" rtlCol="0" anchor="ctr"/>
+          <a:lstStyle/>
+          <a:p>
+            <a:pPr algn="ctr" indent="0" marL="0">
+              <a:buNone/>
+            </a:pPr>
+            <a:r>
+              <a:rPr lang="en-US" sz="1500" spc="500" kern="0" dirty="0">
+                <a:solidFill>
+                  <a:srgbClr val="0E2A47"/>
+                </a:solidFill>
+                <a:latin typeface="Montserrat ExtraBold" pitchFamily="34" charset="0"/>
+                <a:ea typeface="Montserrat ExtraBold" pitchFamily="34" charset="-122"/>
+                <a:cs typeface="Montserrat ExtraBold" pitchFamily="34" charset="-120"/>
+              </a:rPr>
+              <a:t>DE PARTICIPACIÓN</a:t>
+            </a:r>
+            <a:endParaRPr lang="en-US" sz="1500" dirty="0"/>
+          </a:p>
+        </p:txBody>
+      </p:sp>
+      <p:sp>
+        <p:nvSpPr>
+          <p:cNvPr id="6" name="Text 2"/>
+          <p:cNvSpPr txBox="1"/>
+          <p:nvPr/>
+        </p:nvSpPr>
+        <p:spPr>
+          <a:xfrm>
+            <a:off x="1828800" y="3035808"/>
+            <a:ext cx="6400800" cy="274320"/>
+          </a:xfrm>
+          <a:prstGeom prst="rect">
+            <a:avLst/>
+          </a:prstGeom>
+          <a:noFill/>
+          <a:ln/>
+        </p:spPr>
+        <p:txBody>
+          <a:bodyPr wrap="square" lIns="0" tIns="0" rIns="0" bIns="0" rtlCol="0" anchor="ctr"/>
+          <a:lstStyle/>
+          <a:p>
+            <a:pPr algn="ctr" indent="0" marL="0">
+              <a:buNone/>
+            </a:pPr>
+            <a:r>
+              <a:rPr lang="en-US" sz="1250" dirty="0">
                 <a:solidFill>
                   <a:srgbClr val="5B6B7D"/>
+                </a:solidFill>
+                <a:latin typeface="Montserrat Medium" pitchFamily="34" charset="0"/>
+                <a:ea typeface="Montserrat Medium" pitchFamily="34" charset="-122"/>
+                <a:cs typeface="Montserrat Medium" pitchFamily="34" charset="-120"/>
+              </a:rPr>
+              <a:t>Otorga el presente certificado a</a:t>
+            </a:r>
+            <a:endParaRPr lang="en-US" sz="1250" dirty="0"/>
+          </a:p>
+        </p:txBody>
+      </p:sp>
+      <p:sp>
+        <p:nvSpPr>
+          <p:cNvPr id="7" name="Text 3"/>
+          <p:cNvSpPr txBox="1"/>
+          <p:nvPr/>
+        </p:nvSpPr>
+        <p:spPr>
+          <a:xfrm>
+            <a:off x="1097280" y="3310128"/>
+            <a:ext cx="7863840" cy="713232"/>
+          </a:xfrm>
+          <a:prstGeom prst="rect">
+            <a:avLst/>
+          </a:prstGeom>
+          <a:noFill/>
+          <a:ln/>
+        </p:spPr>
+        <p:txBody>
+          <a:bodyPr wrap="square" lIns="0" tIns="0" rIns="0" bIns="0" rtlCol="0" anchor="ctr"/>
+          <a:lstStyle/>
+          <a:p>
+            <a:pPr algn="ctr" indent="0" marL="0">
+              <a:buNone/>
+            </a:pPr>
+            <a:r>
+              <a:rPr lang="en-US" sz="3800" dirty="0">
+                <a:solidFill>
+                  <a:srgbClr val="0E2A47"/>
+                </a:solidFill>
+                <a:latin typeface="Montserrat ExtraBold" pitchFamily="34" charset="0"/>
+                <a:ea typeface="Montserrat ExtraBold" pitchFamily="34" charset="-122"/>
+                <a:cs typeface="Montserrat ExtraBold" pitchFamily="34" charset="-120"/>
+              </a:rPr>
+              <a:t>Nombre del Participante</a:t>
+            </a:r>
+            <a:endParaRPr lang="en-US" sz="3800" dirty="0"/>
+          </a:p>
+        </p:txBody>
+      </p:sp>
+      <p:pic>
+        <p:nvPicPr>
+          <p:cNvPr id="8" name="Image 2" descr="preencoded.png">    </p:cNvPr>
+          <p:cNvPicPr>
+            <a:picLocks noChangeAspect="1"/>
+          </p:cNvPicPr>
+          <p:nvPr/>
+        </p:nvPicPr>
+        <p:blipFill>
+          <a:blip r:embed="rId3"/>
+          <a:stretch>
+            <a:fillRect/>
+          </a:stretch>
+        </p:blipFill>
+        <p:spPr>
+          <a:xfrm>
+            <a:off x="2194560" y="3986784"/>
+            <a:ext cx="5669280" cy="201168"/>
+          </a:xfrm>
+          <a:prstGeom prst="rect">
+            <a:avLst/>
+          </a:prstGeom>
+        </p:spPr>
+      </p:pic>
+      <p:sp>
+        <p:nvSpPr>
+          <p:cNvPr id="9" name="Text 4"/>
+          <p:cNvSpPr txBox="1"/>
+          <p:nvPr/>
+        </p:nvSpPr>
+        <p:spPr>
+          <a:xfrm>
+            <a:off x="1417320" y="4206240"/>
+            <a:ext cx="7223760" cy="896112"/>
+          </a:xfrm>
+          <a:prstGeom prst="rect">
+            <a:avLst/>
+          </a:prstGeom>
+          <a:noFill/>
+          <a:ln/>
+        </p:spPr>
+        <p:txBody>
+          <a:bodyPr wrap="square" lIns="0" tIns="0" rIns="0" bIns="0" rtlCol="0" anchor="t"/>
+          <a:lstStyle/>
+          <a:p>
+            <a:pPr algn="ctr" indent="0" marL="0">
+              <a:lnSpc>
+                <a:spcPct val="112000"/>
+              </a:lnSpc>
+              <a:buNone/>
+            </a:pPr>
+            <a:r>
+              <a:rPr lang="en-US" sz="1150" dirty="0">
+                <a:solidFill>
+                  <a:srgbClr val="2B3A4E"/>
+                </a:solidFill>
+                <a:latin typeface="Montserrat" pitchFamily="34" charset="0"/>
+                <a:ea typeface="Montserrat" pitchFamily="34" charset="-122"/>
+                <a:cs typeface="Montserrat" pitchFamily="34" charset="-120"/>
+              </a:rPr>
+              <a:t>Por su asistencia y participación en el </a:t>
+            </a:r>
+            <a:pPr algn="ctr" indent="0" marL="0">
+              <a:lnSpc>
+                <a:spcPct val="112000"/>
+              </a:lnSpc>
+              <a:buNone/>
+            </a:pPr>
+            <a:r>
+              <a:rPr lang="en-US" sz="1150" dirty="0">
+                <a:solidFill>
+                  <a:srgbClr val="0E2A47"/>
+                </a:solidFill>
+                <a:latin typeface="Montserrat ExtraBold" pitchFamily="34" charset="0"/>
+                <a:ea typeface="Montserrat ExtraBold" pitchFamily="34" charset="-122"/>
+                <a:cs typeface="Montserrat ExtraBold" pitchFamily="34" charset="-120"/>
+              </a:rPr>
+              <a:t>Westhill Medical Leadership Summit 2026</a:t>
+            </a:r>
+            <a:pPr algn="ctr" indent="0" marL="0">
+              <a:lnSpc>
+                <a:spcPct val="112000"/>
+              </a:lnSpc>
+              <a:buNone/>
+            </a:pPr>
+            <a:r>
+              <a:rPr lang="en-US" sz="1150" dirty="0">
+                <a:solidFill>
+                  <a:srgbClr val="2B3A4E"/>
+                </a:solidFill>
+                <a:latin typeface="Montserrat" pitchFamily="34" charset="0"/>
+                <a:ea typeface="Montserrat" pitchFamily="34" charset="-122"/>
+                <a:cs typeface="Montserrat" pitchFamily="34" charset="-120"/>
+              </a:rPr>
+              <a:t> «Fronteras de la Medicina: actualización clínica y nuevas perspectivas en la práctica médica», realizado los días 21, 22 y 23 de octubre de 2026 en la Facultad de Medicina de la Universidad Westhill.</a:t>
+            </a:r>
+            <a:endParaRPr lang="en-US" sz="1150" dirty="0"/>
+          </a:p>
+        </p:txBody>
+      </p:sp>
+      <p:sp>
+        <p:nvSpPr>
+          <p:cNvPr id="10" name="Text 5"/>
+          <p:cNvSpPr txBox="1"/>
+          <p:nvPr/>
+        </p:nvSpPr>
+        <p:spPr>
+          <a:xfrm>
+            <a:off x="2286000" y="5120640"/>
+            <a:ext cx="5486400" cy="237744"/>
+          </a:xfrm>
+          <a:prstGeom prst="rect">
+            <a:avLst/>
+          </a:prstGeom>
+          <a:noFill/>
+          <a:ln/>
+        </p:spPr>
+        <p:txBody>
+          <a:bodyPr wrap="square" lIns="0" tIns="0" rIns="0" bIns="0" rtlCol="0" anchor="ctr"/>
+          <a:lstStyle/>
+          <a:p>
+            <a:pPr algn="ctr" indent="0" marL="0">
+              <a:buNone/>
+            </a:pPr>
+            <a:r>
+              <a:rPr lang="en-US" sz="1050" dirty="0">
+                <a:solidFill>
+                  <a:srgbClr val="266294"/>
                 </a:solidFill>
                 <a:latin typeface="Montserrat SemiBold" pitchFamily="34" charset="0"/>
                 <a:ea typeface="Montserrat SemiBold" pitchFamily="34" charset="-122"/>
                 <a:cs typeface="Montserrat SemiBold" pitchFamily="34" charset="-120"/>
               </a:rPr>
-              <a:t>FACULTAD DE MEDICINA</a:t>
+              <a:t>Ciudad de México, a 23 de octubre de 2026</a:t>
             </a:r>
             <a:endParaRPr lang="en-US" sz="1050" dirty="0"/>
           </a:p>
@@ -2082,361 +2440,7 @@
       </p:sp>
       <p:sp>
         <p:nvSpPr>
-          <p:cNvPr id="3" name="Text 1"/>
-          <p:cNvSpPr txBox="1"/>
-          <p:nvPr/>
-        </p:nvSpPr>
-        <p:spPr>
-          <a:xfrm>
-            <a:off x="1097280" y="1737360"/>
-            <a:ext cx="7863840" cy="777240"/>
-          </a:xfrm>
-          <a:prstGeom prst="rect">
-            <a:avLst/>
-          </a:prstGeom>
-          <a:noFill/>
-          <a:ln/>
-        </p:spPr>
-        <p:txBody>
-          <a:bodyPr wrap="square" lIns="0" tIns="0" rIns="0" bIns="0" rtlCol="0" anchor="ctr"/>
-          <a:lstStyle/>
-          <a:p>
-            <a:pPr algn="ctr" indent="0" marL="0">
-              <a:buNone/>
-            </a:pPr>
-            <a:r>
-              <a:rPr lang="en-US" sz="5000" spc="800" kern="0" dirty="0">
-                <a:solidFill>
-                  <a:srgbClr val="266294"/>
-                </a:solidFill>
-                <a:latin typeface="Montserrat ExtraBold" pitchFamily="34" charset="0"/>
-                <a:ea typeface="Montserrat ExtraBold" pitchFamily="34" charset="-122"/>
-                <a:cs typeface="Montserrat ExtraBold" pitchFamily="34" charset="-120"/>
-              </a:rPr>
-              <a:t>CERTIFICADO</a:t>
-            </a:r>
-            <a:endParaRPr lang="en-US" sz="5000" dirty="0"/>
-          </a:p>
-        </p:txBody>
-      </p:sp>
-      <p:sp>
-        <p:nvSpPr>
-          <p:cNvPr id="4" name="Shape 2"/>
-          <p:cNvSpPr/>
-          <p:nvPr/>
-        </p:nvSpPr>
-        <p:spPr>
-          <a:xfrm>
-            <a:off x="2331720" y="2706624"/>
-            <a:ext cx="914400" cy="54864"/>
-          </a:xfrm>
-          <a:prstGeom prst="rect">
-            <a:avLst/>
-          </a:prstGeom>
-          <a:solidFill>
-            <a:srgbClr val="2DB34A"/>
-          </a:solidFill>
-          <a:ln/>
-        </p:spPr>
-      </p:sp>
-      <p:sp>
-        <p:nvSpPr>
-          <p:cNvPr id="5" name="Shape 3"/>
-          <p:cNvSpPr/>
-          <p:nvPr/>
-        </p:nvSpPr>
-        <p:spPr>
-          <a:xfrm>
-            <a:off x="6812280" y="2706624"/>
-            <a:ext cx="914400" cy="54864"/>
-          </a:xfrm>
-          <a:prstGeom prst="rect">
-            <a:avLst/>
-          </a:prstGeom>
-          <a:solidFill>
-            <a:srgbClr val="2DB34A"/>
-          </a:solidFill>
-          <a:ln/>
-        </p:spPr>
-      </p:sp>
-      <p:sp>
-        <p:nvSpPr>
-          <p:cNvPr id="6" name="Text 4"/>
-          <p:cNvSpPr txBox="1"/>
-          <p:nvPr/>
-        </p:nvSpPr>
-        <p:spPr>
-          <a:xfrm>
-            <a:off x="3291840" y="2560320"/>
-            <a:ext cx="3474720" cy="329184"/>
-          </a:xfrm>
-          <a:prstGeom prst="rect">
-            <a:avLst/>
-          </a:prstGeom>
-          <a:noFill/>
-          <a:ln/>
-        </p:spPr>
-        <p:txBody>
-          <a:bodyPr wrap="square" lIns="0" tIns="0" rIns="0" bIns="0" rtlCol="0" anchor="ctr"/>
-          <a:lstStyle/>
-          <a:p>
-            <a:pPr algn="ctr" indent="0" marL="0">
-              <a:buNone/>
-            </a:pPr>
-            <a:r>
-              <a:rPr lang="en-US" sz="1500" spc="500" kern="0" dirty="0">
-                <a:solidFill>
-                  <a:srgbClr val="0E2A47"/>
-                </a:solidFill>
-                <a:latin typeface="Montserrat ExtraBold" pitchFamily="34" charset="0"/>
-                <a:ea typeface="Montserrat ExtraBold" pitchFamily="34" charset="-122"/>
-                <a:cs typeface="Montserrat ExtraBold" pitchFamily="34" charset="-120"/>
-              </a:rPr>
-              <a:t>DE PARTICIPACIÓN</a:t>
-            </a:r>
-            <a:endParaRPr lang="en-US" sz="1500" dirty="0"/>
-          </a:p>
-        </p:txBody>
-      </p:sp>
-      <p:sp>
-        <p:nvSpPr>
-          <p:cNvPr id="7" name="Text 5"/>
-          <p:cNvSpPr txBox="1"/>
-          <p:nvPr/>
-        </p:nvSpPr>
-        <p:spPr>
-          <a:xfrm>
-            <a:off x="1828800" y="3035808"/>
-            <a:ext cx="6400800" cy="274320"/>
-          </a:xfrm>
-          <a:prstGeom prst="rect">
-            <a:avLst/>
-          </a:prstGeom>
-          <a:noFill/>
-          <a:ln/>
-        </p:spPr>
-        <p:txBody>
-          <a:bodyPr wrap="square" lIns="0" tIns="0" rIns="0" bIns="0" rtlCol="0" anchor="ctr"/>
-          <a:lstStyle/>
-          <a:p>
-            <a:pPr algn="ctr" indent="0" marL="0">
-              <a:buNone/>
-            </a:pPr>
-            <a:r>
-              <a:rPr lang="en-US" sz="1250" dirty="0">
-                <a:solidFill>
-                  <a:srgbClr val="5B6B7D"/>
-                </a:solidFill>
-                <a:latin typeface="Montserrat Medium" pitchFamily="34" charset="0"/>
-                <a:ea typeface="Montserrat Medium" pitchFamily="34" charset="-122"/>
-                <a:cs typeface="Montserrat Medium" pitchFamily="34" charset="-120"/>
-              </a:rPr>
-              <a:t>Otorga el presente certificado a</a:t>
-            </a:r>
-            <a:endParaRPr lang="en-US" sz="1250" dirty="0"/>
-          </a:p>
-        </p:txBody>
-      </p:sp>
-      <p:sp>
-        <p:nvSpPr>
-          <p:cNvPr id="8" name="Text 6"/>
-          <p:cNvSpPr txBox="1"/>
-          <p:nvPr/>
-        </p:nvSpPr>
-        <p:spPr>
-          <a:xfrm>
-            <a:off x="1097280" y="3310128"/>
-            <a:ext cx="7863840" cy="713232"/>
-          </a:xfrm>
-          <a:prstGeom prst="rect">
-            <a:avLst/>
-          </a:prstGeom>
-          <a:noFill/>
-          <a:ln/>
-        </p:spPr>
-        <p:txBody>
-          <a:bodyPr wrap="square" lIns="0" tIns="0" rIns="0" bIns="0" rtlCol="0" anchor="ctr"/>
-          <a:lstStyle/>
-          <a:p>
-            <a:pPr algn="ctr" indent="0" marL="0">
-              <a:buNone/>
-            </a:pPr>
-            <a:r>
-              <a:rPr lang="en-US" sz="3800" dirty="0">
-                <a:solidFill>
-                  <a:srgbClr val="0E2A47"/>
-                </a:solidFill>
-                <a:latin typeface="Montserrat ExtraBold" pitchFamily="34" charset="0"/>
-                <a:ea typeface="Montserrat ExtraBold" pitchFamily="34" charset="-122"/>
-                <a:cs typeface="Montserrat ExtraBold" pitchFamily="34" charset="-120"/>
-              </a:rPr>
-              <a:t>Nombre del Participante</a:t>
-            </a:r>
-            <a:endParaRPr lang="en-US" sz="3800" dirty="0"/>
-          </a:p>
-        </p:txBody>
-      </p:sp>
-      <p:sp>
-        <p:nvSpPr>
-          <p:cNvPr id="9" name="Shape 7"/>
-          <p:cNvSpPr/>
-          <p:nvPr/>
-        </p:nvSpPr>
-        <p:spPr>
-          <a:xfrm>
-            <a:off x="2194560" y="4087368"/>
-            <a:ext cx="5669280" cy="0"/>
-          </a:xfrm>
-          <a:prstGeom prst="line">
-            <a:avLst/>
-          </a:prstGeom>
-          <a:noFill/>
-          <a:ln w="22225">
-            <a:solidFill>
-              <a:srgbClr val="F2C94C"/>
-            </a:solidFill>
-            <a:prstDash val="solid"/>
-          </a:ln>
-        </p:spPr>
-      </p:sp>
-      <p:sp>
-        <p:nvSpPr>
-          <p:cNvPr id="10" name="Shape 8"/>
-          <p:cNvSpPr/>
-          <p:nvPr/>
-        </p:nvSpPr>
-        <p:spPr>
-          <a:xfrm>
-            <a:off x="4974336" y="4032504"/>
-            <a:ext cx="109728" cy="109728"/>
-          </a:xfrm>
-          <a:prstGeom prst="ellipse">
-            <a:avLst/>
-          </a:prstGeom>
-          <a:solidFill>
-            <a:srgbClr val="F2C94C"/>
-          </a:solidFill>
-          <a:ln/>
-        </p:spPr>
-      </p:sp>
-      <p:sp>
-        <p:nvSpPr>
-          <p:cNvPr id="11" name="Text 9"/>
-          <p:cNvSpPr txBox="1"/>
-          <p:nvPr/>
-        </p:nvSpPr>
-        <p:spPr>
-          <a:xfrm>
-            <a:off x="1417320" y="4206240"/>
-            <a:ext cx="7223760" cy="896112"/>
-          </a:xfrm>
-          <a:prstGeom prst="rect">
-            <a:avLst/>
-          </a:prstGeom>
-          <a:noFill/>
-          <a:ln/>
-        </p:spPr>
-        <p:txBody>
-          <a:bodyPr wrap="square" lIns="0" tIns="0" rIns="0" bIns="0" rtlCol="0" anchor="t"/>
-          <a:lstStyle/>
-          <a:p>
-            <a:pPr algn="ctr" indent="0" marL="0">
-              <a:lnSpc>
-                <a:spcPct val="112000"/>
-              </a:lnSpc>
-              <a:buNone/>
-            </a:pPr>
-            <a:r>
-              <a:rPr lang="en-US" sz="1150" dirty="0">
-                <a:solidFill>
-                  <a:srgbClr val="2B3A4E"/>
-                </a:solidFill>
-                <a:latin typeface="Montserrat" pitchFamily="34" charset="0"/>
-                <a:ea typeface="Montserrat" pitchFamily="34" charset="-122"/>
-                <a:cs typeface="Montserrat" pitchFamily="34" charset="-120"/>
-              </a:rPr>
-              <a:t>Por su asistencia y participación en el </a:t>
-            </a:r>
-            <a:pPr algn="ctr" indent="0" marL="0">
-              <a:lnSpc>
-                <a:spcPct val="112000"/>
-              </a:lnSpc>
-              <a:buNone/>
-            </a:pPr>
-            <a:r>
-              <a:rPr lang="en-US" sz="1150" dirty="0">
-                <a:solidFill>
-                  <a:srgbClr val="0E2A47"/>
-                </a:solidFill>
-                <a:latin typeface="Montserrat ExtraBold" pitchFamily="34" charset="0"/>
-                <a:ea typeface="Montserrat ExtraBold" pitchFamily="34" charset="-122"/>
-                <a:cs typeface="Montserrat ExtraBold" pitchFamily="34" charset="-120"/>
-              </a:rPr>
-              <a:t>Westhill Medical Leadership Summit 2026</a:t>
-            </a:r>
-            <a:pPr algn="ctr" indent="0" marL="0">
-              <a:lnSpc>
-                <a:spcPct val="112000"/>
-              </a:lnSpc>
-              <a:buNone/>
-            </a:pPr>
-            <a:r>
-              <a:rPr lang="en-US" sz="1150" dirty="0">
-                <a:solidFill>
-                  <a:srgbClr val="2B3A4E"/>
-                </a:solidFill>
-                <a:latin typeface="Montserrat" pitchFamily="34" charset="0"/>
-                <a:ea typeface="Montserrat" pitchFamily="34" charset="-122"/>
-                <a:cs typeface="Montserrat" pitchFamily="34" charset="-120"/>
-              </a:rPr>
-              <a:t> «Fronteras de la Medicina: actualización clínica y nuevas perspectivas en la práctica médica», realizado los días 21, 22 y 23 de octubre de 2026 en la Facultad de Medicina de la Universidad Westhill.</a:t>
-            </a:r>
-            <a:endParaRPr lang="en-US" sz="1150" dirty="0"/>
-          </a:p>
-        </p:txBody>
-      </p:sp>
-      <p:sp>
-        <p:nvSpPr>
-          <p:cNvPr id="12" name="Text 10"/>
-          <p:cNvSpPr txBox="1"/>
-          <p:nvPr/>
-        </p:nvSpPr>
-        <p:spPr>
-          <a:xfrm>
-            <a:off x="2286000" y="5120640"/>
-            <a:ext cx="5486400" cy="237744"/>
-          </a:xfrm>
-          <a:prstGeom prst="rect">
-            <a:avLst/>
-          </a:prstGeom>
-          <a:noFill/>
-          <a:ln/>
-        </p:spPr>
-        <p:txBody>
-          <a:bodyPr wrap="square" lIns="0" tIns="0" rIns="0" bIns="0" rtlCol="0" anchor="ctr"/>
-          <a:lstStyle/>
-          <a:p>
-            <a:pPr algn="ctr" indent="0" marL="0">
-              <a:buNone/>
-            </a:pPr>
-            <a:r>
-              <a:rPr lang="en-US" sz="1050" dirty="0">
-                <a:solidFill>
-                  <a:srgbClr val="266294"/>
-                </a:solidFill>
-                <a:latin typeface="Montserrat SemiBold" pitchFamily="34" charset="0"/>
-                <a:ea typeface="Montserrat SemiBold" pitchFamily="34" charset="-122"/>
-                <a:cs typeface="Montserrat SemiBold" pitchFamily="34" charset="-120"/>
-              </a:rPr>
-              <a:t>Ciudad de México, a 23 de octubre de 2026</a:t>
-            </a:r>
-            <a:endParaRPr lang="en-US" sz="1050" dirty="0"/>
-          </a:p>
-        </p:txBody>
-      </p:sp>
-      <p:sp>
-        <p:nvSpPr>
-          <p:cNvPr id="13" name="Shape 11"/>
+          <p:cNvPr id="11" name="Shape 6"/>
           <p:cNvSpPr/>
           <p:nvPr/>
         </p:nvSpPr>
@@ -2459,7 +2463,7 @@
       </p:sp>
       <p:sp>
         <p:nvSpPr>
-          <p:cNvPr id="14" name="Text 12"/>
+          <p:cNvPr id="12" name="Text 7"/>
           <p:cNvSpPr txBox="1"/>
           <p:nvPr/>
         </p:nvSpPr>
@@ -2498,7 +2502,7 @@
       </p:sp>
       <p:sp>
         <p:nvSpPr>
-          <p:cNvPr id="15" name="Text 13"/>
+          <p:cNvPr id="13" name="Text 8"/>
           <p:cNvSpPr txBox="1"/>
           <p:nvPr/>
         </p:nvSpPr>
@@ -2537,7 +2541,7 @@
       </p:sp>
       <p:sp>
         <p:nvSpPr>
-          <p:cNvPr id="16" name="Shape 14"/>
+          <p:cNvPr id="14" name="Shape 9"/>
           <p:cNvSpPr/>
           <p:nvPr/>
         </p:nvSpPr>
@@ -2560,7 +2564,7 @@
       </p:sp>
       <p:sp>
         <p:nvSpPr>
-          <p:cNvPr id="17" name="Text 15"/>
+          <p:cNvPr id="15" name="Text 10"/>
           <p:cNvSpPr txBox="1"/>
           <p:nvPr/>
         </p:nvSpPr>
@@ -2599,7 +2603,7 @@
       </p:sp>
       <p:sp>
         <p:nvSpPr>
-          <p:cNvPr id="18" name="Text 16"/>
+          <p:cNvPr id="16" name="Text 11"/>
           <p:cNvSpPr txBox="1"/>
           <p:nvPr/>
         </p:nvSpPr>
@@ -2638,7 +2642,7 @@
       </p:sp>
       <p:sp>
         <p:nvSpPr>
-          <p:cNvPr id="19" name="Text 17"/>
+          <p:cNvPr id="17" name="Text 12"/>
           <p:cNvSpPr txBox="1"/>
           <p:nvPr/>
         </p:nvSpPr>
@@ -2708,32 +2712,370 @@
         </p:nvSpPr>
         <p:spPr>
           <a:xfrm>
-            <a:off x="1188720" y="1536192"/>
-            <a:ext cx="7680960" cy="237744"/>
-          </a:xfrm>
-          <a:prstGeom prst="rect">
-            <a:avLst/>
-          </a:prstGeom>
-          <a:noFill/>
-          <a:ln/>
-        </p:spPr>
-        <p:txBody>
-          <a:bodyPr wrap="square" lIns="0" tIns="0" rIns="0" bIns="0" rtlCol="0" anchor="ctr"/>
-          <a:lstStyle/>
-          <a:p>
-            <a:pPr algn="ctr" indent="0" marL="0">
-              <a:buNone/>
-            </a:pPr>
-            <a:r>
-              <a:rPr lang="en-US" sz="1050" spc="300" kern="0" dirty="0">
+            <a:off x="1097280" y="1737360"/>
+            <a:ext cx="7863840" cy="777240"/>
+          </a:xfrm>
+          <a:prstGeom prst="rect">
+            <a:avLst/>
+          </a:prstGeom>
+          <a:noFill/>
+          <a:ln/>
+        </p:spPr>
+        <p:txBody>
+          <a:bodyPr wrap="square" lIns="0" tIns="0" rIns="0" bIns="0" rtlCol="0" anchor="ctr"/>
+          <a:lstStyle/>
+          <a:p>
+            <a:pPr algn="ctr" indent="0" marL="0">
+              <a:buNone/>
+            </a:pPr>
+            <a:r>
+              <a:rPr lang="en-US" sz="4200" spc="400" kern="0" dirty="0">
+                <a:solidFill>
+                  <a:srgbClr val="266294"/>
+                </a:solidFill>
+                <a:latin typeface="Montserrat ExtraBold" pitchFamily="34" charset="0"/>
+                <a:ea typeface="Montserrat ExtraBold" pitchFamily="34" charset="-122"/>
+                <a:cs typeface="Montserrat ExtraBold" pitchFamily="34" charset="-120"/>
+              </a:rPr>
+              <a:t>RECONOCIMIENTO</a:t>
+            </a:r>
+            <a:endParaRPr lang="en-US" sz="4200" dirty="0"/>
+          </a:p>
+        </p:txBody>
+      </p:sp>
+      <p:pic>
+        <p:nvPicPr>
+          <p:cNvPr id="3" name="Image 0" descr="preencoded.png">    </p:cNvPr>
+          <p:cNvPicPr>
+            <a:picLocks noChangeAspect="1"/>
+          </p:cNvPicPr>
+          <p:nvPr/>
+        </p:nvPicPr>
+        <p:blipFill>
+          <a:blip r:embed="rId1"/>
+          <a:stretch>
+            <a:fillRect/>
+          </a:stretch>
+        </p:blipFill>
+        <p:spPr>
+          <a:xfrm>
+            <a:off x="1874520" y="2642616"/>
+            <a:ext cx="1371600" cy="182880"/>
+          </a:xfrm>
+          <a:prstGeom prst="rect">
+            <a:avLst/>
+          </a:prstGeom>
+        </p:spPr>
+      </p:pic>
+      <p:pic>
+        <p:nvPicPr>
+          <p:cNvPr id="4" name="Image 1" descr="preencoded.png">    </p:cNvPr>
+          <p:cNvPicPr>
+            <a:picLocks noChangeAspect="1"/>
+          </p:cNvPicPr>
+          <p:nvPr/>
+        </p:nvPicPr>
+        <p:blipFill>
+          <a:blip r:embed="rId2"/>
+          <a:stretch>
+            <a:fillRect/>
+          </a:stretch>
+        </p:blipFill>
+        <p:spPr>
+          <a:xfrm>
+            <a:off x="6812280" y="2642616"/>
+            <a:ext cx="1371600" cy="182880"/>
+          </a:xfrm>
+          <a:prstGeom prst="rect">
+            <a:avLst/>
+          </a:prstGeom>
+        </p:spPr>
+      </p:pic>
+      <p:sp>
+        <p:nvSpPr>
+          <p:cNvPr id="5" name="Text 1"/>
+          <p:cNvSpPr txBox="1"/>
+          <p:nvPr/>
+        </p:nvSpPr>
+        <p:spPr>
+          <a:xfrm>
+            <a:off x="3291840" y="2560320"/>
+            <a:ext cx="3474720" cy="329184"/>
+          </a:xfrm>
+          <a:prstGeom prst="rect">
+            <a:avLst/>
+          </a:prstGeom>
+          <a:noFill/>
+          <a:ln/>
+        </p:spPr>
+        <p:txBody>
+          <a:bodyPr wrap="square" lIns="0" tIns="0" rIns="0" bIns="0" rtlCol="0" anchor="ctr"/>
+          <a:lstStyle/>
+          <a:p>
+            <a:pPr algn="ctr" indent="0" marL="0">
+              <a:buNone/>
+            </a:pPr>
+            <a:r>
+              <a:rPr lang="en-US" sz="1500" spc="500" kern="0" dirty="0">
+                <a:solidFill>
+                  <a:srgbClr val="0E2A47"/>
+                </a:solidFill>
+                <a:latin typeface="Montserrat ExtraBold" pitchFamily="34" charset="0"/>
+                <a:ea typeface="Montserrat ExtraBold" pitchFamily="34" charset="-122"/>
+                <a:cs typeface="Montserrat ExtraBold" pitchFamily="34" charset="-120"/>
+              </a:rPr>
+              <a:t>COMO PONENTE</a:t>
+            </a:r>
+            <a:endParaRPr lang="en-US" sz="1500" dirty="0"/>
+          </a:p>
+        </p:txBody>
+      </p:sp>
+      <p:sp>
+        <p:nvSpPr>
+          <p:cNvPr id="6" name="Text 2"/>
+          <p:cNvSpPr txBox="1"/>
+          <p:nvPr/>
+        </p:nvSpPr>
+        <p:spPr>
+          <a:xfrm>
+            <a:off x="1828800" y="3035808"/>
+            <a:ext cx="6400800" cy="274320"/>
+          </a:xfrm>
+          <a:prstGeom prst="rect">
+            <a:avLst/>
+          </a:prstGeom>
+          <a:noFill/>
+          <a:ln/>
+        </p:spPr>
+        <p:txBody>
+          <a:bodyPr wrap="square" lIns="0" tIns="0" rIns="0" bIns="0" rtlCol="0" anchor="ctr"/>
+          <a:lstStyle/>
+          <a:p>
+            <a:pPr algn="ctr" indent="0" marL="0">
+              <a:buNone/>
+            </a:pPr>
+            <a:r>
+              <a:rPr lang="en-US" sz="1250" dirty="0">
                 <a:solidFill>
                   <a:srgbClr val="5B6B7D"/>
+                </a:solidFill>
+                <a:latin typeface="Montserrat Medium" pitchFamily="34" charset="0"/>
+                <a:ea typeface="Montserrat Medium" pitchFamily="34" charset="-122"/>
+                <a:cs typeface="Montserrat Medium" pitchFamily="34" charset="-120"/>
+              </a:rPr>
+              <a:t>Otorga el presente reconocimiento a</a:t>
+            </a:r>
+            <a:endParaRPr lang="en-US" sz="1250" dirty="0"/>
+          </a:p>
+        </p:txBody>
+      </p:sp>
+      <p:sp>
+        <p:nvSpPr>
+          <p:cNvPr id="7" name="Text 3"/>
+          <p:cNvSpPr txBox="1"/>
+          <p:nvPr/>
+        </p:nvSpPr>
+        <p:spPr>
+          <a:xfrm>
+            <a:off x="1097280" y="3310128"/>
+            <a:ext cx="7863840" cy="713232"/>
+          </a:xfrm>
+          <a:prstGeom prst="rect">
+            <a:avLst/>
+          </a:prstGeom>
+          <a:noFill/>
+          <a:ln/>
+        </p:spPr>
+        <p:txBody>
+          <a:bodyPr wrap="square" lIns="0" tIns="0" rIns="0" bIns="0" rtlCol="0" anchor="ctr"/>
+          <a:lstStyle/>
+          <a:p>
+            <a:pPr algn="ctr" indent="0" marL="0">
+              <a:buNone/>
+            </a:pPr>
+            <a:r>
+              <a:rPr lang="en-US" sz="3800" dirty="0">
+                <a:solidFill>
+                  <a:srgbClr val="0E2A47"/>
+                </a:solidFill>
+                <a:latin typeface="Montserrat ExtraBold" pitchFamily="34" charset="0"/>
+                <a:ea typeface="Montserrat ExtraBold" pitchFamily="34" charset="-122"/>
+                <a:cs typeface="Montserrat ExtraBold" pitchFamily="34" charset="-120"/>
+              </a:rPr>
+              <a:t>Dr. Jorge Macías</a:t>
+            </a:r>
+            <a:endParaRPr lang="en-US" sz="3800" dirty="0"/>
+          </a:p>
+        </p:txBody>
+      </p:sp>
+      <p:pic>
+        <p:nvPicPr>
+          <p:cNvPr id="8" name="Image 2" descr="preencoded.png">    </p:cNvPr>
+          <p:cNvPicPr>
+            <a:picLocks noChangeAspect="1"/>
+          </p:cNvPicPr>
+          <p:nvPr/>
+        </p:nvPicPr>
+        <p:blipFill>
+          <a:blip r:embed="rId3"/>
+          <a:stretch>
+            <a:fillRect/>
+          </a:stretch>
+        </p:blipFill>
+        <p:spPr>
+          <a:xfrm>
+            <a:off x="2194560" y="3986784"/>
+            <a:ext cx="5669280" cy="201168"/>
+          </a:xfrm>
+          <a:prstGeom prst="rect">
+            <a:avLst/>
+          </a:prstGeom>
+        </p:spPr>
+      </p:pic>
+      <p:sp>
+        <p:nvSpPr>
+          <p:cNvPr id="9" name="Text 4"/>
+          <p:cNvSpPr txBox="1"/>
+          <p:nvPr/>
+        </p:nvSpPr>
+        <p:spPr>
+          <a:xfrm>
+            <a:off x="1417320" y="4206240"/>
+            <a:ext cx="7223760" cy="896112"/>
+          </a:xfrm>
+          <a:prstGeom prst="rect">
+            <a:avLst/>
+          </a:prstGeom>
+          <a:noFill/>
+          <a:ln/>
+        </p:spPr>
+        <p:txBody>
+          <a:bodyPr wrap="square" lIns="0" tIns="0" rIns="0" bIns="0" rtlCol="0" anchor="t"/>
+          <a:lstStyle/>
+          <a:p>
+            <a:pPr algn="ctr" indent="0" marL="0">
+              <a:lnSpc>
+                <a:spcPct val="112000"/>
+              </a:lnSpc>
+              <a:buNone/>
+            </a:pPr>
+            <a:r>
+              <a:rPr lang="en-US" sz="1150" dirty="0">
+                <a:solidFill>
+                  <a:srgbClr val="2B3A4E"/>
+                </a:solidFill>
+                <a:latin typeface="Montserrat" pitchFamily="34" charset="0"/>
+                <a:ea typeface="Montserrat" pitchFamily="34" charset="-122"/>
+                <a:cs typeface="Montserrat" pitchFamily="34" charset="-120"/>
+              </a:rPr>
+              <a:t>Por su valiosa participación como ponente con la conferencia </a:t>
+            </a:r>
+            <a:pPr algn="ctr" indent="0" marL="0">
+              <a:lnSpc>
+                <a:spcPct val="112000"/>
+              </a:lnSpc>
+              <a:buNone/>
+            </a:pPr>
+            <a:r>
+              <a:rPr lang="en-US" sz="1150" dirty="0">
+                <a:solidFill>
+                  <a:srgbClr val="0E2A47"/>
+                </a:solidFill>
+                <a:latin typeface="Montserrat ExtraBold" pitchFamily="34" charset="0"/>
+                <a:ea typeface="Montserrat ExtraBold" pitchFamily="34" charset="-122"/>
+                <a:cs typeface="Montserrat ExtraBold" pitchFamily="34" charset="-120"/>
+              </a:rPr>
+              <a:t>«AMIR»</a:t>
+            </a:r>
+            <a:pPr algn="ctr" indent="0" marL="0">
+              <a:lnSpc>
+                <a:spcPct val="112000"/>
+              </a:lnSpc>
+              <a:buNone/>
+            </a:pPr>
+            <a:r>
+              <a:rPr lang="en-US" sz="1150" dirty="0">
+                <a:solidFill>
+                  <a:srgbClr val="2B3A4E"/>
+                </a:solidFill>
+                <a:latin typeface="Montserrat" pitchFamily="34" charset="0"/>
+                <a:ea typeface="Montserrat" pitchFamily="34" charset="-122"/>
+                <a:cs typeface="Montserrat" pitchFamily="34" charset="-120"/>
+              </a:rPr>
+              <a:t> en el </a:t>
+            </a:r>
+            <a:pPr algn="ctr" indent="0" marL="0">
+              <a:lnSpc>
+                <a:spcPct val="112000"/>
+              </a:lnSpc>
+              <a:buNone/>
+            </a:pPr>
+            <a:r>
+              <a:rPr lang="en-US" sz="1150" dirty="0">
+                <a:solidFill>
+                  <a:srgbClr val="0E2A47"/>
+                </a:solidFill>
+                <a:latin typeface="Montserrat ExtraBold" pitchFamily="34" charset="0"/>
+                <a:ea typeface="Montserrat ExtraBold" pitchFamily="34" charset="-122"/>
+                <a:cs typeface="Montserrat ExtraBold" pitchFamily="34" charset="-120"/>
+              </a:rPr>
+              <a:t>Westhill Medical Leadership Summit 2026</a:t>
+            </a:r>
+            <a:pPr algn="ctr" indent="0" marL="0">
+              <a:lnSpc>
+                <a:spcPct val="112000"/>
+              </a:lnSpc>
+              <a:buNone/>
+            </a:pPr>
+            <a:r>
+              <a:rPr lang="en-US" sz="1150" dirty="0">
+                <a:solidFill>
+                  <a:srgbClr val="2B3A4E"/>
+                </a:solidFill>
+                <a:latin typeface="Montserrat" pitchFamily="34" charset="0"/>
+                <a:ea typeface="Montserrat" pitchFamily="34" charset="-122"/>
+                <a:cs typeface="Montserrat" pitchFamily="34" charset="-120"/>
+              </a:rPr>
+              <a:t>, realizado los días 21, 22 y 23 de octubre de 2026 en la Facultad de Medicina de la Universidad Westhill.</a:t>
+            </a:r>
+            <a:endParaRPr lang="en-US" sz="1150" dirty="0"/>
+          </a:p>
+        </p:txBody>
+      </p:sp>
+      <p:sp>
+        <p:nvSpPr>
+          <p:cNvPr id="10" name="Text 5"/>
+          <p:cNvSpPr txBox="1"/>
+          <p:nvPr/>
+        </p:nvSpPr>
+        <p:spPr>
+          <a:xfrm>
+            <a:off x="2286000" y="5120640"/>
+            <a:ext cx="5486400" cy="237744"/>
+          </a:xfrm>
+          <a:prstGeom prst="rect">
+            <a:avLst/>
+          </a:prstGeom>
+          <a:noFill/>
+          <a:ln/>
+        </p:spPr>
+        <p:txBody>
+          <a:bodyPr wrap="square" lIns="0" tIns="0" rIns="0" bIns="0" rtlCol="0" anchor="ctr"/>
+          <a:lstStyle/>
+          <a:p>
+            <a:pPr algn="ctr" indent="0" marL="0">
+              <a:buNone/>
+            </a:pPr>
+            <a:r>
+              <a:rPr lang="en-US" sz="1050" dirty="0">
+                <a:solidFill>
+                  <a:srgbClr val="266294"/>
                 </a:solidFill>
                 <a:latin typeface="Montserrat SemiBold" pitchFamily="34" charset="0"/>
                 <a:ea typeface="Montserrat SemiBold" pitchFamily="34" charset="-122"/>
                 <a:cs typeface="Montserrat SemiBold" pitchFamily="34" charset="-120"/>
               </a:rPr>
-              <a:t>FACULTAD DE MEDICINA</a:t>
+              <a:t>Ciudad de México, a 23 de octubre de 2026</a:t>
             </a:r>
             <a:endParaRPr lang="en-US" sz="1050" dirty="0"/>
           </a:p>
@@ -2741,395 +3083,7 @@
       </p:sp>
       <p:sp>
         <p:nvSpPr>
-          <p:cNvPr id="3" name="Text 1"/>
-          <p:cNvSpPr txBox="1"/>
-          <p:nvPr/>
-        </p:nvSpPr>
-        <p:spPr>
-          <a:xfrm>
-            <a:off x="1097280" y="1737360"/>
-            <a:ext cx="7863840" cy="777240"/>
-          </a:xfrm>
-          <a:prstGeom prst="rect">
-            <a:avLst/>
-          </a:prstGeom>
-          <a:noFill/>
-          <a:ln/>
-        </p:spPr>
-        <p:txBody>
-          <a:bodyPr wrap="square" lIns="0" tIns="0" rIns="0" bIns="0" rtlCol="0" anchor="ctr"/>
-          <a:lstStyle/>
-          <a:p>
-            <a:pPr algn="ctr" indent="0" marL="0">
-              <a:buNone/>
-            </a:pPr>
-            <a:r>
-              <a:rPr lang="en-US" sz="4200" spc="400" kern="0" dirty="0">
-                <a:solidFill>
-                  <a:srgbClr val="266294"/>
-                </a:solidFill>
-                <a:latin typeface="Montserrat ExtraBold" pitchFamily="34" charset="0"/>
-                <a:ea typeface="Montserrat ExtraBold" pitchFamily="34" charset="-122"/>
-                <a:cs typeface="Montserrat ExtraBold" pitchFamily="34" charset="-120"/>
-              </a:rPr>
-              <a:t>RECONOCIMIENTO</a:t>
-            </a:r>
-            <a:endParaRPr lang="en-US" sz="4200" dirty="0"/>
-          </a:p>
-        </p:txBody>
-      </p:sp>
-      <p:sp>
-        <p:nvSpPr>
-          <p:cNvPr id="4" name="Shape 2"/>
-          <p:cNvSpPr/>
-          <p:nvPr/>
-        </p:nvSpPr>
-        <p:spPr>
-          <a:xfrm>
-            <a:off x="2331720" y="2706624"/>
-            <a:ext cx="914400" cy="54864"/>
-          </a:xfrm>
-          <a:prstGeom prst="rect">
-            <a:avLst/>
-          </a:prstGeom>
-          <a:solidFill>
-            <a:srgbClr val="2DB34A"/>
-          </a:solidFill>
-          <a:ln/>
-        </p:spPr>
-      </p:sp>
-      <p:sp>
-        <p:nvSpPr>
-          <p:cNvPr id="5" name="Shape 3"/>
-          <p:cNvSpPr/>
-          <p:nvPr/>
-        </p:nvSpPr>
-        <p:spPr>
-          <a:xfrm>
-            <a:off x="6812280" y="2706624"/>
-            <a:ext cx="914400" cy="54864"/>
-          </a:xfrm>
-          <a:prstGeom prst="rect">
-            <a:avLst/>
-          </a:prstGeom>
-          <a:solidFill>
-            <a:srgbClr val="2DB34A"/>
-          </a:solidFill>
-          <a:ln/>
-        </p:spPr>
-      </p:sp>
-      <p:sp>
-        <p:nvSpPr>
-          <p:cNvPr id="6" name="Text 4"/>
-          <p:cNvSpPr txBox="1"/>
-          <p:nvPr/>
-        </p:nvSpPr>
-        <p:spPr>
-          <a:xfrm>
-            <a:off x="3291840" y="2560320"/>
-            <a:ext cx="3474720" cy="329184"/>
-          </a:xfrm>
-          <a:prstGeom prst="rect">
-            <a:avLst/>
-          </a:prstGeom>
-          <a:noFill/>
-          <a:ln/>
-        </p:spPr>
-        <p:txBody>
-          <a:bodyPr wrap="square" lIns="0" tIns="0" rIns="0" bIns="0" rtlCol="0" anchor="ctr"/>
-          <a:lstStyle/>
-          <a:p>
-            <a:pPr algn="ctr" indent="0" marL="0">
-              <a:buNone/>
-            </a:pPr>
-            <a:r>
-              <a:rPr lang="en-US" sz="1500" spc="500" kern="0" dirty="0">
-                <a:solidFill>
-                  <a:srgbClr val="0E2A47"/>
-                </a:solidFill>
-                <a:latin typeface="Montserrat ExtraBold" pitchFamily="34" charset="0"/>
-                <a:ea typeface="Montserrat ExtraBold" pitchFamily="34" charset="-122"/>
-                <a:cs typeface="Montserrat ExtraBold" pitchFamily="34" charset="-120"/>
-              </a:rPr>
-              <a:t>COMO PONENTE</a:t>
-            </a:r>
-            <a:endParaRPr lang="en-US" sz="1500" dirty="0"/>
-          </a:p>
-        </p:txBody>
-      </p:sp>
-      <p:sp>
-        <p:nvSpPr>
-          <p:cNvPr id="7" name="Text 5"/>
-          <p:cNvSpPr txBox="1"/>
-          <p:nvPr/>
-        </p:nvSpPr>
-        <p:spPr>
-          <a:xfrm>
-            <a:off x="1828800" y="3035808"/>
-            <a:ext cx="6400800" cy="274320"/>
-          </a:xfrm>
-          <a:prstGeom prst="rect">
-            <a:avLst/>
-          </a:prstGeom>
-          <a:noFill/>
-          <a:ln/>
-        </p:spPr>
-        <p:txBody>
-          <a:bodyPr wrap="square" lIns="0" tIns="0" rIns="0" bIns="0" rtlCol="0" anchor="ctr"/>
-          <a:lstStyle/>
-          <a:p>
-            <a:pPr algn="ctr" indent="0" marL="0">
-              <a:buNone/>
-            </a:pPr>
-            <a:r>
-              <a:rPr lang="en-US" sz="1250" dirty="0">
-                <a:solidFill>
-                  <a:srgbClr val="5B6B7D"/>
-                </a:solidFill>
-                <a:latin typeface="Montserrat Medium" pitchFamily="34" charset="0"/>
-                <a:ea typeface="Montserrat Medium" pitchFamily="34" charset="-122"/>
-                <a:cs typeface="Montserrat Medium" pitchFamily="34" charset="-120"/>
-              </a:rPr>
-              <a:t>Otorga el presente reconocimiento a</a:t>
-            </a:r>
-            <a:endParaRPr lang="en-US" sz="1250" dirty="0"/>
-          </a:p>
-        </p:txBody>
-      </p:sp>
-      <p:sp>
-        <p:nvSpPr>
-          <p:cNvPr id="8" name="Text 6"/>
-          <p:cNvSpPr txBox="1"/>
-          <p:nvPr/>
-        </p:nvSpPr>
-        <p:spPr>
-          <a:xfrm>
-            <a:off x="1097280" y="3310128"/>
-            <a:ext cx="7863840" cy="713232"/>
-          </a:xfrm>
-          <a:prstGeom prst="rect">
-            <a:avLst/>
-          </a:prstGeom>
-          <a:noFill/>
-          <a:ln/>
-        </p:spPr>
-        <p:txBody>
-          <a:bodyPr wrap="square" lIns="0" tIns="0" rIns="0" bIns="0" rtlCol="0" anchor="ctr"/>
-          <a:lstStyle/>
-          <a:p>
-            <a:pPr algn="ctr" indent="0" marL="0">
-              <a:buNone/>
-            </a:pPr>
-            <a:r>
-              <a:rPr lang="en-US" sz="3800" dirty="0">
-                <a:solidFill>
-                  <a:srgbClr val="0E2A47"/>
-                </a:solidFill>
-                <a:latin typeface="Montserrat ExtraBold" pitchFamily="34" charset="0"/>
-                <a:ea typeface="Montserrat ExtraBold" pitchFamily="34" charset="-122"/>
-                <a:cs typeface="Montserrat ExtraBold" pitchFamily="34" charset="-120"/>
-              </a:rPr>
-              <a:t>Dr. Jorge Macías</a:t>
-            </a:r>
-            <a:endParaRPr lang="en-US" sz="3800" dirty="0"/>
-          </a:p>
-        </p:txBody>
-      </p:sp>
-      <p:sp>
-        <p:nvSpPr>
-          <p:cNvPr id="9" name="Shape 7"/>
-          <p:cNvSpPr/>
-          <p:nvPr/>
-        </p:nvSpPr>
-        <p:spPr>
-          <a:xfrm>
-            <a:off x="2194560" y="4087368"/>
-            <a:ext cx="5669280" cy="0"/>
-          </a:xfrm>
-          <a:prstGeom prst="line">
-            <a:avLst/>
-          </a:prstGeom>
-          <a:noFill/>
-          <a:ln w="22225">
-            <a:solidFill>
-              <a:srgbClr val="F2C94C"/>
-            </a:solidFill>
-            <a:prstDash val="solid"/>
-          </a:ln>
-        </p:spPr>
-      </p:sp>
-      <p:sp>
-        <p:nvSpPr>
-          <p:cNvPr id="10" name="Shape 8"/>
-          <p:cNvSpPr/>
-          <p:nvPr/>
-        </p:nvSpPr>
-        <p:spPr>
-          <a:xfrm>
-            <a:off x="4974336" y="4032504"/>
-            <a:ext cx="109728" cy="109728"/>
-          </a:xfrm>
-          <a:prstGeom prst="ellipse">
-            <a:avLst/>
-          </a:prstGeom>
-          <a:solidFill>
-            <a:srgbClr val="F2C94C"/>
-          </a:solidFill>
-          <a:ln/>
-        </p:spPr>
-      </p:sp>
-      <p:sp>
-        <p:nvSpPr>
-          <p:cNvPr id="11" name="Text 9"/>
-          <p:cNvSpPr txBox="1"/>
-          <p:nvPr/>
-        </p:nvSpPr>
-        <p:spPr>
-          <a:xfrm>
-            <a:off x="1417320" y="4206240"/>
-            <a:ext cx="7223760" cy="896112"/>
-          </a:xfrm>
-          <a:prstGeom prst="rect">
-            <a:avLst/>
-          </a:prstGeom>
-          <a:noFill/>
-          <a:ln/>
-        </p:spPr>
-        <p:txBody>
-          <a:bodyPr wrap="square" lIns="0" tIns="0" rIns="0" bIns="0" rtlCol="0" anchor="t"/>
-          <a:lstStyle/>
-          <a:p>
-            <a:pPr algn="ctr" indent="0" marL="0">
-              <a:lnSpc>
-                <a:spcPct val="112000"/>
-              </a:lnSpc>
-              <a:buNone/>
-            </a:pPr>
-            <a:r>
-              <a:rPr lang="en-US" sz="1150" dirty="0">
-                <a:solidFill>
-                  <a:srgbClr val="2B3A4E"/>
-                </a:solidFill>
-                <a:latin typeface="Montserrat" pitchFamily="34" charset="0"/>
-                <a:ea typeface="Montserrat" pitchFamily="34" charset="-122"/>
-                <a:cs typeface="Montserrat" pitchFamily="34" charset="-120"/>
-              </a:rPr>
-              <a:t>Por su valiosa participación como ponente con la conferencia </a:t>
-            </a:r>
-            <a:pPr algn="ctr" indent="0" marL="0">
-              <a:lnSpc>
-                <a:spcPct val="112000"/>
-              </a:lnSpc>
-              <a:buNone/>
-            </a:pPr>
-            <a:r>
-              <a:rPr lang="en-US" sz="1150" dirty="0">
-                <a:solidFill>
-                  <a:srgbClr val="0E2A47"/>
-                </a:solidFill>
-                <a:latin typeface="Montserrat ExtraBold" pitchFamily="34" charset="0"/>
-                <a:ea typeface="Montserrat ExtraBold" pitchFamily="34" charset="-122"/>
-                <a:cs typeface="Montserrat ExtraBold" pitchFamily="34" charset="-120"/>
-              </a:rPr>
-              <a:t>«AMIR»</a:t>
-            </a:r>
-            <a:pPr algn="ctr" indent="0" marL="0">
-              <a:lnSpc>
-                <a:spcPct val="112000"/>
-              </a:lnSpc>
-              <a:buNone/>
-            </a:pPr>
-            <a:r>
-              <a:rPr lang="en-US" sz="1150" dirty="0">
-                <a:solidFill>
-                  <a:srgbClr val="2B3A4E"/>
-                </a:solidFill>
-                <a:latin typeface="Montserrat" pitchFamily="34" charset="0"/>
-                <a:ea typeface="Montserrat" pitchFamily="34" charset="-122"/>
-                <a:cs typeface="Montserrat" pitchFamily="34" charset="-120"/>
-              </a:rPr>
-              <a:t> en el </a:t>
-            </a:r>
-            <a:pPr algn="ctr" indent="0" marL="0">
-              <a:lnSpc>
-                <a:spcPct val="112000"/>
-              </a:lnSpc>
-              <a:buNone/>
-            </a:pPr>
-            <a:r>
-              <a:rPr lang="en-US" sz="1150" dirty="0">
-                <a:solidFill>
-                  <a:srgbClr val="0E2A47"/>
-                </a:solidFill>
-                <a:latin typeface="Montserrat ExtraBold" pitchFamily="34" charset="0"/>
-                <a:ea typeface="Montserrat ExtraBold" pitchFamily="34" charset="-122"/>
-                <a:cs typeface="Montserrat ExtraBold" pitchFamily="34" charset="-120"/>
-              </a:rPr>
-              <a:t>Westhill Medical Leadership Summit 2026</a:t>
-            </a:r>
-            <a:pPr algn="ctr" indent="0" marL="0">
-              <a:lnSpc>
-                <a:spcPct val="112000"/>
-              </a:lnSpc>
-              <a:buNone/>
-            </a:pPr>
-            <a:r>
-              <a:rPr lang="en-US" sz="1150" dirty="0">
-                <a:solidFill>
-                  <a:srgbClr val="2B3A4E"/>
-                </a:solidFill>
-                <a:latin typeface="Montserrat" pitchFamily="34" charset="0"/>
-                <a:ea typeface="Montserrat" pitchFamily="34" charset="-122"/>
-                <a:cs typeface="Montserrat" pitchFamily="34" charset="-120"/>
-              </a:rPr>
-              <a:t>, realizado los días 21, 22 y 23 de octubre de 2026 en la Facultad de Medicina de la Universidad Westhill.</a:t>
-            </a:r>
-            <a:endParaRPr lang="en-US" sz="1150" dirty="0"/>
-          </a:p>
-        </p:txBody>
-      </p:sp>
-      <p:sp>
-        <p:nvSpPr>
-          <p:cNvPr id="12" name="Text 10"/>
-          <p:cNvSpPr txBox="1"/>
-          <p:nvPr/>
-        </p:nvSpPr>
-        <p:spPr>
-          <a:xfrm>
-            <a:off x="2286000" y="5120640"/>
-            <a:ext cx="5486400" cy="237744"/>
-          </a:xfrm>
-          <a:prstGeom prst="rect">
-            <a:avLst/>
-          </a:prstGeom>
-          <a:noFill/>
-          <a:ln/>
-        </p:spPr>
-        <p:txBody>
-          <a:bodyPr wrap="square" lIns="0" tIns="0" rIns="0" bIns="0" rtlCol="0" anchor="ctr"/>
-          <a:lstStyle/>
-          <a:p>
-            <a:pPr algn="ctr" indent="0" marL="0">
-              <a:buNone/>
-            </a:pPr>
-            <a:r>
-              <a:rPr lang="en-US" sz="1050" dirty="0">
-                <a:solidFill>
-                  <a:srgbClr val="266294"/>
-                </a:solidFill>
-                <a:latin typeface="Montserrat SemiBold" pitchFamily="34" charset="0"/>
-                <a:ea typeface="Montserrat SemiBold" pitchFamily="34" charset="-122"/>
-                <a:cs typeface="Montserrat SemiBold" pitchFamily="34" charset="-120"/>
-              </a:rPr>
-              <a:t>Ciudad de México, a 23 de octubre de 2026</a:t>
-            </a:r>
-            <a:endParaRPr lang="en-US" sz="1050" dirty="0"/>
-          </a:p>
-        </p:txBody>
-      </p:sp>
-      <p:sp>
-        <p:nvSpPr>
-          <p:cNvPr id="13" name="Shape 11"/>
+          <p:cNvPr id="11" name="Shape 6"/>
           <p:cNvSpPr/>
           <p:nvPr/>
         </p:nvSpPr>
@@ -3152,7 +3106,7 @@
       </p:sp>
       <p:sp>
         <p:nvSpPr>
-          <p:cNvPr id="14" name="Text 12"/>
+          <p:cNvPr id="12" name="Text 7"/>
           <p:cNvSpPr txBox="1"/>
           <p:nvPr/>
         </p:nvSpPr>
@@ -3191,7 +3145,7 @@
       </p:sp>
       <p:sp>
         <p:nvSpPr>
-          <p:cNvPr id="15" name="Text 13"/>
+          <p:cNvPr id="13" name="Text 8"/>
           <p:cNvSpPr txBox="1"/>
           <p:nvPr/>
         </p:nvSpPr>
@@ -3230,7 +3184,7 @@
       </p:sp>
       <p:sp>
         <p:nvSpPr>
-          <p:cNvPr id="16" name="Shape 14"/>
+          <p:cNvPr id="14" name="Shape 9"/>
           <p:cNvSpPr/>
           <p:nvPr/>
         </p:nvSpPr>
@@ -3253,7 +3207,7 @@
       </p:sp>
       <p:sp>
         <p:nvSpPr>
-          <p:cNvPr id="17" name="Text 15"/>
+          <p:cNvPr id="15" name="Text 10"/>
           <p:cNvSpPr txBox="1"/>
           <p:nvPr/>
         </p:nvSpPr>
@@ -3292,7 +3246,7 @@
       </p:sp>
       <p:sp>
         <p:nvSpPr>
-          <p:cNvPr id="18" name="Text 16"/>
+          <p:cNvPr id="16" name="Text 11"/>
           <p:cNvSpPr txBox="1"/>
           <p:nvPr/>
         </p:nvSpPr>
@@ -3331,7 +3285,7 @@
       </p:sp>
       <p:sp>
         <p:nvSpPr>
-          <p:cNvPr id="19" name="Text 17"/>
+          <p:cNvPr id="17" name="Text 12"/>
           <p:cNvSpPr txBox="1"/>
           <p:nvPr/>
         </p:nvSpPr>
@@ -3401,32 +3355,370 @@
         </p:nvSpPr>
         <p:spPr>
           <a:xfrm>
-            <a:off x="1188720" y="1536192"/>
-            <a:ext cx="7680960" cy="237744"/>
-          </a:xfrm>
-          <a:prstGeom prst="rect">
-            <a:avLst/>
-          </a:prstGeom>
-          <a:noFill/>
-          <a:ln/>
-        </p:spPr>
-        <p:txBody>
-          <a:bodyPr wrap="square" lIns="0" tIns="0" rIns="0" bIns="0" rtlCol="0" anchor="ctr"/>
-          <a:lstStyle/>
-          <a:p>
-            <a:pPr algn="ctr" indent="0" marL="0">
-              <a:buNone/>
-            </a:pPr>
-            <a:r>
-              <a:rPr lang="en-US" sz="1050" spc="300" kern="0" dirty="0">
+            <a:off x="1097280" y="1737360"/>
+            <a:ext cx="7863840" cy="777240"/>
+          </a:xfrm>
+          <a:prstGeom prst="rect">
+            <a:avLst/>
+          </a:prstGeom>
+          <a:noFill/>
+          <a:ln/>
+        </p:spPr>
+        <p:txBody>
+          <a:bodyPr wrap="square" lIns="0" tIns="0" rIns="0" bIns="0" rtlCol="0" anchor="ctr"/>
+          <a:lstStyle/>
+          <a:p>
+            <a:pPr algn="ctr" indent="0" marL="0">
+              <a:buNone/>
+            </a:pPr>
+            <a:r>
+              <a:rPr lang="en-US" sz="4200" spc="400" kern="0" dirty="0">
+                <a:solidFill>
+                  <a:srgbClr val="266294"/>
+                </a:solidFill>
+                <a:latin typeface="Montserrat ExtraBold" pitchFamily="34" charset="0"/>
+                <a:ea typeface="Montserrat ExtraBold" pitchFamily="34" charset="-122"/>
+                <a:cs typeface="Montserrat ExtraBold" pitchFamily="34" charset="-120"/>
+              </a:rPr>
+              <a:t>RECONOCIMIENTO</a:t>
+            </a:r>
+            <a:endParaRPr lang="en-US" sz="4200" dirty="0"/>
+          </a:p>
+        </p:txBody>
+      </p:sp>
+      <p:pic>
+        <p:nvPicPr>
+          <p:cNvPr id="3" name="Image 0" descr="preencoded.png">    </p:cNvPr>
+          <p:cNvPicPr>
+            <a:picLocks noChangeAspect="1"/>
+          </p:cNvPicPr>
+          <p:nvPr/>
+        </p:nvPicPr>
+        <p:blipFill>
+          <a:blip r:embed="rId1"/>
+          <a:stretch>
+            <a:fillRect/>
+          </a:stretch>
+        </p:blipFill>
+        <p:spPr>
+          <a:xfrm>
+            <a:off x="1874520" y="2642616"/>
+            <a:ext cx="1371600" cy="182880"/>
+          </a:xfrm>
+          <a:prstGeom prst="rect">
+            <a:avLst/>
+          </a:prstGeom>
+        </p:spPr>
+      </p:pic>
+      <p:pic>
+        <p:nvPicPr>
+          <p:cNvPr id="4" name="Image 1" descr="preencoded.png">    </p:cNvPr>
+          <p:cNvPicPr>
+            <a:picLocks noChangeAspect="1"/>
+          </p:cNvPicPr>
+          <p:nvPr/>
+        </p:nvPicPr>
+        <p:blipFill>
+          <a:blip r:embed="rId2"/>
+          <a:stretch>
+            <a:fillRect/>
+          </a:stretch>
+        </p:blipFill>
+        <p:spPr>
+          <a:xfrm>
+            <a:off x="6812280" y="2642616"/>
+            <a:ext cx="1371600" cy="182880"/>
+          </a:xfrm>
+          <a:prstGeom prst="rect">
+            <a:avLst/>
+          </a:prstGeom>
+        </p:spPr>
+      </p:pic>
+      <p:sp>
+        <p:nvSpPr>
+          <p:cNvPr id="5" name="Text 1"/>
+          <p:cNvSpPr txBox="1"/>
+          <p:nvPr/>
+        </p:nvSpPr>
+        <p:spPr>
+          <a:xfrm>
+            <a:off x="3291840" y="2560320"/>
+            <a:ext cx="3474720" cy="329184"/>
+          </a:xfrm>
+          <a:prstGeom prst="rect">
+            <a:avLst/>
+          </a:prstGeom>
+          <a:noFill/>
+          <a:ln/>
+        </p:spPr>
+        <p:txBody>
+          <a:bodyPr wrap="square" lIns="0" tIns="0" rIns="0" bIns="0" rtlCol="0" anchor="ctr"/>
+          <a:lstStyle/>
+          <a:p>
+            <a:pPr algn="ctr" indent="0" marL="0">
+              <a:buNone/>
+            </a:pPr>
+            <a:r>
+              <a:rPr lang="en-US" sz="1500" spc="500" kern="0" dirty="0">
+                <a:solidFill>
+                  <a:srgbClr val="0E2A47"/>
+                </a:solidFill>
+                <a:latin typeface="Montserrat ExtraBold" pitchFamily="34" charset="0"/>
+                <a:ea typeface="Montserrat ExtraBold" pitchFamily="34" charset="-122"/>
+                <a:cs typeface="Montserrat ExtraBold" pitchFamily="34" charset="-120"/>
+              </a:rPr>
+              <a:t>COMO PONENTE</a:t>
+            </a:r>
+            <a:endParaRPr lang="en-US" sz="1500" dirty="0"/>
+          </a:p>
+        </p:txBody>
+      </p:sp>
+      <p:sp>
+        <p:nvSpPr>
+          <p:cNvPr id="6" name="Text 2"/>
+          <p:cNvSpPr txBox="1"/>
+          <p:nvPr/>
+        </p:nvSpPr>
+        <p:spPr>
+          <a:xfrm>
+            <a:off x="1828800" y="3035808"/>
+            <a:ext cx="6400800" cy="274320"/>
+          </a:xfrm>
+          <a:prstGeom prst="rect">
+            <a:avLst/>
+          </a:prstGeom>
+          <a:noFill/>
+          <a:ln/>
+        </p:spPr>
+        <p:txBody>
+          <a:bodyPr wrap="square" lIns="0" tIns="0" rIns="0" bIns="0" rtlCol="0" anchor="ctr"/>
+          <a:lstStyle/>
+          <a:p>
+            <a:pPr algn="ctr" indent="0" marL="0">
+              <a:buNone/>
+            </a:pPr>
+            <a:r>
+              <a:rPr lang="en-US" sz="1250" dirty="0">
                 <a:solidFill>
                   <a:srgbClr val="5B6B7D"/>
+                </a:solidFill>
+                <a:latin typeface="Montserrat Medium" pitchFamily="34" charset="0"/>
+                <a:ea typeface="Montserrat Medium" pitchFamily="34" charset="-122"/>
+                <a:cs typeface="Montserrat Medium" pitchFamily="34" charset="-120"/>
+              </a:rPr>
+              <a:t>Otorga el presente reconocimiento a</a:t>
+            </a:r>
+            <a:endParaRPr lang="en-US" sz="1250" dirty="0"/>
+          </a:p>
+        </p:txBody>
+      </p:sp>
+      <p:sp>
+        <p:nvSpPr>
+          <p:cNvPr id="7" name="Text 3"/>
+          <p:cNvSpPr txBox="1"/>
+          <p:nvPr/>
+        </p:nvSpPr>
+        <p:spPr>
+          <a:xfrm>
+            <a:off x="1097280" y="3310128"/>
+            <a:ext cx="7863840" cy="713232"/>
+          </a:xfrm>
+          <a:prstGeom prst="rect">
+            <a:avLst/>
+          </a:prstGeom>
+          <a:noFill/>
+          <a:ln/>
+        </p:spPr>
+        <p:txBody>
+          <a:bodyPr wrap="square" lIns="0" tIns="0" rIns="0" bIns="0" rtlCol="0" anchor="ctr"/>
+          <a:lstStyle/>
+          <a:p>
+            <a:pPr algn="ctr" indent="0" marL="0">
+              <a:buNone/>
+            </a:pPr>
+            <a:r>
+              <a:rPr lang="en-US" sz="3800" dirty="0">
+                <a:solidFill>
+                  <a:srgbClr val="0E2A47"/>
+                </a:solidFill>
+                <a:latin typeface="Montserrat ExtraBold" pitchFamily="34" charset="0"/>
+                <a:ea typeface="Montserrat ExtraBold" pitchFamily="34" charset="-122"/>
+                <a:cs typeface="Montserrat ExtraBold" pitchFamily="34" charset="-120"/>
+              </a:rPr>
+              <a:t>Dr. Asisclo</a:t>
+            </a:r>
+            <a:endParaRPr lang="en-US" sz="3800" dirty="0"/>
+          </a:p>
+        </p:txBody>
+      </p:sp>
+      <p:pic>
+        <p:nvPicPr>
+          <p:cNvPr id="8" name="Image 2" descr="preencoded.png">    </p:cNvPr>
+          <p:cNvPicPr>
+            <a:picLocks noChangeAspect="1"/>
+          </p:cNvPicPr>
+          <p:nvPr/>
+        </p:nvPicPr>
+        <p:blipFill>
+          <a:blip r:embed="rId3"/>
+          <a:stretch>
+            <a:fillRect/>
+          </a:stretch>
+        </p:blipFill>
+        <p:spPr>
+          <a:xfrm>
+            <a:off x="2194560" y="3986784"/>
+            <a:ext cx="5669280" cy="201168"/>
+          </a:xfrm>
+          <a:prstGeom prst="rect">
+            <a:avLst/>
+          </a:prstGeom>
+        </p:spPr>
+      </p:pic>
+      <p:sp>
+        <p:nvSpPr>
+          <p:cNvPr id="9" name="Text 4"/>
+          <p:cNvSpPr txBox="1"/>
+          <p:nvPr/>
+        </p:nvSpPr>
+        <p:spPr>
+          <a:xfrm>
+            <a:off x="1417320" y="4206240"/>
+            <a:ext cx="7223760" cy="896112"/>
+          </a:xfrm>
+          <a:prstGeom prst="rect">
+            <a:avLst/>
+          </a:prstGeom>
+          <a:noFill/>
+          <a:ln/>
+        </p:spPr>
+        <p:txBody>
+          <a:bodyPr wrap="square" lIns="0" tIns="0" rIns="0" bIns="0" rtlCol="0" anchor="t"/>
+          <a:lstStyle/>
+          <a:p>
+            <a:pPr algn="ctr" indent="0" marL="0">
+              <a:lnSpc>
+                <a:spcPct val="112000"/>
+              </a:lnSpc>
+              <a:buNone/>
+            </a:pPr>
+            <a:r>
+              <a:rPr lang="en-US" sz="1150" dirty="0">
+                <a:solidFill>
+                  <a:srgbClr val="2B3A4E"/>
+                </a:solidFill>
+                <a:latin typeface="Montserrat" pitchFamily="34" charset="0"/>
+                <a:ea typeface="Montserrat" pitchFamily="34" charset="-122"/>
+                <a:cs typeface="Montserrat" pitchFamily="34" charset="-120"/>
+              </a:rPr>
+              <a:t>Por su valiosa participación en la </a:t>
+            </a:r>
+            <a:pPr algn="ctr" indent="0" marL="0">
+              <a:lnSpc>
+                <a:spcPct val="112000"/>
+              </a:lnSpc>
+              <a:buNone/>
+            </a:pPr>
+            <a:r>
+              <a:rPr lang="en-US" sz="1150" dirty="0">
+                <a:solidFill>
+                  <a:srgbClr val="0E2A47"/>
+                </a:solidFill>
+                <a:latin typeface="Montserrat ExtraBold" pitchFamily="34" charset="0"/>
+                <a:ea typeface="Montserrat ExtraBold" pitchFamily="34" charset="-122"/>
+                <a:cs typeface="Montserrat ExtraBold" pitchFamily="34" charset="-120"/>
+              </a:rPr>
+              <a:t>Mesa redonda</a:t>
+            </a:r>
+            <a:pPr algn="ctr" indent="0" marL="0">
+              <a:lnSpc>
+                <a:spcPct val="112000"/>
+              </a:lnSpc>
+              <a:buNone/>
+            </a:pPr>
+            <a:r>
+              <a:rPr lang="en-US" sz="1150" dirty="0">
+                <a:solidFill>
+                  <a:srgbClr val="2B3A4E"/>
+                </a:solidFill>
+                <a:latin typeface="Montserrat" pitchFamily="34" charset="0"/>
+                <a:ea typeface="Montserrat" pitchFamily="34" charset="-122"/>
+                <a:cs typeface="Montserrat" pitchFamily="34" charset="-120"/>
+              </a:rPr>
+              <a:t> del </a:t>
+            </a:r>
+            <a:pPr algn="ctr" indent="0" marL="0">
+              <a:lnSpc>
+                <a:spcPct val="112000"/>
+              </a:lnSpc>
+              <a:buNone/>
+            </a:pPr>
+            <a:r>
+              <a:rPr lang="en-US" sz="1150" dirty="0">
+                <a:solidFill>
+                  <a:srgbClr val="0E2A47"/>
+                </a:solidFill>
+                <a:latin typeface="Montserrat ExtraBold" pitchFamily="34" charset="0"/>
+                <a:ea typeface="Montserrat ExtraBold" pitchFamily="34" charset="-122"/>
+                <a:cs typeface="Montserrat ExtraBold" pitchFamily="34" charset="-120"/>
+              </a:rPr>
+              <a:t>Westhill Medical Leadership Summit 2026</a:t>
+            </a:r>
+            <a:pPr algn="ctr" indent="0" marL="0">
+              <a:lnSpc>
+                <a:spcPct val="112000"/>
+              </a:lnSpc>
+              <a:buNone/>
+            </a:pPr>
+            <a:r>
+              <a:rPr lang="en-US" sz="1150" dirty="0">
+                <a:solidFill>
+                  <a:srgbClr val="2B3A4E"/>
+                </a:solidFill>
+                <a:latin typeface="Montserrat" pitchFamily="34" charset="0"/>
+                <a:ea typeface="Montserrat" pitchFamily="34" charset="-122"/>
+                <a:cs typeface="Montserrat" pitchFamily="34" charset="-120"/>
+              </a:rPr>
+              <a:t>, realizado los días 21, 22 y 23 de octubre de 2026 en la Facultad de Medicina de la Universidad Westhill.</a:t>
+            </a:r>
+            <a:endParaRPr lang="en-US" sz="1150" dirty="0"/>
+          </a:p>
+        </p:txBody>
+      </p:sp>
+      <p:sp>
+        <p:nvSpPr>
+          <p:cNvPr id="10" name="Text 5"/>
+          <p:cNvSpPr txBox="1"/>
+          <p:nvPr/>
+        </p:nvSpPr>
+        <p:spPr>
+          <a:xfrm>
+            <a:off x="2286000" y="5120640"/>
+            <a:ext cx="5486400" cy="237744"/>
+          </a:xfrm>
+          <a:prstGeom prst="rect">
+            <a:avLst/>
+          </a:prstGeom>
+          <a:noFill/>
+          <a:ln/>
+        </p:spPr>
+        <p:txBody>
+          <a:bodyPr wrap="square" lIns="0" tIns="0" rIns="0" bIns="0" rtlCol="0" anchor="ctr"/>
+          <a:lstStyle/>
+          <a:p>
+            <a:pPr algn="ctr" indent="0" marL="0">
+              <a:buNone/>
+            </a:pPr>
+            <a:r>
+              <a:rPr lang="en-US" sz="1050" dirty="0">
+                <a:solidFill>
+                  <a:srgbClr val="266294"/>
                 </a:solidFill>
                 <a:latin typeface="Montserrat SemiBold" pitchFamily="34" charset="0"/>
                 <a:ea typeface="Montserrat SemiBold" pitchFamily="34" charset="-122"/>
                 <a:cs typeface="Montserrat SemiBold" pitchFamily="34" charset="-120"/>
               </a:rPr>
-              <a:t>FACULTAD DE MEDICINA</a:t>
+              <a:t>Ciudad de México, a 23 de octubre de 2026</a:t>
             </a:r>
             <a:endParaRPr lang="en-US" sz="1050" dirty="0"/>
           </a:p>
@@ -3434,395 +3726,7 @@
       </p:sp>
       <p:sp>
         <p:nvSpPr>
-          <p:cNvPr id="3" name="Text 1"/>
-          <p:cNvSpPr txBox="1"/>
-          <p:nvPr/>
-        </p:nvSpPr>
-        <p:spPr>
-          <a:xfrm>
-            <a:off x="1097280" y="1737360"/>
-            <a:ext cx="7863840" cy="777240"/>
-          </a:xfrm>
-          <a:prstGeom prst="rect">
-            <a:avLst/>
-          </a:prstGeom>
-          <a:noFill/>
-          <a:ln/>
-        </p:spPr>
-        <p:txBody>
-          <a:bodyPr wrap="square" lIns="0" tIns="0" rIns="0" bIns="0" rtlCol="0" anchor="ctr"/>
-          <a:lstStyle/>
-          <a:p>
-            <a:pPr algn="ctr" indent="0" marL="0">
-              <a:buNone/>
-            </a:pPr>
-            <a:r>
-              <a:rPr lang="en-US" sz="4200" spc="400" kern="0" dirty="0">
-                <a:solidFill>
-                  <a:srgbClr val="266294"/>
-                </a:solidFill>
-                <a:latin typeface="Montserrat ExtraBold" pitchFamily="34" charset="0"/>
-                <a:ea typeface="Montserrat ExtraBold" pitchFamily="34" charset="-122"/>
-                <a:cs typeface="Montserrat ExtraBold" pitchFamily="34" charset="-120"/>
-              </a:rPr>
-              <a:t>RECONOCIMIENTO</a:t>
-            </a:r>
-            <a:endParaRPr lang="en-US" sz="4200" dirty="0"/>
-          </a:p>
-        </p:txBody>
-      </p:sp>
-      <p:sp>
-        <p:nvSpPr>
-          <p:cNvPr id="4" name="Shape 2"/>
-          <p:cNvSpPr/>
-          <p:nvPr/>
-        </p:nvSpPr>
-        <p:spPr>
-          <a:xfrm>
-            <a:off x="2331720" y="2706624"/>
-            <a:ext cx="914400" cy="54864"/>
-          </a:xfrm>
-          <a:prstGeom prst="rect">
-            <a:avLst/>
-          </a:prstGeom>
-          <a:solidFill>
-            <a:srgbClr val="2DB34A"/>
-          </a:solidFill>
-          <a:ln/>
-        </p:spPr>
-      </p:sp>
-      <p:sp>
-        <p:nvSpPr>
-          <p:cNvPr id="5" name="Shape 3"/>
-          <p:cNvSpPr/>
-          <p:nvPr/>
-        </p:nvSpPr>
-        <p:spPr>
-          <a:xfrm>
-            <a:off x="6812280" y="2706624"/>
-            <a:ext cx="914400" cy="54864"/>
-          </a:xfrm>
-          <a:prstGeom prst="rect">
-            <a:avLst/>
-          </a:prstGeom>
-          <a:solidFill>
-            <a:srgbClr val="2DB34A"/>
-          </a:solidFill>
-          <a:ln/>
-        </p:spPr>
-      </p:sp>
-      <p:sp>
-        <p:nvSpPr>
-          <p:cNvPr id="6" name="Text 4"/>
-          <p:cNvSpPr txBox="1"/>
-          <p:nvPr/>
-        </p:nvSpPr>
-        <p:spPr>
-          <a:xfrm>
-            <a:off x="3291840" y="2560320"/>
-            <a:ext cx="3474720" cy="329184"/>
-          </a:xfrm>
-          <a:prstGeom prst="rect">
-            <a:avLst/>
-          </a:prstGeom>
-          <a:noFill/>
-          <a:ln/>
-        </p:spPr>
-        <p:txBody>
-          <a:bodyPr wrap="square" lIns="0" tIns="0" rIns="0" bIns="0" rtlCol="0" anchor="ctr"/>
-          <a:lstStyle/>
-          <a:p>
-            <a:pPr algn="ctr" indent="0" marL="0">
-              <a:buNone/>
-            </a:pPr>
-            <a:r>
-              <a:rPr lang="en-US" sz="1500" spc="500" kern="0" dirty="0">
-                <a:solidFill>
-                  <a:srgbClr val="0E2A47"/>
-                </a:solidFill>
-                <a:latin typeface="Montserrat ExtraBold" pitchFamily="34" charset="0"/>
-                <a:ea typeface="Montserrat ExtraBold" pitchFamily="34" charset="-122"/>
-                <a:cs typeface="Montserrat ExtraBold" pitchFamily="34" charset="-120"/>
-              </a:rPr>
-              <a:t>COMO PONENTE</a:t>
-            </a:r>
-            <a:endParaRPr lang="en-US" sz="1500" dirty="0"/>
-          </a:p>
-        </p:txBody>
-      </p:sp>
-      <p:sp>
-        <p:nvSpPr>
-          <p:cNvPr id="7" name="Text 5"/>
-          <p:cNvSpPr txBox="1"/>
-          <p:nvPr/>
-        </p:nvSpPr>
-        <p:spPr>
-          <a:xfrm>
-            <a:off x="1828800" y="3035808"/>
-            <a:ext cx="6400800" cy="274320"/>
-          </a:xfrm>
-          <a:prstGeom prst="rect">
-            <a:avLst/>
-          </a:prstGeom>
-          <a:noFill/>
-          <a:ln/>
-        </p:spPr>
-        <p:txBody>
-          <a:bodyPr wrap="square" lIns="0" tIns="0" rIns="0" bIns="0" rtlCol="0" anchor="ctr"/>
-          <a:lstStyle/>
-          <a:p>
-            <a:pPr algn="ctr" indent="0" marL="0">
-              <a:buNone/>
-            </a:pPr>
-            <a:r>
-              <a:rPr lang="en-US" sz="1250" dirty="0">
-                <a:solidFill>
-                  <a:srgbClr val="5B6B7D"/>
-                </a:solidFill>
-                <a:latin typeface="Montserrat Medium" pitchFamily="34" charset="0"/>
-                <a:ea typeface="Montserrat Medium" pitchFamily="34" charset="-122"/>
-                <a:cs typeface="Montserrat Medium" pitchFamily="34" charset="-120"/>
-              </a:rPr>
-              <a:t>Otorga el presente reconocimiento a</a:t>
-            </a:r>
-            <a:endParaRPr lang="en-US" sz="1250" dirty="0"/>
-          </a:p>
-        </p:txBody>
-      </p:sp>
-      <p:sp>
-        <p:nvSpPr>
-          <p:cNvPr id="8" name="Text 6"/>
-          <p:cNvSpPr txBox="1"/>
-          <p:nvPr/>
-        </p:nvSpPr>
-        <p:spPr>
-          <a:xfrm>
-            <a:off x="1097280" y="3310128"/>
-            <a:ext cx="7863840" cy="713232"/>
-          </a:xfrm>
-          <a:prstGeom prst="rect">
-            <a:avLst/>
-          </a:prstGeom>
-          <a:noFill/>
-          <a:ln/>
-        </p:spPr>
-        <p:txBody>
-          <a:bodyPr wrap="square" lIns="0" tIns="0" rIns="0" bIns="0" rtlCol="0" anchor="ctr"/>
-          <a:lstStyle/>
-          <a:p>
-            <a:pPr algn="ctr" indent="0" marL="0">
-              <a:buNone/>
-            </a:pPr>
-            <a:r>
-              <a:rPr lang="en-US" sz="3800" dirty="0">
-                <a:solidFill>
-                  <a:srgbClr val="0E2A47"/>
-                </a:solidFill>
-                <a:latin typeface="Montserrat ExtraBold" pitchFamily="34" charset="0"/>
-                <a:ea typeface="Montserrat ExtraBold" pitchFamily="34" charset="-122"/>
-                <a:cs typeface="Montserrat ExtraBold" pitchFamily="34" charset="-120"/>
-              </a:rPr>
-              <a:t>Dr. Asisclo</a:t>
-            </a:r>
-            <a:endParaRPr lang="en-US" sz="3800" dirty="0"/>
-          </a:p>
-        </p:txBody>
-      </p:sp>
-      <p:sp>
-        <p:nvSpPr>
-          <p:cNvPr id="9" name="Shape 7"/>
-          <p:cNvSpPr/>
-          <p:nvPr/>
-        </p:nvSpPr>
-        <p:spPr>
-          <a:xfrm>
-            <a:off x="2194560" y="4087368"/>
-            <a:ext cx="5669280" cy="0"/>
-          </a:xfrm>
-          <a:prstGeom prst="line">
-            <a:avLst/>
-          </a:prstGeom>
-          <a:noFill/>
-          <a:ln w="22225">
-            <a:solidFill>
-              <a:srgbClr val="F2C94C"/>
-            </a:solidFill>
-            <a:prstDash val="solid"/>
-          </a:ln>
-        </p:spPr>
-      </p:sp>
-      <p:sp>
-        <p:nvSpPr>
-          <p:cNvPr id="10" name="Shape 8"/>
-          <p:cNvSpPr/>
-          <p:nvPr/>
-        </p:nvSpPr>
-        <p:spPr>
-          <a:xfrm>
-            <a:off x="4974336" y="4032504"/>
-            <a:ext cx="109728" cy="109728"/>
-          </a:xfrm>
-          <a:prstGeom prst="ellipse">
-            <a:avLst/>
-          </a:prstGeom>
-          <a:solidFill>
-            <a:srgbClr val="F2C94C"/>
-          </a:solidFill>
-          <a:ln/>
-        </p:spPr>
-      </p:sp>
-      <p:sp>
-        <p:nvSpPr>
-          <p:cNvPr id="11" name="Text 9"/>
-          <p:cNvSpPr txBox="1"/>
-          <p:nvPr/>
-        </p:nvSpPr>
-        <p:spPr>
-          <a:xfrm>
-            <a:off x="1417320" y="4206240"/>
-            <a:ext cx="7223760" cy="896112"/>
-          </a:xfrm>
-          <a:prstGeom prst="rect">
-            <a:avLst/>
-          </a:prstGeom>
-          <a:noFill/>
-          <a:ln/>
-        </p:spPr>
-        <p:txBody>
-          <a:bodyPr wrap="square" lIns="0" tIns="0" rIns="0" bIns="0" rtlCol="0" anchor="t"/>
-          <a:lstStyle/>
-          <a:p>
-            <a:pPr algn="ctr" indent="0" marL="0">
-              <a:lnSpc>
-                <a:spcPct val="112000"/>
-              </a:lnSpc>
-              <a:buNone/>
-            </a:pPr>
-            <a:r>
-              <a:rPr lang="en-US" sz="1150" dirty="0">
-                <a:solidFill>
-                  <a:srgbClr val="2B3A4E"/>
-                </a:solidFill>
-                <a:latin typeface="Montserrat" pitchFamily="34" charset="0"/>
-                <a:ea typeface="Montserrat" pitchFamily="34" charset="-122"/>
-                <a:cs typeface="Montserrat" pitchFamily="34" charset="-120"/>
-              </a:rPr>
-              <a:t>Por su valiosa participación en la </a:t>
-            </a:r>
-            <a:pPr algn="ctr" indent="0" marL="0">
-              <a:lnSpc>
-                <a:spcPct val="112000"/>
-              </a:lnSpc>
-              <a:buNone/>
-            </a:pPr>
-            <a:r>
-              <a:rPr lang="en-US" sz="1150" dirty="0">
-                <a:solidFill>
-                  <a:srgbClr val="0E2A47"/>
-                </a:solidFill>
-                <a:latin typeface="Montserrat ExtraBold" pitchFamily="34" charset="0"/>
-                <a:ea typeface="Montserrat ExtraBold" pitchFamily="34" charset="-122"/>
-                <a:cs typeface="Montserrat ExtraBold" pitchFamily="34" charset="-120"/>
-              </a:rPr>
-              <a:t>Mesa redonda</a:t>
-            </a:r>
-            <a:pPr algn="ctr" indent="0" marL="0">
-              <a:lnSpc>
-                <a:spcPct val="112000"/>
-              </a:lnSpc>
-              <a:buNone/>
-            </a:pPr>
-            <a:r>
-              <a:rPr lang="en-US" sz="1150" dirty="0">
-                <a:solidFill>
-                  <a:srgbClr val="2B3A4E"/>
-                </a:solidFill>
-                <a:latin typeface="Montserrat" pitchFamily="34" charset="0"/>
-                <a:ea typeface="Montserrat" pitchFamily="34" charset="-122"/>
-                <a:cs typeface="Montserrat" pitchFamily="34" charset="-120"/>
-              </a:rPr>
-              <a:t> del </a:t>
-            </a:r>
-            <a:pPr algn="ctr" indent="0" marL="0">
-              <a:lnSpc>
-                <a:spcPct val="112000"/>
-              </a:lnSpc>
-              <a:buNone/>
-            </a:pPr>
-            <a:r>
-              <a:rPr lang="en-US" sz="1150" dirty="0">
-                <a:solidFill>
-                  <a:srgbClr val="0E2A47"/>
-                </a:solidFill>
-                <a:latin typeface="Montserrat ExtraBold" pitchFamily="34" charset="0"/>
-                <a:ea typeface="Montserrat ExtraBold" pitchFamily="34" charset="-122"/>
-                <a:cs typeface="Montserrat ExtraBold" pitchFamily="34" charset="-120"/>
-              </a:rPr>
-              <a:t>Westhill Medical Leadership Summit 2026</a:t>
-            </a:r>
-            <a:pPr algn="ctr" indent="0" marL="0">
-              <a:lnSpc>
-                <a:spcPct val="112000"/>
-              </a:lnSpc>
-              <a:buNone/>
-            </a:pPr>
-            <a:r>
-              <a:rPr lang="en-US" sz="1150" dirty="0">
-                <a:solidFill>
-                  <a:srgbClr val="2B3A4E"/>
-                </a:solidFill>
-                <a:latin typeface="Montserrat" pitchFamily="34" charset="0"/>
-                <a:ea typeface="Montserrat" pitchFamily="34" charset="-122"/>
-                <a:cs typeface="Montserrat" pitchFamily="34" charset="-120"/>
-              </a:rPr>
-              <a:t>, realizado los días 21, 22 y 23 de octubre de 2026 en la Facultad de Medicina de la Universidad Westhill.</a:t>
-            </a:r>
-            <a:endParaRPr lang="en-US" sz="1150" dirty="0"/>
-          </a:p>
-        </p:txBody>
-      </p:sp>
-      <p:sp>
-        <p:nvSpPr>
-          <p:cNvPr id="12" name="Text 10"/>
-          <p:cNvSpPr txBox="1"/>
-          <p:nvPr/>
-        </p:nvSpPr>
-        <p:spPr>
-          <a:xfrm>
-            <a:off x="2286000" y="5120640"/>
-            <a:ext cx="5486400" cy="237744"/>
-          </a:xfrm>
-          <a:prstGeom prst="rect">
-            <a:avLst/>
-          </a:prstGeom>
-          <a:noFill/>
-          <a:ln/>
-        </p:spPr>
-        <p:txBody>
-          <a:bodyPr wrap="square" lIns="0" tIns="0" rIns="0" bIns="0" rtlCol="0" anchor="ctr"/>
-          <a:lstStyle/>
-          <a:p>
-            <a:pPr algn="ctr" indent="0" marL="0">
-              <a:buNone/>
-            </a:pPr>
-            <a:r>
-              <a:rPr lang="en-US" sz="1050" dirty="0">
-                <a:solidFill>
-                  <a:srgbClr val="266294"/>
-                </a:solidFill>
-                <a:latin typeface="Montserrat SemiBold" pitchFamily="34" charset="0"/>
-                <a:ea typeface="Montserrat SemiBold" pitchFamily="34" charset="-122"/>
-                <a:cs typeface="Montserrat SemiBold" pitchFamily="34" charset="-120"/>
-              </a:rPr>
-              <a:t>Ciudad de México, a 23 de octubre de 2026</a:t>
-            </a:r>
-            <a:endParaRPr lang="en-US" sz="1050" dirty="0"/>
-          </a:p>
-        </p:txBody>
-      </p:sp>
-      <p:sp>
-        <p:nvSpPr>
-          <p:cNvPr id="13" name="Shape 11"/>
+          <p:cNvPr id="11" name="Shape 6"/>
           <p:cNvSpPr/>
           <p:nvPr/>
         </p:nvSpPr>
@@ -3845,7 +3749,7 @@
       </p:sp>
       <p:sp>
         <p:nvSpPr>
-          <p:cNvPr id="14" name="Text 12"/>
+          <p:cNvPr id="12" name="Text 7"/>
           <p:cNvSpPr txBox="1"/>
           <p:nvPr/>
         </p:nvSpPr>
@@ -3884,7 +3788,7 @@
       </p:sp>
       <p:sp>
         <p:nvSpPr>
-          <p:cNvPr id="15" name="Text 13"/>
+          <p:cNvPr id="13" name="Text 8"/>
           <p:cNvSpPr txBox="1"/>
           <p:nvPr/>
         </p:nvSpPr>
@@ -3923,7 +3827,7 @@
       </p:sp>
       <p:sp>
         <p:nvSpPr>
-          <p:cNvPr id="16" name="Shape 14"/>
+          <p:cNvPr id="14" name="Shape 9"/>
           <p:cNvSpPr/>
           <p:nvPr/>
         </p:nvSpPr>
@@ -3946,7 +3850,7 @@
       </p:sp>
       <p:sp>
         <p:nvSpPr>
-          <p:cNvPr id="17" name="Text 15"/>
+          <p:cNvPr id="15" name="Text 10"/>
           <p:cNvSpPr txBox="1"/>
           <p:nvPr/>
         </p:nvSpPr>
@@ -3985,7 +3889,7 @@
       </p:sp>
       <p:sp>
         <p:nvSpPr>
-          <p:cNvPr id="18" name="Text 16"/>
+          <p:cNvPr id="16" name="Text 11"/>
           <p:cNvSpPr txBox="1"/>
           <p:nvPr/>
         </p:nvSpPr>
@@ -4024,7 +3928,7 @@
       </p:sp>
       <p:sp>
         <p:nvSpPr>
-          <p:cNvPr id="19" name="Text 17"/>
+          <p:cNvPr id="17" name="Text 12"/>
           <p:cNvSpPr txBox="1"/>
           <p:nvPr/>
         </p:nvSpPr>
@@ -4094,32 +3998,370 @@
         </p:nvSpPr>
         <p:spPr>
           <a:xfrm>
-            <a:off x="1188720" y="1536192"/>
-            <a:ext cx="7680960" cy="237744"/>
-          </a:xfrm>
-          <a:prstGeom prst="rect">
-            <a:avLst/>
-          </a:prstGeom>
-          <a:noFill/>
-          <a:ln/>
-        </p:spPr>
-        <p:txBody>
-          <a:bodyPr wrap="square" lIns="0" tIns="0" rIns="0" bIns="0" rtlCol="0" anchor="ctr"/>
-          <a:lstStyle/>
-          <a:p>
-            <a:pPr algn="ctr" indent="0" marL="0">
-              <a:buNone/>
-            </a:pPr>
-            <a:r>
-              <a:rPr lang="en-US" sz="1050" spc="300" kern="0" dirty="0">
+            <a:off x="1097280" y="1737360"/>
+            <a:ext cx="7863840" cy="777240"/>
+          </a:xfrm>
+          <a:prstGeom prst="rect">
+            <a:avLst/>
+          </a:prstGeom>
+          <a:noFill/>
+          <a:ln/>
+        </p:spPr>
+        <p:txBody>
+          <a:bodyPr wrap="square" lIns="0" tIns="0" rIns="0" bIns="0" rtlCol="0" anchor="ctr"/>
+          <a:lstStyle/>
+          <a:p>
+            <a:pPr algn="ctr" indent="0" marL="0">
+              <a:buNone/>
+            </a:pPr>
+            <a:r>
+              <a:rPr lang="en-US" sz="4200" spc="400" kern="0" dirty="0">
+                <a:solidFill>
+                  <a:srgbClr val="266294"/>
+                </a:solidFill>
+                <a:latin typeface="Montserrat ExtraBold" pitchFamily="34" charset="0"/>
+                <a:ea typeface="Montserrat ExtraBold" pitchFamily="34" charset="-122"/>
+                <a:cs typeface="Montserrat ExtraBold" pitchFamily="34" charset="-120"/>
+              </a:rPr>
+              <a:t>RECONOCIMIENTO</a:t>
+            </a:r>
+            <a:endParaRPr lang="en-US" sz="4200" dirty="0"/>
+          </a:p>
+        </p:txBody>
+      </p:sp>
+      <p:pic>
+        <p:nvPicPr>
+          <p:cNvPr id="3" name="Image 0" descr="preencoded.png">    </p:cNvPr>
+          <p:cNvPicPr>
+            <a:picLocks noChangeAspect="1"/>
+          </p:cNvPicPr>
+          <p:nvPr/>
+        </p:nvPicPr>
+        <p:blipFill>
+          <a:blip r:embed="rId1"/>
+          <a:stretch>
+            <a:fillRect/>
+          </a:stretch>
+        </p:blipFill>
+        <p:spPr>
+          <a:xfrm>
+            <a:off x="1874520" y="2642616"/>
+            <a:ext cx="1371600" cy="182880"/>
+          </a:xfrm>
+          <a:prstGeom prst="rect">
+            <a:avLst/>
+          </a:prstGeom>
+        </p:spPr>
+      </p:pic>
+      <p:pic>
+        <p:nvPicPr>
+          <p:cNvPr id="4" name="Image 1" descr="preencoded.png">    </p:cNvPr>
+          <p:cNvPicPr>
+            <a:picLocks noChangeAspect="1"/>
+          </p:cNvPicPr>
+          <p:nvPr/>
+        </p:nvPicPr>
+        <p:blipFill>
+          <a:blip r:embed="rId2"/>
+          <a:stretch>
+            <a:fillRect/>
+          </a:stretch>
+        </p:blipFill>
+        <p:spPr>
+          <a:xfrm>
+            <a:off x="6812280" y="2642616"/>
+            <a:ext cx="1371600" cy="182880"/>
+          </a:xfrm>
+          <a:prstGeom prst="rect">
+            <a:avLst/>
+          </a:prstGeom>
+        </p:spPr>
+      </p:pic>
+      <p:sp>
+        <p:nvSpPr>
+          <p:cNvPr id="5" name="Text 1"/>
+          <p:cNvSpPr txBox="1"/>
+          <p:nvPr/>
+        </p:nvSpPr>
+        <p:spPr>
+          <a:xfrm>
+            <a:off x="3291840" y="2560320"/>
+            <a:ext cx="3474720" cy="329184"/>
+          </a:xfrm>
+          <a:prstGeom prst="rect">
+            <a:avLst/>
+          </a:prstGeom>
+          <a:noFill/>
+          <a:ln/>
+        </p:spPr>
+        <p:txBody>
+          <a:bodyPr wrap="square" lIns="0" tIns="0" rIns="0" bIns="0" rtlCol="0" anchor="ctr"/>
+          <a:lstStyle/>
+          <a:p>
+            <a:pPr algn="ctr" indent="0" marL="0">
+              <a:buNone/>
+            </a:pPr>
+            <a:r>
+              <a:rPr lang="en-US" sz="1500" spc="500" kern="0" dirty="0">
+                <a:solidFill>
+                  <a:srgbClr val="0E2A47"/>
+                </a:solidFill>
+                <a:latin typeface="Montserrat ExtraBold" pitchFamily="34" charset="0"/>
+                <a:ea typeface="Montserrat ExtraBold" pitchFamily="34" charset="-122"/>
+                <a:cs typeface="Montserrat ExtraBold" pitchFamily="34" charset="-120"/>
+              </a:rPr>
+              <a:t>COMO PONENTE</a:t>
+            </a:r>
+            <a:endParaRPr lang="en-US" sz="1500" dirty="0"/>
+          </a:p>
+        </p:txBody>
+      </p:sp>
+      <p:sp>
+        <p:nvSpPr>
+          <p:cNvPr id="6" name="Text 2"/>
+          <p:cNvSpPr txBox="1"/>
+          <p:nvPr/>
+        </p:nvSpPr>
+        <p:spPr>
+          <a:xfrm>
+            <a:off x="1828800" y="3035808"/>
+            <a:ext cx="6400800" cy="274320"/>
+          </a:xfrm>
+          <a:prstGeom prst="rect">
+            <a:avLst/>
+          </a:prstGeom>
+          <a:noFill/>
+          <a:ln/>
+        </p:spPr>
+        <p:txBody>
+          <a:bodyPr wrap="square" lIns="0" tIns="0" rIns="0" bIns="0" rtlCol="0" anchor="ctr"/>
+          <a:lstStyle/>
+          <a:p>
+            <a:pPr algn="ctr" indent="0" marL="0">
+              <a:buNone/>
+            </a:pPr>
+            <a:r>
+              <a:rPr lang="en-US" sz="1250" dirty="0">
                 <a:solidFill>
                   <a:srgbClr val="5B6B7D"/>
+                </a:solidFill>
+                <a:latin typeface="Montserrat Medium" pitchFamily="34" charset="0"/>
+                <a:ea typeface="Montserrat Medium" pitchFamily="34" charset="-122"/>
+                <a:cs typeface="Montserrat Medium" pitchFamily="34" charset="-120"/>
+              </a:rPr>
+              <a:t>Otorga el presente reconocimiento a</a:t>
+            </a:r>
+            <a:endParaRPr lang="en-US" sz="1250" dirty="0"/>
+          </a:p>
+        </p:txBody>
+      </p:sp>
+      <p:sp>
+        <p:nvSpPr>
+          <p:cNvPr id="7" name="Text 3"/>
+          <p:cNvSpPr txBox="1"/>
+          <p:nvPr/>
+        </p:nvSpPr>
+        <p:spPr>
+          <a:xfrm>
+            <a:off x="1097280" y="3310128"/>
+            <a:ext cx="7863840" cy="713232"/>
+          </a:xfrm>
+          <a:prstGeom prst="rect">
+            <a:avLst/>
+          </a:prstGeom>
+          <a:noFill/>
+          <a:ln/>
+        </p:spPr>
+        <p:txBody>
+          <a:bodyPr wrap="square" lIns="0" tIns="0" rIns="0" bIns="0" rtlCol="0" anchor="ctr"/>
+          <a:lstStyle/>
+          <a:p>
+            <a:pPr algn="ctr" indent="0" marL="0">
+              <a:buNone/>
+            </a:pPr>
+            <a:r>
+              <a:rPr lang="en-US" sz="3800" dirty="0">
+                <a:solidFill>
+                  <a:srgbClr val="0E2A47"/>
+                </a:solidFill>
+                <a:latin typeface="Montserrat ExtraBold" pitchFamily="34" charset="0"/>
+                <a:ea typeface="Montserrat ExtraBold" pitchFamily="34" charset="-122"/>
+                <a:cs typeface="Montserrat ExtraBold" pitchFamily="34" charset="-120"/>
+              </a:rPr>
+              <a:t>Nombre del Ponente</a:t>
+            </a:r>
+            <a:endParaRPr lang="en-US" sz="3800" dirty="0"/>
+          </a:p>
+        </p:txBody>
+      </p:sp>
+      <p:pic>
+        <p:nvPicPr>
+          <p:cNvPr id="8" name="Image 2" descr="preencoded.png">    </p:cNvPr>
+          <p:cNvPicPr>
+            <a:picLocks noChangeAspect="1"/>
+          </p:cNvPicPr>
+          <p:nvPr/>
+        </p:nvPicPr>
+        <p:blipFill>
+          <a:blip r:embed="rId3"/>
+          <a:stretch>
+            <a:fillRect/>
+          </a:stretch>
+        </p:blipFill>
+        <p:spPr>
+          <a:xfrm>
+            <a:off x="2194560" y="3986784"/>
+            <a:ext cx="5669280" cy="201168"/>
+          </a:xfrm>
+          <a:prstGeom prst="rect">
+            <a:avLst/>
+          </a:prstGeom>
+        </p:spPr>
+      </p:pic>
+      <p:sp>
+        <p:nvSpPr>
+          <p:cNvPr id="9" name="Text 4"/>
+          <p:cNvSpPr txBox="1"/>
+          <p:nvPr/>
+        </p:nvSpPr>
+        <p:spPr>
+          <a:xfrm>
+            <a:off x="1417320" y="4206240"/>
+            <a:ext cx="7223760" cy="896112"/>
+          </a:xfrm>
+          <a:prstGeom prst="rect">
+            <a:avLst/>
+          </a:prstGeom>
+          <a:noFill/>
+          <a:ln/>
+        </p:spPr>
+        <p:txBody>
+          <a:bodyPr wrap="square" lIns="0" tIns="0" rIns="0" bIns="0" rtlCol="0" anchor="t"/>
+          <a:lstStyle/>
+          <a:p>
+            <a:pPr algn="ctr" indent="0" marL="0">
+              <a:lnSpc>
+                <a:spcPct val="112000"/>
+              </a:lnSpc>
+              <a:buNone/>
+            </a:pPr>
+            <a:r>
+              <a:rPr lang="en-US" sz="1150" dirty="0">
+                <a:solidFill>
+                  <a:srgbClr val="2B3A4E"/>
+                </a:solidFill>
+                <a:latin typeface="Montserrat" pitchFamily="34" charset="0"/>
+                <a:ea typeface="Montserrat" pitchFamily="34" charset="-122"/>
+                <a:cs typeface="Montserrat" pitchFamily="34" charset="-120"/>
+              </a:rPr>
+              <a:t>Por su valiosa participación como ponente con la conferencia </a:t>
+            </a:r>
+            <a:pPr algn="ctr" indent="0" marL="0">
+              <a:lnSpc>
+                <a:spcPct val="112000"/>
+              </a:lnSpc>
+              <a:buNone/>
+            </a:pPr>
+            <a:r>
+              <a:rPr lang="en-US" sz="1150" dirty="0">
+                <a:solidFill>
+                  <a:srgbClr val="0E2A47"/>
+                </a:solidFill>
+                <a:latin typeface="Montserrat ExtraBold" pitchFamily="34" charset="0"/>
+                <a:ea typeface="Montserrat ExtraBold" pitchFamily="34" charset="-122"/>
+                <a:cs typeface="Montserrat ExtraBold" pitchFamily="34" charset="-120"/>
+              </a:rPr>
+              <a:t>«Título de la ponencia»</a:t>
+            </a:r>
+            <a:pPr algn="ctr" indent="0" marL="0">
+              <a:lnSpc>
+                <a:spcPct val="112000"/>
+              </a:lnSpc>
+              <a:buNone/>
+            </a:pPr>
+            <a:r>
+              <a:rPr lang="en-US" sz="1150" dirty="0">
+                <a:solidFill>
+                  <a:srgbClr val="2B3A4E"/>
+                </a:solidFill>
+                <a:latin typeface="Montserrat" pitchFamily="34" charset="0"/>
+                <a:ea typeface="Montserrat" pitchFamily="34" charset="-122"/>
+                <a:cs typeface="Montserrat" pitchFamily="34" charset="-120"/>
+              </a:rPr>
+              <a:t> en el </a:t>
+            </a:r>
+            <a:pPr algn="ctr" indent="0" marL="0">
+              <a:lnSpc>
+                <a:spcPct val="112000"/>
+              </a:lnSpc>
+              <a:buNone/>
+            </a:pPr>
+            <a:r>
+              <a:rPr lang="en-US" sz="1150" dirty="0">
+                <a:solidFill>
+                  <a:srgbClr val="0E2A47"/>
+                </a:solidFill>
+                <a:latin typeface="Montserrat ExtraBold" pitchFamily="34" charset="0"/>
+                <a:ea typeface="Montserrat ExtraBold" pitchFamily="34" charset="-122"/>
+                <a:cs typeface="Montserrat ExtraBold" pitchFamily="34" charset="-120"/>
+              </a:rPr>
+              <a:t>Westhill Medical Leadership Summit 2026</a:t>
+            </a:r>
+            <a:pPr algn="ctr" indent="0" marL="0">
+              <a:lnSpc>
+                <a:spcPct val="112000"/>
+              </a:lnSpc>
+              <a:buNone/>
+            </a:pPr>
+            <a:r>
+              <a:rPr lang="en-US" sz="1150" dirty="0">
+                <a:solidFill>
+                  <a:srgbClr val="2B3A4E"/>
+                </a:solidFill>
+                <a:latin typeface="Montserrat" pitchFamily="34" charset="0"/>
+                <a:ea typeface="Montserrat" pitchFamily="34" charset="-122"/>
+                <a:cs typeface="Montserrat" pitchFamily="34" charset="-120"/>
+              </a:rPr>
+              <a:t>, realizado los días 21, 22 y 23 de octubre de 2026 en la Facultad de Medicina de la Universidad Westhill.</a:t>
+            </a:r>
+            <a:endParaRPr lang="en-US" sz="1150" dirty="0"/>
+          </a:p>
+        </p:txBody>
+      </p:sp>
+      <p:sp>
+        <p:nvSpPr>
+          <p:cNvPr id="10" name="Text 5"/>
+          <p:cNvSpPr txBox="1"/>
+          <p:nvPr/>
+        </p:nvSpPr>
+        <p:spPr>
+          <a:xfrm>
+            <a:off x="2286000" y="5120640"/>
+            <a:ext cx="5486400" cy="237744"/>
+          </a:xfrm>
+          <a:prstGeom prst="rect">
+            <a:avLst/>
+          </a:prstGeom>
+          <a:noFill/>
+          <a:ln/>
+        </p:spPr>
+        <p:txBody>
+          <a:bodyPr wrap="square" lIns="0" tIns="0" rIns="0" bIns="0" rtlCol="0" anchor="ctr"/>
+          <a:lstStyle/>
+          <a:p>
+            <a:pPr algn="ctr" indent="0" marL="0">
+              <a:buNone/>
+            </a:pPr>
+            <a:r>
+              <a:rPr lang="en-US" sz="1050" dirty="0">
+                <a:solidFill>
+                  <a:srgbClr val="266294"/>
                 </a:solidFill>
                 <a:latin typeface="Montserrat SemiBold" pitchFamily="34" charset="0"/>
                 <a:ea typeface="Montserrat SemiBold" pitchFamily="34" charset="-122"/>
                 <a:cs typeface="Montserrat SemiBold" pitchFamily="34" charset="-120"/>
               </a:rPr>
-              <a:t>FACULTAD DE MEDICINA</a:t>
+              <a:t>Ciudad de México, a 23 de octubre de 2026</a:t>
             </a:r>
             <a:endParaRPr lang="en-US" sz="1050" dirty="0"/>
           </a:p>
@@ -4127,395 +4369,7 @@
       </p:sp>
       <p:sp>
         <p:nvSpPr>
-          <p:cNvPr id="3" name="Text 1"/>
-          <p:cNvSpPr txBox="1"/>
-          <p:nvPr/>
-        </p:nvSpPr>
-        <p:spPr>
-          <a:xfrm>
-            <a:off x="1097280" y="1737360"/>
-            <a:ext cx="7863840" cy="777240"/>
-          </a:xfrm>
-          <a:prstGeom prst="rect">
-            <a:avLst/>
-          </a:prstGeom>
-          <a:noFill/>
-          <a:ln/>
-        </p:spPr>
-        <p:txBody>
-          <a:bodyPr wrap="square" lIns="0" tIns="0" rIns="0" bIns="0" rtlCol="0" anchor="ctr"/>
-          <a:lstStyle/>
-          <a:p>
-            <a:pPr algn="ctr" indent="0" marL="0">
-              <a:buNone/>
-            </a:pPr>
-            <a:r>
-              <a:rPr lang="en-US" sz="4200" spc="400" kern="0" dirty="0">
-                <a:solidFill>
-                  <a:srgbClr val="266294"/>
-                </a:solidFill>
-                <a:latin typeface="Montserrat ExtraBold" pitchFamily="34" charset="0"/>
-                <a:ea typeface="Montserrat ExtraBold" pitchFamily="34" charset="-122"/>
-                <a:cs typeface="Montserrat ExtraBold" pitchFamily="34" charset="-120"/>
-              </a:rPr>
-              <a:t>RECONOCIMIENTO</a:t>
-            </a:r>
-            <a:endParaRPr lang="en-US" sz="4200" dirty="0"/>
-          </a:p>
-        </p:txBody>
-      </p:sp>
-      <p:sp>
-        <p:nvSpPr>
-          <p:cNvPr id="4" name="Shape 2"/>
-          <p:cNvSpPr/>
-          <p:nvPr/>
-        </p:nvSpPr>
-        <p:spPr>
-          <a:xfrm>
-            <a:off x="2331720" y="2706624"/>
-            <a:ext cx="914400" cy="54864"/>
-          </a:xfrm>
-          <a:prstGeom prst="rect">
-            <a:avLst/>
-          </a:prstGeom>
-          <a:solidFill>
-            <a:srgbClr val="2DB34A"/>
-          </a:solidFill>
-          <a:ln/>
-        </p:spPr>
-      </p:sp>
-      <p:sp>
-        <p:nvSpPr>
-          <p:cNvPr id="5" name="Shape 3"/>
-          <p:cNvSpPr/>
-          <p:nvPr/>
-        </p:nvSpPr>
-        <p:spPr>
-          <a:xfrm>
-            <a:off x="6812280" y="2706624"/>
-            <a:ext cx="914400" cy="54864"/>
-          </a:xfrm>
-          <a:prstGeom prst="rect">
-            <a:avLst/>
-          </a:prstGeom>
-          <a:solidFill>
-            <a:srgbClr val="2DB34A"/>
-          </a:solidFill>
-          <a:ln/>
-        </p:spPr>
-      </p:sp>
-      <p:sp>
-        <p:nvSpPr>
-          <p:cNvPr id="6" name="Text 4"/>
-          <p:cNvSpPr txBox="1"/>
-          <p:nvPr/>
-        </p:nvSpPr>
-        <p:spPr>
-          <a:xfrm>
-            <a:off x="3291840" y="2560320"/>
-            <a:ext cx="3474720" cy="329184"/>
-          </a:xfrm>
-          <a:prstGeom prst="rect">
-            <a:avLst/>
-          </a:prstGeom>
-          <a:noFill/>
-          <a:ln/>
-        </p:spPr>
-        <p:txBody>
-          <a:bodyPr wrap="square" lIns="0" tIns="0" rIns="0" bIns="0" rtlCol="0" anchor="ctr"/>
-          <a:lstStyle/>
-          <a:p>
-            <a:pPr algn="ctr" indent="0" marL="0">
-              <a:buNone/>
-            </a:pPr>
-            <a:r>
-              <a:rPr lang="en-US" sz="1500" spc="500" kern="0" dirty="0">
-                <a:solidFill>
-                  <a:srgbClr val="0E2A47"/>
-                </a:solidFill>
-                <a:latin typeface="Montserrat ExtraBold" pitchFamily="34" charset="0"/>
-                <a:ea typeface="Montserrat ExtraBold" pitchFamily="34" charset="-122"/>
-                <a:cs typeface="Montserrat ExtraBold" pitchFamily="34" charset="-120"/>
-              </a:rPr>
-              <a:t>COMO PONENTE</a:t>
-            </a:r>
-            <a:endParaRPr lang="en-US" sz="1500" dirty="0"/>
-          </a:p>
-        </p:txBody>
-      </p:sp>
-      <p:sp>
-        <p:nvSpPr>
-          <p:cNvPr id="7" name="Text 5"/>
-          <p:cNvSpPr txBox="1"/>
-          <p:nvPr/>
-        </p:nvSpPr>
-        <p:spPr>
-          <a:xfrm>
-            <a:off x="1828800" y="3035808"/>
-            <a:ext cx="6400800" cy="274320"/>
-          </a:xfrm>
-          <a:prstGeom prst="rect">
-            <a:avLst/>
-          </a:prstGeom>
-          <a:noFill/>
-          <a:ln/>
-        </p:spPr>
-        <p:txBody>
-          <a:bodyPr wrap="square" lIns="0" tIns="0" rIns="0" bIns="0" rtlCol="0" anchor="ctr"/>
-          <a:lstStyle/>
-          <a:p>
-            <a:pPr algn="ctr" indent="0" marL="0">
-              <a:buNone/>
-            </a:pPr>
-            <a:r>
-              <a:rPr lang="en-US" sz="1250" dirty="0">
-                <a:solidFill>
-                  <a:srgbClr val="5B6B7D"/>
-                </a:solidFill>
-                <a:latin typeface="Montserrat Medium" pitchFamily="34" charset="0"/>
-                <a:ea typeface="Montserrat Medium" pitchFamily="34" charset="-122"/>
-                <a:cs typeface="Montserrat Medium" pitchFamily="34" charset="-120"/>
-              </a:rPr>
-              <a:t>Otorga el presente reconocimiento a</a:t>
-            </a:r>
-            <a:endParaRPr lang="en-US" sz="1250" dirty="0"/>
-          </a:p>
-        </p:txBody>
-      </p:sp>
-      <p:sp>
-        <p:nvSpPr>
-          <p:cNvPr id="8" name="Text 6"/>
-          <p:cNvSpPr txBox="1"/>
-          <p:nvPr/>
-        </p:nvSpPr>
-        <p:spPr>
-          <a:xfrm>
-            <a:off x="1097280" y="3310128"/>
-            <a:ext cx="7863840" cy="713232"/>
-          </a:xfrm>
-          <a:prstGeom prst="rect">
-            <a:avLst/>
-          </a:prstGeom>
-          <a:noFill/>
-          <a:ln/>
-        </p:spPr>
-        <p:txBody>
-          <a:bodyPr wrap="square" lIns="0" tIns="0" rIns="0" bIns="0" rtlCol="0" anchor="ctr"/>
-          <a:lstStyle/>
-          <a:p>
-            <a:pPr algn="ctr" indent="0" marL="0">
-              <a:buNone/>
-            </a:pPr>
-            <a:r>
-              <a:rPr lang="en-US" sz="3800" dirty="0">
-                <a:solidFill>
-                  <a:srgbClr val="0E2A47"/>
-                </a:solidFill>
-                <a:latin typeface="Montserrat ExtraBold" pitchFamily="34" charset="0"/>
-                <a:ea typeface="Montserrat ExtraBold" pitchFamily="34" charset="-122"/>
-                <a:cs typeface="Montserrat ExtraBold" pitchFamily="34" charset="-120"/>
-              </a:rPr>
-              <a:t>Nombre del Ponente</a:t>
-            </a:r>
-            <a:endParaRPr lang="en-US" sz="3800" dirty="0"/>
-          </a:p>
-        </p:txBody>
-      </p:sp>
-      <p:sp>
-        <p:nvSpPr>
-          <p:cNvPr id="9" name="Shape 7"/>
-          <p:cNvSpPr/>
-          <p:nvPr/>
-        </p:nvSpPr>
-        <p:spPr>
-          <a:xfrm>
-            <a:off x="2194560" y="4087368"/>
-            <a:ext cx="5669280" cy="0"/>
-          </a:xfrm>
-          <a:prstGeom prst="line">
-            <a:avLst/>
-          </a:prstGeom>
-          <a:noFill/>
-          <a:ln w="22225">
-            <a:solidFill>
-              <a:srgbClr val="F2C94C"/>
-            </a:solidFill>
-            <a:prstDash val="solid"/>
-          </a:ln>
-        </p:spPr>
-      </p:sp>
-      <p:sp>
-        <p:nvSpPr>
-          <p:cNvPr id="10" name="Shape 8"/>
-          <p:cNvSpPr/>
-          <p:nvPr/>
-        </p:nvSpPr>
-        <p:spPr>
-          <a:xfrm>
-            <a:off x="4974336" y="4032504"/>
-            <a:ext cx="109728" cy="109728"/>
-          </a:xfrm>
-          <a:prstGeom prst="ellipse">
-            <a:avLst/>
-          </a:prstGeom>
-          <a:solidFill>
-            <a:srgbClr val="F2C94C"/>
-          </a:solidFill>
-          <a:ln/>
-        </p:spPr>
-      </p:sp>
-      <p:sp>
-        <p:nvSpPr>
-          <p:cNvPr id="11" name="Text 9"/>
-          <p:cNvSpPr txBox="1"/>
-          <p:nvPr/>
-        </p:nvSpPr>
-        <p:spPr>
-          <a:xfrm>
-            <a:off x="1417320" y="4206240"/>
-            <a:ext cx="7223760" cy="896112"/>
-          </a:xfrm>
-          <a:prstGeom prst="rect">
-            <a:avLst/>
-          </a:prstGeom>
-          <a:noFill/>
-          <a:ln/>
-        </p:spPr>
-        <p:txBody>
-          <a:bodyPr wrap="square" lIns="0" tIns="0" rIns="0" bIns="0" rtlCol="0" anchor="t"/>
-          <a:lstStyle/>
-          <a:p>
-            <a:pPr algn="ctr" indent="0" marL="0">
-              <a:lnSpc>
-                <a:spcPct val="112000"/>
-              </a:lnSpc>
-              <a:buNone/>
-            </a:pPr>
-            <a:r>
-              <a:rPr lang="en-US" sz="1150" dirty="0">
-                <a:solidFill>
-                  <a:srgbClr val="2B3A4E"/>
-                </a:solidFill>
-                <a:latin typeface="Montserrat" pitchFamily="34" charset="0"/>
-                <a:ea typeface="Montserrat" pitchFamily="34" charset="-122"/>
-                <a:cs typeface="Montserrat" pitchFamily="34" charset="-120"/>
-              </a:rPr>
-              <a:t>Por su valiosa participación como ponente con la conferencia </a:t>
-            </a:r>
-            <a:pPr algn="ctr" indent="0" marL="0">
-              <a:lnSpc>
-                <a:spcPct val="112000"/>
-              </a:lnSpc>
-              <a:buNone/>
-            </a:pPr>
-            <a:r>
-              <a:rPr lang="en-US" sz="1150" dirty="0">
-                <a:solidFill>
-                  <a:srgbClr val="0E2A47"/>
-                </a:solidFill>
-                <a:latin typeface="Montserrat ExtraBold" pitchFamily="34" charset="0"/>
-                <a:ea typeface="Montserrat ExtraBold" pitchFamily="34" charset="-122"/>
-                <a:cs typeface="Montserrat ExtraBold" pitchFamily="34" charset="-120"/>
-              </a:rPr>
-              <a:t>«Título de la ponencia»</a:t>
-            </a:r>
-            <a:pPr algn="ctr" indent="0" marL="0">
-              <a:lnSpc>
-                <a:spcPct val="112000"/>
-              </a:lnSpc>
-              <a:buNone/>
-            </a:pPr>
-            <a:r>
-              <a:rPr lang="en-US" sz="1150" dirty="0">
-                <a:solidFill>
-                  <a:srgbClr val="2B3A4E"/>
-                </a:solidFill>
-                <a:latin typeface="Montserrat" pitchFamily="34" charset="0"/>
-                <a:ea typeface="Montserrat" pitchFamily="34" charset="-122"/>
-                <a:cs typeface="Montserrat" pitchFamily="34" charset="-120"/>
-              </a:rPr>
-              <a:t> en el </a:t>
-            </a:r>
-            <a:pPr algn="ctr" indent="0" marL="0">
-              <a:lnSpc>
-                <a:spcPct val="112000"/>
-              </a:lnSpc>
-              <a:buNone/>
-            </a:pPr>
-            <a:r>
-              <a:rPr lang="en-US" sz="1150" dirty="0">
-                <a:solidFill>
-                  <a:srgbClr val="0E2A47"/>
-                </a:solidFill>
-                <a:latin typeface="Montserrat ExtraBold" pitchFamily="34" charset="0"/>
-                <a:ea typeface="Montserrat ExtraBold" pitchFamily="34" charset="-122"/>
-                <a:cs typeface="Montserrat ExtraBold" pitchFamily="34" charset="-120"/>
-              </a:rPr>
-              <a:t>Westhill Medical Leadership Summit 2026</a:t>
-            </a:r>
-            <a:pPr algn="ctr" indent="0" marL="0">
-              <a:lnSpc>
-                <a:spcPct val="112000"/>
-              </a:lnSpc>
-              <a:buNone/>
-            </a:pPr>
-            <a:r>
-              <a:rPr lang="en-US" sz="1150" dirty="0">
-                <a:solidFill>
-                  <a:srgbClr val="2B3A4E"/>
-                </a:solidFill>
-                <a:latin typeface="Montserrat" pitchFamily="34" charset="0"/>
-                <a:ea typeface="Montserrat" pitchFamily="34" charset="-122"/>
-                <a:cs typeface="Montserrat" pitchFamily="34" charset="-120"/>
-              </a:rPr>
-              <a:t>, realizado los días 21, 22 y 23 de octubre de 2026 en la Facultad de Medicina de la Universidad Westhill.</a:t>
-            </a:r>
-            <a:endParaRPr lang="en-US" sz="1150" dirty="0"/>
-          </a:p>
-        </p:txBody>
-      </p:sp>
-      <p:sp>
-        <p:nvSpPr>
-          <p:cNvPr id="12" name="Text 10"/>
-          <p:cNvSpPr txBox="1"/>
-          <p:nvPr/>
-        </p:nvSpPr>
-        <p:spPr>
-          <a:xfrm>
-            <a:off x="2286000" y="5120640"/>
-            <a:ext cx="5486400" cy="237744"/>
-          </a:xfrm>
-          <a:prstGeom prst="rect">
-            <a:avLst/>
-          </a:prstGeom>
-          <a:noFill/>
-          <a:ln/>
-        </p:spPr>
-        <p:txBody>
-          <a:bodyPr wrap="square" lIns="0" tIns="0" rIns="0" bIns="0" rtlCol="0" anchor="ctr"/>
-          <a:lstStyle/>
-          <a:p>
-            <a:pPr algn="ctr" indent="0" marL="0">
-              <a:buNone/>
-            </a:pPr>
-            <a:r>
-              <a:rPr lang="en-US" sz="1050" dirty="0">
-                <a:solidFill>
-                  <a:srgbClr val="266294"/>
-                </a:solidFill>
-                <a:latin typeface="Montserrat SemiBold" pitchFamily="34" charset="0"/>
-                <a:ea typeface="Montserrat SemiBold" pitchFamily="34" charset="-122"/>
-                <a:cs typeface="Montserrat SemiBold" pitchFamily="34" charset="-120"/>
-              </a:rPr>
-              <a:t>Ciudad de México, a 23 de octubre de 2026</a:t>
-            </a:r>
-            <a:endParaRPr lang="en-US" sz="1050" dirty="0"/>
-          </a:p>
-        </p:txBody>
-      </p:sp>
-      <p:sp>
-        <p:nvSpPr>
-          <p:cNvPr id="13" name="Shape 11"/>
+          <p:cNvPr id="11" name="Shape 6"/>
           <p:cNvSpPr/>
           <p:nvPr/>
         </p:nvSpPr>
@@ -4538,7 +4392,7 @@
       </p:sp>
       <p:sp>
         <p:nvSpPr>
-          <p:cNvPr id="14" name="Text 12"/>
+          <p:cNvPr id="12" name="Text 7"/>
           <p:cNvSpPr txBox="1"/>
           <p:nvPr/>
         </p:nvSpPr>
@@ -4577,7 +4431,7 @@
       </p:sp>
       <p:sp>
         <p:nvSpPr>
-          <p:cNvPr id="15" name="Text 13"/>
+          <p:cNvPr id="13" name="Text 8"/>
           <p:cNvSpPr txBox="1"/>
           <p:nvPr/>
         </p:nvSpPr>
@@ -4616,7 +4470,7 @@
       </p:sp>
       <p:sp>
         <p:nvSpPr>
-          <p:cNvPr id="16" name="Shape 14"/>
+          <p:cNvPr id="14" name="Shape 9"/>
           <p:cNvSpPr/>
           <p:nvPr/>
         </p:nvSpPr>
@@ -4639,7 +4493,7 @@
       </p:sp>
       <p:sp>
         <p:nvSpPr>
-          <p:cNvPr id="17" name="Text 15"/>
+          <p:cNvPr id="15" name="Text 10"/>
           <p:cNvSpPr txBox="1"/>
           <p:nvPr/>
         </p:nvSpPr>
@@ -4678,7 +4532,7 @@
       </p:sp>
       <p:sp>
         <p:nvSpPr>
-          <p:cNvPr id="18" name="Text 16"/>
+          <p:cNvPr id="16" name="Text 11"/>
           <p:cNvSpPr txBox="1"/>
           <p:nvPr/>
         </p:nvSpPr>
@@ -4717,7 +4571,7 @@
       </p:sp>
       <p:sp>
         <p:nvSpPr>
-          <p:cNvPr id="19" name="Text 17"/>
+          <p:cNvPr id="17" name="Text 12"/>
           <p:cNvSpPr txBox="1"/>
           <p:nvPr/>
         </p:nvSpPr>
@@ -4787,32 +4641,370 @@
         </p:nvSpPr>
         <p:spPr>
           <a:xfrm>
-            <a:off x="1188720" y="1536192"/>
-            <a:ext cx="7680960" cy="237744"/>
-          </a:xfrm>
-          <a:prstGeom prst="rect">
-            <a:avLst/>
-          </a:prstGeom>
-          <a:noFill/>
-          <a:ln/>
-        </p:spPr>
-        <p:txBody>
-          <a:bodyPr wrap="square" lIns="0" tIns="0" rIns="0" bIns="0" rtlCol="0" anchor="ctr"/>
-          <a:lstStyle/>
-          <a:p>
-            <a:pPr algn="ctr" indent="0" marL="0">
-              <a:buNone/>
-            </a:pPr>
-            <a:r>
-              <a:rPr lang="en-US" sz="1050" spc="300" kern="0" dirty="0">
+            <a:off x="1097280" y="1737360"/>
+            <a:ext cx="7863840" cy="777240"/>
+          </a:xfrm>
+          <a:prstGeom prst="rect">
+            <a:avLst/>
+          </a:prstGeom>
+          <a:noFill/>
+          <a:ln/>
+        </p:spPr>
+        <p:txBody>
+          <a:bodyPr wrap="square" lIns="0" tIns="0" rIns="0" bIns="0" rtlCol="0" anchor="ctr"/>
+          <a:lstStyle/>
+          <a:p>
+            <a:pPr algn="ctr" indent="0" marL="0">
+              <a:buNone/>
+            </a:pPr>
+            <a:r>
+              <a:rPr lang="en-US" sz="4200" spc="400" kern="0" dirty="0">
+                <a:solidFill>
+                  <a:srgbClr val="266294"/>
+                </a:solidFill>
+                <a:latin typeface="Montserrat ExtraBold" pitchFamily="34" charset="0"/>
+                <a:ea typeface="Montserrat ExtraBold" pitchFamily="34" charset="-122"/>
+                <a:cs typeface="Montserrat ExtraBold" pitchFamily="34" charset="-120"/>
+              </a:rPr>
+              <a:t>RECONOCIMIENTO</a:t>
+            </a:r>
+            <a:endParaRPr lang="en-US" sz="4200" dirty="0"/>
+          </a:p>
+        </p:txBody>
+      </p:sp>
+      <p:pic>
+        <p:nvPicPr>
+          <p:cNvPr id="3" name="Image 0" descr="preencoded.png">    </p:cNvPr>
+          <p:cNvPicPr>
+            <a:picLocks noChangeAspect="1"/>
+          </p:cNvPicPr>
+          <p:nvPr/>
+        </p:nvPicPr>
+        <p:blipFill>
+          <a:blip r:embed="rId1"/>
+          <a:stretch>
+            <a:fillRect/>
+          </a:stretch>
+        </p:blipFill>
+        <p:spPr>
+          <a:xfrm>
+            <a:off x="1874520" y="2642616"/>
+            <a:ext cx="1371600" cy="182880"/>
+          </a:xfrm>
+          <a:prstGeom prst="rect">
+            <a:avLst/>
+          </a:prstGeom>
+        </p:spPr>
+      </p:pic>
+      <p:pic>
+        <p:nvPicPr>
+          <p:cNvPr id="4" name="Image 1" descr="preencoded.png">    </p:cNvPr>
+          <p:cNvPicPr>
+            <a:picLocks noChangeAspect="1"/>
+          </p:cNvPicPr>
+          <p:nvPr/>
+        </p:nvPicPr>
+        <p:blipFill>
+          <a:blip r:embed="rId2"/>
+          <a:stretch>
+            <a:fillRect/>
+          </a:stretch>
+        </p:blipFill>
+        <p:spPr>
+          <a:xfrm>
+            <a:off x="6812280" y="2642616"/>
+            <a:ext cx="1371600" cy="182880"/>
+          </a:xfrm>
+          <a:prstGeom prst="rect">
+            <a:avLst/>
+          </a:prstGeom>
+        </p:spPr>
+      </p:pic>
+      <p:sp>
+        <p:nvSpPr>
+          <p:cNvPr id="5" name="Text 1"/>
+          <p:cNvSpPr txBox="1"/>
+          <p:nvPr/>
+        </p:nvSpPr>
+        <p:spPr>
+          <a:xfrm>
+            <a:off x="3291840" y="2560320"/>
+            <a:ext cx="3474720" cy="329184"/>
+          </a:xfrm>
+          <a:prstGeom prst="rect">
+            <a:avLst/>
+          </a:prstGeom>
+          <a:noFill/>
+          <a:ln/>
+        </p:spPr>
+        <p:txBody>
+          <a:bodyPr wrap="square" lIns="0" tIns="0" rIns="0" bIns="0" rtlCol="0" anchor="ctr"/>
+          <a:lstStyle/>
+          <a:p>
+            <a:pPr algn="ctr" indent="0" marL="0">
+              <a:buNone/>
+            </a:pPr>
+            <a:r>
+              <a:rPr lang="en-US" sz="1500" spc="500" kern="0" dirty="0">
+                <a:solidFill>
+                  <a:srgbClr val="0E2A47"/>
+                </a:solidFill>
+                <a:latin typeface="Montserrat ExtraBold" pitchFamily="34" charset="0"/>
+                <a:ea typeface="Montserrat ExtraBold" pitchFamily="34" charset="-122"/>
+                <a:cs typeface="Montserrat ExtraBold" pitchFamily="34" charset="-120"/>
+              </a:rPr>
+              <a:t>COMO PONENTE</a:t>
+            </a:r>
+            <a:endParaRPr lang="en-US" sz="1500" dirty="0"/>
+          </a:p>
+        </p:txBody>
+      </p:sp>
+      <p:sp>
+        <p:nvSpPr>
+          <p:cNvPr id="6" name="Text 2"/>
+          <p:cNvSpPr txBox="1"/>
+          <p:nvPr/>
+        </p:nvSpPr>
+        <p:spPr>
+          <a:xfrm>
+            <a:off x="1828800" y="3035808"/>
+            <a:ext cx="6400800" cy="274320"/>
+          </a:xfrm>
+          <a:prstGeom prst="rect">
+            <a:avLst/>
+          </a:prstGeom>
+          <a:noFill/>
+          <a:ln/>
+        </p:spPr>
+        <p:txBody>
+          <a:bodyPr wrap="square" lIns="0" tIns="0" rIns="0" bIns="0" rtlCol="0" anchor="ctr"/>
+          <a:lstStyle/>
+          <a:p>
+            <a:pPr algn="ctr" indent="0" marL="0">
+              <a:buNone/>
+            </a:pPr>
+            <a:r>
+              <a:rPr lang="en-US" sz="1250" dirty="0">
                 <a:solidFill>
                   <a:srgbClr val="5B6B7D"/>
+                </a:solidFill>
+                <a:latin typeface="Montserrat Medium" pitchFamily="34" charset="0"/>
+                <a:ea typeface="Montserrat Medium" pitchFamily="34" charset="-122"/>
+                <a:cs typeface="Montserrat Medium" pitchFamily="34" charset="-120"/>
+              </a:rPr>
+              <a:t>Otorga el presente reconocimiento a</a:t>
+            </a:r>
+            <a:endParaRPr lang="en-US" sz="1250" dirty="0"/>
+          </a:p>
+        </p:txBody>
+      </p:sp>
+      <p:sp>
+        <p:nvSpPr>
+          <p:cNvPr id="7" name="Text 3"/>
+          <p:cNvSpPr txBox="1"/>
+          <p:nvPr/>
+        </p:nvSpPr>
+        <p:spPr>
+          <a:xfrm>
+            <a:off x="1097280" y="3310128"/>
+            <a:ext cx="7863840" cy="713232"/>
+          </a:xfrm>
+          <a:prstGeom prst="rect">
+            <a:avLst/>
+          </a:prstGeom>
+          <a:noFill/>
+          <a:ln/>
+        </p:spPr>
+        <p:txBody>
+          <a:bodyPr wrap="square" lIns="0" tIns="0" rIns="0" bIns="0" rtlCol="0" anchor="ctr"/>
+          <a:lstStyle/>
+          <a:p>
+            <a:pPr algn="ctr" indent="0" marL="0">
+              <a:buNone/>
+            </a:pPr>
+            <a:r>
+              <a:rPr lang="en-US" sz="3600" dirty="0">
+                <a:solidFill>
+                  <a:srgbClr val="0E2A47"/>
+                </a:solidFill>
+                <a:latin typeface="Montserrat ExtraBold" pitchFamily="34" charset="0"/>
+                <a:ea typeface="Montserrat ExtraBold" pitchFamily="34" charset="-122"/>
+                <a:cs typeface="Montserrat ExtraBold" pitchFamily="34" charset="-120"/>
+              </a:rPr>
+              <a:t>Dr. Juan Manuel Ruiz Molina</a:t>
+            </a:r>
+            <a:endParaRPr lang="en-US" sz="3600" dirty="0"/>
+          </a:p>
+        </p:txBody>
+      </p:sp>
+      <p:pic>
+        <p:nvPicPr>
+          <p:cNvPr id="8" name="Image 2" descr="preencoded.png">    </p:cNvPr>
+          <p:cNvPicPr>
+            <a:picLocks noChangeAspect="1"/>
+          </p:cNvPicPr>
+          <p:nvPr/>
+        </p:nvPicPr>
+        <p:blipFill>
+          <a:blip r:embed="rId3"/>
+          <a:stretch>
+            <a:fillRect/>
+          </a:stretch>
+        </p:blipFill>
+        <p:spPr>
+          <a:xfrm>
+            <a:off x="2194560" y="3986784"/>
+            <a:ext cx="5669280" cy="201168"/>
+          </a:xfrm>
+          <a:prstGeom prst="rect">
+            <a:avLst/>
+          </a:prstGeom>
+        </p:spPr>
+      </p:pic>
+      <p:sp>
+        <p:nvSpPr>
+          <p:cNvPr id="9" name="Text 4"/>
+          <p:cNvSpPr txBox="1"/>
+          <p:nvPr/>
+        </p:nvSpPr>
+        <p:spPr>
+          <a:xfrm>
+            <a:off x="1417320" y="4206240"/>
+            <a:ext cx="7223760" cy="896112"/>
+          </a:xfrm>
+          <a:prstGeom prst="rect">
+            <a:avLst/>
+          </a:prstGeom>
+          <a:noFill/>
+          <a:ln/>
+        </p:spPr>
+        <p:txBody>
+          <a:bodyPr wrap="square" lIns="0" tIns="0" rIns="0" bIns="0" rtlCol="0" anchor="t"/>
+          <a:lstStyle/>
+          <a:p>
+            <a:pPr algn="ctr" indent="0" marL="0">
+              <a:lnSpc>
+                <a:spcPct val="112000"/>
+              </a:lnSpc>
+              <a:buNone/>
+            </a:pPr>
+            <a:r>
+              <a:rPr lang="en-US" sz="1150" dirty="0">
+                <a:solidFill>
+                  <a:srgbClr val="2B3A4E"/>
+                </a:solidFill>
+                <a:latin typeface="Montserrat" pitchFamily="34" charset="0"/>
+                <a:ea typeface="Montserrat" pitchFamily="34" charset="-122"/>
+                <a:cs typeface="Montserrat" pitchFamily="34" charset="-120"/>
+              </a:rPr>
+              <a:t>Por su valiosa participación como ponente con la conferencia </a:t>
+            </a:r>
+            <a:pPr algn="ctr" indent="0" marL="0">
+              <a:lnSpc>
+                <a:spcPct val="112000"/>
+              </a:lnSpc>
+              <a:buNone/>
+            </a:pPr>
+            <a:r>
+              <a:rPr lang="en-US" sz="1150" dirty="0">
+                <a:solidFill>
+                  <a:srgbClr val="0E2A47"/>
+                </a:solidFill>
+                <a:latin typeface="Montserrat ExtraBold" pitchFamily="34" charset="0"/>
+                <a:ea typeface="Montserrat ExtraBold" pitchFamily="34" charset="-122"/>
+                <a:cs typeface="Montserrat ExtraBold" pitchFamily="34" charset="-120"/>
+              </a:rPr>
+              <a:t>«Cirugía en el mundo real: visión de un experto»</a:t>
+            </a:r>
+            <a:pPr algn="ctr" indent="0" marL="0">
+              <a:lnSpc>
+                <a:spcPct val="112000"/>
+              </a:lnSpc>
+              <a:buNone/>
+            </a:pPr>
+            <a:r>
+              <a:rPr lang="en-US" sz="1150" dirty="0">
+                <a:solidFill>
+                  <a:srgbClr val="2B3A4E"/>
+                </a:solidFill>
+                <a:latin typeface="Montserrat" pitchFamily="34" charset="0"/>
+                <a:ea typeface="Montserrat" pitchFamily="34" charset="-122"/>
+                <a:cs typeface="Montserrat" pitchFamily="34" charset="-120"/>
+              </a:rPr>
+              <a:t> en el </a:t>
+            </a:r>
+            <a:pPr algn="ctr" indent="0" marL="0">
+              <a:lnSpc>
+                <a:spcPct val="112000"/>
+              </a:lnSpc>
+              <a:buNone/>
+            </a:pPr>
+            <a:r>
+              <a:rPr lang="en-US" sz="1150" dirty="0">
+                <a:solidFill>
+                  <a:srgbClr val="0E2A47"/>
+                </a:solidFill>
+                <a:latin typeface="Montserrat ExtraBold" pitchFamily="34" charset="0"/>
+                <a:ea typeface="Montserrat ExtraBold" pitchFamily="34" charset="-122"/>
+                <a:cs typeface="Montserrat ExtraBold" pitchFamily="34" charset="-120"/>
+              </a:rPr>
+              <a:t>Westhill Medical Leadership Summit 2026</a:t>
+            </a:r>
+            <a:pPr algn="ctr" indent="0" marL="0">
+              <a:lnSpc>
+                <a:spcPct val="112000"/>
+              </a:lnSpc>
+              <a:buNone/>
+            </a:pPr>
+            <a:r>
+              <a:rPr lang="en-US" sz="1150" dirty="0">
+                <a:solidFill>
+                  <a:srgbClr val="2B3A4E"/>
+                </a:solidFill>
+                <a:latin typeface="Montserrat" pitchFamily="34" charset="0"/>
+                <a:ea typeface="Montserrat" pitchFamily="34" charset="-122"/>
+                <a:cs typeface="Montserrat" pitchFamily="34" charset="-120"/>
+              </a:rPr>
+              <a:t>, realizado los días 21, 22 y 23 de octubre de 2026 en la Facultad de Medicina de la Universidad Westhill.</a:t>
+            </a:r>
+            <a:endParaRPr lang="en-US" sz="1150" dirty="0"/>
+          </a:p>
+        </p:txBody>
+      </p:sp>
+      <p:sp>
+        <p:nvSpPr>
+          <p:cNvPr id="10" name="Text 5"/>
+          <p:cNvSpPr txBox="1"/>
+          <p:nvPr/>
+        </p:nvSpPr>
+        <p:spPr>
+          <a:xfrm>
+            <a:off x="2286000" y="5120640"/>
+            <a:ext cx="5486400" cy="237744"/>
+          </a:xfrm>
+          <a:prstGeom prst="rect">
+            <a:avLst/>
+          </a:prstGeom>
+          <a:noFill/>
+          <a:ln/>
+        </p:spPr>
+        <p:txBody>
+          <a:bodyPr wrap="square" lIns="0" tIns="0" rIns="0" bIns="0" rtlCol="0" anchor="ctr"/>
+          <a:lstStyle/>
+          <a:p>
+            <a:pPr algn="ctr" indent="0" marL="0">
+              <a:buNone/>
+            </a:pPr>
+            <a:r>
+              <a:rPr lang="en-US" sz="1050" dirty="0">
+                <a:solidFill>
+                  <a:srgbClr val="266294"/>
                 </a:solidFill>
                 <a:latin typeface="Montserrat SemiBold" pitchFamily="34" charset="0"/>
                 <a:ea typeface="Montserrat SemiBold" pitchFamily="34" charset="-122"/>
                 <a:cs typeface="Montserrat SemiBold" pitchFamily="34" charset="-120"/>
               </a:rPr>
-              <a:t>FACULTAD DE MEDICINA</a:t>
+              <a:t>Ciudad de México, a 23 de octubre de 2026</a:t>
             </a:r>
             <a:endParaRPr lang="en-US" sz="1050" dirty="0"/>
           </a:p>
@@ -4820,395 +5012,7 @@
       </p:sp>
       <p:sp>
         <p:nvSpPr>
-          <p:cNvPr id="3" name="Text 1"/>
-          <p:cNvSpPr txBox="1"/>
-          <p:nvPr/>
-        </p:nvSpPr>
-        <p:spPr>
-          <a:xfrm>
-            <a:off x="1097280" y="1737360"/>
-            <a:ext cx="7863840" cy="777240"/>
-          </a:xfrm>
-          <a:prstGeom prst="rect">
-            <a:avLst/>
-          </a:prstGeom>
-          <a:noFill/>
-          <a:ln/>
-        </p:spPr>
-        <p:txBody>
-          <a:bodyPr wrap="square" lIns="0" tIns="0" rIns="0" bIns="0" rtlCol="0" anchor="ctr"/>
-          <a:lstStyle/>
-          <a:p>
-            <a:pPr algn="ctr" indent="0" marL="0">
-              <a:buNone/>
-            </a:pPr>
-            <a:r>
-              <a:rPr lang="en-US" sz="4200" spc="400" kern="0" dirty="0">
-                <a:solidFill>
-                  <a:srgbClr val="266294"/>
-                </a:solidFill>
-                <a:latin typeface="Montserrat ExtraBold" pitchFamily="34" charset="0"/>
-                <a:ea typeface="Montserrat ExtraBold" pitchFamily="34" charset="-122"/>
-                <a:cs typeface="Montserrat ExtraBold" pitchFamily="34" charset="-120"/>
-              </a:rPr>
-              <a:t>RECONOCIMIENTO</a:t>
-            </a:r>
-            <a:endParaRPr lang="en-US" sz="4200" dirty="0"/>
-          </a:p>
-        </p:txBody>
-      </p:sp>
-      <p:sp>
-        <p:nvSpPr>
-          <p:cNvPr id="4" name="Shape 2"/>
-          <p:cNvSpPr/>
-          <p:nvPr/>
-        </p:nvSpPr>
-        <p:spPr>
-          <a:xfrm>
-            <a:off x="2331720" y="2706624"/>
-            <a:ext cx="914400" cy="54864"/>
-          </a:xfrm>
-          <a:prstGeom prst="rect">
-            <a:avLst/>
-          </a:prstGeom>
-          <a:solidFill>
-            <a:srgbClr val="2DB34A"/>
-          </a:solidFill>
-          <a:ln/>
-        </p:spPr>
-      </p:sp>
-      <p:sp>
-        <p:nvSpPr>
-          <p:cNvPr id="5" name="Shape 3"/>
-          <p:cNvSpPr/>
-          <p:nvPr/>
-        </p:nvSpPr>
-        <p:spPr>
-          <a:xfrm>
-            <a:off x="6812280" y="2706624"/>
-            <a:ext cx="914400" cy="54864"/>
-          </a:xfrm>
-          <a:prstGeom prst="rect">
-            <a:avLst/>
-          </a:prstGeom>
-          <a:solidFill>
-            <a:srgbClr val="2DB34A"/>
-          </a:solidFill>
-          <a:ln/>
-        </p:spPr>
-      </p:sp>
-      <p:sp>
-        <p:nvSpPr>
-          <p:cNvPr id="6" name="Text 4"/>
-          <p:cNvSpPr txBox="1"/>
-          <p:nvPr/>
-        </p:nvSpPr>
-        <p:spPr>
-          <a:xfrm>
-            <a:off x="3291840" y="2560320"/>
-            <a:ext cx="3474720" cy="329184"/>
-          </a:xfrm>
-          <a:prstGeom prst="rect">
-            <a:avLst/>
-          </a:prstGeom>
-          <a:noFill/>
-          <a:ln/>
-        </p:spPr>
-        <p:txBody>
-          <a:bodyPr wrap="square" lIns="0" tIns="0" rIns="0" bIns="0" rtlCol="0" anchor="ctr"/>
-          <a:lstStyle/>
-          <a:p>
-            <a:pPr algn="ctr" indent="0" marL="0">
-              <a:buNone/>
-            </a:pPr>
-            <a:r>
-              <a:rPr lang="en-US" sz="1500" spc="500" kern="0" dirty="0">
-                <a:solidFill>
-                  <a:srgbClr val="0E2A47"/>
-                </a:solidFill>
-                <a:latin typeface="Montserrat ExtraBold" pitchFamily="34" charset="0"/>
-                <a:ea typeface="Montserrat ExtraBold" pitchFamily="34" charset="-122"/>
-                <a:cs typeface="Montserrat ExtraBold" pitchFamily="34" charset="-120"/>
-              </a:rPr>
-              <a:t>COMO PONENTE</a:t>
-            </a:r>
-            <a:endParaRPr lang="en-US" sz="1500" dirty="0"/>
-          </a:p>
-        </p:txBody>
-      </p:sp>
-      <p:sp>
-        <p:nvSpPr>
-          <p:cNvPr id="7" name="Text 5"/>
-          <p:cNvSpPr txBox="1"/>
-          <p:nvPr/>
-        </p:nvSpPr>
-        <p:spPr>
-          <a:xfrm>
-            <a:off x="1828800" y="3035808"/>
-            <a:ext cx="6400800" cy="274320"/>
-          </a:xfrm>
-          <a:prstGeom prst="rect">
-            <a:avLst/>
-          </a:prstGeom>
-          <a:noFill/>
-          <a:ln/>
-        </p:spPr>
-        <p:txBody>
-          <a:bodyPr wrap="square" lIns="0" tIns="0" rIns="0" bIns="0" rtlCol="0" anchor="ctr"/>
-          <a:lstStyle/>
-          <a:p>
-            <a:pPr algn="ctr" indent="0" marL="0">
-              <a:buNone/>
-            </a:pPr>
-            <a:r>
-              <a:rPr lang="en-US" sz="1250" dirty="0">
-                <a:solidFill>
-                  <a:srgbClr val="5B6B7D"/>
-                </a:solidFill>
-                <a:latin typeface="Montserrat Medium" pitchFamily="34" charset="0"/>
-                <a:ea typeface="Montserrat Medium" pitchFamily="34" charset="-122"/>
-                <a:cs typeface="Montserrat Medium" pitchFamily="34" charset="-120"/>
-              </a:rPr>
-              <a:t>Otorga el presente reconocimiento a</a:t>
-            </a:r>
-            <a:endParaRPr lang="en-US" sz="1250" dirty="0"/>
-          </a:p>
-        </p:txBody>
-      </p:sp>
-      <p:sp>
-        <p:nvSpPr>
-          <p:cNvPr id="8" name="Text 6"/>
-          <p:cNvSpPr txBox="1"/>
-          <p:nvPr/>
-        </p:nvSpPr>
-        <p:spPr>
-          <a:xfrm>
-            <a:off x="1097280" y="3310128"/>
-            <a:ext cx="7863840" cy="713232"/>
-          </a:xfrm>
-          <a:prstGeom prst="rect">
-            <a:avLst/>
-          </a:prstGeom>
-          <a:noFill/>
-          <a:ln/>
-        </p:spPr>
-        <p:txBody>
-          <a:bodyPr wrap="square" lIns="0" tIns="0" rIns="0" bIns="0" rtlCol="0" anchor="ctr"/>
-          <a:lstStyle/>
-          <a:p>
-            <a:pPr algn="ctr" indent="0" marL="0">
-              <a:buNone/>
-            </a:pPr>
-            <a:r>
-              <a:rPr lang="en-US" sz="3600" dirty="0">
-                <a:solidFill>
-                  <a:srgbClr val="0E2A47"/>
-                </a:solidFill>
-                <a:latin typeface="Montserrat ExtraBold" pitchFamily="34" charset="0"/>
-                <a:ea typeface="Montserrat ExtraBold" pitchFamily="34" charset="-122"/>
-                <a:cs typeface="Montserrat ExtraBold" pitchFamily="34" charset="-120"/>
-              </a:rPr>
-              <a:t>Dr. Juan Manuel Ruiz Molina</a:t>
-            </a:r>
-            <a:endParaRPr lang="en-US" sz="3600" dirty="0"/>
-          </a:p>
-        </p:txBody>
-      </p:sp>
-      <p:sp>
-        <p:nvSpPr>
-          <p:cNvPr id="9" name="Shape 7"/>
-          <p:cNvSpPr/>
-          <p:nvPr/>
-        </p:nvSpPr>
-        <p:spPr>
-          <a:xfrm>
-            <a:off x="2194560" y="4087368"/>
-            <a:ext cx="5669280" cy="0"/>
-          </a:xfrm>
-          <a:prstGeom prst="line">
-            <a:avLst/>
-          </a:prstGeom>
-          <a:noFill/>
-          <a:ln w="22225">
-            <a:solidFill>
-              <a:srgbClr val="F2C94C"/>
-            </a:solidFill>
-            <a:prstDash val="solid"/>
-          </a:ln>
-        </p:spPr>
-      </p:sp>
-      <p:sp>
-        <p:nvSpPr>
-          <p:cNvPr id="10" name="Shape 8"/>
-          <p:cNvSpPr/>
-          <p:nvPr/>
-        </p:nvSpPr>
-        <p:spPr>
-          <a:xfrm>
-            <a:off x="4974336" y="4032504"/>
-            <a:ext cx="109728" cy="109728"/>
-          </a:xfrm>
-          <a:prstGeom prst="ellipse">
-            <a:avLst/>
-          </a:prstGeom>
-          <a:solidFill>
-            <a:srgbClr val="F2C94C"/>
-          </a:solidFill>
-          <a:ln/>
-        </p:spPr>
-      </p:sp>
-      <p:sp>
-        <p:nvSpPr>
-          <p:cNvPr id="11" name="Text 9"/>
-          <p:cNvSpPr txBox="1"/>
-          <p:nvPr/>
-        </p:nvSpPr>
-        <p:spPr>
-          <a:xfrm>
-            <a:off x="1417320" y="4206240"/>
-            <a:ext cx="7223760" cy="896112"/>
-          </a:xfrm>
-          <a:prstGeom prst="rect">
-            <a:avLst/>
-          </a:prstGeom>
-          <a:noFill/>
-          <a:ln/>
-        </p:spPr>
-        <p:txBody>
-          <a:bodyPr wrap="square" lIns="0" tIns="0" rIns="0" bIns="0" rtlCol="0" anchor="t"/>
-          <a:lstStyle/>
-          <a:p>
-            <a:pPr algn="ctr" indent="0" marL="0">
-              <a:lnSpc>
-                <a:spcPct val="112000"/>
-              </a:lnSpc>
-              <a:buNone/>
-            </a:pPr>
-            <a:r>
-              <a:rPr lang="en-US" sz="1150" dirty="0">
-                <a:solidFill>
-                  <a:srgbClr val="2B3A4E"/>
-                </a:solidFill>
-                <a:latin typeface="Montserrat" pitchFamily="34" charset="0"/>
-                <a:ea typeface="Montserrat" pitchFamily="34" charset="-122"/>
-                <a:cs typeface="Montserrat" pitchFamily="34" charset="-120"/>
-              </a:rPr>
-              <a:t>Por su valiosa participación como ponente con la conferencia </a:t>
-            </a:r>
-            <a:pPr algn="ctr" indent="0" marL="0">
-              <a:lnSpc>
-                <a:spcPct val="112000"/>
-              </a:lnSpc>
-              <a:buNone/>
-            </a:pPr>
-            <a:r>
-              <a:rPr lang="en-US" sz="1150" dirty="0">
-                <a:solidFill>
-                  <a:srgbClr val="0E2A47"/>
-                </a:solidFill>
-                <a:latin typeface="Montserrat ExtraBold" pitchFamily="34" charset="0"/>
-                <a:ea typeface="Montserrat ExtraBold" pitchFamily="34" charset="-122"/>
-                <a:cs typeface="Montserrat ExtraBold" pitchFamily="34" charset="-120"/>
-              </a:rPr>
-              <a:t>«Cirugía en el mundo real: visión de un experto»</a:t>
-            </a:r>
-            <a:pPr algn="ctr" indent="0" marL="0">
-              <a:lnSpc>
-                <a:spcPct val="112000"/>
-              </a:lnSpc>
-              <a:buNone/>
-            </a:pPr>
-            <a:r>
-              <a:rPr lang="en-US" sz="1150" dirty="0">
-                <a:solidFill>
-                  <a:srgbClr val="2B3A4E"/>
-                </a:solidFill>
-                <a:latin typeface="Montserrat" pitchFamily="34" charset="0"/>
-                <a:ea typeface="Montserrat" pitchFamily="34" charset="-122"/>
-                <a:cs typeface="Montserrat" pitchFamily="34" charset="-120"/>
-              </a:rPr>
-              <a:t> en el </a:t>
-            </a:r>
-            <a:pPr algn="ctr" indent="0" marL="0">
-              <a:lnSpc>
-                <a:spcPct val="112000"/>
-              </a:lnSpc>
-              <a:buNone/>
-            </a:pPr>
-            <a:r>
-              <a:rPr lang="en-US" sz="1150" dirty="0">
-                <a:solidFill>
-                  <a:srgbClr val="0E2A47"/>
-                </a:solidFill>
-                <a:latin typeface="Montserrat ExtraBold" pitchFamily="34" charset="0"/>
-                <a:ea typeface="Montserrat ExtraBold" pitchFamily="34" charset="-122"/>
-                <a:cs typeface="Montserrat ExtraBold" pitchFamily="34" charset="-120"/>
-              </a:rPr>
-              <a:t>Westhill Medical Leadership Summit 2026</a:t>
-            </a:r>
-            <a:pPr algn="ctr" indent="0" marL="0">
-              <a:lnSpc>
-                <a:spcPct val="112000"/>
-              </a:lnSpc>
-              <a:buNone/>
-            </a:pPr>
-            <a:r>
-              <a:rPr lang="en-US" sz="1150" dirty="0">
-                <a:solidFill>
-                  <a:srgbClr val="2B3A4E"/>
-                </a:solidFill>
-                <a:latin typeface="Montserrat" pitchFamily="34" charset="0"/>
-                <a:ea typeface="Montserrat" pitchFamily="34" charset="-122"/>
-                <a:cs typeface="Montserrat" pitchFamily="34" charset="-120"/>
-              </a:rPr>
-              <a:t>, realizado los días 21, 22 y 23 de octubre de 2026 en la Facultad de Medicina de la Universidad Westhill.</a:t>
-            </a:r>
-            <a:endParaRPr lang="en-US" sz="1150" dirty="0"/>
-          </a:p>
-        </p:txBody>
-      </p:sp>
-      <p:sp>
-        <p:nvSpPr>
-          <p:cNvPr id="12" name="Text 10"/>
-          <p:cNvSpPr txBox="1"/>
-          <p:nvPr/>
-        </p:nvSpPr>
-        <p:spPr>
-          <a:xfrm>
-            <a:off x="2286000" y="5120640"/>
-            <a:ext cx="5486400" cy="237744"/>
-          </a:xfrm>
-          <a:prstGeom prst="rect">
-            <a:avLst/>
-          </a:prstGeom>
-          <a:noFill/>
-          <a:ln/>
-        </p:spPr>
-        <p:txBody>
-          <a:bodyPr wrap="square" lIns="0" tIns="0" rIns="0" bIns="0" rtlCol="0" anchor="ctr"/>
-          <a:lstStyle/>
-          <a:p>
-            <a:pPr algn="ctr" indent="0" marL="0">
-              <a:buNone/>
-            </a:pPr>
-            <a:r>
-              <a:rPr lang="en-US" sz="1050" dirty="0">
-                <a:solidFill>
-                  <a:srgbClr val="266294"/>
-                </a:solidFill>
-                <a:latin typeface="Montserrat SemiBold" pitchFamily="34" charset="0"/>
-                <a:ea typeface="Montserrat SemiBold" pitchFamily="34" charset="-122"/>
-                <a:cs typeface="Montserrat SemiBold" pitchFamily="34" charset="-120"/>
-              </a:rPr>
-              <a:t>Ciudad de México, a 23 de octubre de 2026</a:t>
-            </a:r>
-            <a:endParaRPr lang="en-US" sz="1050" dirty="0"/>
-          </a:p>
-        </p:txBody>
-      </p:sp>
-      <p:sp>
-        <p:nvSpPr>
-          <p:cNvPr id="13" name="Shape 11"/>
+          <p:cNvPr id="11" name="Shape 6"/>
           <p:cNvSpPr/>
           <p:nvPr/>
         </p:nvSpPr>
@@ -5231,7 +5035,7 @@
       </p:sp>
       <p:sp>
         <p:nvSpPr>
-          <p:cNvPr id="14" name="Text 12"/>
+          <p:cNvPr id="12" name="Text 7"/>
           <p:cNvSpPr txBox="1"/>
           <p:nvPr/>
         </p:nvSpPr>
@@ -5270,7 +5074,7 @@
       </p:sp>
       <p:sp>
         <p:nvSpPr>
-          <p:cNvPr id="15" name="Text 13"/>
+          <p:cNvPr id="13" name="Text 8"/>
           <p:cNvSpPr txBox="1"/>
           <p:nvPr/>
         </p:nvSpPr>
@@ -5309,7 +5113,7 @@
       </p:sp>
       <p:sp>
         <p:nvSpPr>
-          <p:cNvPr id="16" name="Shape 14"/>
+          <p:cNvPr id="14" name="Shape 9"/>
           <p:cNvSpPr/>
           <p:nvPr/>
         </p:nvSpPr>
@@ -5332,7 +5136,7 @@
       </p:sp>
       <p:sp>
         <p:nvSpPr>
-          <p:cNvPr id="17" name="Text 15"/>
+          <p:cNvPr id="15" name="Text 10"/>
           <p:cNvSpPr txBox="1"/>
           <p:nvPr/>
         </p:nvSpPr>
@@ -5371,7 +5175,7 @@
       </p:sp>
       <p:sp>
         <p:nvSpPr>
-          <p:cNvPr id="18" name="Text 16"/>
+          <p:cNvPr id="16" name="Text 11"/>
           <p:cNvSpPr txBox="1"/>
           <p:nvPr/>
         </p:nvSpPr>
@@ -5410,7 +5214,7 @@
       </p:sp>
       <p:sp>
         <p:nvSpPr>
-          <p:cNvPr id="19" name="Text 17"/>
+          <p:cNvPr id="17" name="Text 12"/>
           <p:cNvSpPr txBox="1"/>
           <p:nvPr/>
         </p:nvSpPr>
@@ -5480,32 +5284,370 @@
         </p:nvSpPr>
         <p:spPr>
           <a:xfrm>
-            <a:off x="1188720" y="1536192"/>
-            <a:ext cx="7680960" cy="237744"/>
-          </a:xfrm>
-          <a:prstGeom prst="rect">
-            <a:avLst/>
-          </a:prstGeom>
-          <a:noFill/>
-          <a:ln/>
-        </p:spPr>
-        <p:txBody>
-          <a:bodyPr wrap="square" lIns="0" tIns="0" rIns="0" bIns="0" rtlCol="0" anchor="ctr"/>
-          <a:lstStyle/>
-          <a:p>
-            <a:pPr algn="ctr" indent="0" marL="0">
-              <a:buNone/>
-            </a:pPr>
-            <a:r>
-              <a:rPr lang="en-US" sz="1050" spc="300" kern="0" dirty="0">
+            <a:off x="1097280" y="1737360"/>
+            <a:ext cx="7863840" cy="777240"/>
+          </a:xfrm>
+          <a:prstGeom prst="rect">
+            <a:avLst/>
+          </a:prstGeom>
+          <a:noFill/>
+          <a:ln/>
+        </p:spPr>
+        <p:txBody>
+          <a:bodyPr wrap="square" lIns="0" tIns="0" rIns="0" bIns="0" rtlCol="0" anchor="ctr"/>
+          <a:lstStyle/>
+          <a:p>
+            <a:pPr algn="ctr" indent="0" marL="0">
+              <a:buNone/>
+            </a:pPr>
+            <a:r>
+              <a:rPr lang="en-US" sz="4200" spc="400" kern="0" dirty="0">
+                <a:solidFill>
+                  <a:srgbClr val="266294"/>
+                </a:solidFill>
+                <a:latin typeface="Montserrat ExtraBold" pitchFamily="34" charset="0"/>
+                <a:ea typeface="Montserrat ExtraBold" pitchFamily="34" charset="-122"/>
+                <a:cs typeface="Montserrat ExtraBold" pitchFamily="34" charset="-120"/>
+              </a:rPr>
+              <a:t>RECONOCIMIENTO</a:t>
+            </a:r>
+            <a:endParaRPr lang="en-US" sz="4200" dirty="0"/>
+          </a:p>
+        </p:txBody>
+      </p:sp>
+      <p:pic>
+        <p:nvPicPr>
+          <p:cNvPr id="3" name="Image 0" descr="preencoded.png">    </p:cNvPr>
+          <p:cNvPicPr>
+            <a:picLocks noChangeAspect="1"/>
+          </p:cNvPicPr>
+          <p:nvPr/>
+        </p:nvPicPr>
+        <p:blipFill>
+          <a:blip r:embed="rId1"/>
+          <a:stretch>
+            <a:fillRect/>
+          </a:stretch>
+        </p:blipFill>
+        <p:spPr>
+          <a:xfrm>
+            <a:off x="1874520" y="2642616"/>
+            <a:ext cx="1371600" cy="182880"/>
+          </a:xfrm>
+          <a:prstGeom prst="rect">
+            <a:avLst/>
+          </a:prstGeom>
+        </p:spPr>
+      </p:pic>
+      <p:pic>
+        <p:nvPicPr>
+          <p:cNvPr id="4" name="Image 1" descr="preencoded.png">    </p:cNvPr>
+          <p:cNvPicPr>
+            <a:picLocks noChangeAspect="1"/>
+          </p:cNvPicPr>
+          <p:nvPr/>
+        </p:nvPicPr>
+        <p:blipFill>
+          <a:blip r:embed="rId2"/>
+          <a:stretch>
+            <a:fillRect/>
+          </a:stretch>
+        </p:blipFill>
+        <p:spPr>
+          <a:xfrm>
+            <a:off x="6812280" y="2642616"/>
+            <a:ext cx="1371600" cy="182880"/>
+          </a:xfrm>
+          <a:prstGeom prst="rect">
+            <a:avLst/>
+          </a:prstGeom>
+        </p:spPr>
+      </p:pic>
+      <p:sp>
+        <p:nvSpPr>
+          <p:cNvPr id="5" name="Text 1"/>
+          <p:cNvSpPr txBox="1"/>
+          <p:nvPr/>
+        </p:nvSpPr>
+        <p:spPr>
+          <a:xfrm>
+            <a:off x="3291840" y="2560320"/>
+            <a:ext cx="3474720" cy="329184"/>
+          </a:xfrm>
+          <a:prstGeom prst="rect">
+            <a:avLst/>
+          </a:prstGeom>
+          <a:noFill/>
+          <a:ln/>
+        </p:spPr>
+        <p:txBody>
+          <a:bodyPr wrap="square" lIns="0" tIns="0" rIns="0" bIns="0" rtlCol="0" anchor="ctr"/>
+          <a:lstStyle/>
+          <a:p>
+            <a:pPr algn="ctr" indent="0" marL="0">
+              <a:buNone/>
+            </a:pPr>
+            <a:r>
+              <a:rPr lang="en-US" sz="1500" spc="500" kern="0" dirty="0">
+                <a:solidFill>
+                  <a:srgbClr val="0E2A47"/>
+                </a:solidFill>
+                <a:latin typeface="Montserrat ExtraBold" pitchFamily="34" charset="0"/>
+                <a:ea typeface="Montserrat ExtraBold" pitchFamily="34" charset="-122"/>
+                <a:cs typeface="Montserrat ExtraBold" pitchFamily="34" charset="-120"/>
+              </a:rPr>
+              <a:t>COMO PONENTE</a:t>
+            </a:r>
+            <a:endParaRPr lang="en-US" sz="1500" dirty="0"/>
+          </a:p>
+        </p:txBody>
+      </p:sp>
+      <p:sp>
+        <p:nvSpPr>
+          <p:cNvPr id="6" name="Text 2"/>
+          <p:cNvSpPr txBox="1"/>
+          <p:nvPr/>
+        </p:nvSpPr>
+        <p:spPr>
+          <a:xfrm>
+            <a:off x="1828800" y="3035808"/>
+            <a:ext cx="6400800" cy="274320"/>
+          </a:xfrm>
+          <a:prstGeom prst="rect">
+            <a:avLst/>
+          </a:prstGeom>
+          <a:noFill/>
+          <a:ln/>
+        </p:spPr>
+        <p:txBody>
+          <a:bodyPr wrap="square" lIns="0" tIns="0" rIns="0" bIns="0" rtlCol="0" anchor="ctr"/>
+          <a:lstStyle/>
+          <a:p>
+            <a:pPr algn="ctr" indent="0" marL="0">
+              <a:buNone/>
+            </a:pPr>
+            <a:r>
+              <a:rPr lang="en-US" sz="1250" dirty="0">
                 <a:solidFill>
                   <a:srgbClr val="5B6B7D"/>
+                </a:solidFill>
+                <a:latin typeface="Montserrat Medium" pitchFamily="34" charset="0"/>
+                <a:ea typeface="Montserrat Medium" pitchFamily="34" charset="-122"/>
+                <a:cs typeface="Montserrat Medium" pitchFamily="34" charset="-120"/>
+              </a:rPr>
+              <a:t>Otorga el presente reconocimiento a</a:t>
+            </a:r>
+            <a:endParaRPr lang="en-US" sz="1250" dirty="0"/>
+          </a:p>
+        </p:txBody>
+      </p:sp>
+      <p:sp>
+        <p:nvSpPr>
+          <p:cNvPr id="7" name="Text 3"/>
+          <p:cNvSpPr txBox="1"/>
+          <p:nvPr/>
+        </p:nvSpPr>
+        <p:spPr>
+          <a:xfrm>
+            <a:off x="1097280" y="3310128"/>
+            <a:ext cx="7863840" cy="713232"/>
+          </a:xfrm>
+          <a:prstGeom prst="rect">
+            <a:avLst/>
+          </a:prstGeom>
+          <a:noFill/>
+          <a:ln/>
+        </p:spPr>
+        <p:txBody>
+          <a:bodyPr wrap="square" lIns="0" tIns="0" rIns="0" bIns="0" rtlCol="0" anchor="ctr"/>
+          <a:lstStyle/>
+          <a:p>
+            <a:pPr algn="ctr" indent="0" marL="0">
+              <a:buNone/>
+            </a:pPr>
+            <a:r>
+              <a:rPr lang="en-US" sz="3800" dirty="0">
+                <a:solidFill>
+                  <a:srgbClr val="0E2A47"/>
+                </a:solidFill>
+                <a:latin typeface="Montserrat ExtraBold" pitchFamily="34" charset="0"/>
+                <a:ea typeface="Montserrat ExtraBold" pitchFamily="34" charset="-122"/>
+                <a:cs typeface="Montserrat ExtraBold" pitchFamily="34" charset="-120"/>
+              </a:rPr>
+              <a:t>Dr. Norberto Ruiz Molina</a:t>
+            </a:r>
+            <a:endParaRPr lang="en-US" sz="3800" dirty="0"/>
+          </a:p>
+        </p:txBody>
+      </p:sp>
+      <p:pic>
+        <p:nvPicPr>
+          <p:cNvPr id="8" name="Image 2" descr="preencoded.png">    </p:cNvPr>
+          <p:cNvPicPr>
+            <a:picLocks noChangeAspect="1"/>
+          </p:cNvPicPr>
+          <p:nvPr/>
+        </p:nvPicPr>
+        <p:blipFill>
+          <a:blip r:embed="rId3"/>
+          <a:stretch>
+            <a:fillRect/>
+          </a:stretch>
+        </p:blipFill>
+        <p:spPr>
+          <a:xfrm>
+            <a:off x="2194560" y="3986784"/>
+            <a:ext cx="5669280" cy="201168"/>
+          </a:xfrm>
+          <a:prstGeom prst="rect">
+            <a:avLst/>
+          </a:prstGeom>
+        </p:spPr>
+      </p:pic>
+      <p:sp>
+        <p:nvSpPr>
+          <p:cNvPr id="9" name="Text 4"/>
+          <p:cNvSpPr txBox="1"/>
+          <p:nvPr/>
+        </p:nvSpPr>
+        <p:spPr>
+          <a:xfrm>
+            <a:off x="1417320" y="4206240"/>
+            <a:ext cx="7223760" cy="896112"/>
+          </a:xfrm>
+          <a:prstGeom prst="rect">
+            <a:avLst/>
+          </a:prstGeom>
+          <a:noFill/>
+          <a:ln/>
+        </p:spPr>
+        <p:txBody>
+          <a:bodyPr wrap="square" lIns="0" tIns="0" rIns="0" bIns="0" rtlCol="0" anchor="t"/>
+          <a:lstStyle/>
+          <a:p>
+            <a:pPr algn="ctr" indent="0" marL="0">
+              <a:lnSpc>
+                <a:spcPct val="112000"/>
+              </a:lnSpc>
+              <a:buNone/>
+            </a:pPr>
+            <a:r>
+              <a:rPr lang="en-US" sz="1150" dirty="0">
+                <a:solidFill>
+                  <a:srgbClr val="2B3A4E"/>
+                </a:solidFill>
+                <a:latin typeface="Montserrat" pitchFamily="34" charset="0"/>
+                <a:ea typeface="Montserrat" pitchFamily="34" charset="-122"/>
+                <a:cs typeface="Montserrat" pitchFamily="34" charset="-120"/>
+              </a:rPr>
+              <a:t>Por su valiosa participación como ponente con la conferencia </a:t>
+            </a:r>
+            <a:pPr algn="ctr" indent="0" marL="0">
+              <a:lnSpc>
+                <a:spcPct val="112000"/>
+              </a:lnSpc>
+              <a:buNone/>
+            </a:pPr>
+            <a:r>
+              <a:rPr lang="en-US" sz="1150" dirty="0">
+                <a:solidFill>
+                  <a:srgbClr val="0E2A47"/>
+                </a:solidFill>
+                <a:latin typeface="Montserrat ExtraBold" pitchFamily="34" charset="0"/>
+                <a:ea typeface="Montserrat ExtraBold" pitchFamily="34" charset="-122"/>
+                <a:cs typeface="Montserrat ExtraBold" pitchFamily="34" charset="-120"/>
+              </a:rPr>
+              <a:t>«Enfermedad por reflujo gastroesofágico»</a:t>
+            </a:r>
+            <a:pPr algn="ctr" indent="0" marL="0">
+              <a:lnSpc>
+                <a:spcPct val="112000"/>
+              </a:lnSpc>
+              <a:buNone/>
+            </a:pPr>
+            <a:r>
+              <a:rPr lang="en-US" sz="1150" dirty="0">
+                <a:solidFill>
+                  <a:srgbClr val="2B3A4E"/>
+                </a:solidFill>
+                <a:latin typeface="Montserrat" pitchFamily="34" charset="0"/>
+                <a:ea typeface="Montserrat" pitchFamily="34" charset="-122"/>
+                <a:cs typeface="Montserrat" pitchFamily="34" charset="-120"/>
+              </a:rPr>
+              <a:t> en el </a:t>
+            </a:r>
+            <a:pPr algn="ctr" indent="0" marL="0">
+              <a:lnSpc>
+                <a:spcPct val="112000"/>
+              </a:lnSpc>
+              <a:buNone/>
+            </a:pPr>
+            <a:r>
+              <a:rPr lang="en-US" sz="1150" dirty="0">
+                <a:solidFill>
+                  <a:srgbClr val="0E2A47"/>
+                </a:solidFill>
+                <a:latin typeface="Montserrat ExtraBold" pitchFamily="34" charset="0"/>
+                <a:ea typeface="Montserrat ExtraBold" pitchFamily="34" charset="-122"/>
+                <a:cs typeface="Montserrat ExtraBold" pitchFamily="34" charset="-120"/>
+              </a:rPr>
+              <a:t>Westhill Medical Leadership Summit 2026</a:t>
+            </a:r>
+            <a:pPr algn="ctr" indent="0" marL="0">
+              <a:lnSpc>
+                <a:spcPct val="112000"/>
+              </a:lnSpc>
+              <a:buNone/>
+            </a:pPr>
+            <a:r>
+              <a:rPr lang="en-US" sz="1150" dirty="0">
+                <a:solidFill>
+                  <a:srgbClr val="2B3A4E"/>
+                </a:solidFill>
+                <a:latin typeface="Montserrat" pitchFamily="34" charset="0"/>
+                <a:ea typeface="Montserrat" pitchFamily="34" charset="-122"/>
+                <a:cs typeface="Montserrat" pitchFamily="34" charset="-120"/>
+              </a:rPr>
+              <a:t>, realizado los días 21, 22 y 23 de octubre de 2026 en la Facultad de Medicina de la Universidad Westhill.</a:t>
+            </a:r>
+            <a:endParaRPr lang="en-US" sz="1150" dirty="0"/>
+          </a:p>
+        </p:txBody>
+      </p:sp>
+      <p:sp>
+        <p:nvSpPr>
+          <p:cNvPr id="10" name="Text 5"/>
+          <p:cNvSpPr txBox="1"/>
+          <p:nvPr/>
+        </p:nvSpPr>
+        <p:spPr>
+          <a:xfrm>
+            <a:off x="2286000" y="5120640"/>
+            <a:ext cx="5486400" cy="237744"/>
+          </a:xfrm>
+          <a:prstGeom prst="rect">
+            <a:avLst/>
+          </a:prstGeom>
+          <a:noFill/>
+          <a:ln/>
+        </p:spPr>
+        <p:txBody>
+          <a:bodyPr wrap="square" lIns="0" tIns="0" rIns="0" bIns="0" rtlCol="0" anchor="ctr"/>
+          <a:lstStyle/>
+          <a:p>
+            <a:pPr algn="ctr" indent="0" marL="0">
+              <a:buNone/>
+            </a:pPr>
+            <a:r>
+              <a:rPr lang="en-US" sz="1050" dirty="0">
+                <a:solidFill>
+                  <a:srgbClr val="266294"/>
                 </a:solidFill>
                 <a:latin typeface="Montserrat SemiBold" pitchFamily="34" charset="0"/>
                 <a:ea typeface="Montserrat SemiBold" pitchFamily="34" charset="-122"/>
                 <a:cs typeface="Montserrat SemiBold" pitchFamily="34" charset="-120"/>
               </a:rPr>
-              <a:t>FACULTAD DE MEDICINA</a:t>
+              <a:t>Ciudad de México, a 23 de octubre de 2026</a:t>
             </a:r>
             <a:endParaRPr lang="en-US" sz="1050" dirty="0"/>
           </a:p>
@@ -5513,395 +5655,7 @@
       </p:sp>
       <p:sp>
         <p:nvSpPr>
-          <p:cNvPr id="3" name="Text 1"/>
-          <p:cNvSpPr txBox="1"/>
-          <p:nvPr/>
-        </p:nvSpPr>
-        <p:spPr>
-          <a:xfrm>
-            <a:off x="1097280" y="1737360"/>
-            <a:ext cx="7863840" cy="777240"/>
-          </a:xfrm>
-          <a:prstGeom prst="rect">
-            <a:avLst/>
-          </a:prstGeom>
-          <a:noFill/>
-          <a:ln/>
-        </p:spPr>
-        <p:txBody>
-          <a:bodyPr wrap="square" lIns="0" tIns="0" rIns="0" bIns="0" rtlCol="0" anchor="ctr"/>
-          <a:lstStyle/>
-          <a:p>
-            <a:pPr algn="ctr" indent="0" marL="0">
-              <a:buNone/>
-            </a:pPr>
-            <a:r>
-              <a:rPr lang="en-US" sz="4200" spc="400" kern="0" dirty="0">
-                <a:solidFill>
-                  <a:srgbClr val="266294"/>
-                </a:solidFill>
-                <a:latin typeface="Montserrat ExtraBold" pitchFamily="34" charset="0"/>
-                <a:ea typeface="Montserrat ExtraBold" pitchFamily="34" charset="-122"/>
-                <a:cs typeface="Montserrat ExtraBold" pitchFamily="34" charset="-120"/>
-              </a:rPr>
-              <a:t>RECONOCIMIENTO</a:t>
-            </a:r>
-            <a:endParaRPr lang="en-US" sz="4200" dirty="0"/>
-          </a:p>
-        </p:txBody>
-      </p:sp>
-      <p:sp>
-        <p:nvSpPr>
-          <p:cNvPr id="4" name="Shape 2"/>
-          <p:cNvSpPr/>
-          <p:nvPr/>
-        </p:nvSpPr>
-        <p:spPr>
-          <a:xfrm>
-            <a:off x="2331720" y="2706624"/>
-            <a:ext cx="914400" cy="54864"/>
-          </a:xfrm>
-          <a:prstGeom prst="rect">
-            <a:avLst/>
-          </a:prstGeom>
-          <a:solidFill>
-            <a:srgbClr val="2DB34A"/>
-          </a:solidFill>
-          <a:ln/>
-        </p:spPr>
-      </p:sp>
-      <p:sp>
-        <p:nvSpPr>
-          <p:cNvPr id="5" name="Shape 3"/>
-          <p:cNvSpPr/>
-          <p:nvPr/>
-        </p:nvSpPr>
-        <p:spPr>
-          <a:xfrm>
-            <a:off x="6812280" y="2706624"/>
-            <a:ext cx="914400" cy="54864"/>
-          </a:xfrm>
-          <a:prstGeom prst="rect">
-            <a:avLst/>
-          </a:prstGeom>
-          <a:solidFill>
-            <a:srgbClr val="2DB34A"/>
-          </a:solidFill>
-          <a:ln/>
-        </p:spPr>
-      </p:sp>
-      <p:sp>
-        <p:nvSpPr>
-          <p:cNvPr id="6" name="Text 4"/>
-          <p:cNvSpPr txBox="1"/>
-          <p:nvPr/>
-        </p:nvSpPr>
-        <p:spPr>
-          <a:xfrm>
-            <a:off x="3291840" y="2560320"/>
-            <a:ext cx="3474720" cy="329184"/>
-          </a:xfrm>
-          <a:prstGeom prst="rect">
-            <a:avLst/>
-          </a:prstGeom>
-          <a:noFill/>
-          <a:ln/>
-        </p:spPr>
-        <p:txBody>
-          <a:bodyPr wrap="square" lIns="0" tIns="0" rIns="0" bIns="0" rtlCol="0" anchor="ctr"/>
-          <a:lstStyle/>
-          <a:p>
-            <a:pPr algn="ctr" indent="0" marL="0">
-              <a:buNone/>
-            </a:pPr>
-            <a:r>
-              <a:rPr lang="en-US" sz="1500" spc="500" kern="0" dirty="0">
-                <a:solidFill>
-                  <a:srgbClr val="0E2A47"/>
-                </a:solidFill>
-                <a:latin typeface="Montserrat ExtraBold" pitchFamily="34" charset="0"/>
-                <a:ea typeface="Montserrat ExtraBold" pitchFamily="34" charset="-122"/>
-                <a:cs typeface="Montserrat ExtraBold" pitchFamily="34" charset="-120"/>
-              </a:rPr>
-              <a:t>COMO PONENTE</a:t>
-            </a:r>
-            <a:endParaRPr lang="en-US" sz="1500" dirty="0"/>
-          </a:p>
-        </p:txBody>
-      </p:sp>
-      <p:sp>
-        <p:nvSpPr>
-          <p:cNvPr id="7" name="Text 5"/>
-          <p:cNvSpPr txBox="1"/>
-          <p:nvPr/>
-        </p:nvSpPr>
-        <p:spPr>
-          <a:xfrm>
-            <a:off x="1828800" y="3035808"/>
-            <a:ext cx="6400800" cy="274320"/>
-          </a:xfrm>
-          <a:prstGeom prst="rect">
-            <a:avLst/>
-          </a:prstGeom>
-          <a:noFill/>
-          <a:ln/>
-        </p:spPr>
-        <p:txBody>
-          <a:bodyPr wrap="square" lIns="0" tIns="0" rIns="0" bIns="0" rtlCol="0" anchor="ctr"/>
-          <a:lstStyle/>
-          <a:p>
-            <a:pPr algn="ctr" indent="0" marL="0">
-              <a:buNone/>
-            </a:pPr>
-            <a:r>
-              <a:rPr lang="en-US" sz="1250" dirty="0">
-                <a:solidFill>
-                  <a:srgbClr val="5B6B7D"/>
-                </a:solidFill>
-                <a:latin typeface="Montserrat Medium" pitchFamily="34" charset="0"/>
-                <a:ea typeface="Montserrat Medium" pitchFamily="34" charset="-122"/>
-                <a:cs typeface="Montserrat Medium" pitchFamily="34" charset="-120"/>
-              </a:rPr>
-              <a:t>Otorga el presente reconocimiento a</a:t>
-            </a:r>
-            <a:endParaRPr lang="en-US" sz="1250" dirty="0"/>
-          </a:p>
-        </p:txBody>
-      </p:sp>
-      <p:sp>
-        <p:nvSpPr>
-          <p:cNvPr id="8" name="Text 6"/>
-          <p:cNvSpPr txBox="1"/>
-          <p:nvPr/>
-        </p:nvSpPr>
-        <p:spPr>
-          <a:xfrm>
-            <a:off x="1097280" y="3310128"/>
-            <a:ext cx="7863840" cy="713232"/>
-          </a:xfrm>
-          <a:prstGeom prst="rect">
-            <a:avLst/>
-          </a:prstGeom>
-          <a:noFill/>
-          <a:ln/>
-        </p:spPr>
-        <p:txBody>
-          <a:bodyPr wrap="square" lIns="0" tIns="0" rIns="0" bIns="0" rtlCol="0" anchor="ctr"/>
-          <a:lstStyle/>
-          <a:p>
-            <a:pPr algn="ctr" indent="0" marL="0">
-              <a:buNone/>
-            </a:pPr>
-            <a:r>
-              <a:rPr lang="en-US" sz="3800" dirty="0">
-                <a:solidFill>
-                  <a:srgbClr val="0E2A47"/>
-                </a:solidFill>
-                <a:latin typeface="Montserrat ExtraBold" pitchFamily="34" charset="0"/>
-                <a:ea typeface="Montserrat ExtraBold" pitchFamily="34" charset="-122"/>
-                <a:cs typeface="Montserrat ExtraBold" pitchFamily="34" charset="-120"/>
-              </a:rPr>
-              <a:t>Dr. Norberto Ruiz Molina</a:t>
-            </a:r>
-            <a:endParaRPr lang="en-US" sz="3800" dirty="0"/>
-          </a:p>
-        </p:txBody>
-      </p:sp>
-      <p:sp>
-        <p:nvSpPr>
-          <p:cNvPr id="9" name="Shape 7"/>
-          <p:cNvSpPr/>
-          <p:nvPr/>
-        </p:nvSpPr>
-        <p:spPr>
-          <a:xfrm>
-            <a:off x="2194560" y="4087368"/>
-            <a:ext cx="5669280" cy="0"/>
-          </a:xfrm>
-          <a:prstGeom prst="line">
-            <a:avLst/>
-          </a:prstGeom>
-          <a:noFill/>
-          <a:ln w="22225">
-            <a:solidFill>
-              <a:srgbClr val="F2C94C"/>
-            </a:solidFill>
-            <a:prstDash val="solid"/>
-          </a:ln>
-        </p:spPr>
-      </p:sp>
-      <p:sp>
-        <p:nvSpPr>
-          <p:cNvPr id="10" name="Shape 8"/>
-          <p:cNvSpPr/>
-          <p:nvPr/>
-        </p:nvSpPr>
-        <p:spPr>
-          <a:xfrm>
-            <a:off x="4974336" y="4032504"/>
-            <a:ext cx="109728" cy="109728"/>
-          </a:xfrm>
-          <a:prstGeom prst="ellipse">
-            <a:avLst/>
-          </a:prstGeom>
-          <a:solidFill>
-            <a:srgbClr val="F2C94C"/>
-          </a:solidFill>
-          <a:ln/>
-        </p:spPr>
-      </p:sp>
-      <p:sp>
-        <p:nvSpPr>
-          <p:cNvPr id="11" name="Text 9"/>
-          <p:cNvSpPr txBox="1"/>
-          <p:nvPr/>
-        </p:nvSpPr>
-        <p:spPr>
-          <a:xfrm>
-            <a:off x="1417320" y="4206240"/>
-            <a:ext cx="7223760" cy="896112"/>
-          </a:xfrm>
-          <a:prstGeom prst="rect">
-            <a:avLst/>
-          </a:prstGeom>
-          <a:noFill/>
-          <a:ln/>
-        </p:spPr>
-        <p:txBody>
-          <a:bodyPr wrap="square" lIns="0" tIns="0" rIns="0" bIns="0" rtlCol="0" anchor="t"/>
-          <a:lstStyle/>
-          <a:p>
-            <a:pPr algn="ctr" indent="0" marL="0">
-              <a:lnSpc>
-                <a:spcPct val="112000"/>
-              </a:lnSpc>
-              <a:buNone/>
-            </a:pPr>
-            <a:r>
-              <a:rPr lang="en-US" sz="1150" dirty="0">
-                <a:solidFill>
-                  <a:srgbClr val="2B3A4E"/>
-                </a:solidFill>
-                <a:latin typeface="Montserrat" pitchFamily="34" charset="0"/>
-                <a:ea typeface="Montserrat" pitchFamily="34" charset="-122"/>
-                <a:cs typeface="Montserrat" pitchFamily="34" charset="-120"/>
-              </a:rPr>
-              <a:t>Por su valiosa participación como ponente con la conferencia </a:t>
-            </a:r>
-            <a:pPr algn="ctr" indent="0" marL="0">
-              <a:lnSpc>
-                <a:spcPct val="112000"/>
-              </a:lnSpc>
-              <a:buNone/>
-            </a:pPr>
-            <a:r>
-              <a:rPr lang="en-US" sz="1150" dirty="0">
-                <a:solidFill>
-                  <a:srgbClr val="0E2A47"/>
-                </a:solidFill>
-                <a:latin typeface="Montserrat ExtraBold" pitchFamily="34" charset="0"/>
-                <a:ea typeface="Montserrat ExtraBold" pitchFamily="34" charset="-122"/>
-                <a:cs typeface="Montserrat ExtraBold" pitchFamily="34" charset="-120"/>
-              </a:rPr>
-              <a:t>«Enfermedad por reflujo gastroesofágico»</a:t>
-            </a:r>
-            <a:pPr algn="ctr" indent="0" marL="0">
-              <a:lnSpc>
-                <a:spcPct val="112000"/>
-              </a:lnSpc>
-              <a:buNone/>
-            </a:pPr>
-            <a:r>
-              <a:rPr lang="en-US" sz="1150" dirty="0">
-                <a:solidFill>
-                  <a:srgbClr val="2B3A4E"/>
-                </a:solidFill>
-                <a:latin typeface="Montserrat" pitchFamily="34" charset="0"/>
-                <a:ea typeface="Montserrat" pitchFamily="34" charset="-122"/>
-                <a:cs typeface="Montserrat" pitchFamily="34" charset="-120"/>
-              </a:rPr>
-              <a:t> en el </a:t>
-            </a:r>
-            <a:pPr algn="ctr" indent="0" marL="0">
-              <a:lnSpc>
-                <a:spcPct val="112000"/>
-              </a:lnSpc>
-              <a:buNone/>
-            </a:pPr>
-            <a:r>
-              <a:rPr lang="en-US" sz="1150" dirty="0">
-                <a:solidFill>
-                  <a:srgbClr val="0E2A47"/>
-                </a:solidFill>
-                <a:latin typeface="Montserrat ExtraBold" pitchFamily="34" charset="0"/>
-                <a:ea typeface="Montserrat ExtraBold" pitchFamily="34" charset="-122"/>
-                <a:cs typeface="Montserrat ExtraBold" pitchFamily="34" charset="-120"/>
-              </a:rPr>
-              <a:t>Westhill Medical Leadership Summit 2026</a:t>
-            </a:r>
-            <a:pPr algn="ctr" indent="0" marL="0">
-              <a:lnSpc>
-                <a:spcPct val="112000"/>
-              </a:lnSpc>
-              <a:buNone/>
-            </a:pPr>
-            <a:r>
-              <a:rPr lang="en-US" sz="1150" dirty="0">
-                <a:solidFill>
-                  <a:srgbClr val="2B3A4E"/>
-                </a:solidFill>
-                <a:latin typeface="Montserrat" pitchFamily="34" charset="0"/>
-                <a:ea typeface="Montserrat" pitchFamily="34" charset="-122"/>
-                <a:cs typeface="Montserrat" pitchFamily="34" charset="-120"/>
-              </a:rPr>
-              <a:t>, realizado los días 21, 22 y 23 de octubre de 2026 en la Facultad de Medicina de la Universidad Westhill.</a:t>
-            </a:r>
-            <a:endParaRPr lang="en-US" sz="1150" dirty="0"/>
-          </a:p>
-        </p:txBody>
-      </p:sp>
-      <p:sp>
-        <p:nvSpPr>
-          <p:cNvPr id="12" name="Text 10"/>
-          <p:cNvSpPr txBox="1"/>
-          <p:nvPr/>
-        </p:nvSpPr>
-        <p:spPr>
-          <a:xfrm>
-            <a:off x="2286000" y="5120640"/>
-            <a:ext cx="5486400" cy="237744"/>
-          </a:xfrm>
-          <a:prstGeom prst="rect">
-            <a:avLst/>
-          </a:prstGeom>
-          <a:noFill/>
-          <a:ln/>
-        </p:spPr>
-        <p:txBody>
-          <a:bodyPr wrap="square" lIns="0" tIns="0" rIns="0" bIns="0" rtlCol="0" anchor="ctr"/>
-          <a:lstStyle/>
-          <a:p>
-            <a:pPr algn="ctr" indent="0" marL="0">
-              <a:buNone/>
-            </a:pPr>
-            <a:r>
-              <a:rPr lang="en-US" sz="1050" dirty="0">
-                <a:solidFill>
-                  <a:srgbClr val="266294"/>
-                </a:solidFill>
-                <a:latin typeface="Montserrat SemiBold" pitchFamily="34" charset="0"/>
-                <a:ea typeface="Montserrat SemiBold" pitchFamily="34" charset="-122"/>
-                <a:cs typeface="Montserrat SemiBold" pitchFamily="34" charset="-120"/>
-              </a:rPr>
-              <a:t>Ciudad de México, a 23 de octubre de 2026</a:t>
-            </a:r>
-            <a:endParaRPr lang="en-US" sz="1050" dirty="0"/>
-          </a:p>
-        </p:txBody>
-      </p:sp>
-      <p:sp>
-        <p:nvSpPr>
-          <p:cNvPr id="13" name="Shape 11"/>
+          <p:cNvPr id="11" name="Shape 6"/>
           <p:cNvSpPr/>
           <p:nvPr/>
         </p:nvSpPr>
@@ -5924,7 +5678,7 @@
       </p:sp>
       <p:sp>
         <p:nvSpPr>
-          <p:cNvPr id="14" name="Text 12"/>
+          <p:cNvPr id="12" name="Text 7"/>
           <p:cNvSpPr txBox="1"/>
           <p:nvPr/>
         </p:nvSpPr>
@@ -5963,7 +5717,7 @@
       </p:sp>
       <p:sp>
         <p:nvSpPr>
-          <p:cNvPr id="15" name="Text 13"/>
+          <p:cNvPr id="13" name="Text 8"/>
           <p:cNvSpPr txBox="1"/>
           <p:nvPr/>
         </p:nvSpPr>
@@ -6002,7 +5756,7 @@
       </p:sp>
       <p:sp>
         <p:nvSpPr>
-          <p:cNvPr id="16" name="Shape 14"/>
+          <p:cNvPr id="14" name="Shape 9"/>
           <p:cNvSpPr/>
           <p:nvPr/>
         </p:nvSpPr>
@@ -6025,7 +5779,7 @@
       </p:sp>
       <p:sp>
         <p:nvSpPr>
-          <p:cNvPr id="17" name="Text 15"/>
+          <p:cNvPr id="15" name="Text 10"/>
           <p:cNvSpPr txBox="1"/>
           <p:nvPr/>
         </p:nvSpPr>
@@ -6064,7 +5818,7 @@
       </p:sp>
       <p:sp>
         <p:nvSpPr>
-          <p:cNvPr id="18" name="Text 16"/>
+          <p:cNvPr id="16" name="Text 11"/>
           <p:cNvSpPr txBox="1"/>
           <p:nvPr/>
         </p:nvSpPr>
@@ -6103,7 +5857,7 @@
       </p:sp>
       <p:sp>
         <p:nvSpPr>
-          <p:cNvPr id="19" name="Text 17"/>
+          <p:cNvPr id="17" name="Text 12"/>
           <p:cNvSpPr txBox="1"/>
           <p:nvPr/>
         </p:nvSpPr>
@@ -6173,32 +5927,370 @@
         </p:nvSpPr>
         <p:spPr>
           <a:xfrm>
-            <a:off x="1188720" y="1536192"/>
-            <a:ext cx="7680960" cy="237744"/>
-          </a:xfrm>
-          <a:prstGeom prst="rect">
-            <a:avLst/>
-          </a:prstGeom>
-          <a:noFill/>
-          <a:ln/>
-        </p:spPr>
-        <p:txBody>
-          <a:bodyPr wrap="square" lIns="0" tIns="0" rIns="0" bIns="0" rtlCol="0" anchor="ctr"/>
-          <a:lstStyle/>
-          <a:p>
-            <a:pPr algn="ctr" indent="0" marL="0">
-              <a:buNone/>
-            </a:pPr>
-            <a:r>
-              <a:rPr lang="en-US" sz="1050" spc="300" kern="0" dirty="0">
+            <a:off x="1097280" y="1737360"/>
+            <a:ext cx="7863840" cy="777240"/>
+          </a:xfrm>
+          <a:prstGeom prst="rect">
+            <a:avLst/>
+          </a:prstGeom>
+          <a:noFill/>
+          <a:ln/>
+        </p:spPr>
+        <p:txBody>
+          <a:bodyPr wrap="square" lIns="0" tIns="0" rIns="0" bIns="0" rtlCol="0" anchor="ctr"/>
+          <a:lstStyle/>
+          <a:p>
+            <a:pPr algn="ctr" indent="0" marL="0">
+              <a:buNone/>
+            </a:pPr>
+            <a:r>
+              <a:rPr lang="en-US" sz="4200" spc="400" kern="0" dirty="0">
+                <a:solidFill>
+                  <a:srgbClr val="266294"/>
+                </a:solidFill>
+                <a:latin typeface="Montserrat ExtraBold" pitchFamily="34" charset="0"/>
+                <a:ea typeface="Montserrat ExtraBold" pitchFamily="34" charset="-122"/>
+                <a:cs typeface="Montserrat ExtraBold" pitchFamily="34" charset="-120"/>
+              </a:rPr>
+              <a:t>RECONOCIMIENTO</a:t>
+            </a:r>
+            <a:endParaRPr lang="en-US" sz="4200" dirty="0"/>
+          </a:p>
+        </p:txBody>
+      </p:sp>
+      <p:pic>
+        <p:nvPicPr>
+          <p:cNvPr id="3" name="Image 0" descr="preencoded.png">    </p:cNvPr>
+          <p:cNvPicPr>
+            <a:picLocks noChangeAspect="1"/>
+          </p:cNvPicPr>
+          <p:nvPr/>
+        </p:nvPicPr>
+        <p:blipFill>
+          <a:blip r:embed="rId1"/>
+          <a:stretch>
+            <a:fillRect/>
+          </a:stretch>
+        </p:blipFill>
+        <p:spPr>
+          <a:xfrm>
+            <a:off x="1874520" y="2642616"/>
+            <a:ext cx="1371600" cy="182880"/>
+          </a:xfrm>
+          <a:prstGeom prst="rect">
+            <a:avLst/>
+          </a:prstGeom>
+        </p:spPr>
+      </p:pic>
+      <p:pic>
+        <p:nvPicPr>
+          <p:cNvPr id="4" name="Image 1" descr="preencoded.png">    </p:cNvPr>
+          <p:cNvPicPr>
+            <a:picLocks noChangeAspect="1"/>
+          </p:cNvPicPr>
+          <p:nvPr/>
+        </p:nvPicPr>
+        <p:blipFill>
+          <a:blip r:embed="rId2"/>
+          <a:stretch>
+            <a:fillRect/>
+          </a:stretch>
+        </p:blipFill>
+        <p:spPr>
+          <a:xfrm>
+            <a:off x="6812280" y="2642616"/>
+            <a:ext cx="1371600" cy="182880"/>
+          </a:xfrm>
+          <a:prstGeom prst="rect">
+            <a:avLst/>
+          </a:prstGeom>
+        </p:spPr>
+      </p:pic>
+      <p:sp>
+        <p:nvSpPr>
+          <p:cNvPr id="5" name="Text 1"/>
+          <p:cNvSpPr txBox="1"/>
+          <p:nvPr/>
+        </p:nvSpPr>
+        <p:spPr>
+          <a:xfrm>
+            <a:off x="3291840" y="2560320"/>
+            <a:ext cx="3474720" cy="329184"/>
+          </a:xfrm>
+          <a:prstGeom prst="rect">
+            <a:avLst/>
+          </a:prstGeom>
+          <a:noFill/>
+          <a:ln/>
+        </p:spPr>
+        <p:txBody>
+          <a:bodyPr wrap="square" lIns="0" tIns="0" rIns="0" bIns="0" rtlCol="0" anchor="ctr"/>
+          <a:lstStyle/>
+          <a:p>
+            <a:pPr algn="ctr" indent="0" marL="0">
+              <a:buNone/>
+            </a:pPr>
+            <a:r>
+              <a:rPr lang="en-US" sz="1500" spc="500" kern="0" dirty="0">
+                <a:solidFill>
+                  <a:srgbClr val="0E2A47"/>
+                </a:solidFill>
+                <a:latin typeface="Montserrat ExtraBold" pitchFamily="34" charset="0"/>
+                <a:ea typeface="Montserrat ExtraBold" pitchFamily="34" charset="-122"/>
+                <a:cs typeface="Montserrat ExtraBold" pitchFamily="34" charset="-120"/>
+              </a:rPr>
+              <a:t>COMO PONENTE</a:t>
+            </a:r>
+            <a:endParaRPr lang="en-US" sz="1500" dirty="0"/>
+          </a:p>
+        </p:txBody>
+      </p:sp>
+      <p:sp>
+        <p:nvSpPr>
+          <p:cNvPr id="6" name="Text 2"/>
+          <p:cNvSpPr txBox="1"/>
+          <p:nvPr/>
+        </p:nvSpPr>
+        <p:spPr>
+          <a:xfrm>
+            <a:off x="1828800" y="3035808"/>
+            <a:ext cx="6400800" cy="274320"/>
+          </a:xfrm>
+          <a:prstGeom prst="rect">
+            <a:avLst/>
+          </a:prstGeom>
+          <a:noFill/>
+          <a:ln/>
+        </p:spPr>
+        <p:txBody>
+          <a:bodyPr wrap="square" lIns="0" tIns="0" rIns="0" bIns="0" rtlCol="0" anchor="ctr"/>
+          <a:lstStyle/>
+          <a:p>
+            <a:pPr algn="ctr" indent="0" marL="0">
+              <a:buNone/>
+            </a:pPr>
+            <a:r>
+              <a:rPr lang="en-US" sz="1250" dirty="0">
                 <a:solidFill>
                   <a:srgbClr val="5B6B7D"/>
+                </a:solidFill>
+                <a:latin typeface="Montserrat Medium" pitchFamily="34" charset="0"/>
+                <a:ea typeface="Montserrat Medium" pitchFamily="34" charset="-122"/>
+                <a:cs typeface="Montserrat Medium" pitchFamily="34" charset="-120"/>
+              </a:rPr>
+              <a:t>Otorga el presente reconocimiento a</a:t>
+            </a:r>
+            <a:endParaRPr lang="en-US" sz="1250" dirty="0"/>
+          </a:p>
+        </p:txBody>
+      </p:sp>
+      <p:sp>
+        <p:nvSpPr>
+          <p:cNvPr id="7" name="Text 3"/>
+          <p:cNvSpPr txBox="1"/>
+          <p:nvPr/>
+        </p:nvSpPr>
+        <p:spPr>
+          <a:xfrm>
+            <a:off x="1097280" y="3310128"/>
+            <a:ext cx="7863840" cy="713232"/>
+          </a:xfrm>
+          <a:prstGeom prst="rect">
+            <a:avLst/>
+          </a:prstGeom>
+          <a:noFill/>
+          <a:ln/>
+        </p:spPr>
+        <p:txBody>
+          <a:bodyPr wrap="square" lIns="0" tIns="0" rIns="0" bIns="0" rtlCol="0" anchor="ctr"/>
+          <a:lstStyle/>
+          <a:p>
+            <a:pPr algn="ctr" indent="0" marL="0">
+              <a:buNone/>
+            </a:pPr>
+            <a:r>
+              <a:rPr lang="en-US" sz="3800" dirty="0">
+                <a:solidFill>
+                  <a:srgbClr val="0E2A47"/>
+                </a:solidFill>
+                <a:latin typeface="Montserrat ExtraBold" pitchFamily="34" charset="0"/>
+                <a:ea typeface="Montserrat ExtraBold" pitchFamily="34" charset="-122"/>
+                <a:cs typeface="Montserrat ExtraBold" pitchFamily="34" charset="-120"/>
+              </a:rPr>
+              <a:t>Dr. Alan</a:t>
+            </a:r>
+            <a:endParaRPr lang="en-US" sz="3800" dirty="0"/>
+          </a:p>
+        </p:txBody>
+      </p:sp>
+      <p:pic>
+        <p:nvPicPr>
+          <p:cNvPr id="8" name="Image 2" descr="preencoded.png">    </p:cNvPr>
+          <p:cNvPicPr>
+            <a:picLocks noChangeAspect="1"/>
+          </p:cNvPicPr>
+          <p:nvPr/>
+        </p:nvPicPr>
+        <p:blipFill>
+          <a:blip r:embed="rId3"/>
+          <a:stretch>
+            <a:fillRect/>
+          </a:stretch>
+        </p:blipFill>
+        <p:spPr>
+          <a:xfrm>
+            <a:off x="2194560" y="3986784"/>
+            <a:ext cx="5669280" cy="201168"/>
+          </a:xfrm>
+          <a:prstGeom prst="rect">
+            <a:avLst/>
+          </a:prstGeom>
+        </p:spPr>
+      </p:pic>
+      <p:sp>
+        <p:nvSpPr>
+          <p:cNvPr id="9" name="Text 4"/>
+          <p:cNvSpPr txBox="1"/>
+          <p:nvPr/>
+        </p:nvSpPr>
+        <p:spPr>
+          <a:xfrm>
+            <a:off x="1417320" y="4206240"/>
+            <a:ext cx="7223760" cy="896112"/>
+          </a:xfrm>
+          <a:prstGeom prst="rect">
+            <a:avLst/>
+          </a:prstGeom>
+          <a:noFill/>
+          <a:ln/>
+        </p:spPr>
+        <p:txBody>
+          <a:bodyPr wrap="square" lIns="0" tIns="0" rIns="0" bIns="0" rtlCol="0" anchor="t"/>
+          <a:lstStyle/>
+          <a:p>
+            <a:pPr algn="ctr" indent="0" marL="0">
+              <a:lnSpc>
+                <a:spcPct val="112000"/>
+              </a:lnSpc>
+              <a:buNone/>
+            </a:pPr>
+            <a:r>
+              <a:rPr lang="en-US" sz="1150" dirty="0">
+                <a:solidFill>
+                  <a:srgbClr val="2B3A4E"/>
+                </a:solidFill>
+                <a:latin typeface="Montserrat" pitchFamily="34" charset="0"/>
+                <a:ea typeface="Montserrat" pitchFamily="34" charset="-122"/>
+                <a:cs typeface="Montserrat" pitchFamily="34" charset="-120"/>
+              </a:rPr>
+              <a:t>Por su valiosa participación como ponente con la conferencia </a:t>
+            </a:r>
+            <a:pPr algn="ctr" indent="0" marL="0">
+              <a:lnSpc>
+                <a:spcPct val="112000"/>
+              </a:lnSpc>
+              <a:buNone/>
+            </a:pPr>
+            <a:r>
+              <a:rPr lang="en-US" sz="1150" dirty="0">
+                <a:solidFill>
+                  <a:srgbClr val="0E2A47"/>
+                </a:solidFill>
+                <a:latin typeface="Montserrat ExtraBold" pitchFamily="34" charset="0"/>
+                <a:ea typeface="Montserrat ExtraBold" pitchFamily="34" charset="-122"/>
+                <a:cs typeface="Montserrat ExtraBold" pitchFamily="34" charset="-120"/>
+              </a:rPr>
+              <a:t>«¿Qué pasa después de la carrera?»</a:t>
+            </a:r>
+            <a:pPr algn="ctr" indent="0" marL="0">
+              <a:lnSpc>
+                <a:spcPct val="112000"/>
+              </a:lnSpc>
+              <a:buNone/>
+            </a:pPr>
+            <a:r>
+              <a:rPr lang="en-US" sz="1150" dirty="0">
+                <a:solidFill>
+                  <a:srgbClr val="2B3A4E"/>
+                </a:solidFill>
+                <a:latin typeface="Montserrat" pitchFamily="34" charset="0"/>
+                <a:ea typeface="Montserrat" pitchFamily="34" charset="-122"/>
+                <a:cs typeface="Montserrat" pitchFamily="34" charset="-120"/>
+              </a:rPr>
+              <a:t> en el </a:t>
+            </a:r>
+            <a:pPr algn="ctr" indent="0" marL="0">
+              <a:lnSpc>
+                <a:spcPct val="112000"/>
+              </a:lnSpc>
+              <a:buNone/>
+            </a:pPr>
+            <a:r>
+              <a:rPr lang="en-US" sz="1150" dirty="0">
+                <a:solidFill>
+                  <a:srgbClr val="0E2A47"/>
+                </a:solidFill>
+                <a:latin typeface="Montserrat ExtraBold" pitchFamily="34" charset="0"/>
+                <a:ea typeface="Montserrat ExtraBold" pitchFamily="34" charset="-122"/>
+                <a:cs typeface="Montserrat ExtraBold" pitchFamily="34" charset="-120"/>
+              </a:rPr>
+              <a:t>Westhill Medical Leadership Summit 2026</a:t>
+            </a:r>
+            <a:pPr algn="ctr" indent="0" marL="0">
+              <a:lnSpc>
+                <a:spcPct val="112000"/>
+              </a:lnSpc>
+              <a:buNone/>
+            </a:pPr>
+            <a:r>
+              <a:rPr lang="en-US" sz="1150" dirty="0">
+                <a:solidFill>
+                  <a:srgbClr val="2B3A4E"/>
+                </a:solidFill>
+                <a:latin typeface="Montserrat" pitchFamily="34" charset="0"/>
+                <a:ea typeface="Montserrat" pitchFamily="34" charset="-122"/>
+                <a:cs typeface="Montserrat" pitchFamily="34" charset="-120"/>
+              </a:rPr>
+              <a:t>, realizado los días 21, 22 y 23 de octubre de 2026 en la Facultad de Medicina de la Universidad Westhill.</a:t>
+            </a:r>
+            <a:endParaRPr lang="en-US" sz="1150" dirty="0"/>
+          </a:p>
+        </p:txBody>
+      </p:sp>
+      <p:sp>
+        <p:nvSpPr>
+          <p:cNvPr id="10" name="Text 5"/>
+          <p:cNvSpPr txBox="1"/>
+          <p:nvPr/>
+        </p:nvSpPr>
+        <p:spPr>
+          <a:xfrm>
+            <a:off x="2286000" y="5120640"/>
+            <a:ext cx="5486400" cy="237744"/>
+          </a:xfrm>
+          <a:prstGeom prst="rect">
+            <a:avLst/>
+          </a:prstGeom>
+          <a:noFill/>
+          <a:ln/>
+        </p:spPr>
+        <p:txBody>
+          <a:bodyPr wrap="square" lIns="0" tIns="0" rIns="0" bIns="0" rtlCol="0" anchor="ctr"/>
+          <a:lstStyle/>
+          <a:p>
+            <a:pPr algn="ctr" indent="0" marL="0">
+              <a:buNone/>
+            </a:pPr>
+            <a:r>
+              <a:rPr lang="en-US" sz="1050" dirty="0">
+                <a:solidFill>
+                  <a:srgbClr val="266294"/>
                 </a:solidFill>
                 <a:latin typeface="Montserrat SemiBold" pitchFamily="34" charset="0"/>
                 <a:ea typeface="Montserrat SemiBold" pitchFamily="34" charset="-122"/>
                 <a:cs typeface="Montserrat SemiBold" pitchFamily="34" charset="-120"/>
               </a:rPr>
-              <a:t>FACULTAD DE MEDICINA</a:t>
+              <a:t>Ciudad de México, a 23 de octubre de 2026</a:t>
             </a:r>
             <a:endParaRPr lang="en-US" sz="1050" dirty="0"/>
           </a:p>
@@ -6206,395 +6298,7 @@
       </p:sp>
       <p:sp>
         <p:nvSpPr>
-          <p:cNvPr id="3" name="Text 1"/>
-          <p:cNvSpPr txBox="1"/>
-          <p:nvPr/>
-        </p:nvSpPr>
-        <p:spPr>
-          <a:xfrm>
-            <a:off x="1097280" y="1737360"/>
-            <a:ext cx="7863840" cy="777240"/>
-          </a:xfrm>
-          <a:prstGeom prst="rect">
-            <a:avLst/>
-          </a:prstGeom>
-          <a:noFill/>
-          <a:ln/>
-        </p:spPr>
-        <p:txBody>
-          <a:bodyPr wrap="square" lIns="0" tIns="0" rIns="0" bIns="0" rtlCol="0" anchor="ctr"/>
-          <a:lstStyle/>
-          <a:p>
-            <a:pPr algn="ctr" indent="0" marL="0">
-              <a:buNone/>
-            </a:pPr>
-            <a:r>
-              <a:rPr lang="en-US" sz="4200" spc="400" kern="0" dirty="0">
-                <a:solidFill>
-                  <a:srgbClr val="266294"/>
-                </a:solidFill>
-                <a:latin typeface="Montserrat ExtraBold" pitchFamily="34" charset="0"/>
-                <a:ea typeface="Montserrat ExtraBold" pitchFamily="34" charset="-122"/>
-                <a:cs typeface="Montserrat ExtraBold" pitchFamily="34" charset="-120"/>
-              </a:rPr>
-              <a:t>RECONOCIMIENTO</a:t>
-            </a:r>
-            <a:endParaRPr lang="en-US" sz="4200" dirty="0"/>
-          </a:p>
-        </p:txBody>
-      </p:sp>
-      <p:sp>
-        <p:nvSpPr>
-          <p:cNvPr id="4" name="Shape 2"/>
-          <p:cNvSpPr/>
-          <p:nvPr/>
-        </p:nvSpPr>
-        <p:spPr>
-          <a:xfrm>
-            <a:off x="2331720" y="2706624"/>
-            <a:ext cx="914400" cy="54864"/>
-          </a:xfrm>
-          <a:prstGeom prst="rect">
-            <a:avLst/>
-          </a:prstGeom>
-          <a:solidFill>
-            <a:srgbClr val="2DB34A"/>
-          </a:solidFill>
-          <a:ln/>
-        </p:spPr>
-      </p:sp>
-      <p:sp>
-        <p:nvSpPr>
-          <p:cNvPr id="5" name="Shape 3"/>
-          <p:cNvSpPr/>
-          <p:nvPr/>
-        </p:nvSpPr>
-        <p:spPr>
-          <a:xfrm>
-            <a:off x="6812280" y="2706624"/>
-            <a:ext cx="914400" cy="54864"/>
-          </a:xfrm>
-          <a:prstGeom prst="rect">
-            <a:avLst/>
-          </a:prstGeom>
-          <a:solidFill>
-            <a:srgbClr val="2DB34A"/>
-          </a:solidFill>
-          <a:ln/>
-        </p:spPr>
-      </p:sp>
-      <p:sp>
-        <p:nvSpPr>
-          <p:cNvPr id="6" name="Text 4"/>
-          <p:cNvSpPr txBox="1"/>
-          <p:nvPr/>
-        </p:nvSpPr>
-        <p:spPr>
-          <a:xfrm>
-            <a:off x="3291840" y="2560320"/>
-            <a:ext cx="3474720" cy="329184"/>
-          </a:xfrm>
-          <a:prstGeom prst="rect">
-            <a:avLst/>
-          </a:prstGeom>
-          <a:noFill/>
-          <a:ln/>
-        </p:spPr>
-        <p:txBody>
-          <a:bodyPr wrap="square" lIns="0" tIns="0" rIns="0" bIns="0" rtlCol="0" anchor="ctr"/>
-          <a:lstStyle/>
-          <a:p>
-            <a:pPr algn="ctr" indent="0" marL="0">
-              <a:buNone/>
-            </a:pPr>
-            <a:r>
-              <a:rPr lang="en-US" sz="1500" spc="500" kern="0" dirty="0">
-                <a:solidFill>
-                  <a:srgbClr val="0E2A47"/>
-                </a:solidFill>
-                <a:latin typeface="Montserrat ExtraBold" pitchFamily="34" charset="0"/>
-                <a:ea typeface="Montserrat ExtraBold" pitchFamily="34" charset="-122"/>
-                <a:cs typeface="Montserrat ExtraBold" pitchFamily="34" charset="-120"/>
-              </a:rPr>
-              <a:t>COMO PONENTE</a:t>
-            </a:r>
-            <a:endParaRPr lang="en-US" sz="1500" dirty="0"/>
-          </a:p>
-        </p:txBody>
-      </p:sp>
-      <p:sp>
-        <p:nvSpPr>
-          <p:cNvPr id="7" name="Text 5"/>
-          <p:cNvSpPr txBox="1"/>
-          <p:nvPr/>
-        </p:nvSpPr>
-        <p:spPr>
-          <a:xfrm>
-            <a:off x="1828800" y="3035808"/>
-            <a:ext cx="6400800" cy="274320"/>
-          </a:xfrm>
-          <a:prstGeom prst="rect">
-            <a:avLst/>
-          </a:prstGeom>
-          <a:noFill/>
-          <a:ln/>
-        </p:spPr>
-        <p:txBody>
-          <a:bodyPr wrap="square" lIns="0" tIns="0" rIns="0" bIns="0" rtlCol="0" anchor="ctr"/>
-          <a:lstStyle/>
-          <a:p>
-            <a:pPr algn="ctr" indent="0" marL="0">
-              <a:buNone/>
-            </a:pPr>
-            <a:r>
-              <a:rPr lang="en-US" sz="1250" dirty="0">
-                <a:solidFill>
-                  <a:srgbClr val="5B6B7D"/>
-                </a:solidFill>
-                <a:latin typeface="Montserrat Medium" pitchFamily="34" charset="0"/>
-                <a:ea typeface="Montserrat Medium" pitchFamily="34" charset="-122"/>
-                <a:cs typeface="Montserrat Medium" pitchFamily="34" charset="-120"/>
-              </a:rPr>
-              <a:t>Otorga el presente reconocimiento a</a:t>
-            </a:r>
-            <a:endParaRPr lang="en-US" sz="1250" dirty="0"/>
-          </a:p>
-        </p:txBody>
-      </p:sp>
-      <p:sp>
-        <p:nvSpPr>
-          <p:cNvPr id="8" name="Text 6"/>
-          <p:cNvSpPr txBox="1"/>
-          <p:nvPr/>
-        </p:nvSpPr>
-        <p:spPr>
-          <a:xfrm>
-            <a:off x="1097280" y="3310128"/>
-            <a:ext cx="7863840" cy="713232"/>
-          </a:xfrm>
-          <a:prstGeom prst="rect">
-            <a:avLst/>
-          </a:prstGeom>
-          <a:noFill/>
-          <a:ln/>
-        </p:spPr>
-        <p:txBody>
-          <a:bodyPr wrap="square" lIns="0" tIns="0" rIns="0" bIns="0" rtlCol="0" anchor="ctr"/>
-          <a:lstStyle/>
-          <a:p>
-            <a:pPr algn="ctr" indent="0" marL="0">
-              <a:buNone/>
-            </a:pPr>
-            <a:r>
-              <a:rPr lang="en-US" sz="3800" dirty="0">
-                <a:solidFill>
-                  <a:srgbClr val="0E2A47"/>
-                </a:solidFill>
-                <a:latin typeface="Montserrat ExtraBold" pitchFamily="34" charset="0"/>
-                <a:ea typeface="Montserrat ExtraBold" pitchFamily="34" charset="-122"/>
-                <a:cs typeface="Montserrat ExtraBold" pitchFamily="34" charset="-120"/>
-              </a:rPr>
-              <a:t>Dr. Alan</a:t>
-            </a:r>
-            <a:endParaRPr lang="en-US" sz="3800" dirty="0"/>
-          </a:p>
-        </p:txBody>
-      </p:sp>
-      <p:sp>
-        <p:nvSpPr>
-          <p:cNvPr id="9" name="Shape 7"/>
-          <p:cNvSpPr/>
-          <p:nvPr/>
-        </p:nvSpPr>
-        <p:spPr>
-          <a:xfrm>
-            <a:off x="2194560" y="4087368"/>
-            <a:ext cx="5669280" cy="0"/>
-          </a:xfrm>
-          <a:prstGeom prst="line">
-            <a:avLst/>
-          </a:prstGeom>
-          <a:noFill/>
-          <a:ln w="22225">
-            <a:solidFill>
-              <a:srgbClr val="F2C94C"/>
-            </a:solidFill>
-            <a:prstDash val="solid"/>
-          </a:ln>
-        </p:spPr>
-      </p:sp>
-      <p:sp>
-        <p:nvSpPr>
-          <p:cNvPr id="10" name="Shape 8"/>
-          <p:cNvSpPr/>
-          <p:nvPr/>
-        </p:nvSpPr>
-        <p:spPr>
-          <a:xfrm>
-            <a:off x="4974336" y="4032504"/>
-            <a:ext cx="109728" cy="109728"/>
-          </a:xfrm>
-          <a:prstGeom prst="ellipse">
-            <a:avLst/>
-          </a:prstGeom>
-          <a:solidFill>
-            <a:srgbClr val="F2C94C"/>
-          </a:solidFill>
-          <a:ln/>
-        </p:spPr>
-      </p:sp>
-      <p:sp>
-        <p:nvSpPr>
-          <p:cNvPr id="11" name="Text 9"/>
-          <p:cNvSpPr txBox="1"/>
-          <p:nvPr/>
-        </p:nvSpPr>
-        <p:spPr>
-          <a:xfrm>
-            <a:off x="1417320" y="4206240"/>
-            <a:ext cx="7223760" cy="896112"/>
-          </a:xfrm>
-          <a:prstGeom prst="rect">
-            <a:avLst/>
-          </a:prstGeom>
-          <a:noFill/>
-          <a:ln/>
-        </p:spPr>
-        <p:txBody>
-          <a:bodyPr wrap="square" lIns="0" tIns="0" rIns="0" bIns="0" rtlCol="0" anchor="t"/>
-          <a:lstStyle/>
-          <a:p>
-            <a:pPr algn="ctr" indent="0" marL="0">
-              <a:lnSpc>
-                <a:spcPct val="112000"/>
-              </a:lnSpc>
-              <a:buNone/>
-            </a:pPr>
-            <a:r>
-              <a:rPr lang="en-US" sz="1150" dirty="0">
-                <a:solidFill>
-                  <a:srgbClr val="2B3A4E"/>
-                </a:solidFill>
-                <a:latin typeface="Montserrat" pitchFamily="34" charset="0"/>
-                <a:ea typeface="Montserrat" pitchFamily="34" charset="-122"/>
-                <a:cs typeface="Montserrat" pitchFamily="34" charset="-120"/>
-              </a:rPr>
-              <a:t>Por su valiosa participación como ponente con la conferencia </a:t>
-            </a:r>
-            <a:pPr algn="ctr" indent="0" marL="0">
-              <a:lnSpc>
-                <a:spcPct val="112000"/>
-              </a:lnSpc>
-              <a:buNone/>
-            </a:pPr>
-            <a:r>
-              <a:rPr lang="en-US" sz="1150" dirty="0">
-                <a:solidFill>
-                  <a:srgbClr val="0E2A47"/>
-                </a:solidFill>
-                <a:latin typeface="Montserrat ExtraBold" pitchFamily="34" charset="0"/>
-                <a:ea typeface="Montserrat ExtraBold" pitchFamily="34" charset="-122"/>
-                <a:cs typeface="Montserrat ExtraBold" pitchFamily="34" charset="-120"/>
-              </a:rPr>
-              <a:t>«¿Qué pasa después de la carrera?»</a:t>
-            </a:r>
-            <a:pPr algn="ctr" indent="0" marL="0">
-              <a:lnSpc>
-                <a:spcPct val="112000"/>
-              </a:lnSpc>
-              <a:buNone/>
-            </a:pPr>
-            <a:r>
-              <a:rPr lang="en-US" sz="1150" dirty="0">
-                <a:solidFill>
-                  <a:srgbClr val="2B3A4E"/>
-                </a:solidFill>
-                <a:latin typeface="Montserrat" pitchFamily="34" charset="0"/>
-                <a:ea typeface="Montserrat" pitchFamily="34" charset="-122"/>
-                <a:cs typeface="Montserrat" pitchFamily="34" charset="-120"/>
-              </a:rPr>
-              <a:t> en el </a:t>
-            </a:r>
-            <a:pPr algn="ctr" indent="0" marL="0">
-              <a:lnSpc>
-                <a:spcPct val="112000"/>
-              </a:lnSpc>
-              <a:buNone/>
-            </a:pPr>
-            <a:r>
-              <a:rPr lang="en-US" sz="1150" dirty="0">
-                <a:solidFill>
-                  <a:srgbClr val="0E2A47"/>
-                </a:solidFill>
-                <a:latin typeface="Montserrat ExtraBold" pitchFamily="34" charset="0"/>
-                <a:ea typeface="Montserrat ExtraBold" pitchFamily="34" charset="-122"/>
-                <a:cs typeface="Montserrat ExtraBold" pitchFamily="34" charset="-120"/>
-              </a:rPr>
-              <a:t>Westhill Medical Leadership Summit 2026</a:t>
-            </a:r>
-            <a:pPr algn="ctr" indent="0" marL="0">
-              <a:lnSpc>
-                <a:spcPct val="112000"/>
-              </a:lnSpc>
-              <a:buNone/>
-            </a:pPr>
-            <a:r>
-              <a:rPr lang="en-US" sz="1150" dirty="0">
-                <a:solidFill>
-                  <a:srgbClr val="2B3A4E"/>
-                </a:solidFill>
-                <a:latin typeface="Montserrat" pitchFamily="34" charset="0"/>
-                <a:ea typeface="Montserrat" pitchFamily="34" charset="-122"/>
-                <a:cs typeface="Montserrat" pitchFamily="34" charset="-120"/>
-              </a:rPr>
-              <a:t>, realizado los días 21, 22 y 23 de octubre de 2026 en la Facultad de Medicina de la Universidad Westhill.</a:t>
-            </a:r>
-            <a:endParaRPr lang="en-US" sz="1150" dirty="0"/>
-          </a:p>
-        </p:txBody>
-      </p:sp>
-      <p:sp>
-        <p:nvSpPr>
-          <p:cNvPr id="12" name="Text 10"/>
-          <p:cNvSpPr txBox="1"/>
-          <p:nvPr/>
-        </p:nvSpPr>
-        <p:spPr>
-          <a:xfrm>
-            <a:off x="2286000" y="5120640"/>
-            <a:ext cx="5486400" cy="237744"/>
-          </a:xfrm>
-          <a:prstGeom prst="rect">
-            <a:avLst/>
-          </a:prstGeom>
-          <a:noFill/>
-          <a:ln/>
-        </p:spPr>
-        <p:txBody>
-          <a:bodyPr wrap="square" lIns="0" tIns="0" rIns="0" bIns="0" rtlCol="0" anchor="ctr"/>
-          <a:lstStyle/>
-          <a:p>
-            <a:pPr algn="ctr" indent="0" marL="0">
-              <a:buNone/>
-            </a:pPr>
-            <a:r>
-              <a:rPr lang="en-US" sz="1050" dirty="0">
-                <a:solidFill>
-                  <a:srgbClr val="266294"/>
-                </a:solidFill>
-                <a:latin typeface="Montserrat SemiBold" pitchFamily="34" charset="0"/>
-                <a:ea typeface="Montserrat SemiBold" pitchFamily="34" charset="-122"/>
-                <a:cs typeface="Montserrat SemiBold" pitchFamily="34" charset="-120"/>
-              </a:rPr>
-              <a:t>Ciudad de México, a 23 de octubre de 2026</a:t>
-            </a:r>
-            <a:endParaRPr lang="en-US" sz="1050" dirty="0"/>
-          </a:p>
-        </p:txBody>
-      </p:sp>
-      <p:sp>
-        <p:nvSpPr>
-          <p:cNvPr id="13" name="Shape 11"/>
+          <p:cNvPr id="11" name="Shape 6"/>
           <p:cNvSpPr/>
           <p:nvPr/>
         </p:nvSpPr>
@@ -6617,7 +6321,7 @@
       </p:sp>
       <p:sp>
         <p:nvSpPr>
-          <p:cNvPr id="14" name="Text 12"/>
+          <p:cNvPr id="12" name="Text 7"/>
           <p:cNvSpPr txBox="1"/>
           <p:nvPr/>
         </p:nvSpPr>
@@ -6656,7 +6360,7 @@
       </p:sp>
       <p:sp>
         <p:nvSpPr>
-          <p:cNvPr id="15" name="Text 13"/>
+          <p:cNvPr id="13" name="Text 8"/>
           <p:cNvSpPr txBox="1"/>
           <p:nvPr/>
         </p:nvSpPr>
@@ -6695,7 +6399,7 @@
       </p:sp>
       <p:sp>
         <p:nvSpPr>
-          <p:cNvPr id="16" name="Shape 14"/>
+          <p:cNvPr id="14" name="Shape 9"/>
           <p:cNvSpPr/>
           <p:nvPr/>
         </p:nvSpPr>
@@ -6718,7 +6422,7 @@
       </p:sp>
       <p:sp>
         <p:nvSpPr>
-          <p:cNvPr id="17" name="Text 15"/>
+          <p:cNvPr id="15" name="Text 10"/>
           <p:cNvSpPr txBox="1"/>
           <p:nvPr/>
         </p:nvSpPr>
@@ -6757,7 +6461,7 @@
       </p:sp>
       <p:sp>
         <p:nvSpPr>
-          <p:cNvPr id="18" name="Text 16"/>
+          <p:cNvPr id="16" name="Text 11"/>
           <p:cNvSpPr txBox="1"/>
           <p:nvPr/>
         </p:nvSpPr>
@@ -6796,7 +6500,7 @@
       </p:sp>
       <p:sp>
         <p:nvSpPr>
-          <p:cNvPr id="19" name="Text 17"/>
+          <p:cNvPr id="17" name="Text 12"/>
           <p:cNvSpPr txBox="1"/>
           <p:nvPr/>
         </p:nvSpPr>
@@ -6866,32 +6570,370 @@
         </p:nvSpPr>
         <p:spPr>
           <a:xfrm>
-            <a:off x="1188720" y="1536192"/>
-            <a:ext cx="7680960" cy="237744"/>
-          </a:xfrm>
-          <a:prstGeom prst="rect">
-            <a:avLst/>
-          </a:prstGeom>
-          <a:noFill/>
-          <a:ln/>
-        </p:spPr>
-        <p:txBody>
-          <a:bodyPr wrap="square" lIns="0" tIns="0" rIns="0" bIns="0" rtlCol="0" anchor="ctr"/>
-          <a:lstStyle/>
-          <a:p>
-            <a:pPr algn="ctr" indent="0" marL="0">
-              <a:buNone/>
-            </a:pPr>
-            <a:r>
-              <a:rPr lang="en-US" sz="1050" spc="300" kern="0" dirty="0">
+            <a:off x="1097280" y="1737360"/>
+            <a:ext cx="7863840" cy="777240"/>
+          </a:xfrm>
+          <a:prstGeom prst="rect">
+            <a:avLst/>
+          </a:prstGeom>
+          <a:noFill/>
+          <a:ln/>
+        </p:spPr>
+        <p:txBody>
+          <a:bodyPr wrap="square" lIns="0" tIns="0" rIns="0" bIns="0" rtlCol="0" anchor="ctr"/>
+          <a:lstStyle/>
+          <a:p>
+            <a:pPr algn="ctr" indent="0" marL="0">
+              <a:buNone/>
+            </a:pPr>
+            <a:r>
+              <a:rPr lang="en-US" sz="4200" spc="400" kern="0" dirty="0">
+                <a:solidFill>
+                  <a:srgbClr val="266294"/>
+                </a:solidFill>
+                <a:latin typeface="Montserrat ExtraBold" pitchFamily="34" charset="0"/>
+                <a:ea typeface="Montserrat ExtraBold" pitchFamily="34" charset="-122"/>
+                <a:cs typeface="Montserrat ExtraBold" pitchFamily="34" charset="-120"/>
+              </a:rPr>
+              <a:t>RECONOCIMIENTO</a:t>
+            </a:r>
+            <a:endParaRPr lang="en-US" sz="4200" dirty="0"/>
+          </a:p>
+        </p:txBody>
+      </p:sp>
+      <p:pic>
+        <p:nvPicPr>
+          <p:cNvPr id="3" name="Image 0" descr="preencoded.png">    </p:cNvPr>
+          <p:cNvPicPr>
+            <a:picLocks noChangeAspect="1"/>
+          </p:cNvPicPr>
+          <p:nvPr/>
+        </p:nvPicPr>
+        <p:blipFill>
+          <a:blip r:embed="rId1"/>
+          <a:stretch>
+            <a:fillRect/>
+          </a:stretch>
+        </p:blipFill>
+        <p:spPr>
+          <a:xfrm>
+            <a:off x="1874520" y="2642616"/>
+            <a:ext cx="1371600" cy="182880"/>
+          </a:xfrm>
+          <a:prstGeom prst="rect">
+            <a:avLst/>
+          </a:prstGeom>
+        </p:spPr>
+      </p:pic>
+      <p:pic>
+        <p:nvPicPr>
+          <p:cNvPr id="4" name="Image 1" descr="preencoded.png">    </p:cNvPr>
+          <p:cNvPicPr>
+            <a:picLocks noChangeAspect="1"/>
+          </p:cNvPicPr>
+          <p:nvPr/>
+        </p:nvPicPr>
+        <p:blipFill>
+          <a:blip r:embed="rId2"/>
+          <a:stretch>
+            <a:fillRect/>
+          </a:stretch>
+        </p:blipFill>
+        <p:spPr>
+          <a:xfrm>
+            <a:off x="6812280" y="2642616"/>
+            <a:ext cx="1371600" cy="182880"/>
+          </a:xfrm>
+          <a:prstGeom prst="rect">
+            <a:avLst/>
+          </a:prstGeom>
+        </p:spPr>
+      </p:pic>
+      <p:sp>
+        <p:nvSpPr>
+          <p:cNvPr id="5" name="Text 1"/>
+          <p:cNvSpPr txBox="1"/>
+          <p:nvPr/>
+        </p:nvSpPr>
+        <p:spPr>
+          <a:xfrm>
+            <a:off x="3291840" y="2560320"/>
+            <a:ext cx="3474720" cy="329184"/>
+          </a:xfrm>
+          <a:prstGeom prst="rect">
+            <a:avLst/>
+          </a:prstGeom>
+          <a:noFill/>
+          <a:ln/>
+        </p:spPr>
+        <p:txBody>
+          <a:bodyPr wrap="square" lIns="0" tIns="0" rIns="0" bIns="0" rtlCol="0" anchor="ctr"/>
+          <a:lstStyle/>
+          <a:p>
+            <a:pPr algn="ctr" indent="0" marL="0">
+              <a:buNone/>
+            </a:pPr>
+            <a:r>
+              <a:rPr lang="en-US" sz="1500" spc="500" kern="0" dirty="0">
+                <a:solidFill>
+                  <a:srgbClr val="0E2A47"/>
+                </a:solidFill>
+                <a:latin typeface="Montserrat ExtraBold" pitchFamily="34" charset="0"/>
+                <a:ea typeface="Montserrat ExtraBold" pitchFamily="34" charset="-122"/>
+                <a:cs typeface="Montserrat ExtraBold" pitchFamily="34" charset="-120"/>
+              </a:rPr>
+              <a:t>COMO PONENTE</a:t>
+            </a:r>
+            <a:endParaRPr lang="en-US" sz="1500" dirty="0"/>
+          </a:p>
+        </p:txBody>
+      </p:sp>
+      <p:sp>
+        <p:nvSpPr>
+          <p:cNvPr id="6" name="Text 2"/>
+          <p:cNvSpPr txBox="1"/>
+          <p:nvPr/>
+        </p:nvSpPr>
+        <p:spPr>
+          <a:xfrm>
+            <a:off x="1828800" y="3035808"/>
+            <a:ext cx="6400800" cy="274320"/>
+          </a:xfrm>
+          <a:prstGeom prst="rect">
+            <a:avLst/>
+          </a:prstGeom>
+          <a:noFill/>
+          <a:ln/>
+        </p:spPr>
+        <p:txBody>
+          <a:bodyPr wrap="square" lIns="0" tIns="0" rIns="0" bIns="0" rtlCol="0" anchor="ctr"/>
+          <a:lstStyle/>
+          <a:p>
+            <a:pPr algn="ctr" indent="0" marL="0">
+              <a:buNone/>
+            </a:pPr>
+            <a:r>
+              <a:rPr lang="en-US" sz="1250" dirty="0">
                 <a:solidFill>
                   <a:srgbClr val="5B6B7D"/>
+                </a:solidFill>
+                <a:latin typeface="Montserrat Medium" pitchFamily="34" charset="0"/>
+                <a:ea typeface="Montserrat Medium" pitchFamily="34" charset="-122"/>
+                <a:cs typeface="Montserrat Medium" pitchFamily="34" charset="-120"/>
+              </a:rPr>
+              <a:t>Otorga el presente reconocimiento a</a:t>
+            </a:r>
+            <a:endParaRPr lang="en-US" sz="1250" dirty="0"/>
+          </a:p>
+        </p:txBody>
+      </p:sp>
+      <p:sp>
+        <p:nvSpPr>
+          <p:cNvPr id="7" name="Text 3"/>
+          <p:cNvSpPr txBox="1"/>
+          <p:nvPr/>
+        </p:nvSpPr>
+        <p:spPr>
+          <a:xfrm>
+            <a:off x="1097280" y="3310128"/>
+            <a:ext cx="7863840" cy="713232"/>
+          </a:xfrm>
+          <a:prstGeom prst="rect">
+            <a:avLst/>
+          </a:prstGeom>
+          <a:noFill/>
+          <a:ln/>
+        </p:spPr>
+        <p:txBody>
+          <a:bodyPr wrap="square" lIns="0" tIns="0" rIns="0" bIns="0" rtlCol="0" anchor="ctr"/>
+          <a:lstStyle/>
+          <a:p>
+            <a:pPr algn="ctr" indent="0" marL="0">
+              <a:buNone/>
+            </a:pPr>
+            <a:r>
+              <a:rPr lang="en-US" sz="3800" dirty="0">
+                <a:solidFill>
+                  <a:srgbClr val="0E2A47"/>
+                </a:solidFill>
+                <a:latin typeface="Montserrat ExtraBold" pitchFamily="34" charset="0"/>
+                <a:ea typeface="Montserrat ExtraBold" pitchFamily="34" charset="-122"/>
+                <a:cs typeface="Montserrat ExtraBold" pitchFamily="34" charset="-120"/>
+              </a:rPr>
+              <a:t>Dr. César Escalante</a:t>
+            </a:r>
+            <a:endParaRPr lang="en-US" sz="3800" dirty="0"/>
+          </a:p>
+        </p:txBody>
+      </p:sp>
+      <p:pic>
+        <p:nvPicPr>
+          <p:cNvPr id="8" name="Image 2" descr="preencoded.png">    </p:cNvPr>
+          <p:cNvPicPr>
+            <a:picLocks noChangeAspect="1"/>
+          </p:cNvPicPr>
+          <p:nvPr/>
+        </p:nvPicPr>
+        <p:blipFill>
+          <a:blip r:embed="rId3"/>
+          <a:stretch>
+            <a:fillRect/>
+          </a:stretch>
+        </p:blipFill>
+        <p:spPr>
+          <a:xfrm>
+            <a:off x="2194560" y="3986784"/>
+            <a:ext cx="5669280" cy="201168"/>
+          </a:xfrm>
+          <a:prstGeom prst="rect">
+            <a:avLst/>
+          </a:prstGeom>
+        </p:spPr>
+      </p:pic>
+      <p:sp>
+        <p:nvSpPr>
+          <p:cNvPr id="9" name="Text 4"/>
+          <p:cNvSpPr txBox="1"/>
+          <p:nvPr/>
+        </p:nvSpPr>
+        <p:spPr>
+          <a:xfrm>
+            <a:off x="1417320" y="4206240"/>
+            <a:ext cx="7223760" cy="896112"/>
+          </a:xfrm>
+          <a:prstGeom prst="rect">
+            <a:avLst/>
+          </a:prstGeom>
+          <a:noFill/>
+          <a:ln/>
+        </p:spPr>
+        <p:txBody>
+          <a:bodyPr wrap="square" lIns="0" tIns="0" rIns="0" bIns="0" rtlCol="0" anchor="t"/>
+          <a:lstStyle/>
+          <a:p>
+            <a:pPr algn="ctr" indent="0" marL="0">
+              <a:lnSpc>
+                <a:spcPct val="112000"/>
+              </a:lnSpc>
+              <a:buNone/>
+            </a:pPr>
+            <a:r>
+              <a:rPr lang="en-US" sz="1150" dirty="0">
+                <a:solidFill>
+                  <a:srgbClr val="2B3A4E"/>
+                </a:solidFill>
+                <a:latin typeface="Montserrat" pitchFamily="34" charset="0"/>
+                <a:ea typeface="Montserrat" pitchFamily="34" charset="-122"/>
+                <a:cs typeface="Montserrat" pitchFamily="34" charset="-120"/>
+              </a:rPr>
+              <a:t>Por su valiosa participación como ponente con la conferencia </a:t>
+            </a:r>
+            <a:pPr algn="ctr" indent="0" marL="0">
+              <a:lnSpc>
+                <a:spcPct val="112000"/>
+              </a:lnSpc>
+              <a:buNone/>
+            </a:pPr>
+            <a:r>
+              <a:rPr lang="en-US" sz="1150" dirty="0">
+                <a:solidFill>
+                  <a:srgbClr val="0E2A47"/>
+                </a:solidFill>
+                <a:latin typeface="Montserrat ExtraBold" pitchFamily="34" charset="0"/>
+                <a:ea typeface="Montserrat ExtraBold" pitchFamily="34" charset="-122"/>
+                <a:cs typeface="Montserrat ExtraBold" pitchFamily="34" charset="-120"/>
+              </a:rPr>
+              <a:t>«Leadership in Healthcare: Leading High-Performance Medical Teams»</a:t>
+            </a:r>
+            <a:pPr algn="ctr" indent="0" marL="0">
+              <a:lnSpc>
+                <a:spcPct val="112000"/>
+              </a:lnSpc>
+              <a:buNone/>
+            </a:pPr>
+            <a:r>
+              <a:rPr lang="en-US" sz="1150" dirty="0">
+                <a:solidFill>
+                  <a:srgbClr val="2B3A4E"/>
+                </a:solidFill>
+                <a:latin typeface="Montserrat" pitchFamily="34" charset="0"/>
+                <a:ea typeface="Montserrat" pitchFamily="34" charset="-122"/>
+                <a:cs typeface="Montserrat" pitchFamily="34" charset="-120"/>
+              </a:rPr>
+              <a:t> en el </a:t>
+            </a:r>
+            <a:pPr algn="ctr" indent="0" marL="0">
+              <a:lnSpc>
+                <a:spcPct val="112000"/>
+              </a:lnSpc>
+              <a:buNone/>
+            </a:pPr>
+            <a:r>
+              <a:rPr lang="en-US" sz="1150" dirty="0">
+                <a:solidFill>
+                  <a:srgbClr val="0E2A47"/>
+                </a:solidFill>
+                <a:latin typeface="Montserrat ExtraBold" pitchFamily="34" charset="0"/>
+                <a:ea typeface="Montserrat ExtraBold" pitchFamily="34" charset="-122"/>
+                <a:cs typeface="Montserrat ExtraBold" pitchFamily="34" charset="-120"/>
+              </a:rPr>
+              <a:t>Westhill Medical Leadership Summit 2026</a:t>
+            </a:r>
+            <a:pPr algn="ctr" indent="0" marL="0">
+              <a:lnSpc>
+                <a:spcPct val="112000"/>
+              </a:lnSpc>
+              <a:buNone/>
+            </a:pPr>
+            <a:r>
+              <a:rPr lang="en-US" sz="1150" dirty="0">
+                <a:solidFill>
+                  <a:srgbClr val="2B3A4E"/>
+                </a:solidFill>
+                <a:latin typeface="Montserrat" pitchFamily="34" charset="0"/>
+                <a:ea typeface="Montserrat" pitchFamily="34" charset="-122"/>
+                <a:cs typeface="Montserrat" pitchFamily="34" charset="-120"/>
+              </a:rPr>
+              <a:t>, realizado los días 21, 22 y 23 de octubre de 2026 en la Facultad de Medicina de la Universidad Westhill.</a:t>
+            </a:r>
+            <a:endParaRPr lang="en-US" sz="1150" dirty="0"/>
+          </a:p>
+        </p:txBody>
+      </p:sp>
+      <p:sp>
+        <p:nvSpPr>
+          <p:cNvPr id="10" name="Text 5"/>
+          <p:cNvSpPr txBox="1"/>
+          <p:nvPr/>
+        </p:nvSpPr>
+        <p:spPr>
+          <a:xfrm>
+            <a:off x="2286000" y="5120640"/>
+            <a:ext cx="5486400" cy="237744"/>
+          </a:xfrm>
+          <a:prstGeom prst="rect">
+            <a:avLst/>
+          </a:prstGeom>
+          <a:noFill/>
+          <a:ln/>
+        </p:spPr>
+        <p:txBody>
+          <a:bodyPr wrap="square" lIns="0" tIns="0" rIns="0" bIns="0" rtlCol="0" anchor="ctr"/>
+          <a:lstStyle/>
+          <a:p>
+            <a:pPr algn="ctr" indent="0" marL="0">
+              <a:buNone/>
+            </a:pPr>
+            <a:r>
+              <a:rPr lang="en-US" sz="1050" dirty="0">
+                <a:solidFill>
+                  <a:srgbClr val="266294"/>
                 </a:solidFill>
                 <a:latin typeface="Montserrat SemiBold" pitchFamily="34" charset="0"/>
                 <a:ea typeface="Montserrat SemiBold" pitchFamily="34" charset="-122"/>
                 <a:cs typeface="Montserrat SemiBold" pitchFamily="34" charset="-120"/>
               </a:rPr>
-              <a:t>FACULTAD DE MEDICINA</a:t>
+              <a:t>Ciudad de México, a 23 de octubre de 2026</a:t>
             </a:r>
             <a:endParaRPr lang="en-US" sz="1050" dirty="0"/>
           </a:p>
@@ -6899,395 +6941,7 @@
       </p:sp>
       <p:sp>
         <p:nvSpPr>
-          <p:cNvPr id="3" name="Text 1"/>
-          <p:cNvSpPr txBox="1"/>
-          <p:nvPr/>
-        </p:nvSpPr>
-        <p:spPr>
-          <a:xfrm>
-            <a:off x="1097280" y="1737360"/>
-            <a:ext cx="7863840" cy="777240"/>
-          </a:xfrm>
-          <a:prstGeom prst="rect">
-            <a:avLst/>
-          </a:prstGeom>
-          <a:noFill/>
-          <a:ln/>
-        </p:spPr>
-        <p:txBody>
-          <a:bodyPr wrap="square" lIns="0" tIns="0" rIns="0" bIns="0" rtlCol="0" anchor="ctr"/>
-          <a:lstStyle/>
-          <a:p>
-            <a:pPr algn="ctr" indent="0" marL="0">
-              <a:buNone/>
-            </a:pPr>
-            <a:r>
-              <a:rPr lang="en-US" sz="4200" spc="400" kern="0" dirty="0">
-                <a:solidFill>
-                  <a:srgbClr val="266294"/>
-                </a:solidFill>
-                <a:latin typeface="Montserrat ExtraBold" pitchFamily="34" charset="0"/>
-                <a:ea typeface="Montserrat ExtraBold" pitchFamily="34" charset="-122"/>
-                <a:cs typeface="Montserrat ExtraBold" pitchFamily="34" charset="-120"/>
-              </a:rPr>
-              <a:t>RECONOCIMIENTO</a:t>
-            </a:r>
-            <a:endParaRPr lang="en-US" sz="4200" dirty="0"/>
-          </a:p>
-        </p:txBody>
-      </p:sp>
-      <p:sp>
-        <p:nvSpPr>
-          <p:cNvPr id="4" name="Shape 2"/>
-          <p:cNvSpPr/>
-          <p:nvPr/>
-        </p:nvSpPr>
-        <p:spPr>
-          <a:xfrm>
-            <a:off x="2331720" y="2706624"/>
-            <a:ext cx="914400" cy="54864"/>
-          </a:xfrm>
-          <a:prstGeom prst="rect">
-            <a:avLst/>
-          </a:prstGeom>
-          <a:solidFill>
-            <a:srgbClr val="2DB34A"/>
-          </a:solidFill>
-          <a:ln/>
-        </p:spPr>
-      </p:sp>
-      <p:sp>
-        <p:nvSpPr>
-          <p:cNvPr id="5" name="Shape 3"/>
-          <p:cNvSpPr/>
-          <p:nvPr/>
-        </p:nvSpPr>
-        <p:spPr>
-          <a:xfrm>
-            <a:off x="6812280" y="2706624"/>
-            <a:ext cx="914400" cy="54864"/>
-          </a:xfrm>
-          <a:prstGeom prst="rect">
-            <a:avLst/>
-          </a:prstGeom>
-          <a:solidFill>
-            <a:srgbClr val="2DB34A"/>
-          </a:solidFill>
-          <a:ln/>
-        </p:spPr>
-      </p:sp>
-      <p:sp>
-        <p:nvSpPr>
-          <p:cNvPr id="6" name="Text 4"/>
-          <p:cNvSpPr txBox="1"/>
-          <p:nvPr/>
-        </p:nvSpPr>
-        <p:spPr>
-          <a:xfrm>
-            <a:off x="3291840" y="2560320"/>
-            <a:ext cx="3474720" cy="329184"/>
-          </a:xfrm>
-          <a:prstGeom prst="rect">
-            <a:avLst/>
-          </a:prstGeom>
-          <a:noFill/>
-          <a:ln/>
-        </p:spPr>
-        <p:txBody>
-          <a:bodyPr wrap="square" lIns="0" tIns="0" rIns="0" bIns="0" rtlCol="0" anchor="ctr"/>
-          <a:lstStyle/>
-          <a:p>
-            <a:pPr algn="ctr" indent="0" marL="0">
-              <a:buNone/>
-            </a:pPr>
-            <a:r>
-              <a:rPr lang="en-US" sz="1500" spc="500" kern="0" dirty="0">
-                <a:solidFill>
-                  <a:srgbClr val="0E2A47"/>
-                </a:solidFill>
-                <a:latin typeface="Montserrat ExtraBold" pitchFamily="34" charset="0"/>
-                <a:ea typeface="Montserrat ExtraBold" pitchFamily="34" charset="-122"/>
-                <a:cs typeface="Montserrat ExtraBold" pitchFamily="34" charset="-120"/>
-              </a:rPr>
-              <a:t>COMO PONENTE</a:t>
-            </a:r>
-            <a:endParaRPr lang="en-US" sz="1500" dirty="0"/>
-          </a:p>
-        </p:txBody>
-      </p:sp>
-      <p:sp>
-        <p:nvSpPr>
-          <p:cNvPr id="7" name="Text 5"/>
-          <p:cNvSpPr txBox="1"/>
-          <p:nvPr/>
-        </p:nvSpPr>
-        <p:spPr>
-          <a:xfrm>
-            <a:off x="1828800" y="3035808"/>
-            <a:ext cx="6400800" cy="274320"/>
-          </a:xfrm>
-          <a:prstGeom prst="rect">
-            <a:avLst/>
-          </a:prstGeom>
-          <a:noFill/>
-          <a:ln/>
-        </p:spPr>
-        <p:txBody>
-          <a:bodyPr wrap="square" lIns="0" tIns="0" rIns="0" bIns="0" rtlCol="0" anchor="ctr"/>
-          <a:lstStyle/>
-          <a:p>
-            <a:pPr algn="ctr" indent="0" marL="0">
-              <a:buNone/>
-            </a:pPr>
-            <a:r>
-              <a:rPr lang="en-US" sz="1250" dirty="0">
-                <a:solidFill>
-                  <a:srgbClr val="5B6B7D"/>
-                </a:solidFill>
-                <a:latin typeface="Montserrat Medium" pitchFamily="34" charset="0"/>
-                <a:ea typeface="Montserrat Medium" pitchFamily="34" charset="-122"/>
-                <a:cs typeface="Montserrat Medium" pitchFamily="34" charset="-120"/>
-              </a:rPr>
-              <a:t>Otorga el presente reconocimiento a</a:t>
-            </a:r>
-            <a:endParaRPr lang="en-US" sz="1250" dirty="0"/>
-          </a:p>
-        </p:txBody>
-      </p:sp>
-      <p:sp>
-        <p:nvSpPr>
-          <p:cNvPr id="8" name="Text 6"/>
-          <p:cNvSpPr txBox="1"/>
-          <p:nvPr/>
-        </p:nvSpPr>
-        <p:spPr>
-          <a:xfrm>
-            <a:off x="1097280" y="3310128"/>
-            <a:ext cx="7863840" cy="713232"/>
-          </a:xfrm>
-          <a:prstGeom prst="rect">
-            <a:avLst/>
-          </a:prstGeom>
-          <a:noFill/>
-          <a:ln/>
-        </p:spPr>
-        <p:txBody>
-          <a:bodyPr wrap="square" lIns="0" tIns="0" rIns="0" bIns="0" rtlCol="0" anchor="ctr"/>
-          <a:lstStyle/>
-          <a:p>
-            <a:pPr algn="ctr" indent="0" marL="0">
-              <a:buNone/>
-            </a:pPr>
-            <a:r>
-              <a:rPr lang="en-US" sz="3800" dirty="0">
-                <a:solidFill>
-                  <a:srgbClr val="0E2A47"/>
-                </a:solidFill>
-                <a:latin typeface="Montserrat ExtraBold" pitchFamily="34" charset="0"/>
-                <a:ea typeface="Montserrat ExtraBold" pitchFamily="34" charset="-122"/>
-                <a:cs typeface="Montserrat ExtraBold" pitchFamily="34" charset="-120"/>
-              </a:rPr>
-              <a:t>Dr. César Escalante</a:t>
-            </a:r>
-            <a:endParaRPr lang="en-US" sz="3800" dirty="0"/>
-          </a:p>
-        </p:txBody>
-      </p:sp>
-      <p:sp>
-        <p:nvSpPr>
-          <p:cNvPr id="9" name="Shape 7"/>
-          <p:cNvSpPr/>
-          <p:nvPr/>
-        </p:nvSpPr>
-        <p:spPr>
-          <a:xfrm>
-            <a:off x="2194560" y="4087368"/>
-            <a:ext cx="5669280" cy="0"/>
-          </a:xfrm>
-          <a:prstGeom prst="line">
-            <a:avLst/>
-          </a:prstGeom>
-          <a:noFill/>
-          <a:ln w="22225">
-            <a:solidFill>
-              <a:srgbClr val="F2C94C"/>
-            </a:solidFill>
-            <a:prstDash val="solid"/>
-          </a:ln>
-        </p:spPr>
-      </p:sp>
-      <p:sp>
-        <p:nvSpPr>
-          <p:cNvPr id="10" name="Shape 8"/>
-          <p:cNvSpPr/>
-          <p:nvPr/>
-        </p:nvSpPr>
-        <p:spPr>
-          <a:xfrm>
-            <a:off x="4974336" y="4032504"/>
-            <a:ext cx="109728" cy="109728"/>
-          </a:xfrm>
-          <a:prstGeom prst="ellipse">
-            <a:avLst/>
-          </a:prstGeom>
-          <a:solidFill>
-            <a:srgbClr val="F2C94C"/>
-          </a:solidFill>
-          <a:ln/>
-        </p:spPr>
-      </p:sp>
-      <p:sp>
-        <p:nvSpPr>
-          <p:cNvPr id="11" name="Text 9"/>
-          <p:cNvSpPr txBox="1"/>
-          <p:nvPr/>
-        </p:nvSpPr>
-        <p:spPr>
-          <a:xfrm>
-            <a:off x="1417320" y="4206240"/>
-            <a:ext cx="7223760" cy="896112"/>
-          </a:xfrm>
-          <a:prstGeom prst="rect">
-            <a:avLst/>
-          </a:prstGeom>
-          <a:noFill/>
-          <a:ln/>
-        </p:spPr>
-        <p:txBody>
-          <a:bodyPr wrap="square" lIns="0" tIns="0" rIns="0" bIns="0" rtlCol="0" anchor="t"/>
-          <a:lstStyle/>
-          <a:p>
-            <a:pPr algn="ctr" indent="0" marL="0">
-              <a:lnSpc>
-                <a:spcPct val="112000"/>
-              </a:lnSpc>
-              <a:buNone/>
-            </a:pPr>
-            <a:r>
-              <a:rPr lang="en-US" sz="1150" dirty="0">
-                <a:solidFill>
-                  <a:srgbClr val="2B3A4E"/>
-                </a:solidFill>
-                <a:latin typeface="Montserrat" pitchFamily="34" charset="0"/>
-                <a:ea typeface="Montserrat" pitchFamily="34" charset="-122"/>
-                <a:cs typeface="Montserrat" pitchFamily="34" charset="-120"/>
-              </a:rPr>
-              <a:t>Por su valiosa participación como ponente con la conferencia </a:t>
-            </a:r>
-            <a:pPr algn="ctr" indent="0" marL="0">
-              <a:lnSpc>
-                <a:spcPct val="112000"/>
-              </a:lnSpc>
-              <a:buNone/>
-            </a:pPr>
-            <a:r>
-              <a:rPr lang="en-US" sz="1150" dirty="0">
-                <a:solidFill>
-                  <a:srgbClr val="0E2A47"/>
-                </a:solidFill>
-                <a:latin typeface="Montserrat ExtraBold" pitchFamily="34" charset="0"/>
-                <a:ea typeface="Montserrat ExtraBold" pitchFamily="34" charset="-122"/>
-                <a:cs typeface="Montserrat ExtraBold" pitchFamily="34" charset="-120"/>
-              </a:rPr>
-              <a:t>«Leadership in Healthcare: Leading High-Performance Medical Teams»</a:t>
-            </a:r>
-            <a:pPr algn="ctr" indent="0" marL="0">
-              <a:lnSpc>
-                <a:spcPct val="112000"/>
-              </a:lnSpc>
-              <a:buNone/>
-            </a:pPr>
-            <a:r>
-              <a:rPr lang="en-US" sz="1150" dirty="0">
-                <a:solidFill>
-                  <a:srgbClr val="2B3A4E"/>
-                </a:solidFill>
-                <a:latin typeface="Montserrat" pitchFamily="34" charset="0"/>
-                <a:ea typeface="Montserrat" pitchFamily="34" charset="-122"/>
-                <a:cs typeface="Montserrat" pitchFamily="34" charset="-120"/>
-              </a:rPr>
-              <a:t> en el </a:t>
-            </a:r>
-            <a:pPr algn="ctr" indent="0" marL="0">
-              <a:lnSpc>
-                <a:spcPct val="112000"/>
-              </a:lnSpc>
-              <a:buNone/>
-            </a:pPr>
-            <a:r>
-              <a:rPr lang="en-US" sz="1150" dirty="0">
-                <a:solidFill>
-                  <a:srgbClr val="0E2A47"/>
-                </a:solidFill>
-                <a:latin typeface="Montserrat ExtraBold" pitchFamily="34" charset="0"/>
-                <a:ea typeface="Montserrat ExtraBold" pitchFamily="34" charset="-122"/>
-                <a:cs typeface="Montserrat ExtraBold" pitchFamily="34" charset="-120"/>
-              </a:rPr>
-              <a:t>Westhill Medical Leadership Summit 2026</a:t>
-            </a:r>
-            <a:pPr algn="ctr" indent="0" marL="0">
-              <a:lnSpc>
-                <a:spcPct val="112000"/>
-              </a:lnSpc>
-              <a:buNone/>
-            </a:pPr>
-            <a:r>
-              <a:rPr lang="en-US" sz="1150" dirty="0">
-                <a:solidFill>
-                  <a:srgbClr val="2B3A4E"/>
-                </a:solidFill>
-                <a:latin typeface="Montserrat" pitchFamily="34" charset="0"/>
-                <a:ea typeface="Montserrat" pitchFamily="34" charset="-122"/>
-                <a:cs typeface="Montserrat" pitchFamily="34" charset="-120"/>
-              </a:rPr>
-              <a:t>, realizado los días 21, 22 y 23 de octubre de 2026 en la Facultad de Medicina de la Universidad Westhill.</a:t>
-            </a:r>
-            <a:endParaRPr lang="en-US" sz="1150" dirty="0"/>
-          </a:p>
-        </p:txBody>
-      </p:sp>
-      <p:sp>
-        <p:nvSpPr>
-          <p:cNvPr id="12" name="Text 10"/>
-          <p:cNvSpPr txBox="1"/>
-          <p:nvPr/>
-        </p:nvSpPr>
-        <p:spPr>
-          <a:xfrm>
-            <a:off x="2286000" y="5120640"/>
-            <a:ext cx="5486400" cy="237744"/>
-          </a:xfrm>
-          <a:prstGeom prst="rect">
-            <a:avLst/>
-          </a:prstGeom>
-          <a:noFill/>
-          <a:ln/>
-        </p:spPr>
-        <p:txBody>
-          <a:bodyPr wrap="square" lIns="0" tIns="0" rIns="0" bIns="0" rtlCol="0" anchor="ctr"/>
-          <a:lstStyle/>
-          <a:p>
-            <a:pPr algn="ctr" indent="0" marL="0">
-              <a:buNone/>
-            </a:pPr>
-            <a:r>
-              <a:rPr lang="en-US" sz="1050" dirty="0">
-                <a:solidFill>
-                  <a:srgbClr val="266294"/>
-                </a:solidFill>
-                <a:latin typeface="Montserrat SemiBold" pitchFamily="34" charset="0"/>
-                <a:ea typeface="Montserrat SemiBold" pitchFamily="34" charset="-122"/>
-                <a:cs typeface="Montserrat SemiBold" pitchFamily="34" charset="-120"/>
-              </a:rPr>
-              <a:t>Ciudad de México, a 23 de octubre de 2026</a:t>
-            </a:r>
-            <a:endParaRPr lang="en-US" sz="1050" dirty="0"/>
-          </a:p>
-        </p:txBody>
-      </p:sp>
-      <p:sp>
-        <p:nvSpPr>
-          <p:cNvPr id="13" name="Shape 11"/>
+          <p:cNvPr id="11" name="Shape 6"/>
           <p:cNvSpPr/>
           <p:nvPr/>
         </p:nvSpPr>
@@ -7310,7 +6964,7 @@
       </p:sp>
       <p:sp>
         <p:nvSpPr>
-          <p:cNvPr id="14" name="Text 12"/>
+          <p:cNvPr id="12" name="Text 7"/>
           <p:cNvSpPr txBox="1"/>
           <p:nvPr/>
         </p:nvSpPr>
@@ -7349,7 +7003,7 @@
       </p:sp>
       <p:sp>
         <p:nvSpPr>
-          <p:cNvPr id="15" name="Text 13"/>
+          <p:cNvPr id="13" name="Text 8"/>
           <p:cNvSpPr txBox="1"/>
           <p:nvPr/>
         </p:nvSpPr>
@@ -7388,7 +7042,7 @@
       </p:sp>
       <p:sp>
         <p:nvSpPr>
-          <p:cNvPr id="16" name="Shape 14"/>
+          <p:cNvPr id="14" name="Shape 9"/>
           <p:cNvSpPr/>
           <p:nvPr/>
         </p:nvSpPr>
@@ -7411,7 +7065,7 @@
       </p:sp>
       <p:sp>
         <p:nvSpPr>
-          <p:cNvPr id="17" name="Text 15"/>
+          <p:cNvPr id="15" name="Text 10"/>
           <p:cNvSpPr txBox="1"/>
           <p:nvPr/>
         </p:nvSpPr>
@@ -7450,7 +7104,7 @@
       </p:sp>
       <p:sp>
         <p:nvSpPr>
-          <p:cNvPr id="18" name="Text 16"/>
+          <p:cNvPr id="16" name="Text 11"/>
           <p:cNvSpPr txBox="1"/>
           <p:nvPr/>
         </p:nvSpPr>
@@ -7489,7 +7143,7 @@
       </p:sp>
       <p:sp>
         <p:nvSpPr>
-          <p:cNvPr id="19" name="Text 17"/>
+          <p:cNvPr id="17" name="Text 12"/>
           <p:cNvSpPr txBox="1"/>
           <p:nvPr/>
         </p:nvSpPr>
@@ -7559,32 +7213,370 @@
         </p:nvSpPr>
         <p:spPr>
           <a:xfrm>
-            <a:off x="1188720" y="1536192"/>
-            <a:ext cx="7680960" cy="237744"/>
-          </a:xfrm>
-          <a:prstGeom prst="rect">
-            <a:avLst/>
-          </a:prstGeom>
-          <a:noFill/>
-          <a:ln/>
-        </p:spPr>
-        <p:txBody>
-          <a:bodyPr wrap="square" lIns="0" tIns="0" rIns="0" bIns="0" rtlCol="0" anchor="ctr"/>
-          <a:lstStyle/>
-          <a:p>
-            <a:pPr algn="ctr" indent="0" marL="0">
-              <a:buNone/>
-            </a:pPr>
-            <a:r>
-              <a:rPr lang="en-US" sz="1050" spc="300" kern="0" dirty="0">
+            <a:off x="1097280" y="1737360"/>
+            <a:ext cx="7863840" cy="777240"/>
+          </a:xfrm>
+          <a:prstGeom prst="rect">
+            <a:avLst/>
+          </a:prstGeom>
+          <a:noFill/>
+          <a:ln/>
+        </p:spPr>
+        <p:txBody>
+          <a:bodyPr wrap="square" lIns="0" tIns="0" rIns="0" bIns="0" rtlCol="0" anchor="ctr"/>
+          <a:lstStyle/>
+          <a:p>
+            <a:pPr algn="ctr" indent="0" marL="0">
+              <a:buNone/>
+            </a:pPr>
+            <a:r>
+              <a:rPr lang="en-US" sz="4200" spc="400" kern="0" dirty="0">
+                <a:solidFill>
+                  <a:srgbClr val="266294"/>
+                </a:solidFill>
+                <a:latin typeface="Montserrat ExtraBold" pitchFamily="34" charset="0"/>
+                <a:ea typeface="Montserrat ExtraBold" pitchFamily="34" charset="-122"/>
+                <a:cs typeface="Montserrat ExtraBold" pitchFamily="34" charset="-120"/>
+              </a:rPr>
+              <a:t>RECONOCIMIENTO</a:t>
+            </a:r>
+            <a:endParaRPr lang="en-US" sz="4200" dirty="0"/>
+          </a:p>
+        </p:txBody>
+      </p:sp>
+      <p:pic>
+        <p:nvPicPr>
+          <p:cNvPr id="3" name="Image 0" descr="preencoded.png">    </p:cNvPr>
+          <p:cNvPicPr>
+            <a:picLocks noChangeAspect="1"/>
+          </p:cNvPicPr>
+          <p:nvPr/>
+        </p:nvPicPr>
+        <p:blipFill>
+          <a:blip r:embed="rId1"/>
+          <a:stretch>
+            <a:fillRect/>
+          </a:stretch>
+        </p:blipFill>
+        <p:spPr>
+          <a:xfrm>
+            <a:off x="1874520" y="2642616"/>
+            <a:ext cx="1371600" cy="182880"/>
+          </a:xfrm>
+          <a:prstGeom prst="rect">
+            <a:avLst/>
+          </a:prstGeom>
+        </p:spPr>
+      </p:pic>
+      <p:pic>
+        <p:nvPicPr>
+          <p:cNvPr id="4" name="Image 1" descr="preencoded.png">    </p:cNvPr>
+          <p:cNvPicPr>
+            <a:picLocks noChangeAspect="1"/>
+          </p:cNvPicPr>
+          <p:nvPr/>
+        </p:nvPicPr>
+        <p:blipFill>
+          <a:blip r:embed="rId2"/>
+          <a:stretch>
+            <a:fillRect/>
+          </a:stretch>
+        </p:blipFill>
+        <p:spPr>
+          <a:xfrm>
+            <a:off x="6812280" y="2642616"/>
+            <a:ext cx="1371600" cy="182880"/>
+          </a:xfrm>
+          <a:prstGeom prst="rect">
+            <a:avLst/>
+          </a:prstGeom>
+        </p:spPr>
+      </p:pic>
+      <p:sp>
+        <p:nvSpPr>
+          <p:cNvPr id="5" name="Text 1"/>
+          <p:cNvSpPr txBox="1"/>
+          <p:nvPr/>
+        </p:nvSpPr>
+        <p:spPr>
+          <a:xfrm>
+            <a:off x="3291840" y="2560320"/>
+            <a:ext cx="3474720" cy="329184"/>
+          </a:xfrm>
+          <a:prstGeom prst="rect">
+            <a:avLst/>
+          </a:prstGeom>
+          <a:noFill/>
+          <a:ln/>
+        </p:spPr>
+        <p:txBody>
+          <a:bodyPr wrap="square" lIns="0" tIns="0" rIns="0" bIns="0" rtlCol="0" anchor="ctr"/>
+          <a:lstStyle/>
+          <a:p>
+            <a:pPr algn="ctr" indent="0" marL="0">
+              <a:buNone/>
+            </a:pPr>
+            <a:r>
+              <a:rPr lang="en-US" sz="1500" spc="500" kern="0" dirty="0">
+                <a:solidFill>
+                  <a:srgbClr val="0E2A47"/>
+                </a:solidFill>
+                <a:latin typeface="Montserrat ExtraBold" pitchFamily="34" charset="0"/>
+                <a:ea typeface="Montserrat ExtraBold" pitchFamily="34" charset="-122"/>
+                <a:cs typeface="Montserrat ExtraBold" pitchFamily="34" charset="-120"/>
+              </a:rPr>
+              <a:t>COMO PONENTE</a:t>
+            </a:r>
+            <a:endParaRPr lang="en-US" sz="1500" dirty="0"/>
+          </a:p>
+        </p:txBody>
+      </p:sp>
+      <p:sp>
+        <p:nvSpPr>
+          <p:cNvPr id="6" name="Text 2"/>
+          <p:cNvSpPr txBox="1"/>
+          <p:nvPr/>
+        </p:nvSpPr>
+        <p:spPr>
+          <a:xfrm>
+            <a:off x="1828800" y="3035808"/>
+            <a:ext cx="6400800" cy="274320"/>
+          </a:xfrm>
+          <a:prstGeom prst="rect">
+            <a:avLst/>
+          </a:prstGeom>
+          <a:noFill/>
+          <a:ln/>
+        </p:spPr>
+        <p:txBody>
+          <a:bodyPr wrap="square" lIns="0" tIns="0" rIns="0" bIns="0" rtlCol="0" anchor="ctr"/>
+          <a:lstStyle/>
+          <a:p>
+            <a:pPr algn="ctr" indent="0" marL="0">
+              <a:buNone/>
+            </a:pPr>
+            <a:r>
+              <a:rPr lang="en-US" sz="1250" dirty="0">
                 <a:solidFill>
                   <a:srgbClr val="5B6B7D"/>
+                </a:solidFill>
+                <a:latin typeface="Montserrat Medium" pitchFamily="34" charset="0"/>
+                <a:ea typeface="Montserrat Medium" pitchFamily="34" charset="-122"/>
+                <a:cs typeface="Montserrat Medium" pitchFamily="34" charset="-120"/>
+              </a:rPr>
+              <a:t>Otorga el presente reconocimiento a</a:t>
+            </a:r>
+            <a:endParaRPr lang="en-US" sz="1250" dirty="0"/>
+          </a:p>
+        </p:txBody>
+      </p:sp>
+      <p:sp>
+        <p:nvSpPr>
+          <p:cNvPr id="7" name="Text 3"/>
+          <p:cNvSpPr txBox="1"/>
+          <p:nvPr/>
+        </p:nvSpPr>
+        <p:spPr>
+          <a:xfrm>
+            <a:off x="1097280" y="3310128"/>
+            <a:ext cx="7863840" cy="713232"/>
+          </a:xfrm>
+          <a:prstGeom prst="rect">
+            <a:avLst/>
+          </a:prstGeom>
+          <a:noFill/>
+          <a:ln/>
+        </p:spPr>
+        <p:txBody>
+          <a:bodyPr wrap="square" lIns="0" tIns="0" rIns="0" bIns="0" rtlCol="0" anchor="ctr"/>
+          <a:lstStyle/>
+          <a:p>
+            <a:pPr algn="ctr" indent="0" marL="0">
+              <a:buNone/>
+            </a:pPr>
+            <a:r>
+              <a:rPr lang="en-US" sz="3800" dirty="0">
+                <a:solidFill>
+                  <a:srgbClr val="0E2A47"/>
+                </a:solidFill>
+                <a:latin typeface="Montserrat ExtraBold" pitchFamily="34" charset="0"/>
+                <a:ea typeface="Montserrat ExtraBold" pitchFamily="34" charset="-122"/>
+                <a:cs typeface="Montserrat ExtraBold" pitchFamily="34" charset="-120"/>
+              </a:rPr>
+              <a:t>Dra. Guadalupe Rodríguez</a:t>
+            </a:r>
+            <a:endParaRPr lang="en-US" sz="3800" dirty="0"/>
+          </a:p>
+        </p:txBody>
+      </p:sp>
+      <p:pic>
+        <p:nvPicPr>
+          <p:cNvPr id="8" name="Image 2" descr="preencoded.png">    </p:cNvPr>
+          <p:cNvPicPr>
+            <a:picLocks noChangeAspect="1"/>
+          </p:cNvPicPr>
+          <p:nvPr/>
+        </p:nvPicPr>
+        <p:blipFill>
+          <a:blip r:embed="rId3"/>
+          <a:stretch>
+            <a:fillRect/>
+          </a:stretch>
+        </p:blipFill>
+        <p:spPr>
+          <a:xfrm>
+            <a:off x="2194560" y="3986784"/>
+            <a:ext cx="5669280" cy="201168"/>
+          </a:xfrm>
+          <a:prstGeom prst="rect">
+            <a:avLst/>
+          </a:prstGeom>
+        </p:spPr>
+      </p:pic>
+      <p:sp>
+        <p:nvSpPr>
+          <p:cNvPr id="9" name="Text 4"/>
+          <p:cNvSpPr txBox="1"/>
+          <p:nvPr/>
+        </p:nvSpPr>
+        <p:spPr>
+          <a:xfrm>
+            <a:off x="1417320" y="4206240"/>
+            <a:ext cx="7223760" cy="896112"/>
+          </a:xfrm>
+          <a:prstGeom prst="rect">
+            <a:avLst/>
+          </a:prstGeom>
+          <a:noFill/>
+          <a:ln/>
+        </p:spPr>
+        <p:txBody>
+          <a:bodyPr wrap="square" lIns="0" tIns="0" rIns="0" bIns="0" rtlCol="0" anchor="t"/>
+          <a:lstStyle/>
+          <a:p>
+            <a:pPr algn="ctr" indent="0" marL="0">
+              <a:lnSpc>
+                <a:spcPct val="112000"/>
+              </a:lnSpc>
+              <a:buNone/>
+            </a:pPr>
+            <a:r>
+              <a:rPr lang="en-US" sz="1150" dirty="0">
+                <a:solidFill>
+                  <a:srgbClr val="2B3A4E"/>
+                </a:solidFill>
+                <a:latin typeface="Montserrat" pitchFamily="34" charset="0"/>
+                <a:ea typeface="Montserrat" pitchFamily="34" charset="-122"/>
+                <a:cs typeface="Montserrat" pitchFamily="34" charset="-120"/>
+              </a:rPr>
+              <a:t>Por su valiosa participación como ponente con la conferencia </a:t>
+            </a:r>
+            <a:pPr algn="ctr" indent="0" marL="0">
+              <a:lnSpc>
+                <a:spcPct val="112000"/>
+              </a:lnSpc>
+              <a:buNone/>
+            </a:pPr>
+            <a:r>
+              <a:rPr lang="en-US" sz="1150" dirty="0">
+                <a:solidFill>
+                  <a:srgbClr val="0E2A47"/>
+                </a:solidFill>
+                <a:latin typeface="Montserrat ExtraBold" pitchFamily="34" charset="0"/>
+                <a:ea typeface="Montserrat ExtraBold" pitchFamily="34" charset="-122"/>
+                <a:cs typeface="Montserrat ExtraBold" pitchFamily="34" charset="-120"/>
+              </a:rPr>
+              <a:t>«Anemias y leucemias»</a:t>
+            </a:r>
+            <a:pPr algn="ctr" indent="0" marL="0">
+              <a:lnSpc>
+                <a:spcPct val="112000"/>
+              </a:lnSpc>
+              <a:buNone/>
+            </a:pPr>
+            <a:r>
+              <a:rPr lang="en-US" sz="1150" dirty="0">
+                <a:solidFill>
+                  <a:srgbClr val="2B3A4E"/>
+                </a:solidFill>
+                <a:latin typeface="Montserrat" pitchFamily="34" charset="0"/>
+                <a:ea typeface="Montserrat" pitchFamily="34" charset="-122"/>
+                <a:cs typeface="Montserrat" pitchFamily="34" charset="-120"/>
+              </a:rPr>
+              <a:t> en el </a:t>
+            </a:r>
+            <a:pPr algn="ctr" indent="0" marL="0">
+              <a:lnSpc>
+                <a:spcPct val="112000"/>
+              </a:lnSpc>
+              <a:buNone/>
+            </a:pPr>
+            <a:r>
+              <a:rPr lang="en-US" sz="1150" dirty="0">
+                <a:solidFill>
+                  <a:srgbClr val="0E2A47"/>
+                </a:solidFill>
+                <a:latin typeface="Montserrat ExtraBold" pitchFamily="34" charset="0"/>
+                <a:ea typeface="Montserrat ExtraBold" pitchFamily="34" charset="-122"/>
+                <a:cs typeface="Montserrat ExtraBold" pitchFamily="34" charset="-120"/>
+              </a:rPr>
+              <a:t>Westhill Medical Leadership Summit 2026</a:t>
+            </a:r>
+            <a:pPr algn="ctr" indent="0" marL="0">
+              <a:lnSpc>
+                <a:spcPct val="112000"/>
+              </a:lnSpc>
+              <a:buNone/>
+            </a:pPr>
+            <a:r>
+              <a:rPr lang="en-US" sz="1150" dirty="0">
+                <a:solidFill>
+                  <a:srgbClr val="2B3A4E"/>
+                </a:solidFill>
+                <a:latin typeface="Montserrat" pitchFamily="34" charset="0"/>
+                <a:ea typeface="Montserrat" pitchFamily="34" charset="-122"/>
+                <a:cs typeface="Montserrat" pitchFamily="34" charset="-120"/>
+              </a:rPr>
+              <a:t>, realizado los días 21, 22 y 23 de octubre de 2026 en la Facultad de Medicina de la Universidad Westhill.</a:t>
+            </a:r>
+            <a:endParaRPr lang="en-US" sz="1150" dirty="0"/>
+          </a:p>
+        </p:txBody>
+      </p:sp>
+      <p:sp>
+        <p:nvSpPr>
+          <p:cNvPr id="10" name="Text 5"/>
+          <p:cNvSpPr txBox="1"/>
+          <p:nvPr/>
+        </p:nvSpPr>
+        <p:spPr>
+          <a:xfrm>
+            <a:off x="2286000" y="5120640"/>
+            <a:ext cx="5486400" cy="237744"/>
+          </a:xfrm>
+          <a:prstGeom prst="rect">
+            <a:avLst/>
+          </a:prstGeom>
+          <a:noFill/>
+          <a:ln/>
+        </p:spPr>
+        <p:txBody>
+          <a:bodyPr wrap="square" lIns="0" tIns="0" rIns="0" bIns="0" rtlCol="0" anchor="ctr"/>
+          <a:lstStyle/>
+          <a:p>
+            <a:pPr algn="ctr" indent="0" marL="0">
+              <a:buNone/>
+            </a:pPr>
+            <a:r>
+              <a:rPr lang="en-US" sz="1050" dirty="0">
+                <a:solidFill>
+                  <a:srgbClr val="266294"/>
                 </a:solidFill>
                 <a:latin typeface="Montserrat SemiBold" pitchFamily="34" charset="0"/>
                 <a:ea typeface="Montserrat SemiBold" pitchFamily="34" charset="-122"/>
                 <a:cs typeface="Montserrat SemiBold" pitchFamily="34" charset="-120"/>
               </a:rPr>
-              <a:t>FACULTAD DE MEDICINA</a:t>
+              <a:t>Ciudad de México, a 23 de octubre de 2026</a:t>
             </a:r>
             <a:endParaRPr lang="en-US" sz="1050" dirty="0"/>
           </a:p>
@@ -7592,395 +7584,7 @@
       </p:sp>
       <p:sp>
         <p:nvSpPr>
-          <p:cNvPr id="3" name="Text 1"/>
-          <p:cNvSpPr txBox="1"/>
-          <p:nvPr/>
-        </p:nvSpPr>
-        <p:spPr>
-          <a:xfrm>
-            <a:off x="1097280" y="1737360"/>
-            <a:ext cx="7863840" cy="777240"/>
-          </a:xfrm>
-          <a:prstGeom prst="rect">
-            <a:avLst/>
-          </a:prstGeom>
-          <a:noFill/>
-          <a:ln/>
-        </p:spPr>
-        <p:txBody>
-          <a:bodyPr wrap="square" lIns="0" tIns="0" rIns="0" bIns="0" rtlCol="0" anchor="ctr"/>
-          <a:lstStyle/>
-          <a:p>
-            <a:pPr algn="ctr" indent="0" marL="0">
-              <a:buNone/>
-            </a:pPr>
-            <a:r>
-              <a:rPr lang="en-US" sz="4200" spc="400" kern="0" dirty="0">
-                <a:solidFill>
-                  <a:srgbClr val="266294"/>
-                </a:solidFill>
-                <a:latin typeface="Montserrat ExtraBold" pitchFamily="34" charset="0"/>
-                <a:ea typeface="Montserrat ExtraBold" pitchFamily="34" charset="-122"/>
-                <a:cs typeface="Montserrat ExtraBold" pitchFamily="34" charset="-120"/>
-              </a:rPr>
-              <a:t>RECONOCIMIENTO</a:t>
-            </a:r>
-            <a:endParaRPr lang="en-US" sz="4200" dirty="0"/>
-          </a:p>
-        </p:txBody>
-      </p:sp>
-      <p:sp>
-        <p:nvSpPr>
-          <p:cNvPr id="4" name="Shape 2"/>
-          <p:cNvSpPr/>
-          <p:nvPr/>
-        </p:nvSpPr>
-        <p:spPr>
-          <a:xfrm>
-            <a:off x="2331720" y="2706624"/>
-            <a:ext cx="914400" cy="54864"/>
-          </a:xfrm>
-          <a:prstGeom prst="rect">
-            <a:avLst/>
-          </a:prstGeom>
-          <a:solidFill>
-            <a:srgbClr val="2DB34A"/>
-          </a:solidFill>
-          <a:ln/>
-        </p:spPr>
-      </p:sp>
-      <p:sp>
-        <p:nvSpPr>
-          <p:cNvPr id="5" name="Shape 3"/>
-          <p:cNvSpPr/>
-          <p:nvPr/>
-        </p:nvSpPr>
-        <p:spPr>
-          <a:xfrm>
-            <a:off x="6812280" y="2706624"/>
-            <a:ext cx="914400" cy="54864"/>
-          </a:xfrm>
-          <a:prstGeom prst="rect">
-            <a:avLst/>
-          </a:prstGeom>
-          <a:solidFill>
-            <a:srgbClr val="2DB34A"/>
-          </a:solidFill>
-          <a:ln/>
-        </p:spPr>
-      </p:sp>
-      <p:sp>
-        <p:nvSpPr>
-          <p:cNvPr id="6" name="Text 4"/>
-          <p:cNvSpPr txBox="1"/>
-          <p:nvPr/>
-        </p:nvSpPr>
-        <p:spPr>
-          <a:xfrm>
-            <a:off x="3291840" y="2560320"/>
-            <a:ext cx="3474720" cy="329184"/>
-          </a:xfrm>
-          <a:prstGeom prst="rect">
-            <a:avLst/>
-          </a:prstGeom>
-          <a:noFill/>
-          <a:ln/>
-        </p:spPr>
-        <p:txBody>
-          <a:bodyPr wrap="square" lIns="0" tIns="0" rIns="0" bIns="0" rtlCol="0" anchor="ctr"/>
-          <a:lstStyle/>
-          <a:p>
-            <a:pPr algn="ctr" indent="0" marL="0">
-              <a:buNone/>
-            </a:pPr>
-            <a:r>
-              <a:rPr lang="en-US" sz="1500" spc="500" kern="0" dirty="0">
-                <a:solidFill>
-                  <a:srgbClr val="0E2A47"/>
-                </a:solidFill>
-                <a:latin typeface="Montserrat ExtraBold" pitchFamily="34" charset="0"/>
-                <a:ea typeface="Montserrat ExtraBold" pitchFamily="34" charset="-122"/>
-                <a:cs typeface="Montserrat ExtraBold" pitchFamily="34" charset="-120"/>
-              </a:rPr>
-              <a:t>COMO PONENTE</a:t>
-            </a:r>
-            <a:endParaRPr lang="en-US" sz="1500" dirty="0"/>
-          </a:p>
-        </p:txBody>
-      </p:sp>
-      <p:sp>
-        <p:nvSpPr>
-          <p:cNvPr id="7" name="Text 5"/>
-          <p:cNvSpPr txBox="1"/>
-          <p:nvPr/>
-        </p:nvSpPr>
-        <p:spPr>
-          <a:xfrm>
-            <a:off x="1828800" y="3035808"/>
-            <a:ext cx="6400800" cy="274320"/>
-          </a:xfrm>
-          <a:prstGeom prst="rect">
-            <a:avLst/>
-          </a:prstGeom>
-          <a:noFill/>
-          <a:ln/>
-        </p:spPr>
-        <p:txBody>
-          <a:bodyPr wrap="square" lIns="0" tIns="0" rIns="0" bIns="0" rtlCol="0" anchor="ctr"/>
-          <a:lstStyle/>
-          <a:p>
-            <a:pPr algn="ctr" indent="0" marL="0">
-              <a:buNone/>
-            </a:pPr>
-            <a:r>
-              <a:rPr lang="en-US" sz="1250" dirty="0">
-                <a:solidFill>
-                  <a:srgbClr val="5B6B7D"/>
-                </a:solidFill>
-                <a:latin typeface="Montserrat Medium" pitchFamily="34" charset="0"/>
-                <a:ea typeface="Montserrat Medium" pitchFamily="34" charset="-122"/>
-                <a:cs typeface="Montserrat Medium" pitchFamily="34" charset="-120"/>
-              </a:rPr>
-              <a:t>Otorga el presente reconocimiento a</a:t>
-            </a:r>
-            <a:endParaRPr lang="en-US" sz="1250" dirty="0"/>
-          </a:p>
-        </p:txBody>
-      </p:sp>
-      <p:sp>
-        <p:nvSpPr>
-          <p:cNvPr id="8" name="Text 6"/>
-          <p:cNvSpPr txBox="1"/>
-          <p:nvPr/>
-        </p:nvSpPr>
-        <p:spPr>
-          <a:xfrm>
-            <a:off x="1097280" y="3310128"/>
-            <a:ext cx="7863840" cy="713232"/>
-          </a:xfrm>
-          <a:prstGeom prst="rect">
-            <a:avLst/>
-          </a:prstGeom>
-          <a:noFill/>
-          <a:ln/>
-        </p:spPr>
-        <p:txBody>
-          <a:bodyPr wrap="square" lIns="0" tIns="0" rIns="0" bIns="0" rtlCol="0" anchor="ctr"/>
-          <a:lstStyle/>
-          <a:p>
-            <a:pPr algn="ctr" indent="0" marL="0">
-              <a:buNone/>
-            </a:pPr>
-            <a:r>
-              <a:rPr lang="en-US" sz="3800" dirty="0">
-                <a:solidFill>
-                  <a:srgbClr val="0E2A47"/>
-                </a:solidFill>
-                <a:latin typeface="Montserrat ExtraBold" pitchFamily="34" charset="0"/>
-                <a:ea typeface="Montserrat ExtraBold" pitchFamily="34" charset="-122"/>
-                <a:cs typeface="Montserrat ExtraBold" pitchFamily="34" charset="-120"/>
-              </a:rPr>
-              <a:t>Dra. Guadalupe Rodríguez</a:t>
-            </a:r>
-            <a:endParaRPr lang="en-US" sz="3800" dirty="0"/>
-          </a:p>
-        </p:txBody>
-      </p:sp>
-      <p:sp>
-        <p:nvSpPr>
-          <p:cNvPr id="9" name="Shape 7"/>
-          <p:cNvSpPr/>
-          <p:nvPr/>
-        </p:nvSpPr>
-        <p:spPr>
-          <a:xfrm>
-            <a:off x="2194560" y="4087368"/>
-            <a:ext cx="5669280" cy="0"/>
-          </a:xfrm>
-          <a:prstGeom prst="line">
-            <a:avLst/>
-          </a:prstGeom>
-          <a:noFill/>
-          <a:ln w="22225">
-            <a:solidFill>
-              <a:srgbClr val="F2C94C"/>
-            </a:solidFill>
-            <a:prstDash val="solid"/>
-          </a:ln>
-        </p:spPr>
-      </p:sp>
-      <p:sp>
-        <p:nvSpPr>
-          <p:cNvPr id="10" name="Shape 8"/>
-          <p:cNvSpPr/>
-          <p:nvPr/>
-        </p:nvSpPr>
-        <p:spPr>
-          <a:xfrm>
-            <a:off x="4974336" y="4032504"/>
-            <a:ext cx="109728" cy="109728"/>
-          </a:xfrm>
-          <a:prstGeom prst="ellipse">
-            <a:avLst/>
-          </a:prstGeom>
-          <a:solidFill>
-            <a:srgbClr val="F2C94C"/>
-          </a:solidFill>
-          <a:ln/>
-        </p:spPr>
-      </p:sp>
-      <p:sp>
-        <p:nvSpPr>
-          <p:cNvPr id="11" name="Text 9"/>
-          <p:cNvSpPr txBox="1"/>
-          <p:nvPr/>
-        </p:nvSpPr>
-        <p:spPr>
-          <a:xfrm>
-            <a:off x="1417320" y="4206240"/>
-            <a:ext cx="7223760" cy="896112"/>
-          </a:xfrm>
-          <a:prstGeom prst="rect">
-            <a:avLst/>
-          </a:prstGeom>
-          <a:noFill/>
-          <a:ln/>
-        </p:spPr>
-        <p:txBody>
-          <a:bodyPr wrap="square" lIns="0" tIns="0" rIns="0" bIns="0" rtlCol="0" anchor="t"/>
-          <a:lstStyle/>
-          <a:p>
-            <a:pPr algn="ctr" indent="0" marL="0">
-              <a:lnSpc>
-                <a:spcPct val="112000"/>
-              </a:lnSpc>
-              <a:buNone/>
-            </a:pPr>
-            <a:r>
-              <a:rPr lang="en-US" sz="1150" dirty="0">
-                <a:solidFill>
-                  <a:srgbClr val="2B3A4E"/>
-                </a:solidFill>
-                <a:latin typeface="Montserrat" pitchFamily="34" charset="0"/>
-                <a:ea typeface="Montserrat" pitchFamily="34" charset="-122"/>
-                <a:cs typeface="Montserrat" pitchFamily="34" charset="-120"/>
-              </a:rPr>
-              <a:t>Por su valiosa participación como ponente con la conferencia </a:t>
-            </a:r>
-            <a:pPr algn="ctr" indent="0" marL="0">
-              <a:lnSpc>
-                <a:spcPct val="112000"/>
-              </a:lnSpc>
-              <a:buNone/>
-            </a:pPr>
-            <a:r>
-              <a:rPr lang="en-US" sz="1150" dirty="0">
-                <a:solidFill>
-                  <a:srgbClr val="0E2A47"/>
-                </a:solidFill>
-                <a:latin typeface="Montserrat ExtraBold" pitchFamily="34" charset="0"/>
-                <a:ea typeface="Montserrat ExtraBold" pitchFamily="34" charset="-122"/>
-                <a:cs typeface="Montserrat ExtraBold" pitchFamily="34" charset="-120"/>
-              </a:rPr>
-              <a:t>«Anemias y leucemias»</a:t>
-            </a:r>
-            <a:pPr algn="ctr" indent="0" marL="0">
-              <a:lnSpc>
-                <a:spcPct val="112000"/>
-              </a:lnSpc>
-              <a:buNone/>
-            </a:pPr>
-            <a:r>
-              <a:rPr lang="en-US" sz="1150" dirty="0">
-                <a:solidFill>
-                  <a:srgbClr val="2B3A4E"/>
-                </a:solidFill>
-                <a:latin typeface="Montserrat" pitchFamily="34" charset="0"/>
-                <a:ea typeface="Montserrat" pitchFamily="34" charset="-122"/>
-                <a:cs typeface="Montserrat" pitchFamily="34" charset="-120"/>
-              </a:rPr>
-              <a:t> en el </a:t>
-            </a:r>
-            <a:pPr algn="ctr" indent="0" marL="0">
-              <a:lnSpc>
-                <a:spcPct val="112000"/>
-              </a:lnSpc>
-              <a:buNone/>
-            </a:pPr>
-            <a:r>
-              <a:rPr lang="en-US" sz="1150" dirty="0">
-                <a:solidFill>
-                  <a:srgbClr val="0E2A47"/>
-                </a:solidFill>
-                <a:latin typeface="Montserrat ExtraBold" pitchFamily="34" charset="0"/>
-                <a:ea typeface="Montserrat ExtraBold" pitchFamily="34" charset="-122"/>
-                <a:cs typeface="Montserrat ExtraBold" pitchFamily="34" charset="-120"/>
-              </a:rPr>
-              <a:t>Westhill Medical Leadership Summit 2026</a:t>
-            </a:r>
-            <a:pPr algn="ctr" indent="0" marL="0">
-              <a:lnSpc>
-                <a:spcPct val="112000"/>
-              </a:lnSpc>
-              <a:buNone/>
-            </a:pPr>
-            <a:r>
-              <a:rPr lang="en-US" sz="1150" dirty="0">
-                <a:solidFill>
-                  <a:srgbClr val="2B3A4E"/>
-                </a:solidFill>
-                <a:latin typeface="Montserrat" pitchFamily="34" charset="0"/>
-                <a:ea typeface="Montserrat" pitchFamily="34" charset="-122"/>
-                <a:cs typeface="Montserrat" pitchFamily="34" charset="-120"/>
-              </a:rPr>
-              <a:t>, realizado los días 21, 22 y 23 de octubre de 2026 en la Facultad de Medicina de la Universidad Westhill.</a:t>
-            </a:r>
-            <a:endParaRPr lang="en-US" sz="1150" dirty="0"/>
-          </a:p>
-        </p:txBody>
-      </p:sp>
-      <p:sp>
-        <p:nvSpPr>
-          <p:cNvPr id="12" name="Text 10"/>
-          <p:cNvSpPr txBox="1"/>
-          <p:nvPr/>
-        </p:nvSpPr>
-        <p:spPr>
-          <a:xfrm>
-            <a:off x="2286000" y="5120640"/>
-            <a:ext cx="5486400" cy="237744"/>
-          </a:xfrm>
-          <a:prstGeom prst="rect">
-            <a:avLst/>
-          </a:prstGeom>
-          <a:noFill/>
-          <a:ln/>
-        </p:spPr>
-        <p:txBody>
-          <a:bodyPr wrap="square" lIns="0" tIns="0" rIns="0" bIns="0" rtlCol="0" anchor="ctr"/>
-          <a:lstStyle/>
-          <a:p>
-            <a:pPr algn="ctr" indent="0" marL="0">
-              <a:buNone/>
-            </a:pPr>
-            <a:r>
-              <a:rPr lang="en-US" sz="1050" dirty="0">
-                <a:solidFill>
-                  <a:srgbClr val="266294"/>
-                </a:solidFill>
-                <a:latin typeface="Montserrat SemiBold" pitchFamily="34" charset="0"/>
-                <a:ea typeface="Montserrat SemiBold" pitchFamily="34" charset="-122"/>
-                <a:cs typeface="Montserrat SemiBold" pitchFamily="34" charset="-120"/>
-              </a:rPr>
-              <a:t>Ciudad de México, a 23 de octubre de 2026</a:t>
-            </a:r>
-            <a:endParaRPr lang="en-US" sz="1050" dirty="0"/>
-          </a:p>
-        </p:txBody>
-      </p:sp>
-      <p:sp>
-        <p:nvSpPr>
-          <p:cNvPr id="13" name="Shape 11"/>
+          <p:cNvPr id="11" name="Shape 6"/>
           <p:cNvSpPr/>
           <p:nvPr/>
         </p:nvSpPr>
@@ -8003,7 +7607,7 @@
       </p:sp>
       <p:sp>
         <p:nvSpPr>
-          <p:cNvPr id="14" name="Text 12"/>
+          <p:cNvPr id="12" name="Text 7"/>
           <p:cNvSpPr txBox="1"/>
           <p:nvPr/>
         </p:nvSpPr>
@@ -8042,7 +7646,7 @@
       </p:sp>
       <p:sp>
         <p:nvSpPr>
-          <p:cNvPr id="15" name="Text 13"/>
+          <p:cNvPr id="13" name="Text 8"/>
           <p:cNvSpPr txBox="1"/>
           <p:nvPr/>
         </p:nvSpPr>
@@ -8081,7 +7685,7 @@
       </p:sp>
       <p:sp>
         <p:nvSpPr>
-          <p:cNvPr id="16" name="Shape 14"/>
+          <p:cNvPr id="14" name="Shape 9"/>
           <p:cNvSpPr/>
           <p:nvPr/>
         </p:nvSpPr>
@@ -8104,7 +7708,7 @@
       </p:sp>
       <p:sp>
         <p:nvSpPr>
-          <p:cNvPr id="17" name="Text 15"/>
+          <p:cNvPr id="15" name="Text 10"/>
           <p:cNvSpPr txBox="1"/>
           <p:nvPr/>
         </p:nvSpPr>
@@ -8143,7 +7747,7 @@
       </p:sp>
       <p:sp>
         <p:nvSpPr>
-          <p:cNvPr id="18" name="Text 16"/>
+          <p:cNvPr id="16" name="Text 11"/>
           <p:cNvSpPr txBox="1"/>
           <p:nvPr/>
         </p:nvSpPr>
@@ -8182,7 +7786,7 @@
       </p:sp>
       <p:sp>
         <p:nvSpPr>
-          <p:cNvPr id="19" name="Text 17"/>
+          <p:cNvPr id="17" name="Text 12"/>
           <p:cNvSpPr txBox="1"/>
           <p:nvPr/>
         </p:nvSpPr>
@@ -8252,32 +7856,370 @@
         </p:nvSpPr>
         <p:spPr>
           <a:xfrm>
-            <a:off x="1188720" y="1536192"/>
-            <a:ext cx="7680960" cy="237744"/>
-          </a:xfrm>
-          <a:prstGeom prst="rect">
-            <a:avLst/>
-          </a:prstGeom>
-          <a:noFill/>
-          <a:ln/>
-        </p:spPr>
-        <p:txBody>
-          <a:bodyPr wrap="square" lIns="0" tIns="0" rIns="0" bIns="0" rtlCol="0" anchor="ctr"/>
-          <a:lstStyle/>
-          <a:p>
-            <a:pPr algn="ctr" indent="0" marL="0">
-              <a:buNone/>
-            </a:pPr>
-            <a:r>
-              <a:rPr lang="en-US" sz="1050" spc="300" kern="0" dirty="0">
+            <a:off x="1097280" y="1737360"/>
+            <a:ext cx="7863840" cy="777240"/>
+          </a:xfrm>
+          <a:prstGeom prst="rect">
+            <a:avLst/>
+          </a:prstGeom>
+          <a:noFill/>
+          <a:ln/>
+        </p:spPr>
+        <p:txBody>
+          <a:bodyPr wrap="square" lIns="0" tIns="0" rIns="0" bIns="0" rtlCol="0" anchor="ctr"/>
+          <a:lstStyle/>
+          <a:p>
+            <a:pPr algn="ctr" indent="0" marL="0">
+              <a:buNone/>
+            </a:pPr>
+            <a:r>
+              <a:rPr lang="en-US" sz="4200" spc="400" kern="0" dirty="0">
+                <a:solidFill>
+                  <a:srgbClr val="266294"/>
+                </a:solidFill>
+                <a:latin typeface="Montserrat ExtraBold" pitchFamily="34" charset="0"/>
+                <a:ea typeface="Montserrat ExtraBold" pitchFamily="34" charset="-122"/>
+                <a:cs typeface="Montserrat ExtraBold" pitchFamily="34" charset="-120"/>
+              </a:rPr>
+              <a:t>RECONOCIMIENTO</a:t>
+            </a:r>
+            <a:endParaRPr lang="en-US" sz="4200" dirty="0"/>
+          </a:p>
+        </p:txBody>
+      </p:sp>
+      <p:pic>
+        <p:nvPicPr>
+          <p:cNvPr id="3" name="Image 0" descr="preencoded.png">    </p:cNvPr>
+          <p:cNvPicPr>
+            <a:picLocks noChangeAspect="1"/>
+          </p:cNvPicPr>
+          <p:nvPr/>
+        </p:nvPicPr>
+        <p:blipFill>
+          <a:blip r:embed="rId1"/>
+          <a:stretch>
+            <a:fillRect/>
+          </a:stretch>
+        </p:blipFill>
+        <p:spPr>
+          <a:xfrm>
+            <a:off x="1874520" y="2642616"/>
+            <a:ext cx="1371600" cy="182880"/>
+          </a:xfrm>
+          <a:prstGeom prst="rect">
+            <a:avLst/>
+          </a:prstGeom>
+        </p:spPr>
+      </p:pic>
+      <p:pic>
+        <p:nvPicPr>
+          <p:cNvPr id="4" name="Image 1" descr="preencoded.png">    </p:cNvPr>
+          <p:cNvPicPr>
+            <a:picLocks noChangeAspect="1"/>
+          </p:cNvPicPr>
+          <p:nvPr/>
+        </p:nvPicPr>
+        <p:blipFill>
+          <a:blip r:embed="rId2"/>
+          <a:stretch>
+            <a:fillRect/>
+          </a:stretch>
+        </p:blipFill>
+        <p:spPr>
+          <a:xfrm>
+            <a:off x="6812280" y="2642616"/>
+            <a:ext cx="1371600" cy="182880"/>
+          </a:xfrm>
+          <a:prstGeom prst="rect">
+            <a:avLst/>
+          </a:prstGeom>
+        </p:spPr>
+      </p:pic>
+      <p:sp>
+        <p:nvSpPr>
+          <p:cNvPr id="5" name="Text 1"/>
+          <p:cNvSpPr txBox="1"/>
+          <p:nvPr/>
+        </p:nvSpPr>
+        <p:spPr>
+          <a:xfrm>
+            <a:off x="3291840" y="2560320"/>
+            <a:ext cx="3474720" cy="329184"/>
+          </a:xfrm>
+          <a:prstGeom prst="rect">
+            <a:avLst/>
+          </a:prstGeom>
+          <a:noFill/>
+          <a:ln/>
+        </p:spPr>
+        <p:txBody>
+          <a:bodyPr wrap="square" lIns="0" tIns="0" rIns="0" bIns="0" rtlCol="0" anchor="ctr"/>
+          <a:lstStyle/>
+          <a:p>
+            <a:pPr algn="ctr" indent="0" marL="0">
+              <a:buNone/>
+            </a:pPr>
+            <a:r>
+              <a:rPr lang="en-US" sz="1500" spc="500" kern="0" dirty="0">
+                <a:solidFill>
+                  <a:srgbClr val="0E2A47"/>
+                </a:solidFill>
+                <a:latin typeface="Montserrat ExtraBold" pitchFamily="34" charset="0"/>
+                <a:ea typeface="Montserrat ExtraBold" pitchFamily="34" charset="-122"/>
+                <a:cs typeface="Montserrat ExtraBold" pitchFamily="34" charset="-120"/>
+              </a:rPr>
+              <a:t>COMO PONENTE</a:t>
+            </a:r>
+            <a:endParaRPr lang="en-US" sz="1500" dirty="0"/>
+          </a:p>
+        </p:txBody>
+      </p:sp>
+      <p:sp>
+        <p:nvSpPr>
+          <p:cNvPr id="6" name="Text 2"/>
+          <p:cNvSpPr txBox="1"/>
+          <p:nvPr/>
+        </p:nvSpPr>
+        <p:spPr>
+          <a:xfrm>
+            <a:off x="1828800" y="3035808"/>
+            <a:ext cx="6400800" cy="274320"/>
+          </a:xfrm>
+          <a:prstGeom prst="rect">
+            <a:avLst/>
+          </a:prstGeom>
+          <a:noFill/>
+          <a:ln/>
+        </p:spPr>
+        <p:txBody>
+          <a:bodyPr wrap="square" lIns="0" tIns="0" rIns="0" bIns="0" rtlCol="0" anchor="ctr"/>
+          <a:lstStyle/>
+          <a:p>
+            <a:pPr algn="ctr" indent="0" marL="0">
+              <a:buNone/>
+            </a:pPr>
+            <a:r>
+              <a:rPr lang="en-US" sz="1250" dirty="0">
                 <a:solidFill>
                   <a:srgbClr val="5B6B7D"/>
+                </a:solidFill>
+                <a:latin typeface="Montserrat Medium" pitchFamily="34" charset="0"/>
+                <a:ea typeface="Montserrat Medium" pitchFamily="34" charset="-122"/>
+                <a:cs typeface="Montserrat Medium" pitchFamily="34" charset="-120"/>
+              </a:rPr>
+              <a:t>Otorga el presente reconocimiento a</a:t>
+            </a:r>
+            <a:endParaRPr lang="en-US" sz="1250" dirty="0"/>
+          </a:p>
+        </p:txBody>
+      </p:sp>
+      <p:sp>
+        <p:nvSpPr>
+          <p:cNvPr id="7" name="Text 3"/>
+          <p:cNvSpPr txBox="1"/>
+          <p:nvPr/>
+        </p:nvSpPr>
+        <p:spPr>
+          <a:xfrm>
+            <a:off x="1097280" y="3310128"/>
+            <a:ext cx="7863840" cy="713232"/>
+          </a:xfrm>
+          <a:prstGeom prst="rect">
+            <a:avLst/>
+          </a:prstGeom>
+          <a:noFill/>
+          <a:ln/>
+        </p:spPr>
+        <p:txBody>
+          <a:bodyPr wrap="square" lIns="0" tIns="0" rIns="0" bIns="0" rtlCol="0" anchor="ctr"/>
+          <a:lstStyle/>
+          <a:p>
+            <a:pPr algn="ctr" indent="0" marL="0">
+              <a:buNone/>
+            </a:pPr>
+            <a:r>
+              <a:rPr lang="en-US" sz="3500" dirty="0">
+                <a:solidFill>
+                  <a:srgbClr val="0E2A47"/>
+                </a:solidFill>
+                <a:latin typeface="Montserrat ExtraBold" pitchFamily="34" charset="0"/>
+                <a:ea typeface="Montserrat ExtraBold" pitchFamily="34" charset="-122"/>
+                <a:cs typeface="Montserrat ExtraBold" pitchFamily="34" charset="-120"/>
+              </a:rPr>
+              <a:t>Dr. Samuel Alejandro Zimbrón</a:t>
+            </a:r>
+            <a:endParaRPr lang="en-US" sz="3500" dirty="0"/>
+          </a:p>
+        </p:txBody>
+      </p:sp>
+      <p:pic>
+        <p:nvPicPr>
+          <p:cNvPr id="8" name="Image 2" descr="preencoded.png">    </p:cNvPr>
+          <p:cNvPicPr>
+            <a:picLocks noChangeAspect="1"/>
+          </p:cNvPicPr>
+          <p:nvPr/>
+        </p:nvPicPr>
+        <p:blipFill>
+          <a:blip r:embed="rId3"/>
+          <a:stretch>
+            <a:fillRect/>
+          </a:stretch>
+        </p:blipFill>
+        <p:spPr>
+          <a:xfrm>
+            <a:off x="2194560" y="3986784"/>
+            <a:ext cx="5669280" cy="201168"/>
+          </a:xfrm>
+          <a:prstGeom prst="rect">
+            <a:avLst/>
+          </a:prstGeom>
+        </p:spPr>
+      </p:pic>
+      <p:sp>
+        <p:nvSpPr>
+          <p:cNvPr id="9" name="Text 4"/>
+          <p:cNvSpPr txBox="1"/>
+          <p:nvPr/>
+        </p:nvSpPr>
+        <p:spPr>
+          <a:xfrm>
+            <a:off x="1417320" y="4206240"/>
+            <a:ext cx="7223760" cy="896112"/>
+          </a:xfrm>
+          <a:prstGeom prst="rect">
+            <a:avLst/>
+          </a:prstGeom>
+          <a:noFill/>
+          <a:ln/>
+        </p:spPr>
+        <p:txBody>
+          <a:bodyPr wrap="square" lIns="0" tIns="0" rIns="0" bIns="0" rtlCol="0" anchor="t"/>
+          <a:lstStyle/>
+          <a:p>
+            <a:pPr algn="ctr" indent="0" marL="0">
+              <a:lnSpc>
+                <a:spcPct val="112000"/>
+              </a:lnSpc>
+              <a:buNone/>
+            </a:pPr>
+            <a:r>
+              <a:rPr lang="en-US" sz="1150" dirty="0">
+                <a:solidFill>
+                  <a:srgbClr val="2B3A4E"/>
+                </a:solidFill>
+                <a:latin typeface="Montserrat" pitchFamily="34" charset="0"/>
+                <a:ea typeface="Montserrat" pitchFamily="34" charset="-122"/>
+                <a:cs typeface="Montserrat" pitchFamily="34" charset="-120"/>
+              </a:rPr>
+              <a:t>Por su valiosa participación como ponente con la conferencia </a:t>
+            </a:r>
+            <a:pPr algn="ctr" indent="0" marL="0">
+              <a:lnSpc>
+                <a:spcPct val="112000"/>
+              </a:lnSpc>
+              <a:buNone/>
+            </a:pPr>
+            <a:r>
+              <a:rPr lang="en-US" sz="1150" dirty="0">
+                <a:solidFill>
+                  <a:srgbClr val="0E2A47"/>
+                </a:solidFill>
+                <a:latin typeface="Montserrat ExtraBold" pitchFamily="34" charset="0"/>
+                <a:ea typeface="Montserrat ExtraBold" pitchFamily="34" charset="-122"/>
+                <a:cs typeface="Montserrat ExtraBold" pitchFamily="34" charset="-120"/>
+              </a:rPr>
+              <a:t>«Nutrición clínica»</a:t>
+            </a:r>
+            <a:pPr algn="ctr" indent="0" marL="0">
+              <a:lnSpc>
+                <a:spcPct val="112000"/>
+              </a:lnSpc>
+              <a:buNone/>
+            </a:pPr>
+            <a:r>
+              <a:rPr lang="en-US" sz="1150" dirty="0">
+                <a:solidFill>
+                  <a:srgbClr val="2B3A4E"/>
+                </a:solidFill>
+                <a:latin typeface="Montserrat" pitchFamily="34" charset="0"/>
+                <a:ea typeface="Montserrat" pitchFamily="34" charset="-122"/>
+                <a:cs typeface="Montserrat" pitchFamily="34" charset="-120"/>
+              </a:rPr>
+              <a:t> en el </a:t>
+            </a:r>
+            <a:pPr algn="ctr" indent="0" marL="0">
+              <a:lnSpc>
+                <a:spcPct val="112000"/>
+              </a:lnSpc>
+              <a:buNone/>
+            </a:pPr>
+            <a:r>
+              <a:rPr lang="en-US" sz="1150" dirty="0">
+                <a:solidFill>
+                  <a:srgbClr val="0E2A47"/>
+                </a:solidFill>
+                <a:latin typeface="Montserrat ExtraBold" pitchFamily="34" charset="0"/>
+                <a:ea typeface="Montserrat ExtraBold" pitchFamily="34" charset="-122"/>
+                <a:cs typeface="Montserrat ExtraBold" pitchFamily="34" charset="-120"/>
+              </a:rPr>
+              <a:t>Westhill Medical Leadership Summit 2026</a:t>
+            </a:r>
+            <a:pPr algn="ctr" indent="0" marL="0">
+              <a:lnSpc>
+                <a:spcPct val="112000"/>
+              </a:lnSpc>
+              <a:buNone/>
+            </a:pPr>
+            <a:r>
+              <a:rPr lang="en-US" sz="1150" dirty="0">
+                <a:solidFill>
+                  <a:srgbClr val="2B3A4E"/>
+                </a:solidFill>
+                <a:latin typeface="Montserrat" pitchFamily="34" charset="0"/>
+                <a:ea typeface="Montserrat" pitchFamily="34" charset="-122"/>
+                <a:cs typeface="Montserrat" pitchFamily="34" charset="-120"/>
+              </a:rPr>
+              <a:t>, realizado los días 21, 22 y 23 de octubre de 2026 en la Facultad de Medicina de la Universidad Westhill.</a:t>
+            </a:r>
+            <a:endParaRPr lang="en-US" sz="1150" dirty="0"/>
+          </a:p>
+        </p:txBody>
+      </p:sp>
+      <p:sp>
+        <p:nvSpPr>
+          <p:cNvPr id="10" name="Text 5"/>
+          <p:cNvSpPr txBox="1"/>
+          <p:nvPr/>
+        </p:nvSpPr>
+        <p:spPr>
+          <a:xfrm>
+            <a:off x="2286000" y="5120640"/>
+            <a:ext cx="5486400" cy="237744"/>
+          </a:xfrm>
+          <a:prstGeom prst="rect">
+            <a:avLst/>
+          </a:prstGeom>
+          <a:noFill/>
+          <a:ln/>
+        </p:spPr>
+        <p:txBody>
+          <a:bodyPr wrap="square" lIns="0" tIns="0" rIns="0" bIns="0" rtlCol="0" anchor="ctr"/>
+          <a:lstStyle/>
+          <a:p>
+            <a:pPr algn="ctr" indent="0" marL="0">
+              <a:buNone/>
+            </a:pPr>
+            <a:r>
+              <a:rPr lang="en-US" sz="1050" dirty="0">
+                <a:solidFill>
+                  <a:srgbClr val="266294"/>
                 </a:solidFill>
                 <a:latin typeface="Montserrat SemiBold" pitchFamily="34" charset="0"/>
                 <a:ea typeface="Montserrat SemiBold" pitchFamily="34" charset="-122"/>
                 <a:cs typeface="Montserrat SemiBold" pitchFamily="34" charset="-120"/>
               </a:rPr>
-              <a:t>FACULTAD DE MEDICINA</a:t>
+              <a:t>Ciudad de México, a 23 de octubre de 2026</a:t>
             </a:r>
             <a:endParaRPr lang="en-US" sz="1050" dirty="0"/>
           </a:p>
@@ -8285,395 +8227,7 @@
       </p:sp>
       <p:sp>
         <p:nvSpPr>
-          <p:cNvPr id="3" name="Text 1"/>
-          <p:cNvSpPr txBox="1"/>
-          <p:nvPr/>
-        </p:nvSpPr>
-        <p:spPr>
-          <a:xfrm>
-            <a:off x="1097280" y="1737360"/>
-            <a:ext cx="7863840" cy="777240"/>
-          </a:xfrm>
-          <a:prstGeom prst="rect">
-            <a:avLst/>
-          </a:prstGeom>
-          <a:noFill/>
-          <a:ln/>
-        </p:spPr>
-        <p:txBody>
-          <a:bodyPr wrap="square" lIns="0" tIns="0" rIns="0" bIns="0" rtlCol="0" anchor="ctr"/>
-          <a:lstStyle/>
-          <a:p>
-            <a:pPr algn="ctr" indent="0" marL="0">
-              <a:buNone/>
-            </a:pPr>
-            <a:r>
-              <a:rPr lang="en-US" sz="4200" spc="400" kern="0" dirty="0">
-                <a:solidFill>
-                  <a:srgbClr val="266294"/>
-                </a:solidFill>
-                <a:latin typeface="Montserrat ExtraBold" pitchFamily="34" charset="0"/>
-                <a:ea typeface="Montserrat ExtraBold" pitchFamily="34" charset="-122"/>
-                <a:cs typeface="Montserrat ExtraBold" pitchFamily="34" charset="-120"/>
-              </a:rPr>
-              <a:t>RECONOCIMIENTO</a:t>
-            </a:r>
-            <a:endParaRPr lang="en-US" sz="4200" dirty="0"/>
-          </a:p>
-        </p:txBody>
-      </p:sp>
-      <p:sp>
-        <p:nvSpPr>
-          <p:cNvPr id="4" name="Shape 2"/>
-          <p:cNvSpPr/>
-          <p:nvPr/>
-        </p:nvSpPr>
-        <p:spPr>
-          <a:xfrm>
-            <a:off x="2331720" y="2706624"/>
-            <a:ext cx="914400" cy="54864"/>
-          </a:xfrm>
-          <a:prstGeom prst="rect">
-            <a:avLst/>
-          </a:prstGeom>
-          <a:solidFill>
-            <a:srgbClr val="2DB34A"/>
-          </a:solidFill>
-          <a:ln/>
-        </p:spPr>
-      </p:sp>
-      <p:sp>
-        <p:nvSpPr>
-          <p:cNvPr id="5" name="Shape 3"/>
-          <p:cNvSpPr/>
-          <p:nvPr/>
-        </p:nvSpPr>
-        <p:spPr>
-          <a:xfrm>
-            <a:off x="6812280" y="2706624"/>
-            <a:ext cx="914400" cy="54864"/>
-          </a:xfrm>
-          <a:prstGeom prst="rect">
-            <a:avLst/>
-          </a:prstGeom>
-          <a:solidFill>
-            <a:srgbClr val="2DB34A"/>
-          </a:solidFill>
-          <a:ln/>
-        </p:spPr>
-      </p:sp>
-      <p:sp>
-        <p:nvSpPr>
-          <p:cNvPr id="6" name="Text 4"/>
-          <p:cNvSpPr txBox="1"/>
-          <p:nvPr/>
-        </p:nvSpPr>
-        <p:spPr>
-          <a:xfrm>
-            <a:off x="3291840" y="2560320"/>
-            <a:ext cx="3474720" cy="329184"/>
-          </a:xfrm>
-          <a:prstGeom prst="rect">
-            <a:avLst/>
-          </a:prstGeom>
-          <a:noFill/>
-          <a:ln/>
-        </p:spPr>
-        <p:txBody>
-          <a:bodyPr wrap="square" lIns="0" tIns="0" rIns="0" bIns="0" rtlCol="0" anchor="ctr"/>
-          <a:lstStyle/>
-          <a:p>
-            <a:pPr algn="ctr" indent="0" marL="0">
-              <a:buNone/>
-            </a:pPr>
-            <a:r>
-              <a:rPr lang="en-US" sz="1500" spc="500" kern="0" dirty="0">
-                <a:solidFill>
-                  <a:srgbClr val="0E2A47"/>
-                </a:solidFill>
-                <a:latin typeface="Montserrat ExtraBold" pitchFamily="34" charset="0"/>
-                <a:ea typeface="Montserrat ExtraBold" pitchFamily="34" charset="-122"/>
-                <a:cs typeface="Montserrat ExtraBold" pitchFamily="34" charset="-120"/>
-              </a:rPr>
-              <a:t>COMO PONENTE</a:t>
-            </a:r>
-            <a:endParaRPr lang="en-US" sz="1500" dirty="0"/>
-          </a:p>
-        </p:txBody>
-      </p:sp>
-      <p:sp>
-        <p:nvSpPr>
-          <p:cNvPr id="7" name="Text 5"/>
-          <p:cNvSpPr txBox="1"/>
-          <p:nvPr/>
-        </p:nvSpPr>
-        <p:spPr>
-          <a:xfrm>
-            <a:off x="1828800" y="3035808"/>
-            <a:ext cx="6400800" cy="274320"/>
-          </a:xfrm>
-          <a:prstGeom prst="rect">
-            <a:avLst/>
-          </a:prstGeom>
-          <a:noFill/>
-          <a:ln/>
-        </p:spPr>
-        <p:txBody>
-          <a:bodyPr wrap="square" lIns="0" tIns="0" rIns="0" bIns="0" rtlCol="0" anchor="ctr"/>
-          <a:lstStyle/>
-          <a:p>
-            <a:pPr algn="ctr" indent="0" marL="0">
-              <a:buNone/>
-            </a:pPr>
-            <a:r>
-              <a:rPr lang="en-US" sz="1250" dirty="0">
-                <a:solidFill>
-                  <a:srgbClr val="5B6B7D"/>
-                </a:solidFill>
-                <a:latin typeface="Montserrat Medium" pitchFamily="34" charset="0"/>
-                <a:ea typeface="Montserrat Medium" pitchFamily="34" charset="-122"/>
-                <a:cs typeface="Montserrat Medium" pitchFamily="34" charset="-120"/>
-              </a:rPr>
-              <a:t>Otorga el presente reconocimiento a</a:t>
-            </a:r>
-            <a:endParaRPr lang="en-US" sz="1250" dirty="0"/>
-          </a:p>
-        </p:txBody>
-      </p:sp>
-      <p:sp>
-        <p:nvSpPr>
-          <p:cNvPr id="8" name="Text 6"/>
-          <p:cNvSpPr txBox="1"/>
-          <p:nvPr/>
-        </p:nvSpPr>
-        <p:spPr>
-          <a:xfrm>
-            <a:off x="1097280" y="3310128"/>
-            <a:ext cx="7863840" cy="713232"/>
-          </a:xfrm>
-          <a:prstGeom prst="rect">
-            <a:avLst/>
-          </a:prstGeom>
-          <a:noFill/>
-          <a:ln/>
-        </p:spPr>
-        <p:txBody>
-          <a:bodyPr wrap="square" lIns="0" tIns="0" rIns="0" bIns="0" rtlCol="0" anchor="ctr"/>
-          <a:lstStyle/>
-          <a:p>
-            <a:pPr algn="ctr" indent="0" marL="0">
-              <a:buNone/>
-            </a:pPr>
-            <a:r>
-              <a:rPr lang="en-US" sz="3500" dirty="0">
-                <a:solidFill>
-                  <a:srgbClr val="0E2A47"/>
-                </a:solidFill>
-                <a:latin typeface="Montserrat ExtraBold" pitchFamily="34" charset="0"/>
-                <a:ea typeface="Montserrat ExtraBold" pitchFamily="34" charset="-122"/>
-                <a:cs typeface="Montserrat ExtraBold" pitchFamily="34" charset="-120"/>
-              </a:rPr>
-              <a:t>Dr. Samuel Alejandro Zimbrón</a:t>
-            </a:r>
-            <a:endParaRPr lang="en-US" sz="3500" dirty="0"/>
-          </a:p>
-        </p:txBody>
-      </p:sp>
-      <p:sp>
-        <p:nvSpPr>
-          <p:cNvPr id="9" name="Shape 7"/>
-          <p:cNvSpPr/>
-          <p:nvPr/>
-        </p:nvSpPr>
-        <p:spPr>
-          <a:xfrm>
-            <a:off x="2194560" y="4087368"/>
-            <a:ext cx="5669280" cy="0"/>
-          </a:xfrm>
-          <a:prstGeom prst="line">
-            <a:avLst/>
-          </a:prstGeom>
-          <a:noFill/>
-          <a:ln w="22225">
-            <a:solidFill>
-              <a:srgbClr val="F2C94C"/>
-            </a:solidFill>
-            <a:prstDash val="solid"/>
-          </a:ln>
-        </p:spPr>
-      </p:sp>
-      <p:sp>
-        <p:nvSpPr>
-          <p:cNvPr id="10" name="Shape 8"/>
-          <p:cNvSpPr/>
-          <p:nvPr/>
-        </p:nvSpPr>
-        <p:spPr>
-          <a:xfrm>
-            <a:off x="4974336" y="4032504"/>
-            <a:ext cx="109728" cy="109728"/>
-          </a:xfrm>
-          <a:prstGeom prst="ellipse">
-            <a:avLst/>
-          </a:prstGeom>
-          <a:solidFill>
-            <a:srgbClr val="F2C94C"/>
-          </a:solidFill>
-          <a:ln/>
-        </p:spPr>
-      </p:sp>
-      <p:sp>
-        <p:nvSpPr>
-          <p:cNvPr id="11" name="Text 9"/>
-          <p:cNvSpPr txBox="1"/>
-          <p:nvPr/>
-        </p:nvSpPr>
-        <p:spPr>
-          <a:xfrm>
-            <a:off x="1417320" y="4206240"/>
-            <a:ext cx="7223760" cy="896112"/>
-          </a:xfrm>
-          <a:prstGeom prst="rect">
-            <a:avLst/>
-          </a:prstGeom>
-          <a:noFill/>
-          <a:ln/>
-        </p:spPr>
-        <p:txBody>
-          <a:bodyPr wrap="square" lIns="0" tIns="0" rIns="0" bIns="0" rtlCol="0" anchor="t"/>
-          <a:lstStyle/>
-          <a:p>
-            <a:pPr algn="ctr" indent="0" marL="0">
-              <a:lnSpc>
-                <a:spcPct val="112000"/>
-              </a:lnSpc>
-              <a:buNone/>
-            </a:pPr>
-            <a:r>
-              <a:rPr lang="en-US" sz="1150" dirty="0">
-                <a:solidFill>
-                  <a:srgbClr val="2B3A4E"/>
-                </a:solidFill>
-                <a:latin typeface="Montserrat" pitchFamily="34" charset="0"/>
-                <a:ea typeface="Montserrat" pitchFamily="34" charset="-122"/>
-                <a:cs typeface="Montserrat" pitchFamily="34" charset="-120"/>
-              </a:rPr>
-              <a:t>Por su valiosa participación como ponente con la conferencia </a:t>
-            </a:r>
-            <a:pPr algn="ctr" indent="0" marL="0">
-              <a:lnSpc>
-                <a:spcPct val="112000"/>
-              </a:lnSpc>
-              <a:buNone/>
-            </a:pPr>
-            <a:r>
-              <a:rPr lang="en-US" sz="1150" dirty="0">
-                <a:solidFill>
-                  <a:srgbClr val="0E2A47"/>
-                </a:solidFill>
-                <a:latin typeface="Montserrat ExtraBold" pitchFamily="34" charset="0"/>
-                <a:ea typeface="Montserrat ExtraBold" pitchFamily="34" charset="-122"/>
-                <a:cs typeface="Montserrat ExtraBold" pitchFamily="34" charset="-120"/>
-              </a:rPr>
-              <a:t>«Nutrición clínica»</a:t>
-            </a:r>
-            <a:pPr algn="ctr" indent="0" marL="0">
-              <a:lnSpc>
-                <a:spcPct val="112000"/>
-              </a:lnSpc>
-              <a:buNone/>
-            </a:pPr>
-            <a:r>
-              <a:rPr lang="en-US" sz="1150" dirty="0">
-                <a:solidFill>
-                  <a:srgbClr val="2B3A4E"/>
-                </a:solidFill>
-                <a:latin typeface="Montserrat" pitchFamily="34" charset="0"/>
-                <a:ea typeface="Montserrat" pitchFamily="34" charset="-122"/>
-                <a:cs typeface="Montserrat" pitchFamily="34" charset="-120"/>
-              </a:rPr>
-              <a:t> en el </a:t>
-            </a:r>
-            <a:pPr algn="ctr" indent="0" marL="0">
-              <a:lnSpc>
-                <a:spcPct val="112000"/>
-              </a:lnSpc>
-              <a:buNone/>
-            </a:pPr>
-            <a:r>
-              <a:rPr lang="en-US" sz="1150" dirty="0">
-                <a:solidFill>
-                  <a:srgbClr val="0E2A47"/>
-                </a:solidFill>
-                <a:latin typeface="Montserrat ExtraBold" pitchFamily="34" charset="0"/>
-                <a:ea typeface="Montserrat ExtraBold" pitchFamily="34" charset="-122"/>
-                <a:cs typeface="Montserrat ExtraBold" pitchFamily="34" charset="-120"/>
-              </a:rPr>
-              <a:t>Westhill Medical Leadership Summit 2026</a:t>
-            </a:r>
-            <a:pPr algn="ctr" indent="0" marL="0">
-              <a:lnSpc>
-                <a:spcPct val="112000"/>
-              </a:lnSpc>
-              <a:buNone/>
-            </a:pPr>
-            <a:r>
-              <a:rPr lang="en-US" sz="1150" dirty="0">
-                <a:solidFill>
-                  <a:srgbClr val="2B3A4E"/>
-                </a:solidFill>
-                <a:latin typeface="Montserrat" pitchFamily="34" charset="0"/>
-                <a:ea typeface="Montserrat" pitchFamily="34" charset="-122"/>
-                <a:cs typeface="Montserrat" pitchFamily="34" charset="-120"/>
-              </a:rPr>
-              <a:t>, realizado los días 21, 22 y 23 de octubre de 2026 en la Facultad de Medicina de la Universidad Westhill.</a:t>
-            </a:r>
-            <a:endParaRPr lang="en-US" sz="1150" dirty="0"/>
-          </a:p>
-        </p:txBody>
-      </p:sp>
-      <p:sp>
-        <p:nvSpPr>
-          <p:cNvPr id="12" name="Text 10"/>
-          <p:cNvSpPr txBox="1"/>
-          <p:nvPr/>
-        </p:nvSpPr>
-        <p:spPr>
-          <a:xfrm>
-            <a:off x="2286000" y="5120640"/>
-            <a:ext cx="5486400" cy="237744"/>
-          </a:xfrm>
-          <a:prstGeom prst="rect">
-            <a:avLst/>
-          </a:prstGeom>
-          <a:noFill/>
-          <a:ln/>
-        </p:spPr>
-        <p:txBody>
-          <a:bodyPr wrap="square" lIns="0" tIns="0" rIns="0" bIns="0" rtlCol="0" anchor="ctr"/>
-          <a:lstStyle/>
-          <a:p>
-            <a:pPr algn="ctr" indent="0" marL="0">
-              <a:buNone/>
-            </a:pPr>
-            <a:r>
-              <a:rPr lang="en-US" sz="1050" dirty="0">
-                <a:solidFill>
-                  <a:srgbClr val="266294"/>
-                </a:solidFill>
-                <a:latin typeface="Montserrat SemiBold" pitchFamily="34" charset="0"/>
-                <a:ea typeface="Montserrat SemiBold" pitchFamily="34" charset="-122"/>
-                <a:cs typeface="Montserrat SemiBold" pitchFamily="34" charset="-120"/>
-              </a:rPr>
-              <a:t>Ciudad de México, a 23 de octubre de 2026</a:t>
-            </a:r>
-            <a:endParaRPr lang="en-US" sz="1050" dirty="0"/>
-          </a:p>
-        </p:txBody>
-      </p:sp>
-      <p:sp>
-        <p:nvSpPr>
-          <p:cNvPr id="13" name="Shape 11"/>
+          <p:cNvPr id="11" name="Shape 6"/>
           <p:cNvSpPr/>
           <p:nvPr/>
         </p:nvSpPr>
@@ -8696,7 +8250,7 @@
       </p:sp>
       <p:sp>
         <p:nvSpPr>
-          <p:cNvPr id="14" name="Text 12"/>
+          <p:cNvPr id="12" name="Text 7"/>
           <p:cNvSpPr txBox="1"/>
           <p:nvPr/>
         </p:nvSpPr>
@@ -8735,7 +8289,7 @@
       </p:sp>
       <p:sp>
         <p:nvSpPr>
-          <p:cNvPr id="15" name="Text 13"/>
+          <p:cNvPr id="13" name="Text 8"/>
           <p:cNvSpPr txBox="1"/>
           <p:nvPr/>
         </p:nvSpPr>
@@ -8774,7 +8328,7 @@
       </p:sp>
       <p:sp>
         <p:nvSpPr>
-          <p:cNvPr id="16" name="Shape 14"/>
+          <p:cNvPr id="14" name="Shape 9"/>
           <p:cNvSpPr/>
           <p:nvPr/>
         </p:nvSpPr>
@@ -8797,7 +8351,7 @@
       </p:sp>
       <p:sp>
         <p:nvSpPr>
-          <p:cNvPr id="17" name="Text 15"/>
+          <p:cNvPr id="15" name="Text 10"/>
           <p:cNvSpPr txBox="1"/>
           <p:nvPr/>
         </p:nvSpPr>
@@ -8836,7 +8390,7 @@
       </p:sp>
       <p:sp>
         <p:nvSpPr>
-          <p:cNvPr id="18" name="Text 16"/>
+          <p:cNvPr id="16" name="Text 11"/>
           <p:cNvSpPr txBox="1"/>
           <p:nvPr/>
         </p:nvSpPr>
@@ -8875,7 +8429,7 @@
       </p:sp>
       <p:sp>
         <p:nvSpPr>
-          <p:cNvPr id="19" name="Text 17"/>
+          <p:cNvPr id="17" name="Text 12"/>
           <p:cNvSpPr txBox="1"/>
           <p:nvPr/>
         </p:nvSpPr>
@@ -8945,32 +8499,370 @@
         </p:nvSpPr>
         <p:spPr>
           <a:xfrm>
-            <a:off x="1188720" y="1536192"/>
-            <a:ext cx="7680960" cy="237744"/>
-          </a:xfrm>
-          <a:prstGeom prst="rect">
-            <a:avLst/>
-          </a:prstGeom>
-          <a:noFill/>
-          <a:ln/>
-        </p:spPr>
-        <p:txBody>
-          <a:bodyPr wrap="square" lIns="0" tIns="0" rIns="0" bIns="0" rtlCol="0" anchor="ctr"/>
-          <a:lstStyle/>
-          <a:p>
-            <a:pPr algn="ctr" indent="0" marL="0">
-              <a:buNone/>
-            </a:pPr>
-            <a:r>
-              <a:rPr lang="en-US" sz="1050" spc="300" kern="0" dirty="0">
+            <a:off x="1097280" y="1737360"/>
+            <a:ext cx="7863840" cy="777240"/>
+          </a:xfrm>
+          <a:prstGeom prst="rect">
+            <a:avLst/>
+          </a:prstGeom>
+          <a:noFill/>
+          <a:ln/>
+        </p:spPr>
+        <p:txBody>
+          <a:bodyPr wrap="square" lIns="0" tIns="0" rIns="0" bIns="0" rtlCol="0" anchor="ctr"/>
+          <a:lstStyle/>
+          <a:p>
+            <a:pPr algn="ctr" indent="0" marL="0">
+              <a:buNone/>
+            </a:pPr>
+            <a:r>
+              <a:rPr lang="en-US" sz="4200" spc="400" kern="0" dirty="0">
+                <a:solidFill>
+                  <a:srgbClr val="266294"/>
+                </a:solidFill>
+                <a:latin typeface="Montserrat ExtraBold" pitchFamily="34" charset="0"/>
+                <a:ea typeface="Montserrat ExtraBold" pitchFamily="34" charset="-122"/>
+                <a:cs typeface="Montserrat ExtraBold" pitchFamily="34" charset="-120"/>
+              </a:rPr>
+              <a:t>RECONOCIMIENTO</a:t>
+            </a:r>
+            <a:endParaRPr lang="en-US" sz="4200" dirty="0"/>
+          </a:p>
+        </p:txBody>
+      </p:sp>
+      <p:pic>
+        <p:nvPicPr>
+          <p:cNvPr id="3" name="Image 0" descr="preencoded.png">    </p:cNvPr>
+          <p:cNvPicPr>
+            <a:picLocks noChangeAspect="1"/>
+          </p:cNvPicPr>
+          <p:nvPr/>
+        </p:nvPicPr>
+        <p:blipFill>
+          <a:blip r:embed="rId1"/>
+          <a:stretch>
+            <a:fillRect/>
+          </a:stretch>
+        </p:blipFill>
+        <p:spPr>
+          <a:xfrm>
+            <a:off x="1874520" y="2642616"/>
+            <a:ext cx="1371600" cy="182880"/>
+          </a:xfrm>
+          <a:prstGeom prst="rect">
+            <a:avLst/>
+          </a:prstGeom>
+        </p:spPr>
+      </p:pic>
+      <p:pic>
+        <p:nvPicPr>
+          <p:cNvPr id="4" name="Image 1" descr="preencoded.png">    </p:cNvPr>
+          <p:cNvPicPr>
+            <a:picLocks noChangeAspect="1"/>
+          </p:cNvPicPr>
+          <p:nvPr/>
+        </p:nvPicPr>
+        <p:blipFill>
+          <a:blip r:embed="rId2"/>
+          <a:stretch>
+            <a:fillRect/>
+          </a:stretch>
+        </p:blipFill>
+        <p:spPr>
+          <a:xfrm>
+            <a:off x="6812280" y="2642616"/>
+            <a:ext cx="1371600" cy="182880"/>
+          </a:xfrm>
+          <a:prstGeom prst="rect">
+            <a:avLst/>
+          </a:prstGeom>
+        </p:spPr>
+      </p:pic>
+      <p:sp>
+        <p:nvSpPr>
+          <p:cNvPr id="5" name="Text 1"/>
+          <p:cNvSpPr txBox="1"/>
+          <p:nvPr/>
+        </p:nvSpPr>
+        <p:spPr>
+          <a:xfrm>
+            <a:off x="3291840" y="2560320"/>
+            <a:ext cx="3474720" cy="329184"/>
+          </a:xfrm>
+          <a:prstGeom prst="rect">
+            <a:avLst/>
+          </a:prstGeom>
+          <a:noFill/>
+          <a:ln/>
+        </p:spPr>
+        <p:txBody>
+          <a:bodyPr wrap="square" lIns="0" tIns="0" rIns="0" bIns="0" rtlCol="0" anchor="ctr"/>
+          <a:lstStyle/>
+          <a:p>
+            <a:pPr algn="ctr" indent="0" marL="0">
+              <a:buNone/>
+            </a:pPr>
+            <a:r>
+              <a:rPr lang="en-US" sz="1500" spc="500" kern="0" dirty="0">
+                <a:solidFill>
+                  <a:srgbClr val="0E2A47"/>
+                </a:solidFill>
+                <a:latin typeface="Montserrat ExtraBold" pitchFamily="34" charset="0"/>
+                <a:ea typeface="Montserrat ExtraBold" pitchFamily="34" charset="-122"/>
+                <a:cs typeface="Montserrat ExtraBold" pitchFamily="34" charset="-120"/>
+              </a:rPr>
+              <a:t>COMO PONENTE</a:t>
+            </a:r>
+            <a:endParaRPr lang="en-US" sz="1500" dirty="0"/>
+          </a:p>
+        </p:txBody>
+      </p:sp>
+      <p:sp>
+        <p:nvSpPr>
+          <p:cNvPr id="6" name="Text 2"/>
+          <p:cNvSpPr txBox="1"/>
+          <p:nvPr/>
+        </p:nvSpPr>
+        <p:spPr>
+          <a:xfrm>
+            <a:off x="1828800" y="3035808"/>
+            <a:ext cx="6400800" cy="274320"/>
+          </a:xfrm>
+          <a:prstGeom prst="rect">
+            <a:avLst/>
+          </a:prstGeom>
+          <a:noFill/>
+          <a:ln/>
+        </p:spPr>
+        <p:txBody>
+          <a:bodyPr wrap="square" lIns="0" tIns="0" rIns="0" bIns="0" rtlCol="0" anchor="ctr"/>
+          <a:lstStyle/>
+          <a:p>
+            <a:pPr algn="ctr" indent="0" marL="0">
+              <a:buNone/>
+            </a:pPr>
+            <a:r>
+              <a:rPr lang="en-US" sz="1250" dirty="0">
                 <a:solidFill>
                   <a:srgbClr val="5B6B7D"/>
+                </a:solidFill>
+                <a:latin typeface="Montserrat Medium" pitchFamily="34" charset="0"/>
+                <a:ea typeface="Montserrat Medium" pitchFamily="34" charset="-122"/>
+                <a:cs typeface="Montserrat Medium" pitchFamily="34" charset="-120"/>
+              </a:rPr>
+              <a:t>Otorga el presente reconocimiento a</a:t>
+            </a:r>
+            <a:endParaRPr lang="en-US" sz="1250" dirty="0"/>
+          </a:p>
+        </p:txBody>
+      </p:sp>
+      <p:sp>
+        <p:nvSpPr>
+          <p:cNvPr id="7" name="Text 3"/>
+          <p:cNvSpPr txBox="1"/>
+          <p:nvPr/>
+        </p:nvSpPr>
+        <p:spPr>
+          <a:xfrm>
+            <a:off x="1097280" y="3310128"/>
+            <a:ext cx="7863840" cy="713232"/>
+          </a:xfrm>
+          <a:prstGeom prst="rect">
+            <a:avLst/>
+          </a:prstGeom>
+          <a:noFill/>
+          <a:ln/>
+        </p:spPr>
+        <p:txBody>
+          <a:bodyPr wrap="square" lIns="0" tIns="0" rIns="0" bIns="0" rtlCol="0" anchor="ctr"/>
+          <a:lstStyle/>
+          <a:p>
+            <a:pPr algn="ctr" indent="0" marL="0">
+              <a:buNone/>
+            </a:pPr>
+            <a:r>
+              <a:rPr lang="en-US" sz="3800" dirty="0">
+                <a:solidFill>
+                  <a:srgbClr val="0E2A47"/>
+                </a:solidFill>
+                <a:latin typeface="Montserrat ExtraBold" pitchFamily="34" charset="0"/>
+                <a:ea typeface="Montserrat ExtraBold" pitchFamily="34" charset="-122"/>
+                <a:cs typeface="Montserrat ExtraBold" pitchFamily="34" charset="-120"/>
+              </a:rPr>
+              <a:t>Dra. Iris</a:t>
+            </a:r>
+            <a:endParaRPr lang="en-US" sz="3800" dirty="0"/>
+          </a:p>
+        </p:txBody>
+      </p:sp>
+      <p:pic>
+        <p:nvPicPr>
+          <p:cNvPr id="8" name="Image 2" descr="preencoded.png">    </p:cNvPr>
+          <p:cNvPicPr>
+            <a:picLocks noChangeAspect="1"/>
+          </p:cNvPicPr>
+          <p:nvPr/>
+        </p:nvPicPr>
+        <p:blipFill>
+          <a:blip r:embed="rId3"/>
+          <a:stretch>
+            <a:fillRect/>
+          </a:stretch>
+        </p:blipFill>
+        <p:spPr>
+          <a:xfrm>
+            <a:off x="2194560" y="3986784"/>
+            <a:ext cx="5669280" cy="201168"/>
+          </a:xfrm>
+          <a:prstGeom prst="rect">
+            <a:avLst/>
+          </a:prstGeom>
+        </p:spPr>
+      </p:pic>
+      <p:sp>
+        <p:nvSpPr>
+          <p:cNvPr id="9" name="Text 4"/>
+          <p:cNvSpPr txBox="1"/>
+          <p:nvPr/>
+        </p:nvSpPr>
+        <p:spPr>
+          <a:xfrm>
+            <a:off x="1417320" y="4206240"/>
+            <a:ext cx="7223760" cy="896112"/>
+          </a:xfrm>
+          <a:prstGeom prst="rect">
+            <a:avLst/>
+          </a:prstGeom>
+          <a:noFill/>
+          <a:ln/>
+        </p:spPr>
+        <p:txBody>
+          <a:bodyPr wrap="square" lIns="0" tIns="0" rIns="0" bIns="0" rtlCol="0" anchor="t"/>
+          <a:lstStyle/>
+          <a:p>
+            <a:pPr algn="ctr" indent="0" marL="0">
+              <a:lnSpc>
+                <a:spcPct val="112000"/>
+              </a:lnSpc>
+              <a:buNone/>
+            </a:pPr>
+            <a:r>
+              <a:rPr lang="en-US" sz="1150" dirty="0">
+                <a:solidFill>
+                  <a:srgbClr val="2B3A4E"/>
+                </a:solidFill>
+                <a:latin typeface="Montserrat" pitchFamily="34" charset="0"/>
+                <a:ea typeface="Montserrat" pitchFamily="34" charset="-122"/>
+                <a:cs typeface="Montserrat" pitchFamily="34" charset="-120"/>
+              </a:rPr>
+              <a:t>Por su valiosa participación como ponente con la conferencia </a:t>
+            </a:r>
+            <a:pPr algn="ctr" indent="0" marL="0">
+              <a:lnSpc>
+                <a:spcPct val="112000"/>
+              </a:lnSpc>
+              <a:buNone/>
+            </a:pPr>
+            <a:r>
+              <a:rPr lang="en-US" sz="1150" dirty="0">
+                <a:solidFill>
+                  <a:srgbClr val="0E2A47"/>
+                </a:solidFill>
+                <a:latin typeface="Montserrat ExtraBold" pitchFamily="34" charset="0"/>
+                <a:ea typeface="Montserrat ExtraBold" pitchFamily="34" charset="-122"/>
+                <a:cs typeface="Montserrat ExtraBold" pitchFamily="34" charset="-120"/>
+              </a:rPr>
+              <a:t>«AMIR»</a:t>
+            </a:r>
+            <a:pPr algn="ctr" indent="0" marL="0">
+              <a:lnSpc>
+                <a:spcPct val="112000"/>
+              </a:lnSpc>
+              <a:buNone/>
+            </a:pPr>
+            <a:r>
+              <a:rPr lang="en-US" sz="1150" dirty="0">
+                <a:solidFill>
+                  <a:srgbClr val="2B3A4E"/>
+                </a:solidFill>
+                <a:latin typeface="Montserrat" pitchFamily="34" charset="0"/>
+                <a:ea typeface="Montserrat" pitchFamily="34" charset="-122"/>
+                <a:cs typeface="Montserrat" pitchFamily="34" charset="-120"/>
+              </a:rPr>
+              <a:t> en el </a:t>
+            </a:r>
+            <a:pPr algn="ctr" indent="0" marL="0">
+              <a:lnSpc>
+                <a:spcPct val="112000"/>
+              </a:lnSpc>
+              <a:buNone/>
+            </a:pPr>
+            <a:r>
+              <a:rPr lang="en-US" sz="1150" dirty="0">
+                <a:solidFill>
+                  <a:srgbClr val="0E2A47"/>
+                </a:solidFill>
+                <a:latin typeface="Montserrat ExtraBold" pitchFamily="34" charset="0"/>
+                <a:ea typeface="Montserrat ExtraBold" pitchFamily="34" charset="-122"/>
+                <a:cs typeface="Montserrat ExtraBold" pitchFamily="34" charset="-120"/>
+              </a:rPr>
+              <a:t>Westhill Medical Leadership Summit 2026</a:t>
+            </a:r>
+            <a:pPr algn="ctr" indent="0" marL="0">
+              <a:lnSpc>
+                <a:spcPct val="112000"/>
+              </a:lnSpc>
+              <a:buNone/>
+            </a:pPr>
+            <a:r>
+              <a:rPr lang="en-US" sz="1150" dirty="0">
+                <a:solidFill>
+                  <a:srgbClr val="2B3A4E"/>
+                </a:solidFill>
+                <a:latin typeface="Montserrat" pitchFamily="34" charset="0"/>
+                <a:ea typeface="Montserrat" pitchFamily="34" charset="-122"/>
+                <a:cs typeface="Montserrat" pitchFamily="34" charset="-120"/>
+              </a:rPr>
+              <a:t>, realizado los días 21, 22 y 23 de octubre de 2026 en la Facultad de Medicina de la Universidad Westhill.</a:t>
+            </a:r>
+            <a:endParaRPr lang="en-US" sz="1150" dirty="0"/>
+          </a:p>
+        </p:txBody>
+      </p:sp>
+      <p:sp>
+        <p:nvSpPr>
+          <p:cNvPr id="10" name="Text 5"/>
+          <p:cNvSpPr txBox="1"/>
+          <p:nvPr/>
+        </p:nvSpPr>
+        <p:spPr>
+          <a:xfrm>
+            <a:off x="2286000" y="5120640"/>
+            <a:ext cx="5486400" cy="237744"/>
+          </a:xfrm>
+          <a:prstGeom prst="rect">
+            <a:avLst/>
+          </a:prstGeom>
+          <a:noFill/>
+          <a:ln/>
+        </p:spPr>
+        <p:txBody>
+          <a:bodyPr wrap="square" lIns="0" tIns="0" rIns="0" bIns="0" rtlCol="0" anchor="ctr"/>
+          <a:lstStyle/>
+          <a:p>
+            <a:pPr algn="ctr" indent="0" marL="0">
+              <a:buNone/>
+            </a:pPr>
+            <a:r>
+              <a:rPr lang="en-US" sz="1050" dirty="0">
+                <a:solidFill>
+                  <a:srgbClr val="266294"/>
                 </a:solidFill>
                 <a:latin typeface="Montserrat SemiBold" pitchFamily="34" charset="0"/>
                 <a:ea typeface="Montserrat SemiBold" pitchFamily="34" charset="-122"/>
                 <a:cs typeface="Montserrat SemiBold" pitchFamily="34" charset="-120"/>
               </a:rPr>
-              <a:t>FACULTAD DE MEDICINA</a:t>
+              <a:t>Ciudad de México, a 23 de octubre de 2026</a:t>
             </a:r>
             <a:endParaRPr lang="en-US" sz="1050" dirty="0"/>
           </a:p>
@@ -8978,395 +8870,7 @@
       </p:sp>
       <p:sp>
         <p:nvSpPr>
-          <p:cNvPr id="3" name="Text 1"/>
-          <p:cNvSpPr txBox="1"/>
-          <p:nvPr/>
-        </p:nvSpPr>
-        <p:spPr>
-          <a:xfrm>
-            <a:off x="1097280" y="1737360"/>
-            <a:ext cx="7863840" cy="777240"/>
-          </a:xfrm>
-          <a:prstGeom prst="rect">
-            <a:avLst/>
-          </a:prstGeom>
-          <a:noFill/>
-          <a:ln/>
-        </p:spPr>
-        <p:txBody>
-          <a:bodyPr wrap="square" lIns="0" tIns="0" rIns="0" bIns="0" rtlCol="0" anchor="ctr"/>
-          <a:lstStyle/>
-          <a:p>
-            <a:pPr algn="ctr" indent="0" marL="0">
-              <a:buNone/>
-            </a:pPr>
-            <a:r>
-              <a:rPr lang="en-US" sz="4200" spc="400" kern="0" dirty="0">
-                <a:solidFill>
-                  <a:srgbClr val="266294"/>
-                </a:solidFill>
-                <a:latin typeface="Montserrat ExtraBold" pitchFamily="34" charset="0"/>
-                <a:ea typeface="Montserrat ExtraBold" pitchFamily="34" charset="-122"/>
-                <a:cs typeface="Montserrat ExtraBold" pitchFamily="34" charset="-120"/>
-              </a:rPr>
-              <a:t>RECONOCIMIENTO</a:t>
-            </a:r>
-            <a:endParaRPr lang="en-US" sz="4200" dirty="0"/>
-          </a:p>
-        </p:txBody>
-      </p:sp>
-      <p:sp>
-        <p:nvSpPr>
-          <p:cNvPr id="4" name="Shape 2"/>
-          <p:cNvSpPr/>
-          <p:nvPr/>
-        </p:nvSpPr>
-        <p:spPr>
-          <a:xfrm>
-            <a:off x="2331720" y="2706624"/>
-            <a:ext cx="914400" cy="54864"/>
-          </a:xfrm>
-          <a:prstGeom prst="rect">
-            <a:avLst/>
-          </a:prstGeom>
-          <a:solidFill>
-            <a:srgbClr val="2DB34A"/>
-          </a:solidFill>
-          <a:ln/>
-        </p:spPr>
-      </p:sp>
-      <p:sp>
-        <p:nvSpPr>
-          <p:cNvPr id="5" name="Shape 3"/>
-          <p:cNvSpPr/>
-          <p:nvPr/>
-        </p:nvSpPr>
-        <p:spPr>
-          <a:xfrm>
-            <a:off x="6812280" y="2706624"/>
-            <a:ext cx="914400" cy="54864"/>
-          </a:xfrm>
-          <a:prstGeom prst="rect">
-            <a:avLst/>
-          </a:prstGeom>
-          <a:solidFill>
-            <a:srgbClr val="2DB34A"/>
-          </a:solidFill>
-          <a:ln/>
-        </p:spPr>
-      </p:sp>
-      <p:sp>
-        <p:nvSpPr>
-          <p:cNvPr id="6" name="Text 4"/>
-          <p:cNvSpPr txBox="1"/>
-          <p:nvPr/>
-        </p:nvSpPr>
-        <p:spPr>
-          <a:xfrm>
-            <a:off x="3291840" y="2560320"/>
-            <a:ext cx="3474720" cy="329184"/>
-          </a:xfrm>
-          <a:prstGeom prst="rect">
-            <a:avLst/>
-          </a:prstGeom>
-          <a:noFill/>
-          <a:ln/>
-        </p:spPr>
-        <p:txBody>
-          <a:bodyPr wrap="square" lIns="0" tIns="0" rIns="0" bIns="0" rtlCol="0" anchor="ctr"/>
-          <a:lstStyle/>
-          <a:p>
-            <a:pPr algn="ctr" indent="0" marL="0">
-              <a:buNone/>
-            </a:pPr>
-            <a:r>
-              <a:rPr lang="en-US" sz="1500" spc="500" kern="0" dirty="0">
-                <a:solidFill>
-                  <a:srgbClr val="0E2A47"/>
-                </a:solidFill>
-                <a:latin typeface="Montserrat ExtraBold" pitchFamily="34" charset="0"/>
-                <a:ea typeface="Montserrat ExtraBold" pitchFamily="34" charset="-122"/>
-                <a:cs typeface="Montserrat ExtraBold" pitchFamily="34" charset="-120"/>
-              </a:rPr>
-              <a:t>COMO PONENTE</a:t>
-            </a:r>
-            <a:endParaRPr lang="en-US" sz="1500" dirty="0"/>
-          </a:p>
-        </p:txBody>
-      </p:sp>
-      <p:sp>
-        <p:nvSpPr>
-          <p:cNvPr id="7" name="Text 5"/>
-          <p:cNvSpPr txBox="1"/>
-          <p:nvPr/>
-        </p:nvSpPr>
-        <p:spPr>
-          <a:xfrm>
-            <a:off x="1828800" y="3035808"/>
-            <a:ext cx="6400800" cy="274320"/>
-          </a:xfrm>
-          <a:prstGeom prst="rect">
-            <a:avLst/>
-          </a:prstGeom>
-          <a:noFill/>
-          <a:ln/>
-        </p:spPr>
-        <p:txBody>
-          <a:bodyPr wrap="square" lIns="0" tIns="0" rIns="0" bIns="0" rtlCol="0" anchor="ctr"/>
-          <a:lstStyle/>
-          <a:p>
-            <a:pPr algn="ctr" indent="0" marL="0">
-              <a:buNone/>
-            </a:pPr>
-            <a:r>
-              <a:rPr lang="en-US" sz="1250" dirty="0">
-                <a:solidFill>
-                  <a:srgbClr val="5B6B7D"/>
-                </a:solidFill>
-                <a:latin typeface="Montserrat Medium" pitchFamily="34" charset="0"/>
-                <a:ea typeface="Montserrat Medium" pitchFamily="34" charset="-122"/>
-                <a:cs typeface="Montserrat Medium" pitchFamily="34" charset="-120"/>
-              </a:rPr>
-              <a:t>Otorga el presente reconocimiento a</a:t>
-            </a:r>
-            <a:endParaRPr lang="en-US" sz="1250" dirty="0"/>
-          </a:p>
-        </p:txBody>
-      </p:sp>
-      <p:sp>
-        <p:nvSpPr>
-          <p:cNvPr id="8" name="Text 6"/>
-          <p:cNvSpPr txBox="1"/>
-          <p:nvPr/>
-        </p:nvSpPr>
-        <p:spPr>
-          <a:xfrm>
-            <a:off x="1097280" y="3310128"/>
-            <a:ext cx="7863840" cy="713232"/>
-          </a:xfrm>
-          <a:prstGeom prst="rect">
-            <a:avLst/>
-          </a:prstGeom>
-          <a:noFill/>
-          <a:ln/>
-        </p:spPr>
-        <p:txBody>
-          <a:bodyPr wrap="square" lIns="0" tIns="0" rIns="0" bIns="0" rtlCol="0" anchor="ctr"/>
-          <a:lstStyle/>
-          <a:p>
-            <a:pPr algn="ctr" indent="0" marL="0">
-              <a:buNone/>
-            </a:pPr>
-            <a:r>
-              <a:rPr lang="en-US" sz="3800" dirty="0">
-                <a:solidFill>
-                  <a:srgbClr val="0E2A47"/>
-                </a:solidFill>
-                <a:latin typeface="Montserrat ExtraBold" pitchFamily="34" charset="0"/>
-                <a:ea typeface="Montserrat ExtraBold" pitchFamily="34" charset="-122"/>
-                <a:cs typeface="Montserrat ExtraBold" pitchFamily="34" charset="-120"/>
-              </a:rPr>
-              <a:t>Dra. Iris</a:t>
-            </a:r>
-            <a:endParaRPr lang="en-US" sz="3800" dirty="0"/>
-          </a:p>
-        </p:txBody>
-      </p:sp>
-      <p:sp>
-        <p:nvSpPr>
-          <p:cNvPr id="9" name="Shape 7"/>
-          <p:cNvSpPr/>
-          <p:nvPr/>
-        </p:nvSpPr>
-        <p:spPr>
-          <a:xfrm>
-            <a:off x="2194560" y="4087368"/>
-            <a:ext cx="5669280" cy="0"/>
-          </a:xfrm>
-          <a:prstGeom prst="line">
-            <a:avLst/>
-          </a:prstGeom>
-          <a:noFill/>
-          <a:ln w="22225">
-            <a:solidFill>
-              <a:srgbClr val="F2C94C"/>
-            </a:solidFill>
-            <a:prstDash val="solid"/>
-          </a:ln>
-        </p:spPr>
-      </p:sp>
-      <p:sp>
-        <p:nvSpPr>
-          <p:cNvPr id="10" name="Shape 8"/>
-          <p:cNvSpPr/>
-          <p:nvPr/>
-        </p:nvSpPr>
-        <p:spPr>
-          <a:xfrm>
-            <a:off x="4974336" y="4032504"/>
-            <a:ext cx="109728" cy="109728"/>
-          </a:xfrm>
-          <a:prstGeom prst="ellipse">
-            <a:avLst/>
-          </a:prstGeom>
-          <a:solidFill>
-            <a:srgbClr val="F2C94C"/>
-          </a:solidFill>
-          <a:ln/>
-        </p:spPr>
-      </p:sp>
-      <p:sp>
-        <p:nvSpPr>
-          <p:cNvPr id="11" name="Text 9"/>
-          <p:cNvSpPr txBox="1"/>
-          <p:nvPr/>
-        </p:nvSpPr>
-        <p:spPr>
-          <a:xfrm>
-            <a:off x="1417320" y="4206240"/>
-            <a:ext cx="7223760" cy="896112"/>
-          </a:xfrm>
-          <a:prstGeom prst="rect">
-            <a:avLst/>
-          </a:prstGeom>
-          <a:noFill/>
-          <a:ln/>
-        </p:spPr>
-        <p:txBody>
-          <a:bodyPr wrap="square" lIns="0" tIns="0" rIns="0" bIns="0" rtlCol="0" anchor="t"/>
-          <a:lstStyle/>
-          <a:p>
-            <a:pPr algn="ctr" indent="0" marL="0">
-              <a:lnSpc>
-                <a:spcPct val="112000"/>
-              </a:lnSpc>
-              <a:buNone/>
-            </a:pPr>
-            <a:r>
-              <a:rPr lang="en-US" sz="1150" dirty="0">
-                <a:solidFill>
-                  <a:srgbClr val="2B3A4E"/>
-                </a:solidFill>
-                <a:latin typeface="Montserrat" pitchFamily="34" charset="0"/>
-                <a:ea typeface="Montserrat" pitchFamily="34" charset="-122"/>
-                <a:cs typeface="Montserrat" pitchFamily="34" charset="-120"/>
-              </a:rPr>
-              <a:t>Por su valiosa participación como ponente con la conferencia </a:t>
-            </a:r>
-            <a:pPr algn="ctr" indent="0" marL="0">
-              <a:lnSpc>
-                <a:spcPct val="112000"/>
-              </a:lnSpc>
-              <a:buNone/>
-            </a:pPr>
-            <a:r>
-              <a:rPr lang="en-US" sz="1150" dirty="0">
-                <a:solidFill>
-                  <a:srgbClr val="0E2A47"/>
-                </a:solidFill>
-                <a:latin typeface="Montserrat ExtraBold" pitchFamily="34" charset="0"/>
-                <a:ea typeface="Montserrat ExtraBold" pitchFamily="34" charset="-122"/>
-                <a:cs typeface="Montserrat ExtraBold" pitchFamily="34" charset="-120"/>
-              </a:rPr>
-              <a:t>«AMIR»</a:t>
-            </a:r>
-            <a:pPr algn="ctr" indent="0" marL="0">
-              <a:lnSpc>
-                <a:spcPct val="112000"/>
-              </a:lnSpc>
-              <a:buNone/>
-            </a:pPr>
-            <a:r>
-              <a:rPr lang="en-US" sz="1150" dirty="0">
-                <a:solidFill>
-                  <a:srgbClr val="2B3A4E"/>
-                </a:solidFill>
-                <a:latin typeface="Montserrat" pitchFamily="34" charset="0"/>
-                <a:ea typeface="Montserrat" pitchFamily="34" charset="-122"/>
-                <a:cs typeface="Montserrat" pitchFamily="34" charset="-120"/>
-              </a:rPr>
-              <a:t> en el </a:t>
-            </a:r>
-            <a:pPr algn="ctr" indent="0" marL="0">
-              <a:lnSpc>
-                <a:spcPct val="112000"/>
-              </a:lnSpc>
-              <a:buNone/>
-            </a:pPr>
-            <a:r>
-              <a:rPr lang="en-US" sz="1150" dirty="0">
-                <a:solidFill>
-                  <a:srgbClr val="0E2A47"/>
-                </a:solidFill>
-                <a:latin typeface="Montserrat ExtraBold" pitchFamily="34" charset="0"/>
-                <a:ea typeface="Montserrat ExtraBold" pitchFamily="34" charset="-122"/>
-                <a:cs typeface="Montserrat ExtraBold" pitchFamily="34" charset="-120"/>
-              </a:rPr>
-              <a:t>Westhill Medical Leadership Summit 2026</a:t>
-            </a:r>
-            <a:pPr algn="ctr" indent="0" marL="0">
-              <a:lnSpc>
-                <a:spcPct val="112000"/>
-              </a:lnSpc>
-              <a:buNone/>
-            </a:pPr>
-            <a:r>
-              <a:rPr lang="en-US" sz="1150" dirty="0">
-                <a:solidFill>
-                  <a:srgbClr val="2B3A4E"/>
-                </a:solidFill>
-                <a:latin typeface="Montserrat" pitchFamily="34" charset="0"/>
-                <a:ea typeface="Montserrat" pitchFamily="34" charset="-122"/>
-                <a:cs typeface="Montserrat" pitchFamily="34" charset="-120"/>
-              </a:rPr>
-              <a:t>, realizado los días 21, 22 y 23 de octubre de 2026 en la Facultad de Medicina de la Universidad Westhill.</a:t>
-            </a:r>
-            <a:endParaRPr lang="en-US" sz="1150" dirty="0"/>
-          </a:p>
-        </p:txBody>
-      </p:sp>
-      <p:sp>
-        <p:nvSpPr>
-          <p:cNvPr id="12" name="Text 10"/>
-          <p:cNvSpPr txBox="1"/>
-          <p:nvPr/>
-        </p:nvSpPr>
-        <p:spPr>
-          <a:xfrm>
-            <a:off x="2286000" y="5120640"/>
-            <a:ext cx="5486400" cy="237744"/>
-          </a:xfrm>
-          <a:prstGeom prst="rect">
-            <a:avLst/>
-          </a:prstGeom>
-          <a:noFill/>
-          <a:ln/>
-        </p:spPr>
-        <p:txBody>
-          <a:bodyPr wrap="square" lIns="0" tIns="0" rIns="0" bIns="0" rtlCol="0" anchor="ctr"/>
-          <a:lstStyle/>
-          <a:p>
-            <a:pPr algn="ctr" indent="0" marL="0">
-              <a:buNone/>
-            </a:pPr>
-            <a:r>
-              <a:rPr lang="en-US" sz="1050" dirty="0">
-                <a:solidFill>
-                  <a:srgbClr val="266294"/>
-                </a:solidFill>
-                <a:latin typeface="Montserrat SemiBold" pitchFamily="34" charset="0"/>
-                <a:ea typeface="Montserrat SemiBold" pitchFamily="34" charset="-122"/>
-                <a:cs typeface="Montserrat SemiBold" pitchFamily="34" charset="-120"/>
-              </a:rPr>
-              <a:t>Ciudad de México, a 23 de octubre de 2026</a:t>
-            </a:r>
-            <a:endParaRPr lang="en-US" sz="1050" dirty="0"/>
-          </a:p>
-        </p:txBody>
-      </p:sp>
-      <p:sp>
-        <p:nvSpPr>
-          <p:cNvPr id="13" name="Shape 11"/>
+          <p:cNvPr id="11" name="Shape 6"/>
           <p:cNvSpPr/>
           <p:nvPr/>
         </p:nvSpPr>
@@ -9389,7 +8893,7 @@
       </p:sp>
       <p:sp>
         <p:nvSpPr>
-          <p:cNvPr id="14" name="Text 12"/>
+          <p:cNvPr id="12" name="Text 7"/>
           <p:cNvSpPr txBox="1"/>
           <p:nvPr/>
         </p:nvSpPr>
@@ -9428,7 +8932,7 @@
       </p:sp>
       <p:sp>
         <p:nvSpPr>
-          <p:cNvPr id="15" name="Text 13"/>
+          <p:cNvPr id="13" name="Text 8"/>
           <p:cNvSpPr txBox="1"/>
           <p:nvPr/>
         </p:nvSpPr>
@@ -9467,7 +8971,7 @@
       </p:sp>
       <p:sp>
         <p:nvSpPr>
-          <p:cNvPr id="16" name="Shape 14"/>
+          <p:cNvPr id="14" name="Shape 9"/>
           <p:cNvSpPr/>
           <p:nvPr/>
         </p:nvSpPr>
@@ -9490,7 +8994,7 @@
       </p:sp>
       <p:sp>
         <p:nvSpPr>
-          <p:cNvPr id="17" name="Text 15"/>
+          <p:cNvPr id="15" name="Text 10"/>
           <p:cNvSpPr txBox="1"/>
           <p:nvPr/>
         </p:nvSpPr>
@@ -9529,7 +9033,7 @@
       </p:sp>
       <p:sp>
         <p:nvSpPr>
-          <p:cNvPr id="18" name="Text 16"/>
+          <p:cNvPr id="16" name="Text 11"/>
           <p:cNvSpPr txBox="1"/>
           <p:nvPr/>
         </p:nvSpPr>
@@ -9568,7 +9072,7 @@
       </p:sp>
       <p:sp>
         <p:nvSpPr>
-          <p:cNvPr id="19" name="Text 17"/>
+          <p:cNvPr id="17" name="Text 12"/>
           <p:cNvSpPr txBox="1"/>
           <p:nvPr/>
         </p:nvSpPr>
